--- a/demo/molina-gemma4-finetuning-meeting-deck.pptx
+++ b/demo/molina-gemma4-finetuning-meeting-deck.pptx
@@ -5,7 +5,7 @@
     <p:sldMasterId id="2147483648" r:id="rId1"/>
   </p:sldMasterIdLst>
   <p:notesMasterIdLst>
-    <p:notesMasterId r:id="rId14"/>
+    <p:notesMasterId r:id="rId15"/>
   </p:notesMasterIdLst>
   <p:sldIdLst>
     <p:sldId id="256" r:id="rId2"/>
@@ -20,6 +20,7 @@
     <p:sldId id="265" r:id="rId11"/>
     <p:sldId id="266" r:id="rId12"/>
     <p:sldId id="267" r:id="rId13"/>
+    <p:sldId id="268" r:id="rId14"/>
   </p:sldIdLst>
   <p:sldSz cx="12192000" cy="6858000"/>
   <p:notesSz cx="6858000" cy="9144000"/>
@@ -121,400 +122,6 @@
 </p:presentation>
 </file>
 
-<file path=ppt/revisionInfo.xml><?xml version="1.0" encoding="utf-8"?>
-<p1510:revInfo xmlns:a="http://schemas.openxmlformats.org/drawingml/2006/main" xmlns:r="http://schemas.openxmlformats.org/officeDocument/2006/relationships" xmlns:p1510="http://schemas.microsoft.com/office/powerpoint/2015/10/main">
-  <p1510:revLst>
-    <p1510:client id="{7A28C343-BC75-4F6E-A599-D965041CA488}" v="28" dt="2026-06-02T19:39:32.602"/>
-  </p1510:revLst>
-</p1510:revInfo>
-</file>
-
-<file path=ppt/changesInfos/changesInfo1.xml><?xml version="1.0" encoding="utf-8"?>
-<pc:chgInfo xmlns:a="http://schemas.openxmlformats.org/drawingml/2006/main" xmlns:r="http://schemas.openxmlformats.org/officeDocument/2006/relationships" xmlns:ac="http://schemas.microsoft.com/office/drawing/2013/main/command" xmlns:pc="http://schemas.microsoft.com/office/powerpoint/2013/main/command">
-  <pc:docChgLst>
-    <pc:chgData name="Jay Padhya" userId="99449f0b-447f-4fbb-878a-15ec063fa8cd" providerId="ADAL" clId="{E308DACC-A42A-4B27-BCD7-E287F1684823}"/>
-    <pc:docChg chg="undo custSel modSld">
-      <pc:chgData name="Jay Padhya" userId="99449f0b-447f-4fbb-878a-15ec063fa8cd" providerId="ADAL" clId="{E308DACC-A42A-4B27-BCD7-E287F1684823}" dt="2026-06-02T19:39:32.602" v="42" actId="478"/>
-      <pc:docMkLst>
-        <pc:docMk/>
-      </pc:docMkLst>
-      <pc:sldChg chg="delSp modSp mod">
-        <pc:chgData name="Jay Padhya" userId="99449f0b-447f-4fbb-878a-15ec063fa8cd" providerId="ADAL" clId="{E308DACC-A42A-4B27-BCD7-E287F1684823}" dt="2026-06-02T19:38:13.254" v="29" actId="1076"/>
-        <pc:sldMkLst>
-          <pc:docMk/>
-          <pc:sldMk cId="3213371304" sldId="256"/>
-        </pc:sldMkLst>
-        <pc:spChg chg="mod">
-          <ac:chgData name="Jay Padhya" userId="99449f0b-447f-4fbb-878a-15ec063fa8cd" providerId="ADAL" clId="{E308DACC-A42A-4B27-BCD7-E287F1684823}" dt="2026-06-02T19:38:13.254" v="29" actId="1076"/>
-          <ac:spMkLst>
-            <pc:docMk/>
-            <pc:sldMk cId="3213371304" sldId="256"/>
-            <ac:spMk id="14" creationId="{074BAF8E-5F63-0FB1-C2FB-E4830B0B83E7}"/>
-          </ac:spMkLst>
-        </pc:spChg>
-        <pc:spChg chg="mod">
-          <ac:chgData name="Jay Padhya" userId="99449f0b-447f-4fbb-878a-15ec063fa8cd" providerId="ADAL" clId="{E308DACC-A42A-4B27-BCD7-E287F1684823}" dt="2026-06-02T19:38:13.254" v="29" actId="1076"/>
-          <ac:spMkLst>
-            <pc:docMk/>
-            <pc:sldMk cId="3213371304" sldId="256"/>
-            <ac:spMk id="16" creationId="{07A1B360-1B36-4461-AC02-83B6BBB2DB40}"/>
-          </ac:spMkLst>
-        </pc:spChg>
-        <pc:spChg chg="mod">
-          <ac:chgData name="Jay Padhya" userId="99449f0b-447f-4fbb-878a-15ec063fa8cd" providerId="ADAL" clId="{E308DACC-A42A-4B27-BCD7-E287F1684823}" dt="2026-06-02T19:38:13.254" v="29" actId="1076"/>
-          <ac:spMkLst>
-            <pc:docMk/>
-            <pc:sldMk cId="3213371304" sldId="256"/>
-            <ac:spMk id="18" creationId="{3679A38A-381E-C899-4A1F-BB7CC670D808}"/>
-          </ac:spMkLst>
-        </pc:spChg>
-        <pc:spChg chg="mod">
-          <ac:chgData name="Jay Padhya" userId="99449f0b-447f-4fbb-878a-15ec063fa8cd" providerId="ADAL" clId="{E308DACC-A42A-4B27-BCD7-E287F1684823}" dt="2026-06-02T19:38:13.254" v="29" actId="1076"/>
-          <ac:spMkLst>
-            <pc:docMk/>
-            <pc:sldMk cId="3213371304" sldId="256"/>
-            <ac:spMk id="19" creationId="{0542932D-AE2E-5FB7-EF12-EEC6E8B31FEC}"/>
-          </ac:spMkLst>
-        </pc:spChg>
-        <pc:spChg chg="mod">
-          <ac:chgData name="Jay Padhya" userId="99449f0b-447f-4fbb-878a-15ec063fa8cd" providerId="ADAL" clId="{E308DACC-A42A-4B27-BCD7-E287F1684823}" dt="2026-06-02T19:38:13.254" v="29" actId="1076"/>
-          <ac:spMkLst>
-            <pc:docMk/>
-            <pc:sldMk cId="3213371304" sldId="256"/>
-            <ac:spMk id="22" creationId="{C9EED369-ECB0-1794-E95D-DAAE0B1D3F6F}"/>
-          </ac:spMkLst>
-        </pc:spChg>
-        <pc:spChg chg="del">
-          <ac:chgData name="Jay Padhya" userId="99449f0b-447f-4fbb-878a-15ec063fa8cd" providerId="ADAL" clId="{E308DACC-A42A-4B27-BCD7-E287F1684823}" dt="2026-06-02T19:37:58.939" v="25" actId="478"/>
-          <ac:spMkLst>
-            <pc:docMk/>
-            <pc:sldMk cId="3213371304" sldId="256"/>
-            <ac:spMk id="26" creationId="{EBA109C4-7A4C-754D-5E0D-D64E62412E16}"/>
-          </ac:spMkLst>
-        </pc:spChg>
-        <pc:cxnChg chg="mod">
-          <ac:chgData name="Jay Padhya" userId="99449f0b-447f-4fbb-878a-15ec063fa8cd" providerId="ADAL" clId="{E308DACC-A42A-4B27-BCD7-E287F1684823}" dt="2026-06-02T19:38:13.254" v="29" actId="1076"/>
-          <ac:cxnSpMkLst>
-            <pc:docMk/>
-            <pc:sldMk cId="3213371304" sldId="256"/>
-            <ac:cxnSpMk id="24" creationId="{90964874-B8BF-09B9-15FE-71563094BD08}"/>
-          </ac:cxnSpMkLst>
-        </pc:cxnChg>
-        <pc:cxnChg chg="mod">
-          <ac:chgData name="Jay Padhya" userId="99449f0b-447f-4fbb-878a-15ec063fa8cd" providerId="ADAL" clId="{E308DACC-A42A-4B27-BCD7-E287F1684823}" dt="2026-06-02T19:38:13.254" v="29" actId="1076"/>
-          <ac:cxnSpMkLst>
-            <pc:docMk/>
-            <pc:sldMk cId="3213371304" sldId="256"/>
-            <ac:cxnSpMk id="25" creationId="{8A8D26E7-6C24-2E3E-92DF-06D674296E93}"/>
-          </ac:cxnSpMkLst>
-        </pc:cxnChg>
-      </pc:sldChg>
-      <pc:sldChg chg="delSp modSp mod">
-        <pc:chgData name="Jay Padhya" userId="99449f0b-447f-4fbb-878a-15ec063fa8cd" providerId="ADAL" clId="{E308DACC-A42A-4B27-BCD7-E287F1684823}" dt="2026-06-02T19:38:43.505" v="30" actId="478"/>
-        <pc:sldMkLst>
-          <pc:docMk/>
-          <pc:sldMk cId="4191963947" sldId="257"/>
-        </pc:sldMkLst>
-        <pc:spChg chg="mod">
-          <ac:chgData name="Jay Padhya" userId="99449f0b-447f-4fbb-878a-15ec063fa8cd" providerId="ADAL" clId="{E308DACC-A42A-4B27-BCD7-E287F1684823}" dt="2026-06-02T17:17:37.713" v="2" actId="14100"/>
-          <ac:spMkLst>
-            <pc:docMk/>
-            <pc:sldMk cId="4191963947" sldId="257"/>
-            <ac:spMk id="4" creationId="{00EC5D6A-BD5B-7A00-251E-69C8475037EC}"/>
-          </ac:spMkLst>
-        </pc:spChg>
-        <pc:spChg chg="del">
-          <ac:chgData name="Jay Padhya" userId="99449f0b-447f-4fbb-878a-15ec063fa8cd" providerId="ADAL" clId="{E308DACC-A42A-4B27-BCD7-E287F1684823}" dt="2026-06-02T17:17:40.706" v="3" actId="478"/>
-          <ac:spMkLst>
-            <pc:docMk/>
-            <pc:sldMk cId="4191963947" sldId="257"/>
-            <ac:spMk id="5" creationId="{60FC441A-DCDC-AB8E-1AAD-A048F9B82437}"/>
-          </ac:spMkLst>
-        </pc:spChg>
-        <pc:spChg chg="mod">
-          <ac:chgData name="Jay Padhya" userId="99449f0b-447f-4fbb-878a-15ec063fa8cd" providerId="ADAL" clId="{E308DACC-A42A-4B27-BCD7-E287F1684823}" dt="2026-06-02T17:17:57.921" v="9" actId="20577"/>
-          <ac:spMkLst>
-            <pc:docMk/>
-            <pc:sldMk cId="4191963947" sldId="257"/>
-            <ac:spMk id="6" creationId="{65B5639F-85AC-CE3F-EFB5-1C8ADAFD2CDC}"/>
-          </ac:spMkLst>
-        </pc:spChg>
-        <pc:spChg chg="del">
-          <ac:chgData name="Jay Padhya" userId="99449f0b-447f-4fbb-878a-15ec063fa8cd" providerId="ADAL" clId="{E308DACC-A42A-4B27-BCD7-E287F1684823}" dt="2026-06-02T19:38:43.505" v="30" actId="478"/>
-          <ac:spMkLst>
-            <pc:docMk/>
-            <pc:sldMk cId="4191963947" sldId="257"/>
-            <ac:spMk id="37" creationId="{0D29D071-B71D-4677-CCED-F832C085A082}"/>
-          </ac:spMkLst>
-        </pc:spChg>
-      </pc:sldChg>
-      <pc:sldChg chg="delSp mod">
-        <pc:chgData name="Jay Padhya" userId="99449f0b-447f-4fbb-878a-15ec063fa8cd" providerId="ADAL" clId="{E308DACC-A42A-4B27-BCD7-E287F1684823}" dt="2026-06-02T19:38:47.419" v="31" actId="478"/>
-        <pc:sldMkLst>
-          <pc:docMk/>
-          <pc:sldMk cId="2980989318" sldId="258"/>
-        </pc:sldMkLst>
-        <pc:spChg chg="del">
-          <ac:chgData name="Jay Padhya" userId="99449f0b-447f-4fbb-878a-15ec063fa8cd" providerId="ADAL" clId="{E308DACC-A42A-4B27-BCD7-E287F1684823}" dt="2026-06-02T19:38:47.419" v="31" actId="478"/>
-          <ac:spMkLst>
-            <pc:docMk/>
-            <pc:sldMk cId="2980989318" sldId="258"/>
-            <ac:spMk id="37" creationId="{2EF02ACA-3A96-8539-5A9C-8D995B027EA7}"/>
-          </ac:spMkLst>
-        </pc:spChg>
-      </pc:sldChg>
-      <pc:sldChg chg="delSp modSp mod">
-        <pc:chgData name="Jay Padhya" userId="99449f0b-447f-4fbb-878a-15ec063fa8cd" providerId="ADAL" clId="{E308DACC-A42A-4B27-BCD7-E287F1684823}" dt="2026-06-02T19:38:49.793" v="32" actId="478"/>
-        <pc:sldMkLst>
-          <pc:docMk/>
-          <pc:sldMk cId="1478307375" sldId="259"/>
-        </pc:sldMkLst>
-        <pc:spChg chg="mod">
-          <ac:chgData name="Jay Padhya" userId="99449f0b-447f-4fbb-878a-15ec063fa8cd" providerId="ADAL" clId="{E308DACC-A42A-4B27-BCD7-E287F1684823}" dt="2026-06-02T17:18:19.773" v="11" actId="33524"/>
-          <ac:spMkLst>
-            <pc:docMk/>
-            <pc:sldMk cId="1478307375" sldId="259"/>
-            <ac:spMk id="6" creationId="{45EBE288-D07B-E819-BD35-956CBDA026BC}"/>
-          </ac:spMkLst>
-        </pc:spChg>
-        <pc:spChg chg="mod">
-          <ac:chgData name="Jay Padhya" userId="99449f0b-447f-4fbb-878a-15ec063fa8cd" providerId="ADAL" clId="{E308DACC-A42A-4B27-BCD7-E287F1684823}" dt="2026-06-02T17:18:24.768" v="12" actId="33524"/>
-          <ac:spMkLst>
-            <pc:docMk/>
-            <pc:sldMk cId="1478307375" sldId="259"/>
-            <ac:spMk id="11" creationId="{D6DFDA47-6F29-FE88-AC4C-266DC8382034}"/>
-          </ac:spMkLst>
-        </pc:spChg>
-        <pc:spChg chg="del">
-          <ac:chgData name="Jay Padhya" userId="99449f0b-447f-4fbb-878a-15ec063fa8cd" providerId="ADAL" clId="{E308DACC-A42A-4B27-BCD7-E287F1684823}" dt="2026-06-02T19:38:49.793" v="32" actId="478"/>
-          <ac:spMkLst>
-            <pc:docMk/>
-            <pc:sldMk cId="1478307375" sldId="259"/>
-            <ac:spMk id="61" creationId="{9A5B2EAC-0A86-B634-E76F-779A18524C4A}"/>
-          </ac:spMkLst>
-        </pc:spChg>
-      </pc:sldChg>
-      <pc:sldChg chg="delSp modSp mod">
-        <pc:chgData name="Jay Padhya" userId="99449f0b-447f-4fbb-878a-15ec063fa8cd" providerId="ADAL" clId="{E308DACC-A42A-4B27-BCD7-E287F1684823}" dt="2026-06-02T19:38:55.689" v="34" actId="1076"/>
-        <pc:sldMkLst>
-          <pc:docMk/>
-          <pc:sldMk cId="1105497129" sldId="260"/>
-        </pc:sldMkLst>
-        <pc:spChg chg="mod">
-          <ac:chgData name="Jay Padhya" userId="99449f0b-447f-4fbb-878a-15ec063fa8cd" providerId="ADAL" clId="{E308DACC-A42A-4B27-BCD7-E287F1684823}" dt="2026-06-02T19:38:55.689" v="34" actId="1076"/>
-          <ac:spMkLst>
-            <pc:docMk/>
-            <pc:sldMk cId="1105497129" sldId="260"/>
-            <ac:spMk id="35" creationId="{00134BC3-701B-4D4D-DE9B-85B6D3ED58E2}"/>
-          </ac:spMkLst>
-        </pc:spChg>
-        <pc:spChg chg="del">
-          <ac:chgData name="Jay Padhya" userId="99449f0b-447f-4fbb-878a-15ec063fa8cd" providerId="ADAL" clId="{E308DACC-A42A-4B27-BCD7-E287F1684823}" dt="2026-06-02T19:38:53.388" v="33" actId="478"/>
-          <ac:spMkLst>
-            <pc:docMk/>
-            <pc:sldMk cId="1105497129" sldId="260"/>
-            <ac:spMk id="36" creationId="{ECC87C25-CEDF-5062-18AC-7419AB4081E7}"/>
-          </ac:spMkLst>
-        </pc:spChg>
-      </pc:sldChg>
-      <pc:sldChg chg="delSp modSp mod">
-        <pc:chgData name="Jay Padhya" userId="99449f0b-447f-4fbb-878a-15ec063fa8cd" providerId="ADAL" clId="{E308DACC-A42A-4B27-BCD7-E287F1684823}" dt="2026-06-02T19:39:11.737" v="36" actId="478"/>
-        <pc:sldMkLst>
-          <pc:docMk/>
-          <pc:sldMk cId="2712118673" sldId="261"/>
-        </pc:sldMkLst>
-        <pc:spChg chg="del">
-          <ac:chgData name="Jay Padhya" userId="99449f0b-447f-4fbb-878a-15ec063fa8cd" providerId="ADAL" clId="{E308DACC-A42A-4B27-BCD7-E287F1684823}" dt="2026-06-02T19:39:11.737" v="36" actId="478"/>
-          <ac:spMkLst>
-            <pc:docMk/>
-            <pc:sldMk cId="2712118673" sldId="261"/>
-            <ac:spMk id="5" creationId="{01CCA4B6-E2A0-8228-FB6C-63849E40F643}"/>
-          </ac:spMkLst>
-        </pc:spChg>
-        <pc:spChg chg="mod">
-          <ac:chgData name="Jay Padhya" userId="99449f0b-447f-4fbb-878a-15ec063fa8cd" providerId="ADAL" clId="{E308DACC-A42A-4B27-BCD7-E287F1684823}" dt="2026-06-02T17:18:48.075" v="14" actId="14100"/>
-          <ac:spMkLst>
-            <pc:docMk/>
-            <pc:sldMk cId="2712118673" sldId="261"/>
-            <ac:spMk id="6" creationId="{D7E7196A-05EA-13DA-8B14-A160289E9A16}"/>
-          </ac:spMkLst>
-        </pc:spChg>
-        <pc:spChg chg="mod">
-          <ac:chgData name="Jay Padhya" userId="99449f0b-447f-4fbb-878a-15ec063fa8cd" providerId="ADAL" clId="{E308DACC-A42A-4B27-BCD7-E287F1684823}" dt="2026-06-02T17:18:36.643" v="13" actId="14100"/>
-          <ac:spMkLst>
-            <pc:docMk/>
-            <pc:sldMk cId="2712118673" sldId="261"/>
-            <ac:spMk id="10" creationId="{017BB6CA-4293-A235-5A86-1AF79DAD2C59}"/>
-          </ac:spMkLst>
-        </pc:spChg>
-        <pc:spChg chg="del">
-          <ac:chgData name="Jay Padhya" userId="99449f0b-447f-4fbb-878a-15ec063fa8cd" providerId="ADAL" clId="{E308DACC-A42A-4B27-BCD7-E287F1684823}" dt="2026-06-02T19:39:08.564" v="35" actId="478"/>
-          <ac:spMkLst>
-            <pc:docMk/>
-            <pc:sldMk cId="2712118673" sldId="261"/>
-            <ac:spMk id="39" creationId="{D5AB3981-5C0D-1556-125F-272D4C94FAAC}"/>
-          </ac:spMkLst>
-        </pc:spChg>
-      </pc:sldChg>
-      <pc:sldChg chg="delSp modSp mod">
-        <pc:chgData name="Jay Padhya" userId="99449f0b-447f-4fbb-878a-15ec063fa8cd" providerId="ADAL" clId="{E308DACC-A42A-4B27-BCD7-E287F1684823}" dt="2026-06-02T19:39:15.463" v="37" actId="478"/>
-        <pc:sldMkLst>
-          <pc:docMk/>
-          <pc:sldMk cId="2273145114" sldId="262"/>
-        </pc:sldMkLst>
-        <pc:spChg chg="del">
-          <ac:chgData name="Jay Padhya" userId="99449f0b-447f-4fbb-878a-15ec063fa8cd" providerId="ADAL" clId="{E308DACC-A42A-4B27-BCD7-E287F1684823}" dt="2026-06-02T19:39:15.463" v="37" actId="478"/>
-          <ac:spMkLst>
-            <pc:docMk/>
-            <pc:sldMk cId="2273145114" sldId="262"/>
-            <ac:spMk id="44" creationId="{736C1753-03D7-CD42-210E-D143FE84C40F}"/>
-          </ac:spMkLst>
-        </pc:spChg>
-        <pc:cxnChg chg="mod">
-          <ac:chgData name="Jay Padhya" userId="99449f0b-447f-4fbb-878a-15ec063fa8cd" providerId="ADAL" clId="{E308DACC-A42A-4B27-BCD7-E287F1684823}" dt="2026-06-02T17:18:57.280" v="15" actId="1076"/>
-          <ac:cxnSpMkLst>
-            <pc:docMk/>
-            <pc:sldMk cId="2273145114" sldId="262"/>
-            <ac:cxnSpMk id="12" creationId="{8561FAA2-8034-19D6-F92A-498B9D08F403}"/>
-          </ac:cxnSpMkLst>
-        </pc:cxnChg>
-        <pc:cxnChg chg="mod">
-          <ac:chgData name="Jay Padhya" userId="99449f0b-447f-4fbb-878a-15ec063fa8cd" providerId="ADAL" clId="{E308DACC-A42A-4B27-BCD7-E287F1684823}" dt="2026-06-02T17:19:00.210" v="16" actId="1076"/>
-          <ac:cxnSpMkLst>
-            <pc:docMk/>
-            <pc:sldMk cId="2273145114" sldId="262"/>
-            <ac:cxnSpMk id="18" creationId="{D4E370B4-8FE7-FE2B-DA71-962CD3030A2D}"/>
-          </ac:cxnSpMkLst>
-        </pc:cxnChg>
-        <pc:cxnChg chg="mod">
-          <ac:chgData name="Jay Padhya" userId="99449f0b-447f-4fbb-878a-15ec063fa8cd" providerId="ADAL" clId="{E308DACC-A42A-4B27-BCD7-E287F1684823}" dt="2026-06-02T17:19:02.154" v="17" actId="1076"/>
-          <ac:cxnSpMkLst>
-            <pc:docMk/>
-            <pc:sldMk cId="2273145114" sldId="262"/>
-            <ac:cxnSpMk id="24" creationId="{48E854BA-7C84-4D18-5DB1-50C559EC9627}"/>
-          </ac:cxnSpMkLst>
-        </pc:cxnChg>
-        <pc:cxnChg chg="mod">
-          <ac:chgData name="Jay Padhya" userId="99449f0b-447f-4fbb-878a-15ec063fa8cd" providerId="ADAL" clId="{E308DACC-A42A-4B27-BCD7-E287F1684823}" dt="2026-06-02T17:19:05.300" v="18" actId="1076"/>
-          <ac:cxnSpMkLst>
-            <pc:docMk/>
-            <pc:sldMk cId="2273145114" sldId="262"/>
-            <ac:cxnSpMk id="35" creationId="{7DCC78E2-344B-E20F-6F92-4271BFB22033}"/>
-          </ac:cxnSpMkLst>
-        </pc:cxnChg>
-        <pc:cxnChg chg="mod">
-          <ac:chgData name="Jay Padhya" userId="99449f0b-447f-4fbb-878a-15ec063fa8cd" providerId="ADAL" clId="{E308DACC-A42A-4B27-BCD7-E287F1684823}" dt="2026-06-02T17:19:08.197" v="19" actId="1076"/>
-          <ac:cxnSpMkLst>
-            <pc:docMk/>
-            <pc:sldMk cId="2273145114" sldId="262"/>
-            <ac:cxnSpMk id="41" creationId="{63818CBC-CF3A-EC36-BB26-211D47C22B2E}"/>
-          </ac:cxnSpMkLst>
-        </pc:cxnChg>
-      </pc:sldChg>
-      <pc:sldChg chg="delSp mod">
-        <pc:chgData name="Jay Padhya" userId="99449f0b-447f-4fbb-878a-15ec063fa8cd" providerId="ADAL" clId="{E308DACC-A42A-4B27-BCD7-E287F1684823}" dt="2026-06-02T19:39:18.618" v="38" actId="478"/>
-        <pc:sldMkLst>
-          <pc:docMk/>
-          <pc:sldMk cId="1588241042" sldId="263"/>
-        </pc:sldMkLst>
-        <pc:spChg chg="del">
-          <ac:chgData name="Jay Padhya" userId="99449f0b-447f-4fbb-878a-15ec063fa8cd" providerId="ADAL" clId="{E308DACC-A42A-4B27-BCD7-E287F1684823}" dt="2026-06-02T19:39:18.618" v="38" actId="478"/>
-          <ac:spMkLst>
-            <pc:docMk/>
-            <pc:sldMk cId="1588241042" sldId="263"/>
-            <ac:spMk id="27" creationId="{8D705E3E-7E8F-9F70-AA70-7C93E0BDA8E4}"/>
-          </ac:spMkLst>
-        </pc:spChg>
-      </pc:sldChg>
-      <pc:sldChg chg="delSp mod">
-        <pc:chgData name="Jay Padhya" userId="99449f0b-447f-4fbb-878a-15ec063fa8cd" providerId="ADAL" clId="{E308DACC-A42A-4B27-BCD7-E287F1684823}" dt="2026-06-02T19:39:21.274" v="39" actId="478"/>
-        <pc:sldMkLst>
-          <pc:docMk/>
-          <pc:sldMk cId="4293682231" sldId="264"/>
-        </pc:sldMkLst>
-        <pc:spChg chg="del">
-          <ac:chgData name="Jay Padhya" userId="99449f0b-447f-4fbb-878a-15ec063fa8cd" providerId="ADAL" clId="{E308DACC-A42A-4B27-BCD7-E287F1684823}" dt="2026-06-02T19:39:21.274" v="39" actId="478"/>
-          <ac:spMkLst>
-            <pc:docMk/>
-            <pc:sldMk cId="4293682231" sldId="264"/>
-            <ac:spMk id="30" creationId="{AD5BC1F9-277F-68C3-F733-534DDA4C8908}"/>
-          </ac:spMkLst>
-        </pc:spChg>
-      </pc:sldChg>
-      <pc:sldChg chg="delSp mod">
-        <pc:chgData name="Jay Padhya" userId="99449f0b-447f-4fbb-878a-15ec063fa8cd" providerId="ADAL" clId="{E308DACC-A42A-4B27-BCD7-E287F1684823}" dt="2026-06-02T19:39:24.664" v="40" actId="478"/>
-        <pc:sldMkLst>
-          <pc:docMk/>
-          <pc:sldMk cId="2679890112" sldId="265"/>
-        </pc:sldMkLst>
-        <pc:spChg chg="del">
-          <ac:chgData name="Jay Padhya" userId="99449f0b-447f-4fbb-878a-15ec063fa8cd" providerId="ADAL" clId="{E308DACC-A42A-4B27-BCD7-E287F1684823}" dt="2026-06-02T19:39:24.664" v="40" actId="478"/>
-          <ac:spMkLst>
-            <pc:docMk/>
-            <pc:sldMk cId="2679890112" sldId="265"/>
-            <ac:spMk id="24" creationId="{A8B3C47C-BEF5-C2AB-0E51-26529C030ECB}"/>
-          </ac:spMkLst>
-        </pc:spChg>
-      </pc:sldChg>
-      <pc:sldChg chg="delSp mod">
-        <pc:chgData name="Jay Padhya" userId="99449f0b-447f-4fbb-878a-15ec063fa8cd" providerId="ADAL" clId="{E308DACC-A42A-4B27-BCD7-E287F1684823}" dt="2026-06-02T19:39:29.816" v="41" actId="478"/>
-        <pc:sldMkLst>
-          <pc:docMk/>
-          <pc:sldMk cId="1001487370" sldId="266"/>
-        </pc:sldMkLst>
-        <pc:spChg chg="del">
-          <ac:chgData name="Jay Padhya" userId="99449f0b-447f-4fbb-878a-15ec063fa8cd" providerId="ADAL" clId="{E308DACC-A42A-4B27-BCD7-E287F1684823}" dt="2026-06-02T19:39:29.816" v="41" actId="478"/>
-          <ac:spMkLst>
-            <pc:docMk/>
-            <pc:sldMk cId="1001487370" sldId="266"/>
-            <ac:spMk id="27" creationId="{181B820C-05BB-0AA9-51B5-C4D3113C271B}"/>
-          </ac:spMkLst>
-        </pc:spChg>
-      </pc:sldChg>
-      <pc:sldChg chg="delSp modSp mod">
-        <pc:chgData name="Jay Padhya" userId="99449f0b-447f-4fbb-878a-15ec063fa8cd" providerId="ADAL" clId="{E308DACC-A42A-4B27-BCD7-E287F1684823}" dt="2026-06-02T19:39:32.602" v="42" actId="478"/>
-        <pc:sldMkLst>
-          <pc:docMk/>
-          <pc:sldMk cId="1024807437" sldId="267"/>
-        </pc:sldMkLst>
-        <pc:spChg chg="del">
-          <ac:chgData name="Jay Padhya" userId="99449f0b-447f-4fbb-878a-15ec063fa8cd" providerId="ADAL" clId="{E308DACC-A42A-4B27-BCD7-E287F1684823}" dt="2026-06-02T19:39:32.602" v="42" actId="478"/>
-          <ac:spMkLst>
-            <pc:docMk/>
-            <pc:sldMk cId="1024807437" sldId="267"/>
-            <ac:spMk id="3" creationId="{62C60101-AEFC-9651-DF96-060330A237FC}"/>
-          </ac:spMkLst>
-        </pc:spChg>
-        <pc:spChg chg="mod">
-          <ac:chgData name="Jay Padhya" userId="99449f0b-447f-4fbb-878a-15ec063fa8cd" providerId="ADAL" clId="{E308DACC-A42A-4B27-BCD7-E287F1684823}" dt="2026-06-02T17:19:37.578" v="22" actId="14100"/>
-          <ac:spMkLst>
-            <pc:docMk/>
-            <pc:sldMk cId="1024807437" sldId="267"/>
-            <ac:spMk id="5" creationId="{1BA3E3AA-679B-1C38-E7D3-CA60023A3D87}"/>
-          </ac:spMkLst>
-        </pc:spChg>
-        <pc:spChg chg="mod">
-          <ac:chgData name="Jay Padhya" userId="99449f0b-447f-4fbb-878a-15ec063fa8cd" providerId="ADAL" clId="{E308DACC-A42A-4B27-BCD7-E287F1684823}" dt="2026-06-02T17:19:46.462" v="24" actId="1076"/>
-          <ac:spMkLst>
-            <pc:docMk/>
-            <pc:sldMk cId="1024807437" sldId="267"/>
-            <ac:spMk id="6" creationId="{0B4636E1-D974-114B-910A-178F8E28C8AC}"/>
-          </ac:spMkLst>
-        </pc:spChg>
-        <pc:spChg chg="del">
-          <ac:chgData name="Jay Padhya" userId="99449f0b-447f-4fbb-878a-15ec063fa8cd" providerId="ADAL" clId="{E308DACC-A42A-4B27-BCD7-E287F1684823}" dt="2026-06-02T17:19:29.961" v="20" actId="478"/>
-          <ac:spMkLst>
-            <pc:docMk/>
-            <pc:sldMk cId="1024807437" sldId="267"/>
-            <ac:spMk id="29" creationId="{0CF1C518-E099-0F92-2E55-DBCE463676CF}"/>
-          </ac:spMkLst>
-        </pc:spChg>
-      </pc:sldChg>
-    </pc:docChg>
-  </pc:docChgLst>
-</pc:chgInfo>
-</file>
-
 <file path=ppt/notesMasters/notesMaster1.xml><?xml version="1.0" encoding="utf-8"?>
 <p:notesMaster xmlns:a="http://schemas.openxmlformats.org/drawingml/2006/main" xmlns:r="http://schemas.openxmlformats.org/officeDocument/2006/relationships" xmlns:p="http://schemas.openxmlformats.org/presentationml/2006/main">
   <p:cSld>
@@ -595,9 +202,9 @@
             </a:lvl1pPr>
           </a:lstStyle>
           <a:p>
-            <a:fld id="{AC19A1FA-2752-4764-AD56-EC7A9C3EA46B}" type="datetimeFigureOut">
+            <a:fld id="{F8F13748-ED91-41C8-A22E-A94D5421A329}" type="datetimeFigureOut">
               <a:rPr lang="en-US" smtClean="0"/>
-              <a:t>6/2/2026</a:t>
+              <a:t>6/3/2026</a:t>
             </a:fld>
             <a:endParaRPr lang="en-US"/>
           </a:p>
@@ -753,7 +360,7 @@
             </a:lvl1pPr>
           </a:lstStyle>
           <a:p>
-            <a:fld id="{F9A074BA-C3FB-406C-A519-80D27E7380F7}" type="slidenum">
+            <a:fld id="{4FA1AD70-E0BA-4B7F-959B-5FDA645614EB}" type="slidenum">
               <a:rPr lang="en-US" smtClean="0"/>
               <a:t>‹#›</a:t>
             </a:fld>
@@ -764,7 +371,7 @@
     </p:spTree>
     <p:extLst>
       <p:ext uri="{BB962C8B-B14F-4D97-AF65-F5344CB8AC3E}">
-        <p14:creationId xmlns:p14="http://schemas.microsoft.com/office/powerpoint/2010/main" val="3185541358"/>
+        <p14:creationId xmlns:p14="http://schemas.microsoft.com/office/powerpoint/2010/main" val="1671076587"/>
       </p:ext>
     </p:extLst>
   </p:cSld>
@@ -910,7 +517,31 @@
           <a:p>
             <a:r>
               <a:rPr lang="en-US"/>
-              <a:t>Last call, Chirag asked whether we could use a small open model for a browsing or computer-use style agent, and whether we could fine-tune it using the A100 capacity already available. This deck is the meeting narrative for that answer. I am going to show the problem, what base Gemma can and cannot do natively, why fine-tuning is the right lever for this behavior, exactly what we trained, the AzureML and Foundry-adjacent resources we used, and how the fine-tuned model changes the result.</a:t>
+              <a:t>Slide 1. I will start with the headline: this is a Gemma 4B-class fine-tuning demo for a browser-action agent.</a:t>
+            </a:r>
+          </a:p>
+          <a:p>
+            <a:r>
+              <a:rPr lang="en-US"/>
+              <a:t>The business question is whether a small open model can learn a reliable EIM workflow behavior.</a:t>
+            </a:r>
+          </a:p>
+          <a:p>
+            <a:r>
+              <a:rPr lang="en-US"/>
+              <a:t>The demo uses AzureML managed compute, synthetic data only, and a LoRA adapter.</a:t>
+            </a:r>
+          </a:p>
+          <a:p>
+            <a:r>
+              <a:rPr lang="en-US"/>
+              <a:t>The output we care about is not prose. It is a JSON action plan that another system can execute.</a:t>
+            </a:r>
+          </a:p>
+          <a:p>
+            <a:r>
+              <a:rPr lang="en-US"/>
+              <a:t>I will walk through the baseline, the fine-tuning method, the data, the Azure resources, and the before-after result.</a:t>
             </a:r>
           </a:p>
         </p:txBody>
@@ -930,7 +561,7 @@
           <a:bodyPr/>
           <a:lstStyle/>
           <a:p>
-            <a:fld id="{F9A074BA-C3FB-406C-A519-80D27E7380F7}" type="slidenum">
+            <a:fld id="{4FA1AD70-E0BA-4B7F-959B-5FDA645614EB}" type="slidenum">
               <a:rPr lang="en-US" smtClean="0"/>
               <a:t>1</a:t>
             </a:fld>
@@ -941,7 +572,7 @@
     </p:spTree>
     <p:extLst>
       <p:ext uri="{BB962C8B-B14F-4D97-AF65-F5344CB8AC3E}">
-        <p14:creationId xmlns:p14="http://schemas.microsoft.com/office/powerpoint/2010/main" val="4150018256"/>
+        <p14:creationId xmlns:p14="http://schemas.microsoft.com/office/powerpoint/2010/main" val="2288512041"/>
       </p:ext>
     </p:extLst>
   </p:cSld>
@@ -997,7 +628,43 @@
           <a:p>
             <a:r>
               <a:rPr lang="en-US"/>
-              <a:t>Here I would go one layer deeper for the technical audience. The training job loads the base model and tokenizer, enables gradient checkpointing, and applies LoRA to the attention and MLP projection layers. The current winner profile uses a higher rank and alpha than the original simple demo: rank 32 and alpha 64, with eight epochs on a small synthetic dataset. TRL SFTTrainer applies the chat template and trains against the assistant JSON. The output is not a whole new full model first; it is a small adapter plus metadata, which we can register and deploy.</a:t>
+              <a:t>Slide 10. This is what trains on the A100.</a:t>
+            </a:r>
+          </a:p>
+          <a:p>
+            <a:r>
+              <a:rPr lang="en-US"/>
+              <a:t>The laptop does not fine-tune the model. It only submits and monitors the AzureML job.</a:t>
+            </a:r>
+          </a:p>
+          <a:p>
+            <a:r>
+              <a:rPr lang="en-US"/>
+              <a:t>Inside the job, Transformers loads the Gemma base model in bf16.</a:t>
+            </a:r>
+          </a:p>
+          <a:p>
+            <a:r>
+              <a:rPr lang="en-US"/>
+              <a:t>PEFT applies LoRA with rank 32 and alpha 64 in the current winner profile.</a:t>
+            </a:r>
+          </a:p>
+          <a:p>
+            <a:r>
+              <a:rPr lang="en-US"/>
+              <a:t>The target modules are attention projections and MLP projections: q, k, v, o, gate, up, and down.</a:t>
+            </a:r>
+          </a:p>
+          <a:p>
+            <a:r>
+              <a:rPr lang="en-US"/>
+              <a:t>TRL SFTTrainer applies the chat template and trains on the assistant JSON examples.</a:t>
+            </a:r>
+          </a:p>
+          <a:p>
+            <a:r>
+              <a:rPr lang="en-US"/>
+              <a:t>The output is a LoRA adapter plus metadata, not a full model retrain.</a:t>
             </a:r>
           </a:p>
         </p:txBody>
@@ -1017,7 +684,7 @@
           <a:bodyPr/>
           <a:lstStyle/>
           <a:p>
-            <a:fld id="{F9A074BA-C3FB-406C-A519-80D27E7380F7}" type="slidenum">
+            <a:fld id="{4FA1AD70-E0BA-4B7F-959B-5FDA645614EB}" type="slidenum">
               <a:rPr lang="en-US" smtClean="0"/>
               <a:t>10</a:t>
             </a:fld>
@@ -1028,7 +695,7 @@
     </p:spTree>
     <p:extLst>
       <p:ext uri="{BB962C8B-B14F-4D97-AF65-F5344CB8AC3E}">
-        <p14:creationId xmlns:p14="http://schemas.microsoft.com/office/powerpoint/2010/main" val="1314873630"/>
+        <p14:creationId xmlns:p14="http://schemas.microsoft.com/office/powerpoint/2010/main" val="3487659777"/>
       </p:ext>
     </p:extLst>
   </p:cSld>
@@ -1084,7 +751,37 @@
           <a:p>
             <a:r>
               <a:rPr lang="en-US"/>
-              <a:t>This is the serving story. The demo intentionally avoids paying for two GPU endpoints. The endpoint loads the base model and the adapter. The Streamlit app calls it once with the adapter disabled and once with the adapter enabled. That gives a clean side-by-side comparison. It also makes the cost conversation simple: the endpoint is the expensive part, so we run it for the meeting and then delete it.</a:t>
+              <a:t>Slide 11. This is the fine-tuning code path in plain English.</a:t>
+            </a:r>
+          </a:p>
+          <a:p>
+            <a:r>
+              <a:rPr lang="en-US"/>
+              <a:t>Step one, Transformers loads the base Gemma model from the catalog mount or model path.</a:t>
+            </a:r>
+          </a:p>
+          <a:p>
+            <a:r>
+              <a:rPr lang="en-US"/>
+              <a:t>Step two, PEFT injects LoRA trainable matrices into selected layers while the base weights stay frozen.</a:t>
+            </a:r>
+          </a:p>
+          <a:p>
+            <a:r>
+              <a:rPr lang="en-US"/>
+              <a:t>Step three, SFTTrainer trains against the message records: system, user DOM, and assistant JSON.</a:t>
+            </a:r>
+          </a:p>
+          <a:p>
+            <a:r>
+              <a:rPr lang="en-US"/>
+              <a:t>Step four, the job saves the adapter to outputs/lora_adapter.</a:t>
+            </a:r>
+          </a:p>
+          <a:p>
+            <a:r>
+              <a:rPr lang="en-US"/>
+              <a:t>The key point is that fine-tuning changes the response behavior through the adapter, not by rewriting the whole base model.</a:t>
             </a:r>
           </a:p>
         </p:txBody>
@@ -1104,7 +801,7 @@
           <a:bodyPr/>
           <a:lstStyle/>
           <a:p>
-            <a:fld id="{F9A074BA-C3FB-406C-A519-80D27E7380F7}" type="slidenum">
+            <a:fld id="{4FA1AD70-E0BA-4B7F-959B-5FDA645614EB}" type="slidenum">
               <a:rPr lang="en-US" smtClean="0"/>
               <a:t>11</a:t>
             </a:fld>
@@ -1115,7 +812,7 @@
     </p:spTree>
     <p:extLst>
       <p:ext uri="{BB962C8B-B14F-4D97-AF65-F5344CB8AC3E}">
-        <p14:creationId xmlns:p14="http://schemas.microsoft.com/office/powerpoint/2010/main" val="2648657814"/>
+        <p14:creationId xmlns:p14="http://schemas.microsoft.com/office/powerpoint/2010/main" val="688454448"/>
       </p:ext>
     </p:extLst>
   </p:cSld>
@@ -1171,7 +868,37 @@
           <a:p>
             <a:r>
               <a:rPr lang="en-US"/>
-              <a:t>I would close by saying: the fine-tuned model solves the problem by learning the contract. It does not make the system production-ready by itself, and it does not replace retrieval, policy governance, or human review. But it shows that a small model can be specialized for browser-action behavior. The next step is not to broaden the assistant. The next step is to select one high-value EIM workflow, define graders up front, use safe training data, and run the same evaluation loop with a clear pass threshold and cost ceiling.</a:t>
+              <a:t>Slide 12. The live serving pattern uses one endpoint and two behaviors.</a:t>
+            </a:r>
+          </a:p>
+          <a:p>
+            <a:r>
+              <a:rPr lang="en-US"/>
+              <a:t>The endpoint loads the base model and the LoRA adapter.</a:t>
+            </a:r>
+          </a:p>
+          <a:p>
+            <a:r>
+              <a:rPr lang="en-US"/>
+              <a:t>When use_adapter is false, we see base Gemma behavior.</a:t>
+            </a:r>
+          </a:p>
+          <a:p>
+            <a:r>
+              <a:rPr lang="en-US"/>
+              <a:t>When use_adapter is true, we see the fine-tuned behavior.</a:t>
+            </a:r>
+          </a:p>
+          <a:p>
+            <a:r>
+              <a:rPr lang="en-US"/>
+              <a:t>That gives a clean side-by-side comparison without paying for two GPU endpoints.</a:t>
+            </a:r>
+          </a:p>
+          <a:p>
+            <a:r>
+              <a:rPr lang="en-US"/>
+              <a:t>After the demo, delete the endpoint to stop A100 hourly billing.</a:t>
             </a:r>
           </a:p>
         </p:txBody>
@@ -1191,7 +918,7 @@
           <a:bodyPr/>
           <a:lstStyle/>
           <a:p>
-            <a:fld id="{F9A074BA-C3FB-406C-A519-80D27E7380F7}" type="slidenum">
+            <a:fld id="{4FA1AD70-E0BA-4B7F-959B-5FDA645614EB}" type="slidenum">
               <a:rPr lang="en-US" smtClean="0"/>
               <a:t>12</a:t>
             </a:fld>
@@ -1202,7 +929,124 @@
     </p:spTree>
     <p:extLst>
       <p:ext uri="{BB962C8B-B14F-4D97-AF65-F5344CB8AC3E}">
-        <p14:creationId xmlns:p14="http://schemas.microsoft.com/office/powerpoint/2010/main" val="2168069998"/>
+        <p14:creationId xmlns:p14="http://schemas.microsoft.com/office/powerpoint/2010/main" val="3249944"/>
+      </p:ext>
+    </p:extLst>
+  </p:cSld>
+  <p:clrMapOvr>
+    <a:masterClrMapping/>
+  </p:clrMapOvr>
+</p:notes>
+</file>
+
+<file path=ppt/notesSlides/notesSlide13.xml><?xml version="1.0" encoding="utf-8"?>
+<p:notes xmlns:a="http://schemas.openxmlformats.org/drawingml/2006/main" xmlns:r="http://schemas.openxmlformats.org/officeDocument/2006/relationships" xmlns:p="http://schemas.openxmlformats.org/presentationml/2006/main">
+  <p:cSld>
+    <p:spTree>
+      <p:nvGrpSpPr>
+        <p:cNvPr id="1" name=""/>
+        <p:cNvGrpSpPr/>
+        <p:nvPr/>
+      </p:nvGrpSpPr>
+      <p:grpSpPr>
+        <a:xfrm>
+          <a:off x="0" y="0"/>
+          <a:ext cx="0" cy="0"/>
+          <a:chOff x="0" y="0"/>
+          <a:chExt cx="0" cy="0"/>
+        </a:xfrm>
+      </p:grpSpPr>
+      <p:sp>
+        <p:nvSpPr>
+          <p:cNvPr id="2" name="Slide Image Placeholder 1"/>
+          <p:cNvSpPr>
+            <a:spLocks noGrp="1" noRot="1" noChangeAspect="1"/>
+          </p:cNvSpPr>
+          <p:nvPr>
+            <p:ph type="sldImg"/>
+          </p:nvPr>
+        </p:nvSpPr>
+        <p:spPr/>
+      </p:sp>
+      <p:sp>
+        <p:nvSpPr>
+          <p:cNvPr id="3" name="Notes Placeholder 2"/>
+          <p:cNvSpPr>
+            <a:spLocks noGrp="1"/>
+          </p:cNvSpPr>
+          <p:nvPr>
+            <p:ph type="body" idx="1"/>
+          </p:nvPr>
+        </p:nvSpPr>
+        <p:spPr/>
+        <p:txBody>
+          <a:bodyPr/>
+          <a:lstStyle/>
+          <a:p>
+            <a:r>
+              <a:rPr lang="en-US"/>
+              <a:t>Slide 13. The conclusion is that the fine-tuned model solves the narrow contract better.</a:t>
+            </a:r>
+          </a:p>
+          <a:p>
+            <a:r>
+              <a:rPr lang="en-US"/>
+              <a:t>It learns to use stable data-eim selectors instead of generated IDs.</a:t>
+            </a:r>
+          </a:p>
+          <a:p>
+            <a:r>
+              <a:rPr lang="en-US"/>
+              <a:t>It learns workflow order, such as opening the workspace before acting inside it.</a:t>
+            </a:r>
+          </a:p>
+          <a:p>
+            <a:r>
+              <a:rPr lang="en-US"/>
+              <a:t>It keeps the response machine-readable by returning JSON only.</a:t>
+            </a:r>
+          </a:p>
+          <a:p>
+            <a:r>
+              <a:rPr lang="en-US"/>
+              <a:t>It remains governed through synthetic data, AzureML lineage, model registration, and endpoint cleanup.</a:t>
+            </a:r>
+          </a:p>
+          <a:p>
+            <a:r>
+              <a:rPr lang="en-US"/>
+              <a:t>The recommended next step is one real Molina workflow, safe examples, agreed graders, and the same baseline to fine-tune to eval loop.</a:t>
+            </a:r>
+          </a:p>
+        </p:txBody>
+      </p:sp>
+      <p:sp>
+        <p:nvSpPr>
+          <p:cNvPr id="4" name="Slide Number Placeholder 3"/>
+          <p:cNvSpPr>
+            <a:spLocks noGrp="1"/>
+          </p:cNvSpPr>
+          <p:nvPr>
+            <p:ph type="sldNum" sz="quarter" idx="5"/>
+          </p:nvPr>
+        </p:nvSpPr>
+        <p:spPr/>
+        <p:txBody>
+          <a:bodyPr/>
+          <a:lstStyle/>
+          <a:p>
+            <a:fld id="{4FA1AD70-E0BA-4B7F-959B-5FDA645614EB}" type="slidenum">
+              <a:rPr lang="en-US" smtClean="0"/>
+              <a:t>13</a:t>
+            </a:fld>
+            <a:endParaRPr lang="en-US"/>
+          </a:p>
+        </p:txBody>
+      </p:sp>
+    </p:spTree>
+    <p:extLst>
+      <p:ext uri="{BB962C8B-B14F-4D97-AF65-F5344CB8AC3E}">
+        <p14:creationId xmlns:p14="http://schemas.microsoft.com/office/powerpoint/2010/main" val="2483798239"/>
       </p:ext>
     </p:extLst>
   </p:cSld>
@@ -1258,7 +1102,31 @@
           <a:p>
             <a:r>
               <a:rPr lang="en-US"/>
-              <a:t>The business problem is not simply that we need a model to answer questions. A browsing agent has to turn a human instruction into a deterministic sequence of actions. It needs to know which workspace to open, which field to type into, which button to press, and which value to extract. If it returns a nice paragraph, that is not useful to an automation layer. The demo focuses on the parts that matter for this ask: a compact DOM, a user instruction, and a strict JSON action plan with stable selectors.</a:t>
+              <a:t>Slide 2. The problem is that browsing agents need repeatable actions, not just good-sounding answers.</a:t>
+            </a:r>
+          </a:p>
+          <a:p>
+            <a:r>
+              <a:rPr lang="en-US"/>
+              <a:t>The user gives a goal, such as opening a prior authorization and submitting it after a policy check.</a:t>
+            </a:r>
+          </a:p>
+          <a:p>
+            <a:r>
+              <a:rPr lang="en-US"/>
+              <a:t>The model sees a compact page state, usually a DOM snippet with both generated IDs and stable attributes.</a:t>
+            </a:r>
+          </a:p>
+          <a:p>
+            <a:r>
+              <a:rPr lang="en-US"/>
+              <a:t>The model must return the action contract: click, type, or extract in strict JSON.</a:t>
+            </a:r>
+          </a:p>
+          <a:p>
+            <a:r>
+              <a:rPr lang="en-US"/>
+              <a:t>This matters because Molina needs repeatable, auditable, low-variance workflow behavior.</a:t>
             </a:r>
           </a:p>
         </p:txBody>
@@ -1278,7 +1146,7 @@
           <a:bodyPr/>
           <a:lstStyle/>
           <a:p>
-            <a:fld id="{F9A074BA-C3FB-406C-A519-80D27E7380F7}" type="slidenum">
+            <a:fld id="{4FA1AD70-E0BA-4B7F-959B-5FDA645614EB}" type="slidenum">
               <a:rPr lang="en-US" smtClean="0"/>
               <a:t>2</a:t>
             </a:fld>
@@ -1289,7 +1157,7 @@
     </p:spTree>
     <p:extLst>
       <p:ext uri="{BB962C8B-B14F-4D97-AF65-F5344CB8AC3E}">
-        <p14:creationId xmlns:p14="http://schemas.microsoft.com/office/powerpoint/2010/main" val="2731313336"/>
+        <p14:creationId xmlns:p14="http://schemas.microsoft.com/office/powerpoint/2010/main" val="4214540846"/>
       </p:ext>
     </p:extLst>
   </p:cSld>
@@ -1345,7 +1213,37 @@
           <a:p>
             <a:r>
               <a:rPr lang="en-US"/>
-              <a:t>This slide is the scoping slide. I would make clear that we are not claiming to have built a universal healthcare assistant. We are testing the behavior Chirag asked about: can a small model be taught to operate in a browser-like workflow with a strict output contract? That is why the demo includes a baseline, synthetic but realistic page states, explicit pass-fail checks, AzureML job lineage, and cost controls.</a:t>
+              <a:t>Slide 3. This demo is scoped narrowly on purpose.</a:t>
+            </a:r>
+          </a:p>
+          <a:p>
+            <a:r>
+              <a:rPr lang="en-US"/>
+              <a:t>We test a workflow contract: DOM plus instruction in, JSON action plan out.</a:t>
+            </a:r>
+          </a:p>
+          <a:p>
+            <a:r>
+              <a:rPr lang="en-US"/>
+              <a:t>We use base Gemma as the small-model baseline to see what it can do before training.</a:t>
+            </a:r>
+          </a:p>
+          <a:p>
+            <a:r>
+              <a:rPr lang="en-US"/>
+              <a:t>We use synthetic healthcare-shaped data so no Molina PHI is involved.</a:t>
+            </a:r>
+          </a:p>
+          <a:p>
+            <a:r>
+              <a:rPr lang="en-US"/>
+              <a:t>We score objective checks: valid JSON, schema, stable selectors, workflow navigation, required actions, and order.</a:t>
+            </a:r>
+          </a:p>
+          <a:p>
+            <a:r>
+              <a:rPr lang="en-US"/>
+              <a:t>The Azure path is AzureML because this Gemma fine-tuning route is not using Foundry serverless fine-tuning.</a:t>
             </a:r>
           </a:p>
         </p:txBody>
@@ -1365,7 +1263,7 @@
           <a:bodyPr/>
           <a:lstStyle/>
           <a:p>
-            <a:fld id="{F9A074BA-C3FB-406C-A519-80D27E7380F7}" type="slidenum">
+            <a:fld id="{4FA1AD70-E0BA-4B7F-959B-5FDA645614EB}" type="slidenum">
               <a:rPr lang="en-US" smtClean="0"/>
               <a:t>3</a:t>
             </a:fld>
@@ -1376,7 +1274,7 @@
     </p:spTree>
     <p:extLst>
       <p:ext uri="{BB962C8B-B14F-4D97-AF65-F5344CB8AC3E}">
-        <p14:creationId xmlns:p14="http://schemas.microsoft.com/office/powerpoint/2010/main" val="1305697150"/>
+        <p14:creationId xmlns:p14="http://schemas.microsoft.com/office/powerpoint/2010/main" val="3945271118"/>
       </p:ext>
     </p:extLst>
   </p:cSld>
@@ -1432,7 +1330,37 @@
           <a:p>
             <a:r>
               <a:rPr lang="en-US"/>
-              <a:t>This is the baseline story. Base Gemma is not useless. It can often return JSON and it understands that the task is about clicking, typing, and extracting. But the failures are exactly the failures that matter for a browsing agent. It uses brittle IDs like member-search-3430, it can skip the workflow navigation step, and it may not preserve the required order. That is why this is a good fine-tuning candidate: the model already has general capability, but it needs to learn a precise behavior contract.</a:t>
+              <a:t>Slide 4. Base Gemma is not bad, but it misses the contract we need.</a:t>
+            </a:r>
+          </a:p>
+          <a:p>
+            <a:r>
+              <a:rPr lang="en-US"/>
+              <a:t>It can often produce valid JSON and understand that the task involves clicking, typing, and extracting.</a:t>
+            </a:r>
+          </a:p>
+          <a:p>
+            <a:r>
+              <a:rPr lang="en-US"/>
+              <a:t>Where it fails is the workflow discipline.</a:t>
+            </a:r>
+          </a:p>
+          <a:p>
+            <a:r>
+              <a:rPr lang="en-US"/>
+              <a:t>It may choose generated IDs like member-search-3430 instead of stable data-eim selectors.</a:t>
+            </a:r>
+          </a:p>
+          <a:p>
+            <a:r>
+              <a:rPr lang="en-US"/>
+              <a:t>It may skip opening the correct workspace or miss the exact order.</a:t>
+            </a:r>
+          </a:p>
+          <a:p>
+            <a:r>
+              <a:rPr lang="en-US"/>
+              <a:t>That is why prompting alone is not the full answer for this demo.</a:t>
             </a:r>
           </a:p>
         </p:txBody>
@@ -1452,7 +1380,7 @@
           <a:bodyPr/>
           <a:lstStyle/>
           <a:p>
-            <a:fld id="{F9A074BA-C3FB-406C-A519-80D27E7380F7}" type="slidenum">
+            <a:fld id="{4FA1AD70-E0BA-4B7F-959B-5FDA645614EB}" type="slidenum">
               <a:rPr lang="en-US" smtClean="0"/>
               <a:t>4</a:t>
             </a:fld>
@@ -1463,7 +1391,7 @@
     </p:spTree>
     <p:extLst>
       <p:ext uri="{BB962C8B-B14F-4D97-AF65-F5344CB8AC3E}">
-        <p14:creationId xmlns:p14="http://schemas.microsoft.com/office/powerpoint/2010/main" val="729837632"/>
+        <p14:creationId xmlns:p14="http://schemas.microsoft.com/office/powerpoint/2010/main" val="2378010703"/>
       </p:ext>
     </p:extLst>
   </p:cSld>
@@ -1519,7 +1447,37 @@
           <a:p>
             <a:r>
               <a:rPr lang="en-US"/>
-              <a:t>I would frame this carefully. A small SLM is attractive because it is cheaper to train, cheaper to deploy, and easier to specialize. The base model already understands the general shape of the problem, which is good. But for browser automation, near-misses still fail. A selector that looks valid but is unstable is not good enough. A response that has the right idea but adds prose is not good enough. The gap is behavior consistency, not raw knowledge.</a:t>
+              <a:t>Slide 5. The small SLM succeeds natively on general understanding.</a:t>
+            </a:r>
+          </a:p>
+          <a:p>
+            <a:r>
+              <a:rPr lang="en-US"/>
+              <a:t>It can parse healthcare-ish instructions and compact HTML or DOM snippets.</a:t>
+            </a:r>
+          </a:p>
+          <a:p>
+            <a:r>
+              <a:rPr lang="en-US"/>
+              <a:t>It usually understands click, type, and extract as action types.</a:t>
+            </a:r>
+          </a:p>
+          <a:p>
+            <a:r>
+              <a:rPr lang="en-US"/>
+              <a:t>But native behavior is still inconsistent for automation.</a:t>
+            </a:r>
+          </a:p>
+          <a:p>
+            <a:r>
+              <a:rPr lang="en-US"/>
+              <a:t>For a browser agent, a near miss still fails if the selector is brittle or the response includes extra prose.</a:t>
+            </a:r>
+          </a:p>
+          <a:p>
+            <a:r>
+              <a:rPr lang="en-US"/>
+              <a:t>So the measured gap is behavior consistency, not raw model knowledge.</a:t>
             </a:r>
           </a:p>
         </p:txBody>
@@ -1539,7 +1497,7 @@
           <a:bodyPr/>
           <a:lstStyle/>
           <a:p>
-            <a:fld id="{F9A074BA-C3FB-406C-A519-80D27E7380F7}" type="slidenum">
+            <a:fld id="{4FA1AD70-E0BA-4B7F-959B-5FDA645614EB}" type="slidenum">
               <a:rPr lang="en-US" smtClean="0"/>
               <a:t>5</a:t>
             </a:fld>
@@ -1550,7 +1508,7 @@
     </p:spTree>
     <p:extLst>
       <p:ext uri="{BB962C8B-B14F-4D97-AF65-F5344CB8AC3E}">
-        <p14:creationId xmlns:p14="http://schemas.microsoft.com/office/powerpoint/2010/main" val="4160985943"/>
+        <p14:creationId xmlns:p14="http://schemas.microsoft.com/office/powerpoint/2010/main" val="923567327"/>
       </p:ext>
     </p:extLst>
   </p:cSld>
@@ -1606,7 +1564,37 @@
           <a:p>
             <a:r>
               <a:rPr lang="en-US"/>
-              <a:t>The important message is that fine-tuning here is behavioral. We are not asking Gemma to memorize Molina policy. We are teaching it how to respond when it sees a page state and an instruction. LoRA is a good fit because the base weights stay frozen and we only train a small adapter. That keeps the experiment cheap, makes it fit on one A100, and gives us a production-friendly pattern where different EIM workflows can eventually have different adapters.</a:t>
+              <a:t>Slide 6. Fine-tuning is the right lever because the gap is behavioral.</a:t>
+            </a:r>
+          </a:p>
+          <a:p>
+            <a:r>
+              <a:rPr lang="en-US"/>
+              <a:t>We are not teaching Molina medical policy to the model.</a:t>
+            </a:r>
+          </a:p>
+          <a:p>
+            <a:r>
+              <a:rPr lang="en-US"/>
+              <a:t>We are teaching the model how to respond when it sees a page state and a user instruction.</a:t>
+            </a:r>
+          </a:p>
+          <a:p>
+            <a:r>
+              <a:rPr lang="en-US"/>
+              <a:t>LoRA keeps the base Gemma model frozen and trains a small adapter on top.</a:t>
+            </a:r>
+          </a:p>
+          <a:p>
+            <a:r>
+              <a:rPr lang="en-US"/>
+              <a:t>That adapter learns stable selectors, workflow ordering, and JSON-only discipline.</a:t>
+            </a:r>
+          </a:p>
+          <a:p>
+            <a:r>
+              <a:rPr lang="en-US"/>
+              <a:t>This keeps the experiment cheaper and makes the behavior swappable by workflow later.</a:t>
             </a:r>
           </a:p>
         </p:txBody>
@@ -1626,7 +1614,7 @@
           <a:bodyPr/>
           <a:lstStyle/>
           <a:p>
-            <a:fld id="{F9A074BA-C3FB-406C-A519-80D27E7380F7}" type="slidenum">
+            <a:fld id="{4FA1AD70-E0BA-4B7F-959B-5FDA645614EB}" type="slidenum">
               <a:rPr lang="en-US" smtClean="0"/>
               <a:t>6</a:t>
             </a:fld>
@@ -1637,7 +1625,7 @@
     </p:spTree>
     <p:extLst>
       <p:ext uri="{BB962C8B-B14F-4D97-AF65-F5344CB8AC3E}">
-        <p14:creationId xmlns:p14="http://schemas.microsoft.com/office/powerpoint/2010/main" val="1824921271"/>
+        <p14:creationId xmlns:p14="http://schemas.microsoft.com/office/powerpoint/2010/main" val="375017913"/>
       </p:ext>
     </p:extLst>
   </p:cSld>
@@ -1693,7 +1681,43 @@
           <a:p>
             <a:r>
               <a:rPr lang="en-US"/>
-              <a:t>This is the build flow I would walk through in the meeting. We start with deterministic synthetic examples. We prepare the training and validation data. The AzureML SDK submits a command job to the A100 cluster. The training script loads Gemma, applies LoRA adapters to attention and MLP projections, and trains with TRL SFTTrainer. The resulting adapter is registered as an AzureML model, deployed to a managed online endpoint, and tested in the Streamlit app. After the demo, the endpoint should be deleted to stop A100 billing.</a:t>
+              <a:t>Slide 7. Here is the end-to-end process flow.</a:t>
+            </a:r>
+          </a:p>
+          <a:p>
+            <a:r>
+              <a:rPr lang="en-US"/>
+              <a:t>First, we generate deterministic synthetic JSONL examples.</a:t>
+            </a:r>
+          </a:p>
+          <a:p>
+            <a:r>
+              <a:rPr lang="en-US"/>
+              <a:t>Second, we prepare or package the data for AzureML.</a:t>
+            </a:r>
+          </a:p>
+          <a:p>
+            <a:r>
+              <a:rPr lang="en-US"/>
+              <a:t>Third, the AzureML SDK submits a command job to the A100 cluster.</a:t>
+            </a:r>
+          </a:p>
+          <a:p>
+            <a:r>
+              <a:rPr lang="en-US"/>
+              <a:t>Fourth, training.py loads Gemma, applies LoRA, and runs supervised fine-tuning.</a:t>
+            </a:r>
+          </a:p>
+          <a:p>
+            <a:r>
+              <a:rPr lang="en-US"/>
+              <a:t>Fifth, the adapter is registered and deployed.</a:t>
+            </a:r>
+          </a:p>
+          <a:p>
+            <a:r>
+              <a:rPr lang="en-US"/>
+              <a:t>Finally, the Streamlit app compares base and tuned behavior on the same prompts.</a:t>
             </a:r>
           </a:p>
         </p:txBody>
@@ -1713,7 +1737,7 @@
           <a:bodyPr/>
           <a:lstStyle/>
           <a:p>
-            <a:fld id="{F9A074BA-C3FB-406C-A519-80D27E7380F7}" type="slidenum">
+            <a:fld id="{4FA1AD70-E0BA-4B7F-959B-5FDA645614EB}" type="slidenum">
               <a:rPr lang="en-US" smtClean="0"/>
               <a:t>7</a:t>
             </a:fld>
@@ -1724,7 +1748,7 @@
     </p:spTree>
     <p:extLst>
       <p:ext uri="{BB962C8B-B14F-4D97-AF65-F5344CB8AC3E}">
-        <p14:creationId xmlns:p14="http://schemas.microsoft.com/office/powerpoint/2010/main" val="2032182355"/>
+        <p14:creationId xmlns:p14="http://schemas.microsoft.com/office/powerpoint/2010/main" val="2507133804"/>
       </p:ext>
     </p:extLst>
   </p:cSld>
@@ -1780,7 +1804,37 @@
           <a:p>
             <a:r>
               <a:rPr lang="en-US"/>
-              <a:t>This is the data discipline slide. The data is intentionally synthetic. We used fake member IDs, fake authorization IDs, fake claims, and deterministic generators. That keeps us out of PHI and lets us focus on the behavior. Each example is a system, user, assistant turn. The user message contains the DOM and instruction. The assistant message is the exact JSON action plan we want the model to learn. The point is not to teach Molina policy; it is to teach the browser-action pattern.</a:t>
+              <a:t>Slide 8. This is the data used for training.</a:t>
+            </a:r>
+          </a:p>
+          <a:p>
+            <a:r>
+              <a:rPr lang="en-US"/>
+              <a:t>The current winner profile uses 96 training records, 24 validation records, and 16 holdout eval prompts.</a:t>
+            </a:r>
+          </a:p>
+          <a:p>
+            <a:r>
+              <a:rPr lang="en-US"/>
+              <a:t>Each record is a messages object: system instruction, user DOM plus instruction, and assistant JSON answer.</a:t>
+            </a:r>
+          </a:p>
+          <a:p>
+            <a:r>
+              <a:rPr lang="en-US"/>
+              <a:t>The values are fake: fake member IDs, fake authorization IDs, and fake claims.</a:t>
+            </a:r>
+          </a:p>
+          <a:p>
+            <a:r>
+              <a:rPr lang="en-US"/>
+              <a:t>The reason for synthetic data is safety and control.</a:t>
+            </a:r>
+          </a:p>
+          <a:p>
+            <a:r>
+              <a:rPr lang="en-US"/>
+              <a:t>We are proving the workflow pattern without exposing Molina production data.</a:t>
             </a:r>
           </a:p>
         </p:txBody>
@@ -1800,7 +1854,7 @@
           <a:bodyPr/>
           <a:lstStyle/>
           <a:p>
-            <a:fld id="{F9A074BA-C3FB-406C-A519-80D27E7380F7}" type="slidenum">
+            <a:fld id="{4FA1AD70-E0BA-4B7F-959B-5FDA645614EB}" type="slidenum">
               <a:rPr lang="en-US" smtClean="0"/>
               <a:t>8</a:t>
             </a:fld>
@@ -1811,7 +1865,7 @@
     </p:spTree>
     <p:extLst>
       <p:ext uri="{BB962C8B-B14F-4D97-AF65-F5344CB8AC3E}">
-        <p14:creationId xmlns:p14="http://schemas.microsoft.com/office/powerpoint/2010/main" val="3218853969"/>
+        <p14:creationId xmlns:p14="http://schemas.microsoft.com/office/powerpoint/2010/main" val="1724934549"/>
       </p:ext>
     </p:extLst>
   </p:cSld>
@@ -1867,7 +1921,37 @@
           <a:p>
             <a:r>
               <a:rPr lang="en-US"/>
-              <a:t>This slide explains the technical path. The reason we use AzureML is practical: Gemma is available as a catalog/base model path, but not as a Foundry serverless fine-tuning base for this demo. AzureML gives us the pieces we need: a governed workspace, data assets, command jobs, A100 managed compute, environments, model registration, and managed online endpoints. The SDK scripts are small control-plane wrappers around those resources.</a:t>
+              <a:t>Slide 9. These are the technical resources behind the demo.</a:t>
+            </a:r>
+          </a:p>
+          <a:p>
+            <a:r>
+              <a:rPr lang="en-US"/>
+              <a:t>Foundry and AzureML catalog assets provide the Gemma base model reference.</a:t>
+            </a:r>
+          </a:p>
+          <a:p>
+            <a:r>
+              <a:rPr lang="en-US"/>
+              <a:t>AzureML provides the workspace, jobs, data assets, model registry, lineage, and managed online endpoint.</a:t>
+            </a:r>
+          </a:p>
+          <a:p>
+            <a:r>
+              <a:rPr lang="en-US"/>
+              <a:t>A100 compute runs the actual training job.</a:t>
+            </a:r>
+          </a:p>
+          <a:p>
+            <a:r>
+              <a:rPr lang="en-US"/>
+              <a:t>Key Vault is the production pattern for gated model tokens and secrets.</a:t>
+            </a:r>
+          </a:p>
+          <a:p>
+            <a:r>
+              <a:rPr lang="en-US"/>
+              <a:t>The SDK scripts are control-plane wrappers: prepare data, submit training, register the adapter, and deploy the endpoint.</a:t>
             </a:r>
           </a:p>
         </p:txBody>
@@ -1887,7 +1971,7 @@
           <a:bodyPr/>
           <a:lstStyle/>
           <a:p>
-            <a:fld id="{F9A074BA-C3FB-406C-A519-80D27E7380F7}" type="slidenum">
+            <a:fld id="{4FA1AD70-E0BA-4B7F-959B-5FDA645614EB}" type="slidenum">
               <a:rPr lang="en-US" smtClean="0"/>
               <a:t>9</a:t>
             </a:fld>
@@ -1898,7 +1982,7 @@
     </p:spTree>
     <p:extLst>
       <p:ext uri="{BB962C8B-B14F-4D97-AF65-F5344CB8AC3E}">
-        <p14:creationId xmlns:p14="http://schemas.microsoft.com/office/powerpoint/2010/main" val="801794854"/>
+        <p14:creationId xmlns:p14="http://schemas.microsoft.com/office/powerpoint/2010/main" val="1513910142"/>
       </p:ext>
     </p:extLst>
   </p:cSld>
@@ -1930,7 +2014,7 @@
           <p:cNvPr id="2" name="Title 1">
             <a:extLst>
               <a:ext uri="{FF2B5EF4-FFF2-40B4-BE49-F238E27FC236}">
-                <a16:creationId xmlns:a16="http://schemas.microsoft.com/office/drawing/2014/main" id="{DC545949-24F5-3C05-0F79-30326A2CD733}"/>
+                <a16:creationId xmlns:a16="http://schemas.microsoft.com/office/drawing/2014/main" id="{321FFD3F-5E79-454F-DB1A-6D0A3E793E0F}"/>
               </a:ext>
             </a:extLst>
           </p:cNvPr>
@@ -1967,7 +2051,7 @@
           <p:cNvPr id="3" name="Subtitle 2">
             <a:extLst>
               <a:ext uri="{FF2B5EF4-FFF2-40B4-BE49-F238E27FC236}">
-                <a16:creationId xmlns:a16="http://schemas.microsoft.com/office/drawing/2014/main" id="{99438848-ECA5-6F7C-D397-3DD21760D6D0}"/>
+                <a16:creationId xmlns:a16="http://schemas.microsoft.com/office/drawing/2014/main" id="{BE09F7E2-9CF9-0595-35EC-6D007F5A987B}"/>
               </a:ext>
             </a:extLst>
           </p:cNvPr>
@@ -2037,7 +2121,7 @@
           <p:cNvPr id="4" name="Date Placeholder 3">
             <a:extLst>
               <a:ext uri="{FF2B5EF4-FFF2-40B4-BE49-F238E27FC236}">
-                <a16:creationId xmlns:a16="http://schemas.microsoft.com/office/drawing/2014/main" id="{5204A763-50C7-FDE9-65A7-DF18B1A5C269}"/>
+                <a16:creationId xmlns:a16="http://schemas.microsoft.com/office/drawing/2014/main" id="{E6C99982-3CCE-67F3-C66E-CC3EE999CBD0}"/>
               </a:ext>
             </a:extLst>
           </p:cNvPr>
@@ -2053,9 +2137,9 @@
           <a:bodyPr/>
           <a:lstStyle/>
           <a:p>
-            <a:fld id="{3E77E078-294F-485B-94A9-936C65A883C8}" type="datetimeFigureOut">
+            <a:fld id="{D2125630-F6C6-4083-9D16-97DD112F45A0}" type="datetimeFigureOut">
               <a:rPr lang="en-US" smtClean="0"/>
-              <a:t>6/2/2026</a:t>
+              <a:t>6/3/2026</a:t>
             </a:fld>
             <a:endParaRPr lang="en-US"/>
           </a:p>
@@ -2066,7 +2150,7 @@
           <p:cNvPr id="5" name="Footer Placeholder 4">
             <a:extLst>
               <a:ext uri="{FF2B5EF4-FFF2-40B4-BE49-F238E27FC236}">
-                <a16:creationId xmlns:a16="http://schemas.microsoft.com/office/drawing/2014/main" id="{F91E7C8C-D33D-DCF7-0957-C959924388BB}"/>
+                <a16:creationId xmlns:a16="http://schemas.microsoft.com/office/drawing/2014/main" id="{3C01D5F1-02E9-4ACD-A23A-232FC153D398}"/>
               </a:ext>
             </a:extLst>
           </p:cNvPr>
@@ -2091,7 +2175,7 @@
           <p:cNvPr id="6" name="Slide Number Placeholder 5">
             <a:extLst>
               <a:ext uri="{FF2B5EF4-FFF2-40B4-BE49-F238E27FC236}">
-                <a16:creationId xmlns:a16="http://schemas.microsoft.com/office/drawing/2014/main" id="{EE6BA6B3-FCC7-62C0-160C-64C9EB1B7FCF}"/>
+                <a16:creationId xmlns:a16="http://schemas.microsoft.com/office/drawing/2014/main" id="{FB42DFBB-0AE6-EA18-8779-A57AD535CC49}"/>
               </a:ext>
             </a:extLst>
           </p:cNvPr>
@@ -2107,7 +2191,7 @@
           <a:bodyPr/>
           <a:lstStyle/>
           <a:p>
-            <a:fld id="{82D166BE-6BB7-4B07-846D-D2E331B7E500}" type="slidenum">
+            <a:fld id="{8BF4A284-2A1D-44F7-B75D-5BB7CC07B10D}" type="slidenum">
               <a:rPr lang="en-US" smtClean="0"/>
               <a:t>‹#›</a:t>
             </a:fld>
@@ -2118,7 +2202,7 @@
     </p:spTree>
     <p:extLst>
       <p:ext uri="{BB962C8B-B14F-4D97-AF65-F5344CB8AC3E}">
-        <p14:creationId xmlns:p14="http://schemas.microsoft.com/office/powerpoint/2010/main" val="4021615177"/>
+        <p14:creationId xmlns:p14="http://schemas.microsoft.com/office/powerpoint/2010/main" val="3317540406"/>
       </p:ext>
     </p:extLst>
   </p:cSld>
@@ -2150,7 +2234,7 @@
           <p:cNvPr id="2" name="Title 1">
             <a:extLst>
               <a:ext uri="{FF2B5EF4-FFF2-40B4-BE49-F238E27FC236}">
-                <a16:creationId xmlns:a16="http://schemas.microsoft.com/office/drawing/2014/main" id="{05A94FA9-8BD6-2093-03D6-BB296B4F0D18}"/>
+                <a16:creationId xmlns:a16="http://schemas.microsoft.com/office/drawing/2014/main" id="{6FBAFE14-7981-8135-3FC1-951270493342}"/>
               </a:ext>
             </a:extLst>
           </p:cNvPr>
@@ -2178,7 +2262,7 @@
           <p:cNvPr id="3" name="Vertical Text Placeholder 2">
             <a:extLst>
               <a:ext uri="{FF2B5EF4-FFF2-40B4-BE49-F238E27FC236}">
-                <a16:creationId xmlns:a16="http://schemas.microsoft.com/office/drawing/2014/main" id="{122C5DD8-E1A7-4ABC-2026-51D9CCC2B419}"/>
+                <a16:creationId xmlns:a16="http://schemas.microsoft.com/office/drawing/2014/main" id="{993EC313-A772-5806-7819-38121BAD4CE5}"/>
               </a:ext>
             </a:extLst>
           </p:cNvPr>
@@ -2235,7 +2319,7 @@
           <p:cNvPr id="4" name="Date Placeholder 3">
             <a:extLst>
               <a:ext uri="{FF2B5EF4-FFF2-40B4-BE49-F238E27FC236}">
-                <a16:creationId xmlns:a16="http://schemas.microsoft.com/office/drawing/2014/main" id="{C93171F0-8D3F-BC65-4F13-41F393B944C5}"/>
+                <a16:creationId xmlns:a16="http://schemas.microsoft.com/office/drawing/2014/main" id="{99059950-6A4E-F614-4DFE-312B19AA4CDA}"/>
               </a:ext>
             </a:extLst>
           </p:cNvPr>
@@ -2251,9 +2335,9 @@
           <a:bodyPr/>
           <a:lstStyle/>
           <a:p>
-            <a:fld id="{3E77E078-294F-485B-94A9-936C65A883C8}" type="datetimeFigureOut">
+            <a:fld id="{D2125630-F6C6-4083-9D16-97DD112F45A0}" type="datetimeFigureOut">
               <a:rPr lang="en-US" smtClean="0"/>
-              <a:t>6/2/2026</a:t>
+              <a:t>6/3/2026</a:t>
             </a:fld>
             <a:endParaRPr lang="en-US"/>
           </a:p>
@@ -2264,7 +2348,7 @@
           <p:cNvPr id="5" name="Footer Placeholder 4">
             <a:extLst>
               <a:ext uri="{FF2B5EF4-FFF2-40B4-BE49-F238E27FC236}">
-                <a16:creationId xmlns:a16="http://schemas.microsoft.com/office/drawing/2014/main" id="{3C5312BD-25BC-BD65-BDB3-D76BBAB6A0BE}"/>
+                <a16:creationId xmlns:a16="http://schemas.microsoft.com/office/drawing/2014/main" id="{03BE0C4F-B232-3E15-1F22-5DD26AD140D1}"/>
               </a:ext>
             </a:extLst>
           </p:cNvPr>
@@ -2289,7 +2373,7 @@
           <p:cNvPr id="6" name="Slide Number Placeholder 5">
             <a:extLst>
               <a:ext uri="{FF2B5EF4-FFF2-40B4-BE49-F238E27FC236}">
-                <a16:creationId xmlns:a16="http://schemas.microsoft.com/office/drawing/2014/main" id="{0D4AB082-3FFB-B02F-261C-99321158EF12}"/>
+                <a16:creationId xmlns:a16="http://schemas.microsoft.com/office/drawing/2014/main" id="{73B67DC5-E9F0-BF13-B7A2-4C71E174D0A8}"/>
               </a:ext>
             </a:extLst>
           </p:cNvPr>
@@ -2305,7 +2389,7 @@
           <a:bodyPr/>
           <a:lstStyle/>
           <a:p>
-            <a:fld id="{82D166BE-6BB7-4B07-846D-D2E331B7E500}" type="slidenum">
+            <a:fld id="{8BF4A284-2A1D-44F7-B75D-5BB7CC07B10D}" type="slidenum">
               <a:rPr lang="en-US" smtClean="0"/>
               <a:t>‹#›</a:t>
             </a:fld>
@@ -2316,7 +2400,7 @@
     </p:spTree>
     <p:extLst>
       <p:ext uri="{BB962C8B-B14F-4D97-AF65-F5344CB8AC3E}">
-        <p14:creationId xmlns:p14="http://schemas.microsoft.com/office/powerpoint/2010/main" val="1493209001"/>
+        <p14:creationId xmlns:p14="http://schemas.microsoft.com/office/powerpoint/2010/main" val="2249078856"/>
       </p:ext>
     </p:extLst>
   </p:cSld>
@@ -2348,7 +2432,7 @@
           <p:cNvPr id="2" name="Vertical Title 1">
             <a:extLst>
               <a:ext uri="{FF2B5EF4-FFF2-40B4-BE49-F238E27FC236}">
-                <a16:creationId xmlns:a16="http://schemas.microsoft.com/office/drawing/2014/main" id="{9AC0D447-C168-62C4-B12A-F81BBF7831F5}"/>
+                <a16:creationId xmlns:a16="http://schemas.microsoft.com/office/drawing/2014/main" id="{174B54EF-D99F-1D97-B518-686611456831}"/>
               </a:ext>
             </a:extLst>
           </p:cNvPr>
@@ -2381,7 +2465,7 @@
           <p:cNvPr id="3" name="Vertical Text Placeholder 2">
             <a:extLst>
               <a:ext uri="{FF2B5EF4-FFF2-40B4-BE49-F238E27FC236}">
-                <a16:creationId xmlns:a16="http://schemas.microsoft.com/office/drawing/2014/main" id="{AD662149-1D97-AA11-2D92-4DB2F28A41D3}"/>
+                <a16:creationId xmlns:a16="http://schemas.microsoft.com/office/drawing/2014/main" id="{A9439269-32CF-21F8-6AB0-EE34E87EF67E}"/>
               </a:ext>
             </a:extLst>
           </p:cNvPr>
@@ -2443,7 +2527,7 @@
           <p:cNvPr id="4" name="Date Placeholder 3">
             <a:extLst>
               <a:ext uri="{FF2B5EF4-FFF2-40B4-BE49-F238E27FC236}">
-                <a16:creationId xmlns:a16="http://schemas.microsoft.com/office/drawing/2014/main" id="{DCB27A46-6168-8031-1D2D-934807C2EC64}"/>
+                <a16:creationId xmlns:a16="http://schemas.microsoft.com/office/drawing/2014/main" id="{4A5BBF5E-CCD5-8BAB-3ED3-4EE52FA1DCB5}"/>
               </a:ext>
             </a:extLst>
           </p:cNvPr>
@@ -2459,9 +2543,9 @@
           <a:bodyPr/>
           <a:lstStyle/>
           <a:p>
-            <a:fld id="{3E77E078-294F-485B-94A9-936C65A883C8}" type="datetimeFigureOut">
+            <a:fld id="{D2125630-F6C6-4083-9D16-97DD112F45A0}" type="datetimeFigureOut">
               <a:rPr lang="en-US" smtClean="0"/>
-              <a:t>6/2/2026</a:t>
+              <a:t>6/3/2026</a:t>
             </a:fld>
             <a:endParaRPr lang="en-US"/>
           </a:p>
@@ -2472,7 +2556,7 @@
           <p:cNvPr id="5" name="Footer Placeholder 4">
             <a:extLst>
               <a:ext uri="{FF2B5EF4-FFF2-40B4-BE49-F238E27FC236}">
-                <a16:creationId xmlns:a16="http://schemas.microsoft.com/office/drawing/2014/main" id="{1C98C727-162C-D524-F99C-774DD07DEF5D}"/>
+                <a16:creationId xmlns:a16="http://schemas.microsoft.com/office/drawing/2014/main" id="{7090F118-3489-5464-4F32-AAB0BF45BE46}"/>
               </a:ext>
             </a:extLst>
           </p:cNvPr>
@@ -2497,7 +2581,7 @@
           <p:cNvPr id="6" name="Slide Number Placeholder 5">
             <a:extLst>
               <a:ext uri="{FF2B5EF4-FFF2-40B4-BE49-F238E27FC236}">
-                <a16:creationId xmlns:a16="http://schemas.microsoft.com/office/drawing/2014/main" id="{4581C03D-6252-980F-8E66-AEB9E4CC1F68}"/>
+                <a16:creationId xmlns:a16="http://schemas.microsoft.com/office/drawing/2014/main" id="{538EC21F-BB80-38F4-56E5-D2668D1ABE64}"/>
               </a:ext>
             </a:extLst>
           </p:cNvPr>
@@ -2513,7 +2597,7 @@
           <a:bodyPr/>
           <a:lstStyle/>
           <a:p>
-            <a:fld id="{82D166BE-6BB7-4B07-846D-D2E331B7E500}" type="slidenum">
+            <a:fld id="{8BF4A284-2A1D-44F7-B75D-5BB7CC07B10D}" type="slidenum">
               <a:rPr lang="en-US" smtClean="0"/>
               <a:t>‹#›</a:t>
             </a:fld>
@@ -2524,7 +2608,7 @@
     </p:spTree>
     <p:extLst>
       <p:ext uri="{BB962C8B-B14F-4D97-AF65-F5344CB8AC3E}">
-        <p14:creationId xmlns:p14="http://schemas.microsoft.com/office/powerpoint/2010/main" val="2758611390"/>
+        <p14:creationId xmlns:p14="http://schemas.microsoft.com/office/powerpoint/2010/main" val="3565161830"/>
       </p:ext>
     </p:extLst>
   </p:cSld>
@@ -2556,7 +2640,7 @@
           <p:cNvPr id="2" name="Title 1">
             <a:extLst>
               <a:ext uri="{FF2B5EF4-FFF2-40B4-BE49-F238E27FC236}">
-                <a16:creationId xmlns:a16="http://schemas.microsoft.com/office/drawing/2014/main" id="{FC3C5103-FF4D-6D69-36D2-433683FC7500}"/>
+                <a16:creationId xmlns:a16="http://schemas.microsoft.com/office/drawing/2014/main" id="{AF9A6508-2D40-88EB-2617-DD32AB83E012}"/>
               </a:ext>
             </a:extLst>
           </p:cNvPr>
@@ -2584,7 +2668,7 @@
           <p:cNvPr id="3" name="Content Placeholder 2">
             <a:extLst>
               <a:ext uri="{FF2B5EF4-FFF2-40B4-BE49-F238E27FC236}">
-                <a16:creationId xmlns:a16="http://schemas.microsoft.com/office/drawing/2014/main" id="{371E5613-56F7-BDA7-8BEB-CFDFECAF6111}"/>
+                <a16:creationId xmlns:a16="http://schemas.microsoft.com/office/drawing/2014/main" id="{A9237C42-F9FC-0A33-9335-D92160873B15}"/>
               </a:ext>
             </a:extLst>
           </p:cNvPr>
@@ -2641,7 +2725,7 @@
           <p:cNvPr id="4" name="Date Placeholder 3">
             <a:extLst>
               <a:ext uri="{FF2B5EF4-FFF2-40B4-BE49-F238E27FC236}">
-                <a16:creationId xmlns:a16="http://schemas.microsoft.com/office/drawing/2014/main" id="{1D8EDC61-9585-EA8D-8616-2CC9795AB3F5}"/>
+                <a16:creationId xmlns:a16="http://schemas.microsoft.com/office/drawing/2014/main" id="{991E2DD2-5058-4E50-82E4-BD63D07BB7C7}"/>
               </a:ext>
             </a:extLst>
           </p:cNvPr>
@@ -2657,9 +2741,9 @@
           <a:bodyPr/>
           <a:lstStyle/>
           <a:p>
-            <a:fld id="{3E77E078-294F-485B-94A9-936C65A883C8}" type="datetimeFigureOut">
+            <a:fld id="{D2125630-F6C6-4083-9D16-97DD112F45A0}" type="datetimeFigureOut">
               <a:rPr lang="en-US" smtClean="0"/>
-              <a:t>6/2/2026</a:t>
+              <a:t>6/3/2026</a:t>
             </a:fld>
             <a:endParaRPr lang="en-US"/>
           </a:p>
@@ -2670,7 +2754,7 @@
           <p:cNvPr id="5" name="Footer Placeholder 4">
             <a:extLst>
               <a:ext uri="{FF2B5EF4-FFF2-40B4-BE49-F238E27FC236}">
-                <a16:creationId xmlns:a16="http://schemas.microsoft.com/office/drawing/2014/main" id="{3872E3BE-FFFD-D1D9-D40A-04C6A46B81C4}"/>
+                <a16:creationId xmlns:a16="http://schemas.microsoft.com/office/drawing/2014/main" id="{90148126-E0C7-1848-87D1-F132E3333DE6}"/>
               </a:ext>
             </a:extLst>
           </p:cNvPr>
@@ -2695,7 +2779,7 @@
           <p:cNvPr id="6" name="Slide Number Placeholder 5">
             <a:extLst>
               <a:ext uri="{FF2B5EF4-FFF2-40B4-BE49-F238E27FC236}">
-                <a16:creationId xmlns:a16="http://schemas.microsoft.com/office/drawing/2014/main" id="{F5E36BB8-4AAF-34D1-9420-5FACA5D26854}"/>
+                <a16:creationId xmlns:a16="http://schemas.microsoft.com/office/drawing/2014/main" id="{62BD1B46-25A8-4762-E7ED-08289665F3E7}"/>
               </a:ext>
             </a:extLst>
           </p:cNvPr>
@@ -2711,7 +2795,7 @@
           <a:bodyPr/>
           <a:lstStyle/>
           <a:p>
-            <a:fld id="{82D166BE-6BB7-4B07-846D-D2E331B7E500}" type="slidenum">
+            <a:fld id="{8BF4A284-2A1D-44F7-B75D-5BB7CC07B10D}" type="slidenum">
               <a:rPr lang="en-US" smtClean="0"/>
               <a:t>‹#›</a:t>
             </a:fld>
@@ -2722,7 +2806,7 @@
     </p:spTree>
     <p:extLst>
       <p:ext uri="{BB962C8B-B14F-4D97-AF65-F5344CB8AC3E}">
-        <p14:creationId xmlns:p14="http://schemas.microsoft.com/office/powerpoint/2010/main" val="1985307326"/>
+        <p14:creationId xmlns:p14="http://schemas.microsoft.com/office/powerpoint/2010/main" val="1752413347"/>
       </p:ext>
     </p:extLst>
   </p:cSld>
@@ -2754,7 +2838,7 @@
           <p:cNvPr id="2" name="Title 1">
             <a:extLst>
               <a:ext uri="{FF2B5EF4-FFF2-40B4-BE49-F238E27FC236}">
-                <a16:creationId xmlns:a16="http://schemas.microsoft.com/office/drawing/2014/main" id="{70AD6702-5252-4910-ADE9-A9F679E09973}"/>
+                <a16:creationId xmlns:a16="http://schemas.microsoft.com/office/drawing/2014/main" id="{8F6C38EB-3EF7-1E37-06B5-1D18E0AE31B6}"/>
               </a:ext>
             </a:extLst>
           </p:cNvPr>
@@ -2791,7 +2875,7 @@
           <p:cNvPr id="3" name="Text Placeholder 2">
             <a:extLst>
               <a:ext uri="{FF2B5EF4-FFF2-40B4-BE49-F238E27FC236}">
-                <a16:creationId xmlns:a16="http://schemas.microsoft.com/office/drawing/2014/main" id="{E3A85F88-74F6-9338-DED7-A75F9A07AB9B}"/>
+                <a16:creationId xmlns:a16="http://schemas.microsoft.com/office/drawing/2014/main" id="{BAAB758F-D57E-8E95-0151-B72CCE402478}"/>
               </a:ext>
             </a:extLst>
           </p:cNvPr>
@@ -2916,7 +3000,7 @@
           <p:cNvPr id="4" name="Date Placeholder 3">
             <a:extLst>
               <a:ext uri="{FF2B5EF4-FFF2-40B4-BE49-F238E27FC236}">
-                <a16:creationId xmlns:a16="http://schemas.microsoft.com/office/drawing/2014/main" id="{ACD4EBAE-4103-4E50-22F6-47FCAD231B14}"/>
+                <a16:creationId xmlns:a16="http://schemas.microsoft.com/office/drawing/2014/main" id="{5DCC4C87-C14A-8291-5A93-79E987644DB0}"/>
               </a:ext>
             </a:extLst>
           </p:cNvPr>
@@ -2932,9 +3016,9 @@
           <a:bodyPr/>
           <a:lstStyle/>
           <a:p>
-            <a:fld id="{3E77E078-294F-485B-94A9-936C65A883C8}" type="datetimeFigureOut">
+            <a:fld id="{D2125630-F6C6-4083-9D16-97DD112F45A0}" type="datetimeFigureOut">
               <a:rPr lang="en-US" smtClean="0"/>
-              <a:t>6/2/2026</a:t>
+              <a:t>6/3/2026</a:t>
             </a:fld>
             <a:endParaRPr lang="en-US"/>
           </a:p>
@@ -2945,7 +3029,7 @@
           <p:cNvPr id="5" name="Footer Placeholder 4">
             <a:extLst>
               <a:ext uri="{FF2B5EF4-FFF2-40B4-BE49-F238E27FC236}">
-                <a16:creationId xmlns:a16="http://schemas.microsoft.com/office/drawing/2014/main" id="{1776CC44-9656-5A3B-0622-78E6E4B58322}"/>
+                <a16:creationId xmlns:a16="http://schemas.microsoft.com/office/drawing/2014/main" id="{D9B07AA8-FDD3-B606-169A-A139C126542F}"/>
               </a:ext>
             </a:extLst>
           </p:cNvPr>
@@ -2970,7 +3054,7 @@
           <p:cNvPr id="6" name="Slide Number Placeholder 5">
             <a:extLst>
               <a:ext uri="{FF2B5EF4-FFF2-40B4-BE49-F238E27FC236}">
-                <a16:creationId xmlns:a16="http://schemas.microsoft.com/office/drawing/2014/main" id="{D8809013-C73A-2AF4-F156-B34B64FD4A85}"/>
+                <a16:creationId xmlns:a16="http://schemas.microsoft.com/office/drawing/2014/main" id="{26FDDDF8-1BC4-4E5F-5F96-E556F2A78025}"/>
               </a:ext>
             </a:extLst>
           </p:cNvPr>
@@ -2986,7 +3070,7 @@
           <a:bodyPr/>
           <a:lstStyle/>
           <a:p>
-            <a:fld id="{82D166BE-6BB7-4B07-846D-D2E331B7E500}" type="slidenum">
+            <a:fld id="{8BF4A284-2A1D-44F7-B75D-5BB7CC07B10D}" type="slidenum">
               <a:rPr lang="en-US" smtClean="0"/>
               <a:t>‹#›</a:t>
             </a:fld>
@@ -2997,7 +3081,7 @@
     </p:spTree>
     <p:extLst>
       <p:ext uri="{BB962C8B-B14F-4D97-AF65-F5344CB8AC3E}">
-        <p14:creationId xmlns:p14="http://schemas.microsoft.com/office/powerpoint/2010/main" val="2616397731"/>
+        <p14:creationId xmlns:p14="http://schemas.microsoft.com/office/powerpoint/2010/main" val="2246517225"/>
       </p:ext>
     </p:extLst>
   </p:cSld>
@@ -3029,7 +3113,7 @@
           <p:cNvPr id="2" name="Title 1">
             <a:extLst>
               <a:ext uri="{FF2B5EF4-FFF2-40B4-BE49-F238E27FC236}">
-                <a16:creationId xmlns:a16="http://schemas.microsoft.com/office/drawing/2014/main" id="{05FD86B2-CB5B-53E8-3A1D-774B47DF4130}"/>
+                <a16:creationId xmlns:a16="http://schemas.microsoft.com/office/drawing/2014/main" id="{281D4F47-DADA-6C87-1B77-B585400F62F0}"/>
               </a:ext>
             </a:extLst>
           </p:cNvPr>
@@ -3057,7 +3141,7 @@
           <p:cNvPr id="3" name="Content Placeholder 2">
             <a:extLst>
               <a:ext uri="{FF2B5EF4-FFF2-40B4-BE49-F238E27FC236}">
-                <a16:creationId xmlns:a16="http://schemas.microsoft.com/office/drawing/2014/main" id="{1C0377D7-5695-59A5-8E61-BAA4A0275CE3}"/>
+                <a16:creationId xmlns:a16="http://schemas.microsoft.com/office/drawing/2014/main" id="{A8F78014-D245-F52C-F8EF-7EFD91E2EF0B}"/>
               </a:ext>
             </a:extLst>
           </p:cNvPr>
@@ -3119,7 +3203,7 @@
           <p:cNvPr id="4" name="Content Placeholder 3">
             <a:extLst>
               <a:ext uri="{FF2B5EF4-FFF2-40B4-BE49-F238E27FC236}">
-                <a16:creationId xmlns:a16="http://schemas.microsoft.com/office/drawing/2014/main" id="{3C115C3F-C41D-B4BC-5736-C62A355EBBE4}"/>
+                <a16:creationId xmlns:a16="http://schemas.microsoft.com/office/drawing/2014/main" id="{4FF98012-EA47-F360-A293-DEB42FF00D77}"/>
               </a:ext>
             </a:extLst>
           </p:cNvPr>
@@ -3181,7 +3265,7 @@
           <p:cNvPr id="5" name="Date Placeholder 4">
             <a:extLst>
               <a:ext uri="{FF2B5EF4-FFF2-40B4-BE49-F238E27FC236}">
-                <a16:creationId xmlns:a16="http://schemas.microsoft.com/office/drawing/2014/main" id="{D811E9D8-2610-7637-4AAF-892A557E00B1}"/>
+                <a16:creationId xmlns:a16="http://schemas.microsoft.com/office/drawing/2014/main" id="{B626CCB1-53D7-8819-854F-75432B9849DB}"/>
               </a:ext>
             </a:extLst>
           </p:cNvPr>
@@ -3197,9 +3281,9 @@
           <a:bodyPr/>
           <a:lstStyle/>
           <a:p>
-            <a:fld id="{3E77E078-294F-485B-94A9-936C65A883C8}" type="datetimeFigureOut">
+            <a:fld id="{D2125630-F6C6-4083-9D16-97DD112F45A0}" type="datetimeFigureOut">
               <a:rPr lang="en-US" smtClean="0"/>
-              <a:t>6/2/2026</a:t>
+              <a:t>6/3/2026</a:t>
             </a:fld>
             <a:endParaRPr lang="en-US"/>
           </a:p>
@@ -3210,7 +3294,7 @@
           <p:cNvPr id="6" name="Footer Placeholder 5">
             <a:extLst>
               <a:ext uri="{FF2B5EF4-FFF2-40B4-BE49-F238E27FC236}">
-                <a16:creationId xmlns:a16="http://schemas.microsoft.com/office/drawing/2014/main" id="{A9122620-DA05-9A19-DE84-ECB1945AD834}"/>
+                <a16:creationId xmlns:a16="http://schemas.microsoft.com/office/drawing/2014/main" id="{10B72DC8-7115-AF5B-695A-877B54912355}"/>
               </a:ext>
             </a:extLst>
           </p:cNvPr>
@@ -3235,7 +3319,7 @@
           <p:cNvPr id="7" name="Slide Number Placeholder 6">
             <a:extLst>
               <a:ext uri="{FF2B5EF4-FFF2-40B4-BE49-F238E27FC236}">
-                <a16:creationId xmlns:a16="http://schemas.microsoft.com/office/drawing/2014/main" id="{FC883901-E9F9-9F9A-92B4-1D30B8FDAAFF}"/>
+                <a16:creationId xmlns:a16="http://schemas.microsoft.com/office/drawing/2014/main" id="{F0D911D2-D70C-180F-1AC2-DD0201183E00}"/>
               </a:ext>
             </a:extLst>
           </p:cNvPr>
@@ -3251,7 +3335,7 @@
           <a:bodyPr/>
           <a:lstStyle/>
           <a:p>
-            <a:fld id="{82D166BE-6BB7-4B07-846D-D2E331B7E500}" type="slidenum">
+            <a:fld id="{8BF4A284-2A1D-44F7-B75D-5BB7CC07B10D}" type="slidenum">
               <a:rPr lang="en-US" smtClean="0"/>
               <a:t>‹#›</a:t>
             </a:fld>
@@ -3262,7 +3346,7 @@
     </p:spTree>
     <p:extLst>
       <p:ext uri="{BB962C8B-B14F-4D97-AF65-F5344CB8AC3E}">
-        <p14:creationId xmlns:p14="http://schemas.microsoft.com/office/powerpoint/2010/main" val="2803439490"/>
+        <p14:creationId xmlns:p14="http://schemas.microsoft.com/office/powerpoint/2010/main" val="514635751"/>
       </p:ext>
     </p:extLst>
   </p:cSld>
@@ -3294,7 +3378,7 @@
           <p:cNvPr id="2" name="Title 1">
             <a:extLst>
               <a:ext uri="{FF2B5EF4-FFF2-40B4-BE49-F238E27FC236}">
-                <a16:creationId xmlns:a16="http://schemas.microsoft.com/office/drawing/2014/main" id="{7E1AB79B-7194-D146-9F02-22BC56C630EF}"/>
+                <a16:creationId xmlns:a16="http://schemas.microsoft.com/office/drawing/2014/main" id="{229D102A-5F42-FF0B-818F-EF048EEE8BDB}"/>
               </a:ext>
             </a:extLst>
           </p:cNvPr>
@@ -3327,7 +3411,7 @@
           <p:cNvPr id="3" name="Text Placeholder 2">
             <a:extLst>
               <a:ext uri="{FF2B5EF4-FFF2-40B4-BE49-F238E27FC236}">
-                <a16:creationId xmlns:a16="http://schemas.microsoft.com/office/drawing/2014/main" id="{4CA6B6E4-68F7-BBC2-AE89-8B37939503F6}"/>
+                <a16:creationId xmlns:a16="http://schemas.microsoft.com/office/drawing/2014/main" id="{F339D7D4-A287-895F-8413-41196E653C3C}"/>
               </a:ext>
             </a:extLst>
           </p:cNvPr>
@@ -3398,7 +3482,7 @@
           <p:cNvPr id="4" name="Content Placeholder 3">
             <a:extLst>
               <a:ext uri="{FF2B5EF4-FFF2-40B4-BE49-F238E27FC236}">
-                <a16:creationId xmlns:a16="http://schemas.microsoft.com/office/drawing/2014/main" id="{98201553-E874-821C-4254-C8E733733CDD}"/>
+                <a16:creationId xmlns:a16="http://schemas.microsoft.com/office/drawing/2014/main" id="{4FFFABF3-EB3B-FCED-0F4D-41F0D1A49B54}"/>
               </a:ext>
             </a:extLst>
           </p:cNvPr>
@@ -3460,7 +3544,7 @@
           <p:cNvPr id="5" name="Text Placeholder 4">
             <a:extLst>
               <a:ext uri="{FF2B5EF4-FFF2-40B4-BE49-F238E27FC236}">
-                <a16:creationId xmlns:a16="http://schemas.microsoft.com/office/drawing/2014/main" id="{9AD304BE-DD9D-C301-7FE4-D0C7FAA8EEF4}"/>
+                <a16:creationId xmlns:a16="http://schemas.microsoft.com/office/drawing/2014/main" id="{FD5D665D-18B7-5DB4-7526-9FAF12CBDCA6}"/>
               </a:ext>
             </a:extLst>
           </p:cNvPr>
@@ -3531,7 +3615,7 @@
           <p:cNvPr id="6" name="Content Placeholder 5">
             <a:extLst>
               <a:ext uri="{FF2B5EF4-FFF2-40B4-BE49-F238E27FC236}">
-                <a16:creationId xmlns:a16="http://schemas.microsoft.com/office/drawing/2014/main" id="{9E714920-5433-BB7D-4976-BF59B6CB932F}"/>
+                <a16:creationId xmlns:a16="http://schemas.microsoft.com/office/drawing/2014/main" id="{887C4E7F-BDC4-A57D-9B59-63A594C66883}"/>
               </a:ext>
             </a:extLst>
           </p:cNvPr>
@@ -3593,7 +3677,7 @@
           <p:cNvPr id="7" name="Date Placeholder 6">
             <a:extLst>
               <a:ext uri="{FF2B5EF4-FFF2-40B4-BE49-F238E27FC236}">
-                <a16:creationId xmlns:a16="http://schemas.microsoft.com/office/drawing/2014/main" id="{9DA65869-065B-FB86-5600-2A17A9B3EC04}"/>
+                <a16:creationId xmlns:a16="http://schemas.microsoft.com/office/drawing/2014/main" id="{AE91925F-1486-A7A1-383E-BCDD60FE1ECA}"/>
               </a:ext>
             </a:extLst>
           </p:cNvPr>
@@ -3609,9 +3693,9 @@
           <a:bodyPr/>
           <a:lstStyle/>
           <a:p>
-            <a:fld id="{3E77E078-294F-485B-94A9-936C65A883C8}" type="datetimeFigureOut">
+            <a:fld id="{D2125630-F6C6-4083-9D16-97DD112F45A0}" type="datetimeFigureOut">
               <a:rPr lang="en-US" smtClean="0"/>
-              <a:t>6/2/2026</a:t>
+              <a:t>6/3/2026</a:t>
             </a:fld>
             <a:endParaRPr lang="en-US"/>
           </a:p>
@@ -3622,7 +3706,7 @@
           <p:cNvPr id="8" name="Footer Placeholder 7">
             <a:extLst>
               <a:ext uri="{FF2B5EF4-FFF2-40B4-BE49-F238E27FC236}">
-                <a16:creationId xmlns:a16="http://schemas.microsoft.com/office/drawing/2014/main" id="{9755ECF0-47E5-88C4-0CC7-1B9A09960F3E}"/>
+                <a16:creationId xmlns:a16="http://schemas.microsoft.com/office/drawing/2014/main" id="{46C02307-5727-AF31-0770-BAB1C6676F99}"/>
               </a:ext>
             </a:extLst>
           </p:cNvPr>
@@ -3647,7 +3731,7 @@
           <p:cNvPr id="9" name="Slide Number Placeholder 8">
             <a:extLst>
               <a:ext uri="{FF2B5EF4-FFF2-40B4-BE49-F238E27FC236}">
-                <a16:creationId xmlns:a16="http://schemas.microsoft.com/office/drawing/2014/main" id="{CBF04687-2A99-74C1-4CBB-584666F7A740}"/>
+                <a16:creationId xmlns:a16="http://schemas.microsoft.com/office/drawing/2014/main" id="{DE18040C-56F4-A900-164A-F2C62C215DB7}"/>
               </a:ext>
             </a:extLst>
           </p:cNvPr>
@@ -3663,7 +3747,7 @@
           <a:bodyPr/>
           <a:lstStyle/>
           <a:p>
-            <a:fld id="{82D166BE-6BB7-4B07-846D-D2E331B7E500}" type="slidenum">
+            <a:fld id="{8BF4A284-2A1D-44F7-B75D-5BB7CC07B10D}" type="slidenum">
               <a:rPr lang="en-US" smtClean="0"/>
               <a:t>‹#›</a:t>
             </a:fld>
@@ -3674,7 +3758,7 @@
     </p:spTree>
     <p:extLst>
       <p:ext uri="{BB962C8B-B14F-4D97-AF65-F5344CB8AC3E}">
-        <p14:creationId xmlns:p14="http://schemas.microsoft.com/office/powerpoint/2010/main" val="2912954456"/>
+        <p14:creationId xmlns:p14="http://schemas.microsoft.com/office/powerpoint/2010/main" val="1738275354"/>
       </p:ext>
     </p:extLst>
   </p:cSld>
@@ -3706,7 +3790,7 @@
           <p:cNvPr id="2" name="Title 1">
             <a:extLst>
               <a:ext uri="{FF2B5EF4-FFF2-40B4-BE49-F238E27FC236}">
-                <a16:creationId xmlns:a16="http://schemas.microsoft.com/office/drawing/2014/main" id="{BD4A7FBF-DFED-DBB6-DD78-D80736ADF430}"/>
+                <a16:creationId xmlns:a16="http://schemas.microsoft.com/office/drawing/2014/main" id="{88F06CE0-21FE-6DDE-C7E7-004127EDE2F9}"/>
               </a:ext>
             </a:extLst>
           </p:cNvPr>
@@ -3734,7 +3818,7 @@
           <p:cNvPr id="3" name="Date Placeholder 2">
             <a:extLst>
               <a:ext uri="{FF2B5EF4-FFF2-40B4-BE49-F238E27FC236}">
-                <a16:creationId xmlns:a16="http://schemas.microsoft.com/office/drawing/2014/main" id="{19011A5F-BD3A-6B72-C6BC-9A28331487C7}"/>
+                <a16:creationId xmlns:a16="http://schemas.microsoft.com/office/drawing/2014/main" id="{90EE9C7D-5079-0F57-313B-00E506BB9C7F}"/>
               </a:ext>
             </a:extLst>
           </p:cNvPr>
@@ -3750,9 +3834,9 @@
           <a:bodyPr/>
           <a:lstStyle/>
           <a:p>
-            <a:fld id="{3E77E078-294F-485B-94A9-936C65A883C8}" type="datetimeFigureOut">
+            <a:fld id="{D2125630-F6C6-4083-9D16-97DD112F45A0}" type="datetimeFigureOut">
               <a:rPr lang="en-US" smtClean="0"/>
-              <a:t>6/2/2026</a:t>
+              <a:t>6/3/2026</a:t>
             </a:fld>
             <a:endParaRPr lang="en-US"/>
           </a:p>
@@ -3763,7 +3847,7 @@
           <p:cNvPr id="4" name="Footer Placeholder 3">
             <a:extLst>
               <a:ext uri="{FF2B5EF4-FFF2-40B4-BE49-F238E27FC236}">
-                <a16:creationId xmlns:a16="http://schemas.microsoft.com/office/drawing/2014/main" id="{7367676F-C991-6CE4-BEE6-66909D9BA493}"/>
+                <a16:creationId xmlns:a16="http://schemas.microsoft.com/office/drawing/2014/main" id="{14EF769F-B34E-6A76-1560-1C4E8F281724}"/>
               </a:ext>
             </a:extLst>
           </p:cNvPr>
@@ -3788,7 +3872,7 @@
           <p:cNvPr id="5" name="Slide Number Placeholder 4">
             <a:extLst>
               <a:ext uri="{FF2B5EF4-FFF2-40B4-BE49-F238E27FC236}">
-                <a16:creationId xmlns:a16="http://schemas.microsoft.com/office/drawing/2014/main" id="{81B811D1-81E2-B7FC-60BE-F99F0C9B47A6}"/>
+                <a16:creationId xmlns:a16="http://schemas.microsoft.com/office/drawing/2014/main" id="{9BD01CC9-F92D-99C8-6428-0CA80146ACF1}"/>
               </a:ext>
             </a:extLst>
           </p:cNvPr>
@@ -3804,7 +3888,7 @@
           <a:bodyPr/>
           <a:lstStyle/>
           <a:p>
-            <a:fld id="{82D166BE-6BB7-4B07-846D-D2E331B7E500}" type="slidenum">
+            <a:fld id="{8BF4A284-2A1D-44F7-B75D-5BB7CC07B10D}" type="slidenum">
               <a:rPr lang="en-US" smtClean="0"/>
               <a:t>‹#›</a:t>
             </a:fld>
@@ -3815,7 +3899,7 @@
     </p:spTree>
     <p:extLst>
       <p:ext uri="{BB962C8B-B14F-4D97-AF65-F5344CB8AC3E}">
-        <p14:creationId xmlns:p14="http://schemas.microsoft.com/office/powerpoint/2010/main" val="3797247223"/>
+        <p14:creationId xmlns:p14="http://schemas.microsoft.com/office/powerpoint/2010/main" val="4121503007"/>
       </p:ext>
     </p:extLst>
   </p:cSld>
@@ -3847,7 +3931,7 @@
           <p:cNvPr id="2" name="Date Placeholder 1">
             <a:extLst>
               <a:ext uri="{FF2B5EF4-FFF2-40B4-BE49-F238E27FC236}">
-                <a16:creationId xmlns:a16="http://schemas.microsoft.com/office/drawing/2014/main" id="{FCCEB4E0-A31A-DFFB-B07C-F37F2EAF152F}"/>
+                <a16:creationId xmlns:a16="http://schemas.microsoft.com/office/drawing/2014/main" id="{89D042EE-337B-DD17-9B4E-6F1CB495E8CD}"/>
               </a:ext>
             </a:extLst>
           </p:cNvPr>
@@ -3863,9 +3947,9 @@
           <a:bodyPr/>
           <a:lstStyle/>
           <a:p>
-            <a:fld id="{3E77E078-294F-485B-94A9-936C65A883C8}" type="datetimeFigureOut">
+            <a:fld id="{D2125630-F6C6-4083-9D16-97DD112F45A0}" type="datetimeFigureOut">
               <a:rPr lang="en-US" smtClean="0"/>
-              <a:t>6/2/2026</a:t>
+              <a:t>6/3/2026</a:t>
             </a:fld>
             <a:endParaRPr lang="en-US"/>
           </a:p>
@@ -3876,7 +3960,7 @@
           <p:cNvPr id="3" name="Footer Placeholder 2">
             <a:extLst>
               <a:ext uri="{FF2B5EF4-FFF2-40B4-BE49-F238E27FC236}">
-                <a16:creationId xmlns:a16="http://schemas.microsoft.com/office/drawing/2014/main" id="{362A539C-575A-4031-C70B-C4D1B52A4795}"/>
+                <a16:creationId xmlns:a16="http://schemas.microsoft.com/office/drawing/2014/main" id="{64824DD6-7A6A-C3AC-5128-BE3AAFDC4701}"/>
               </a:ext>
             </a:extLst>
           </p:cNvPr>
@@ -3901,7 +3985,7 @@
           <p:cNvPr id="4" name="Slide Number Placeholder 3">
             <a:extLst>
               <a:ext uri="{FF2B5EF4-FFF2-40B4-BE49-F238E27FC236}">
-                <a16:creationId xmlns:a16="http://schemas.microsoft.com/office/drawing/2014/main" id="{74152B20-8FD1-C901-5D95-EC2173E0AADF}"/>
+                <a16:creationId xmlns:a16="http://schemas.microsoft.com/office/drawing/2014/main" id="{CBB5060E-E487-B516-C590-16EC54CA02D7}"/>
               </a:ext>
             </a:extLst>
           </p:cNvPr>
@@ -3917,7 +4001,7 @@
           <a:bodyPr/>
           <a:lstStyle/>
           <a:p>
-            <a:fld id="{82D166BE-6BB7-4B07-846D-D2E331B7E500}" type="slidenum">
+            <a:fld id="{8BF4A284-2A1D-44F7-B75D-5BB7CC07B10D}" type="slidenum">
               <a:rPr lang="en-US" smtClean="0"/>
               <a:t>‹#›</a:t>
             </a:fld>
@@ -3928,7 +4012,7 @@
     </p:spTree>
     <p:extLst>
       <p:ext uri="{BB962C8B-B14F-4D97-AF65-F5344CB8AC3E}">
-        <p14:creationId xmlns:p14="http://schemas.microsoft.com/office/powerpoint/2010/main" val="2073634089"/>
+        <p14:creationId xmlns:p14="http://schemas.microsoft.com/office/powerpoint/2010/main" val="1752976830"/>
       </p:ext>
     </p:extLst>
   </p:cSld>
@@ -3960,7 +4044,7 @@
           <p:cNvPr id="2" name="Title 1">
             <a:extLst>
               <a:ext uri="{FF2B5EF4-FFF2-40B4-BE49-F238E27FC236}">
-                <a16:creationId xmlns:a16="http://schemas.microsoft.com/office/drawing/2014/main" id="{2DB81DF6-BEAF-FDF3-74BF-BC1D6B558586}"/>
+                <a16:creationId xmlns:a16="http://schemas.microsoft.com/office/drawing/2014/main" id="{8440F42F-558A-E353-75AF-4AD543EB6978}"/>
               </a:ext>
             </a:extLst>
           </p:cNvPr>
@@ -3997,7 +4081,7 @@
           <p:cNvPr id="3" name="Content Placeholder 2">
             <a:extLst>
               <a:ext uri="{FF2B5EF4-FFF2-40B4-BE49-F238E27FC236}">
-                <a16:creationId xmlns:a16="http://schemas.microsoft.com/office/drawing/2014/main" id="{CFAC8EB9-2F7D-D070-0879-D2B2F6EACD74}"/>
+                <a16:creationId xmlns:a16="http://schemas.microsoft.com/office/drawing/2014/main" id="{941163F6-8A70-6EEE-98EC-165133E26FE2}"/>
               </a:ext>
             </a:extLst>
           </p:cNvPr>
@@ -4087,7 +4171,7 @@
           <p:cNvPr id="4" name="Text Placeholder 3">
             <a:extLst>
               <a:ext uri="{FF2B5EF4-FFF2-40B4-BE49-F238E27FC236}">
-                <a16:creationId xmlns:a16="http://schemas.microsoft.com/office/drawing/2014/main" id="{042873A9-E1BB-7E07-5D2B-A6F941872CE7}"/>
+                <a16:creationId xmlns:a16="http://schemas.microsoft.com/office/drawing/2014/main" id="{DF04C4BD-0D94-3264-9D61-68559D5D0E6D}"/>
               </a:ext>
             </a:extLst>
           </p:cNvPr>
@@ -4158,7 +4242,7 @@
           <p:cNvPr id="5" name="Date Placeholder 4">
             <a:extLst>
               <a:ext uri="{FF2B5EF4-FFF2-40B4-BE49-F238E27FC236}">
-                <a16:creationId xmlns:a16="http://schemas.microsoft.com/office/drawing/2014/main" id="{5FD910FC-7B68-C6D5-778E-EB278C89C503}"/>
+                <a16:creationId xmlns:a16="http://schemas.microsoft.com/office/drawing/2014/main" id="{1771D3BF-FD51-DFD2-184C-6980914DEFFA}"/>
               </a:ext>
             </a:extLst>
           </p:cNvPr>
@@ -4174,9 +4258,9 @@
           <a:bodyPr/>
           <a:lstStyle/>
           <a:p>
-            <a:fld id="{3E77E078-294F-485B-94A9-936C65A883C8}" type="datetimeFigureOut">
+            <a:fld id="{D2125630-F6C6-4083-9D16-97DD112F45A0}" type="datetimeFigureOut">
               <a:rPr lang="en-US" smtClean="0"/>
-              <a:t>6/2/2026</a:t>
+              <a:t>6/3/2026</a:t>
             </a:fld>
             <a:endParaRPr lang="en-US"/>
           </a:p>
@@ -4187,7 +4271,7 @@
           <p:cNvPr id="6" name="Footer Placeholder 5">
             <a:extLst>
               <a:ext uri="{FF2B5EF4-FFF2-40B4-BE49-F238E27FC236}">
-                <a16:creationId xmlns:a16="http://schemas.microsoft.com/office/drawing/2014/main" id="{F96BA178-2517-6404-4DE1-FC48CC7293BD}"/>
+                <a16:creationId xmlns:a16="http://schemas.microsoft.com/office/drawing/2014/main" id="{2C6CBC03-DC76-35A0-A27E-42914F67EFC7}"/>
               </a:ext>
             </a:extLst>
           </p:cNvPr>
@@ -4212,7 +4296,7 @@
           <p:cNvPr id="7" name="Slide Number Placeholder 6">
             <a:extLst>
               <a:ext uri="{FF2B5EF4-FFF2-40B4-BE49-F238E27FC236}">
-                <a16:creationId xmlns:a16="http://schemas.microsoft.com/office/drawing/2014/main" id="{17D2CF15-37E0-2BAD-B33C-3E196292821B}"/>
+                <a16:creationId xmlns:a16="http://schemas.microsoft.com/office/drawing/2014/main" id="{CF9904E7-0969-0972-725F-3B9B197AF461}"/>
               </a:ext>
             </a:extLst>
           </p:cNvPr>
@@ -4228,7 +4312,7 @@
           <a:bodyPr/>
           <a:lstStyle/>
           <a:p>
-            <a:fld id="{82D166BE-6BB7-4B07-846D-D2E331B7E500}" type="slidenum">
+            <a:fld id="{8BF4A284-2A1D-44F7-B75D-5BB7CC07B10D}" type="slidenum">
               <a:rPr lang="en-US" smtClean="0"/>
               <a:t>‹#›</a:t>
             </a:fld>
@@ -4239,7 +4323,7 @@
     </p:spTree>
     <p:extLst>
       <p:ext uri="{BB962C8B-B14F-4D97-AF65-F5344CB8AC3E}">
-        <p14:creationId xmlns:p14="http://schemas.microsoft.com/office/powerpoint/2010/main" val="1103334323"/>
+        <p14:creationId xmlns:p14="http://schemas.microsoft.com/office/powerpoint/2010/main" val="3612223977"/>
       </p:ext>
     </p:extLst>
   </p:cSld>
@@ -4271,7 +4355,7 @@
           <p:cNvPr id="2" name="Title 1">
             <a:extLst>
               <a:ext uri="{FF2B5EF4-FFF2-40B4-BE49-F238E27FC236}">
-                <a16:creationId xmlns:a16="http://schemas.microsoft.com/office/drawing/2014/main" id="{554A1B26-762E-3D28-A7C7-1C0E075AA18E}"/>
+                <a16:creationId xmlns:a16="http://schemas.microsoft.com/office/drawing/2014/main" id="{E8F7C1DC-B29C-7E34-F09B-AD4C598E21E5}"/>
               </a:ext>
             </a:extLst>
           </p:cNvPr>
@@ -4308,7 +4392,7 @@
           <p:cNvPr id="3" name="Picture Placeholder 2">
             <a:extLst>
               <a:ext uri="{FF2B5EF4-FFF2-40B4-BE49-F238E27FC236}">
-                <a16:creationId xmlns:a16="http://schemas.microsoft.com/office/drawing/2014/main" id="{EF6EFB73-E6CF-B93C-7E16-4BC897134A65}"/>
+                <a16:creationId xmlns:a16="http://schemas.microsoft.com/office/drawing/2014/main" id="{237CB4F1-6CE6-F35A-DB2D-014EC24CCDE1}"/>
               </a:ext>
             </a:extLst>
           </p:cNvPr>
@@ -4375,7 +4459,7 @@
           <p:cNvPr id="4" name="Text Placeholder 3">
             <a:extLst>
               <a:ext uri="{FF2B5EF4-FFF2-40B4-BE49-F238E27FC236}">
-                <a16:creationId xmlns:a16="http://schemas.microsoft.com/office/drawing/2014/main" id="{749DA967-2B03-B14C-F0A2-902A735D3A7B}"/>
+                <a16:creationId xmlns:a16="http://schemas.microsoft.com/office/drawing/2014/main" id="{A8260255-6678-2DBD-07F8-E3DBC0EA67FA}"/>
               </a:ext>
             </a:extLst>
           </p:cNvPr>
@@ -4446,7 +4530,7 @@
           <p:cNvPr id="5" name="Date Placeholder 4">
             <a:extLst>
               <a:ext uri="{FF2B5EF4-FFF2-40B4-BE49-F238E27FC236}">
-                <a16:creationId xmlns:a16="http://schemas.microsoft.com/office/drawing/2014/main" id="{0994B706-28EA-97D1-FF52-F96D9C1A2D5E}"/>
+                <a16:creationId xmlns:a16="http://schemas.microsoft.com/office/drawing/2014/main" id="{FAEBE4B4-FAFE-6469-30B7-58D4229522F0}"/>
               </a:ext>
             </a:extLst>
           </p:cNvPr>
@@ -4462,9 +4546,9 @@
           <a:bodyPr/>
           <a:lstStyle/>
           <a:p>
-            <a:fld id="{3E77E078-294F-485B-94A9-936C65A883C8}" type="datetimeFigureOut">
+            <a:fld id="{D2125630-F6C6-4083-9D16-97DD112F45A0}" type="datetimeFigureOut">
               <a:rPr lang="en-US" smtClean="0"/>
-              <a:t>6/2/2026</a:t>
+              <a:t>6/3/2026</a:t>
             </a:fld>
             <a:endParaRPr lang="en-US"/>
           </a:p>
@@ -4475,7 +4559,7 @@
           <p:cNvPr id="6" name="Footer Placeholder 5">
             <a:extLst>
               <a:ext uri="{FF2B5EF4-FFF2-40B4-BE49-F238E27FC236}">
-                <a16:creationId xmlns:a16="http://schemas.microsoft.com/office/drawing/2014/main" id="{4AC46714-7ACF-4C58-3A1F-1C2C531EF670}"/>
+                <a16:creationId xmlns:a16="http://schemas.microsoft.com/office/drawing/2014/main" id="{2AE3D418-C03B-A723-3363-F772060F1B5D}"/>
               </a:ext>
             </a:extLst>
           </p:cNvPr>
@@ -4500,7 +4584,7 @@
           <p:cNvPr id="7" name="Slide Number Placeholder 6">
             <a:extLst>
               <a:ext uri="{FF2B5EF4-FFF2-40B4-BE49-F238E27FC236}">
-                <a16:creationId xmlns:a16="http://schemas.microsoft.com/office/drawing/2014/main" id="{D99BE22A-2B2A-17A2-C36C-10C7A1B5DA7B}"/>
+                <a16:creationId xmlns:a16="http://schemas.microsoft.com/office/drawing/2014/main" id="{413153AA-2084-C7F8-2B00-0658D2E5501B}"/>
               </a:ext>
             </a:extLst>
           </p:cNvPr>
@@ -4516,7 +4600,7 @@
           <a:bodyPr/>
           <a:lstStyle/>
           <a:p>
-            <a:fld id="{82D166BE-6BB7-4B07-846D-D2E331B7E500}" type="slidenum">
+            <a:fld id="{8BF4A284-2A1D-44F7-B75D-5BB7CC07B10D}" type="slidenum">
               <a:rPr lang="en-US" smtClean="0"/>
               <a:t>‹#›</a:t>
             </a:fld>
@@ -4527,7 +4611,7 @@
     </p:spTree>
     <p:extLst>
       <p:ext uri="{BB962C8B-B14F-4D97-AF65-F5344CB8AC3E}">
-        <p14:creationId xmlns:p14="http://schemas.microsoft.com/office/powerpoint/2010/main" val="1382713077"/>
+        <p14:creationId xmlns:p14="http://schemas.microsoft.com/office/powerpoint/2010/main" val="3792248678"/>
       </p:ext>
     </p:extLst>
   </p:cSld>
@@ -4564,7 +4648,7 @@
           <p:cNvPr id="2" name="Title Placeholder 1">
             <a:extLst>
               <a:ext uri="{FF2B5EF4-FFF2-40B4-BE49-F238E27FC236}">
-                <a16:creationId xmlns:a16="http://schemas.microsoft.com/office/drawing/2014/main" id="{55261149-E9DA-62E4-CF72-8F007F2FB62E}"/>
+                <a16:creationId xmlns:a16="http://schemas.microsoft.com/office/drawing/2014/main" id="{90587143-9FEB-6CA1-F8DD-54FF7975820E}"/>
               </a:ext>
             </a:extLst>
           </p:cNvPr>
@@ -4602,7 +4686,7 @@
           <p:cNvPr id="3" name="Text Placeholder 2">
             <a:extLst>
               <a:ext uri="{FF2B5EF4-FFF2-40B4-BE49-F238E27FC236}">
-                <a16:creationId xmlns:a16="http://schemas.microsoft.com/office/drawing/2014/main" id="{D2CC6D35-0522-86EB-FB73-CF775E1034F1}"/>
+                <a16:creationId xmlns:a16="http://schemas.microsoft.com/office/drawing/2014/main" id="{6AA51918-6708-51BE-78C0-D6856E936499}"/>
               </a:ext>
             </a:extLst>
           </p:cNvPr>
@@ -4669,7 +4753,7 @@
           <p:cNvPr id="4" name="Date Placeholder 3">
             <a:extLst>
               <a:ext uri="{FF2B5EF4-FFF2-40B4-BE49-F238E27FC236}">
-                <a16:creationId xmlns:a16="http://schemas.microsoft.com/office/drawing/2014/main" id="{2E8EEC54-4727-0F08-11B5-59207DC02AC6}"/>
+                <a16:creationId xmlns:a16="http://schemas.microsoft.com/office/drawing/2014/main" id="{3FBB8A17-7A93-2108-17B8-B1E5986B7A77}"/>
               </a:ext>
             </a:extLst>
           </p:cNvPr>
@@ -4703,9 +4787,9 @@
             </a:lvl1pPr>
           </a:lstStyle>
           <a:p>
-            <a:fld id="{3E77E078-294F-485B-94A9-936C65A883C8}" type="datetimeFigureOut">
+            <a:fld id="{D2125630-F6C6-4083-9D16-97DD112F45A0}" type="datetimeFigureOut">
               <a:rPr lang="en-US" smtClean="0"/>
-              <a:t>6/2/2026</a:t>
+              <a:t>6/3/2026</a:t>
             </a:fld>
             <a:endParaRPr lang="en-US"/>
           </a:p>
@@ -4716,7 +4800,7 @@
           <p:cNvPr id="5" name="Footer Placeholder 4">
             <a:extLst>
               <a:ext uri="{FF2B5EF4-FFF2-40B4-BE49-F238E27FC236}">
-                <a16:creationId xmlns:a16="http://schemas.microsoft.com/office/drawing/2014/main" id="{CF43841B-F676-1F0A-9A27-3738744A812E}"/>
+                <a16:creationId xmlns:a16="http://schemas.microsoft.com/office/drawing/2014/main" id="{6E107C99-F8F3-D531-DABF-4604C4525CF4}"/>
               </a:ext>
             </a:extLst>
           </p:cNvPr>
@@ -4759,7 +4843,7 @@
           <p:cNvPr id="6" name="Slide Number Placeholder 5">
             <a:extLst>
               <a:ext uri="{FF2B5EF4-FFF2-40B4-BE49-F238E27FC236}">
-                <a16:creationId xmlns:a16="http://schemas.microsoft.com/office/drawing/2014/main" id="{BB8C9769-6C32-FBB2-E0E0-183F347F517F}"/>
+                <a16:creationId xmlns:a16="http://schemas.microsoft.com/office/drawing/2014/main" id="{8061FE6F-324A-1B6B-A720-292523B30BED}"/>
               </a:ext>
             </a:extLst>
           </p:cNvPr>
@@ -4793,7 +4877,7 @@
             </a:lvl1pPr>
           </a:lstStyle>
           <a:p>
-            <a:fld id="{82D166BE-6BB7-4B07-846D-D2E331B7E500}" type="slidenum">
+            <a:fld id="{8BF4A284-2A1D-44F7-B75D-5BB7CC07B10D}" type="slidenum">
               <a:rPr lang="en-US" smtClean="0"/>
               <a:t>‹#›</a:t>
             </a:fld>
@@ -4804,7 +4888,7 @@
     </p:spTree>
     <p:extLst>
       <p:ext uri="{BB962C8B-B14F-4D97-AF65-F5344CB8AC3E}">
-        <p14:creationId xmlns:p14="http://schemas.microsoft.com/office/powerpoint/2010/main" val="3041271780"/>
+        <p14:creationId xmlns:p14="http://schemas.microsoft.com/office/powerpoint/2010/main" val="2677483357"/>
       </p:ext>
     </p:extLst>
   </p:cSld>
@@ -5127,7 +5211,7 @@
           <p:cNvPr id="2" name="Rectangle 1">
             <a:extLst>
               <a:ext uri="{FF2B5EF4-FFF2-40B4-BE49-F238E27FC236}">
-                <a16:creationId xmlns:a16="http://schemas.microsoft.com/office/drawing/2014/main" id="{333CC963-6E7F-0CB3-EA47-2B3FE19CF798}"/>
+                <a16:creationId xmlns:a16="http://schemas.microsoft.com/office/drawing/2014/main" id="{F3CD0A7D-7FF2-0379-19E7-6CD0994D1CF1}"/>
               </a:ext>
             </a:extLst>
           </p:cNvPr>
@@ -5195,7 +5279,7 @@
           <p:cNvPr id="3" name="Oval 2">
             <a:extLst>
               <a:ext uri="{FF2B5EF4-FFF2-40B4-BE49-F238E27FC236}">
-                <a16:creationId xmlns:a16="http://schemas.microsoft.com/office/drawing/2014/main" id="{ED9BB160-E74B-59A9-864D-734A63A591B1}"/>
+                <a16:creationId xmlns:a16="http://schemas.microsoft.com/office/drawing/2014/main" id="{B9DE4D46-3739-E62E-716D-3F0DD68CD308}"/>
               </a:ext>
             </a:extLst>
           </p:cNvPr>
@@ -5265,7 +5349,7 @@
           <p:cNvPr id="4" name="Oval 3">
             <a:extLst>
               <a:ext uri="{FF2B5EF4-FFF2-40B4-BE49-F238E27FC236}">
-                <a16:creationId xmlns:a16="http://schemas.microsoft.com/office/drawing/2014/main" id="{740A30F9-C433-C724-7BB9-65D47962B807}"/>
+                <a16:creationId xmlns:a16="http://schemas.microsoft.com/office/drawing/2014/main" id="{CD6F7FAD-E024-37CA-0748-D17ECB9B49F4}"/>
               </a:ext>
             </a:extLst>
           </p:cNvPr>
@@ -5335,7 +5419,7 @@
           <p:cNvPr id="5" name="TextBox 4">
             <a:extLst>
               <a:ext uri="{FF2B5EF4-FFF2-40B4-BE49-F238E27FC236}">
-                <a16:creationId xmlns:a16="http://schemas.microsoft.com/office/drawing/2014/main" id="{ADCAF562-D47D-4101-0069-E03807ABE88D}"/>
+                <a16:creationId xmlns:a16="http://schemas.microsoft.com/office/drawing/2014/main" id="{FC9E8557-146D-C181-850C-CF7C20E073CD}"/>
               </a:ext>
             </a:extLst>
           </p:cNvPr>
@@ -5375,7 +5459,7 @@
           <p:cNvPr id="6" name="TextBox 5">
             <a:extLst>
               <a:ext uri="{FF2B5EF4-FFF2-40B4-BE49-F238E27FC236}">
-                <a16:creationId xmlns:a16="http://schemas.microsoft.com/office/drawing/2014/main" id="{869CCE4B-FFB7-5348-3E96-FFFBE663DB15}"/>
+                <a16:creationId xmlns:a16="http://schemas.microsoft.com/office/drawing/2014/main" id="{A8F14480-732D-0051-1142-A8AF672D1D99}"/>
               </a:ext>
             </a:extLst>
           </p:cNvPr>
@@ -5415,7 +5499,7 @@
           <p:cNvPr id="7" name="TextBox 6">
             <a:extLst>
               <a:ext uri="{FF2B5EF4-FFF2-40B4-BE49-F238E27FC236}">
-                <a16:creationId xmlns:a16="http://schemas.microsoft.com/office/drawing/2014/main" id="{D4E51D22-2B8B-25F8-8991-05870D00BBF7}"/>
+                <a16:creationId xmlns:a16="http://schemas.microsoft.com/office/drawing/2014/main" id="{10F4D48C-B88D-64D9-3418-906EBB7EE544}"/>
               </a:ext>
             </a:extLst>
           </p:cNvPr>
@@ -5455,7 +5539,7 @@
           <p:cNvPr id="8" name="Rectangle: Rounded Corners 7">
             <a:extLst>
               <a:ext uri="{FF2B5EF4-FFF2-40B4-BE49-F238E27FC236}">
-                <a16:creationId xmlns:a16="http://schemas.microsoft.com/office/drawing/2014/main" id="{0EDEEBF4-A9A3-5BBB-EAC8-3A3A6F577027}"/>
+                <a16:creationId xmlns:a16="http://schemas.microsoft.com/office/drawing/2014/main" id="{A49B799C-4312-2CC7-13B4-8EF75BBA83C7}"/>
               </a:ext>
             </a:extLst>
           </p:cNvPr>
@@ -5523,7 +5607,7 @@
           <p:cNvPr id="9" name="TextBox 8">
             <a:extLst>
               <a:ext uri="{FF2B5EF4-FFF2-40B4-BE49-F238E27FC236}">
-                <a16:creationId xmlns:a16="http://schemas.microsoft.com/office/drawing/2014/main" id="{F0934D16-6B66-91FC-ABA3-7E29A8FB4804}"/>
+                <a16:creationId xmlns:a16="http://schemas.microsoft.com/office/drawing/2014/main" id="{989D43C5-F4D5-1BBA-7CCD-E725F023C5ED}"/>
               </a:ext>
             </a:extLst>
           </p:cNvPr>
@@ -5564,7 +5648,7 @@
           <p:cNvPr id="10" name="Rectangle: Rounded Corners 9">
             <a:extLst>
               <a:ext uri="{FF2B5EF4-FFF2-40B4-BE49-F238E27FC236}">
-                <a16:creationId xmlns:a16="http://schemas.microsoft.com/office/drawing/2014/main" id="{0B6B859C-D13F-5B44-98B1-042C283DE196}"/>
+                <a16:creationId xmlns:a16="http://schemas.microsoft.com/office/drawing/2014/main" id="{FF662B39-E943-5E99-386F-B242D4D60CEE}"/>
               </a:ext>
             </a:extLst>
           </p:cNvPr>
@@ -5632,7 +5716,7 @@
           <p:cNvPr id="11" name="TextBox 10">
             <a:extLst>
               <a:ext uri="{FF2B5EF4-FFF2-40B4-BE49-F238E27FC236}">
-                <a16:creationId xmlns:a16="http://schemas.microsoft.com/office/drawing/2014/main" id="{64F14B86-ABAA-0FDE-602A-2C16B8F8B006}"/>
+                <a16:creationId xmlns:a16="http://schemas.microsoft.com/office/drawing/2014/main" id="{AEA19B2A-A219-A01A-B45A-99ECD1ABEB4F}"/>
               </a:ext>
             </a:extLst>
           </p:cNvPr>
@@ -5673,7 +5757,7 @@
           <p:cNvPr id="12" name="Rectangle: Rounded Corners 11">
             <a:extLst>
               <a:ext uri="{FF2B5EF4-FFF2-40B4-BE49-F238E27FC236}">
-                <a16:creationId xmlns:a16="http://schemas.microsoft.com/office/drawing/2014/main" id="{10CA1163-8139-5FC6-E3F7-0CE84AC2DCB5}"/>
+                <a16:creationId xmlns:a16="http://schemas.microsoft.com/office/drawing/2014/main" id="{E0782096-AAE1-64BA-64A9-D6BABACB8E84}"/>
               </a:ext>
             </a:extLst>
           </p:cNvPr>
@@ -5741,7 +5825,7 @@
           <p:cNvPr id="13" name="TextBox 12">
             <a:extLst>
               <a:ext uri="{FF2B5EF4-FFF2-40B4-BE49-F238E27FC236}">
-                <a16:creationId xmlns:a16="http://schemas.microsoft.com/office/drawing/2014/main" id="{9E1CA02F-2C14-63F6-68CE-EC2F83D9F6E4}"/>
+                <a16:creationId xmlns:a16="http://schemas.microsoft.com/office/drawing/2014/main" id="{62214B18-D08F-C286-A765-C50361E34EA5}"/>
               </a:ext>
             </a:extLst>
           </p:cNvPr>
@@ -5782,7 +5866,7 @@
           <p:cNvPr id="14" name="Rectangle: Rounded Corners 13">
             <a:extLst>
               <a:ext uri="{FF2B5EF4-FFF2-40B4-BE49-F238E27FC236}">
-                <a16:creationId xmlns:a16="http://schemas.microsoft.com/office/drawing/2014/main" id="{074BAF8E-5F63-0FB1-C2FB-E4830B0B83E7}"/>
+                <a16:creationId xmlns:a16="http://schemas.microsoft.com/office/drawing/2014/main" id="{3B7D1D9E-09AA-00B9-F8D2-DE34D606626F}"/>
               </a:ext>
             </a:extLst>
           </p:cNvPr>
@@ -5836,7 +5920,7 @@
           <p:cNvPr id="15" name="Rectangle: Rounded Corners 14">
             <a:extLst>
               <a:ext uri="{FF2B5EF4-FFF2-40B4-BE49-F238E27FC236}">
-                <a16:creationId xmlns:a16="http://schemas.microsoft.com/office/drawing/2014/main" id="{5CF826E0-A40D-015E-4516-056FE3F87F6C}"/>
+                <a16:creationId xmlns:a16="http://schemas.microsoft.com/office/drawing/2014/main" id="{C9C7D9CB-121C-E8B2-4E82-7424B5FF6C93}"/>
               </a:ext>
             </a:extLst>
           </p:cNvPr>
@@ -5904,7 +5988,7 @@
           <p:cNvPr id="16" name="TextBox 15">
             <a:extLst>
               <a:ext uri="{FF2B5EF4-FFF2-40B4-BE49-F238E27FC236}">
-                <a16:creationId xmlns:a16="http://schemas.microsoft.com/office/drawing/2014/main" id="{07A1B360-1B36-4461-AC02-83B6BBB2DB40}"/>
+                <a16:creationId xmlns:a16="http://schemas.microsoft.com/office/drawing/2014/main" id="{7504C815-FC0D-0DC4-62DF-BC9A08973239}"/>
               </a:ext>
             </a:extLst>
           </p:cNvPr>
@@ -5945,7 +6029,7 @@
           <p:cNvPr id="17" name="Rectangle: Rounded Corners 16">
             <a:extLst>
               <a:ext uri="{FF2B5EF4-FFF2-40B4-BE49-F238E27FC236}">
-                <a16:creationId xmlns:a16="http://schemas.microsoft.com/office/drawing/2014/main" id="{8DDEBE1F-0114-BDF9-E312-7331302250A2}"/>
+                <a16:creationId xmlns:a16="http://schemas.microsoft.com/office/drawing/2014/main" id="{6790674B-E11F-86FA-8D09-B87504AA2600}"/>
               </a:ext>
             </a:extLst>
           </p:cNvPr>
@@ -6013,7 +6097,7 @@
           <p:cNvPr id="18" name="TextBox 17">
             <a:extLst>
               <a:ext uri="{FF2B5EF4-FFF2-40B4-BE49-F238E27FC236}">
-                <a16:creationId xmlns:a16="http://schemas.microsoft.com/office/drawing/2014/main" id="{3679A38A-381E-C899-4A1F-BB7CC670D808}"/>
+                <a16:creationId xmlns:a16="http://schemas.microsoft.com/office/drawing/2014/main" id="{DF016C0F-39D3-3559-2729-CAA0F1848530}"/>
               </a:ext>
             </a:extLst>
           </p:cNvPr>
@@ -6054,7 +6138,7 @@
           <p:cNvPr id="19" name="Rectangle: Rounded Corners 18">
             <a:extLst>
               <a:ext uri="{FF2B5EF4-FFF2-40B4-BE49-F238E27FC236}">
-                <a16:creationId xmlns:a16="http://schemas.microsoft.com/office/drawing/2014/main" id="{0542932D-AE2E-5FB7-EF12-EEC6E8B31FEC}"/>
+                <a16:creationId xmlns:a16="http://schemas.microsoft.com/office/drawing/2014/main" id="{CD4DC99F-DECC-8E00-7155-DF8AAF6AD95D}"/>
               </a:ext>
             </a:extLst>
           </p:cNvPr>
@@ -6122,7 +6206,7 @@
           <p:cNvPr id="20" name="TextBox 19">
             <a:extLst>
               <a:ext uri="{FF2B5EF4-FFF2-40B4-BE49-F238E27FC236}">
-                <a16:creationId xmlns:a16="http://schemas.microsoft.com/office/drawing/2014/main" id="{B780CB81-EE65-6232-7E5A-AC12FA02460E}"/>
+                <a16:creationId xmlns:a16="http://schemas.microsoft.com/office/drawing/2014/main" id="{8BF0CBEC-853D-3739-EC90-3C462336B798}"/>
               </a:ext>
             </a:extLst>
           </p:cNvPr>
@@ -6163,7 +6247,7 @@
           <p:cNvPr id="21" name="Straight Connector 20">
             <a:extLst>
               <a:ext uri="{FF2B5EF4-FFF2-40B4-BE49-F238E27FC236}">
-                <a16:creationId xmlns:a16="http://schemas.microsoft.com/office/drawing/2014/main" id="{54B02110-4E3D-2BA5-6C10-924F22ADD6B9}"/>
+                <a16:creationId xmlns:a16="http://schemas.microsoft.com/office/drawing/2014/main" id="{9BC9A195-67C7-0308-244E-FDFCFFC63EDA}"/>
               </a:ext>
             </a:extLst>
           </p:cNvPr>
@@ -6204,7 +6288,7 @@
           <p:cNvPr id="22" name="Rectangle: Rounded Corners 21">
             <a:extLst>
               <a:ext uri="{FF2B5EF4-FFF2-40B4-BE49-F238E27FC236}">
-                <a16:creationId xmlns:a16="http://schemas.microsoft.com/office/drawing/2014/main" id="{C9EED369-ECB0-1794-E95D-DAAE0B1D3F6F}"/>
+                <a16:creationId xmlns:a16="http://schemas.microsoft.com/office/drawing/2014/main" id="{EA99ABAE-EF05-8329-0A42-72C126FCDB0A}"/>
               </a:ext>
             </a:extLst>
           </p:cNvPr>
@@ -6272,7 +6356,7 @@
           <p:cNvPr id="23" name="TextBox 22">
             <a:extLst>
               <a:ext uri="{FF2B5EF4-FFF2-40B4-BE49-F238E27FC236}">
-                <a16:creationId xmlns:a16="http://schemas.microsoft.com/office/drawing/2014/main" id="{13377B47-B821-A819-FA97-830A8D16C18C}"/>
+                <a16:creationId xmlns:a16="http://schemas.microsoft.com/office/drawing/2014/main" id="{56423FAB-688C-0CDF-8951-3BFF57C0C7D3}"/>
               </a:ext>
             </a:extLst>
           </p:cNvPr>
@@ -6313,7 +6397,7 @@
           <p:cNvPr id="24" name="Straight Connector 23">
             <a:extLst>
               <a:ext uri="{FF2B5EF4-FFF2-40B4-BE49-F238E27FC236}">
-                <a16:creationId xmlns:a16="http://schemas.microsoft.com/office/drawing/2014/main" id="{90964874-B8BF-09B9-15FE-71563094BD08}"/>
+                <a16:creationId xmlns:a16="http://schemas.microsoft.com/office/drawing/2014/main" id="{CF6F6D71-FC3F-7572-FE33-245121FB8647}"/>
               </a:ext>
             </a:extLst>
           </p:cNvPr>
@@ -6354,7 +6438,7 @@
           <p:cNvPr id="25" name="Straight Connector 24">
             <a:extLst>
               <a:ext uri="{FF2B5EF4-FFF2-40B4-BE49-F238E27FC236}">
-                <a16:creationId xmlns:a16="http://schemas.microsoft.com/office/drawing/2014/main" id="{8A8D26E7-6C24-2E3E-92DF-06D674296E93}"/>
+                <a16:creationId xmlns:a16="http://schemas.microsoft.com/office/drawing/2014/main" id="{0736BFF1-BCC2-B5E5-220C-FFAB68CCCCEE}"/>
               </a:ext>
             </a:extLst>
           </p:cNvPr>
@@ -6390,10 +6474,50 @@
           </a:fontRef>
         </p:style>
       </p:cxnSp>
+      <p:sp>
+        <p:nvSpPr>
+          <p:cNvPr id="26" name="TextBox 25">
+            <a:extLst>
+              <a:ext uri="{FF2B5EF4-FFF2-40B4-BE49-F238E27FC236}">
+                <a16:creationId xmlns:a16="http://schemas.microsoft.com/office/drawing/2014/main" id="{CC2D968E-575D-22D9-08C3-A2B44FAAF68B}"/>
+              </a:ext>
+            </a:extLst>
+          </p:cNvPr>
+          <p:cNvSpPr txBox="1"/>
+          <p:nvPr/>
+        </p:nvSpPr>
+        <p:spPr>
+          <a:xfrm>
+            <a:off x="621792" y="6144768"/>
+            <a:ext cx="4846320" cy="183127"/>
+          </a:xfrm>
+          <a:prstGeom prst="rect">
+            <a:avLst/>
+          </a:prstGeom>
+          <a:noFill/>
+        </p:spPr>
+        <p:txBody>
+          <a:bodyPr vert="horz" wrap="square" lIns="36576" tIns="18288" rIns="36576" bIns="18288" rtlCol="0">
+            <a:spAutoFit/>
+          </a:bodyPr>
+          <a:lstStyle/>
+          <a:p>
+            <a:r>
+              <a:rPr lang="en-US" sz="950">
+                <a:solidFill>
+                  <a:srgbClr val="C8C6C4"/>
+                </a:solidFill>
+                <a:latin typeface="Segoe UI" panose="020B0502040204020203" pitchFamily="34" charset="0"/>
+              </a:rPr>
+              <a:t>Prepared for Chirag, Dhanshri, and EIM team</a:t>
+            </a:r>
+          </a:p>
+        </p:txBody>
+      </p:sp>
     </p:spTree>
     <p:extLst>
       <p:ext uri="{BB962C8B-B14F-4D97-AF65-F5344CB8AC3E}">
-        <p14:creationId xmlns:p14="http://schemas.microsoft.com/office/powerpoint/2010/main" val="3213371304"/>
+        <p14:creationId xmlns:p14="http://schemas.microsoft.com/office/powerpoint/2010/main" val="2262400309"/>
       </p:ext>
     </p:extLst>
   </p:cSld>
@@ -6425,7 +6549,7 @@
           <p:cNvPr id="2" name="Rectangle 1">
             <a:extLst>
               <a:ext uri="{FF2B5EF4-FFF2-40B4-BE49-F238E27FC236}">
-                <a16:creationId xmlns:a16="http://schemas.microsoft.com/office/drawing/2014/main" id="{D33C1FA6-1233-CEE9-132B-EA01B203EC51}"/>
+                <a16:creationId xmlns:a16="http://schemas.microsoft.com/office/drawing/2014/main" id="{CBAD3820-892F-4D09-512B-844110965648}"/>
               </a:ext>
             </a:extLst>
           </p:cNvPr>
@@ -6493,7 +6617,7 @@
           <p:cNvPr id="3" name="TextBox 2">
             <a:extLst>
               <a:ext uri="{FF2B5EF4-FFF2-40B4-BE49-F238E27FC236}">
-                <a16:creationId xmlns:a16="http://schemas.microsoft.com/office/drawing/2014/main" id="{FFEF4360-BDCC-20E1-3A0F-0C8C60F2491F}"/>
+                <a16:creationId xmlns:a16="http://schemas.microsoft.com/office/drawing/2014/main" id="{43C72C8A-49BE-E727-A5BA-876D60F3A5B9}"/>
               </a:ext>
             </a:extLst>
           </p:cNvPr>
@@ -6533,7 +6657,7 @@
           <p:cNvPr id="4" name="TextBox 3">
             <a:extLst>
               <a:ext uri="{FF2B5EF4-FFF2-40B4-BE49-F238E27FC236}">
-                <a16:creationId xmlns:a16="http://schemas.microsoft.com/office/drawing/2014/main" id="{0C036AD2-7AC5-0027-CC62-64F14E6C806C}"/>
+                <a16:creationId xmlns:a16="http://schemas.microsoft.com/office/drawing/2014/main" id="{88F80590-6347-DDCF-A7E9-34960F71550A}"/>
               </a:ext>
             </a:extLst>
           </p:cNvPr>
@@ -6573,7 +6697,7 @@
           <p:cNvPr id="5" name="TextBox 4">
             <a:extLst>
               <a:ext uri="{FF2B5EF4-FFF2-40B4-BE49-F238E27FC236}">
-                <a16:creationId xmlns:a16="http://schemas.microsoft.com/office/drawing/2014/main" id="{F92DFC31-E0D9-AD4B-E715-9E993FEF0093}"/>
+                <a16:creationId xmlns:a16="http://schemas.microsoft.com/office/drawing/2014/main" id="{49248C4B-1AB7-26CF-AA0D-154DD6075BC3}"/>
               </a:ext>
             </a:extLst>
           </p:cNvPr>
@@ -6614,7 +6738,7 @@
           <p:cNvPr id="6" name="TextBox 5">
             <a:extLst>
               <a:ext uri="{FF2B5EF4-FFF2-40B4-BE49-F238E27FC236}">
-                <a16:creationId xmlns:a16="http://schemas.microsoft.com/office/drawing/2014/main" id="{4C437191-811F-2AC8-E0DA-28AC019EC1DB}"/>
+                <a16:creationId xmlns:a16="http://schemas.microsoft.com/office/drawing/2014/main" id="{76A3960A-A70E-D5BB-76C9-A5B278B2517C}"/>
               </a:ext>
             </a:extLst>
           </p:cNvPr>
@@ -6654,7 +6778,7 @@
           <p:cNvPr id="7" name="Rectangle: Rounded Corners 6">
             <a:extLst>
               <a:ext uri="{FF2B5EF4-FFF2-40B4-BE49-F238E27FC236}">
-                <a16:creationId xmlns:a16="http://schemas.microsoft.com/office/drawing/2014/main" id="{C0DB6A49-69D0-AAF8-89CE-4DCA8B8CF5DA}"/>
+                <a16:creationId xmlns:a16="http://schemas.microsoft.com/office/drawing/2014/main" id="{B01F6963-A3E9-F397-4592-6C5258E6B3EE}"/>
               </a:ext>
             </a:extLst>
           </p:cNvPr>
@@ -6708,7 +6832,7 @@
           <p:cNvPr id="8" name="TextBox 7">
             <a:extLst>
               <a:ext uri="{FF2B5EF4-FFF2-40B4-BE49-F238E27FC236}">
-                <a16:creationId xmlns:a16="http://schemas.microsoft.com/office/drawing/2014/main" id="{859492F6-8D35-922F-AF2C-9A150E4A2669}"/>
+                <a16:creationId xmlns:a16="http://schemas.microsoft.com/office/drawing/2014/main" id="{498591CD-FC7A-D729-E0EF-B7DCB7E5C510}"/>
               </a:ext>
             </a:extLst>
           </p:cNvPr>
@@ -6748,7 +6872,7 @@
           <p:cNvPr id="9" name="TextBox 8">
             <a:extLst>
               <a:ext uri="{FF2B5EF4-FFF2-40B4-BE49-F238E27FC236}">
-                <a16:creationId xmlns:a16="http://schemas.microsoft.com/office/drawing/2014/main" id="{E04F5F5A-95A2-723B-D80F-34CE50B0CEAD}"/>
+                <a16:creationId xmlns:a16="http://schemas.microsoft.com/office/drawing/2014/main" id="{E147E6BE-7DA3-F988-330A-732C35CEDF57}"/>
               </a:ext>
             </a:extLst>
           </p:cNvPr>
@@ -6821,7 +6945,7 @@
           <p:cNvPr id="10" name="Rectangle: Rounded Corners 9">
             <a:extLst>
               <a:ext uri="{FF2B5EF4-FFF2-40B4-BE49-F238E27FC236}">
-                <a16:creationId xmlns:a16="http://schemas.microsoft.com/office/drawing/2014/main" id="{ACE7ECC2-489A-7AFA-878B-42F438A5AAA9}"/>
+                <a16:creationId xmlns:a16="http://schemas.microsoft.com/office/drawing/2014/main" id="{2349533F-9237-F862-1C85-E06F90EE7E3C}"/>
               </a:ext>
             </a:extLst>
           </p:cNvPr>
@@ -6875,7 +6999,7 @@
           <p:cNvPr id="11" name="TextBox 10">
             <a:extLst>
               <a:ext uri="{FF2B5EF4-FFF2-40B4-BE49-F238E27FC236}">
-                <a16:creationId xmlns:a16="http://schemas.microsoft.com/office/drawing/2014/main" id="{9978B99F-A1DB-74EE-8BDA-2CA8A4778150}"/>
+                <a16:creationId xmlns:a16="http://schemas.microsoft.com/office/drawing/2014/main" id="{C0EE2308-717A-F695-B473-D63595D3255A}"/>
               </a:ext>
             </a:extLst>
           </p:cNvPr>
@@ -6915,7 +7039,7 @@
           <p:cNvPr id="12" name="TextBox 11">
             <a:extLst>
               <a:ext uri="{FF2B5EF4-FFF2-40B4-BE49-F238E27FC236}">
-                <a16:creationId xmlns:a16="http://schemas.microsoft.com/office/drawing/2014/main" id="{644051CF-FC33-3BAB-D465-FF0EF7B9BBA6}"/>
+                <a16:creationId xmlns:a16="http://schemas.microsoft.com/office/drawing/2014/main" id="{55E9BE88-A6D1-885D-A491-23C2ED971C45}"/>
               </a:ext>
             </a:extLst>
           </p:cNvPr>
@@ -6988,7 +7112,7 @@
           <p:cNvPr id="13" name="Rectangle: Rounded Corners 12">
             <a:extLst>
               <a:ext uri="{FF2B5EF4-FFF2-40B4-BE49-F238E27FC236}">
-                <a16:creationId xmlns:a16="http://schemas.microsoft.com/office/drawing/2014/main" id="{75ABB54F-FD6E-35C9-01C9-A1D631A36592}"/>
+                <a16:creationId xmlns:a16="http://schemas.microsoft.com/office/drawing/2014/main" id="{A40BCDB0-71D3-F452-D03D-E50B75121E9F}"/>
               </a:ext>
             </a:extLst>
           </p:cNvPr>
@@ -7042,7 +7166,7 @@
           <p:cNvPr id="14" name="TextBox 13">
             <a:extLst>
               <a:ext uri="{FF2B5EF4-FFF2-40B4-BE49-F238E27FC236}">
-                <a16:creationId xmlns:a16="http://schemas.microsoft.com/office/drawing/2014/main" id="{DAE3294B-601D-D71D-C152-01BA4F572B9D}"/>
+                <a16:creationId xmlns:a16="http://schemas.microsoft.com/office/drawing/2014/main" id="{912927F1-770A-BCAE-9473-1FE06CBCF93C}"/>
               </a:ext>
             </a:extLst>
           </p:cNvPr>
@@ -7082,7 +7206,7 @@
           <p:cNvPr id="15" name="TextBox 14">
             <a:extLst>
               <a:ext uri="{FF2B5EF4-FFF2-40B4-BE49-F238E27FC236}">
-                <a16:creationId xmlns:a16="http://schemas.microsoft.com/office/drawing/2014/main" id="{1ABCE875-3BA1-6400-FB97-1E511C273A98}"/>
+                <a16:creationId xmlns:a16="http://schemas.microsoft.com/office/drawing/2014/main" id="{2CAB75D0-F9B5-31AD-A924-74DBC096C807}"/>
               </a:ext>
             </a:extLst>
           </p:cNvPr>
@@ -7166,7 +7290,7 @@
           <p:cNvPr id="16" name="Rectangle: Rounded Corners 15">
             <a:extLst>
               <a:ext uri="{FF2B5EF4-FFF2-40B4-BE49-F238E27FC236}">
-                <a16:creationId xmlns:a16="http://schemas.microsoft.com/office/drawing/2014/main" id="{78822711-B233-7114-9086-748F7C70B006}"/>
+                <a16:creationId xmlns:a16="http://schemas.microsoft.com/office/drawing/2014/main" id="{CD69DA47-64EB-9DBA-B500-5CF4B2314EF0}"/>
               </a:ext>
             </a:extLst>
           </p:cNvPr>
@@ -7234,7 +7358,7 @@
           <p:cNvPr id="17" name="TextBox 16">
             <a:extLst>
               <a:ext uri="{FF2B5EF4-FFF2-40B4-BE49-F238E27FC236}">
-                <a16:creationId xmlns:a16="http://schemas.microsoft.com/office/drawing/2014/main" id="{4CACE3DE-FCE3-28BA-E125-BB763EA0D228}"/>
+                <a16:creationId xmlns:a16="http://schemas.microsoft.com/office/drawing/2014/main" id="{D5564A34-5666-366F-54C2-794274B3BFFB}"/>
               </a:ext>
             </a:extLst>
           </p:cNvPr>
@@ -7275,7 +7399,7 @@
           <p:cNvPr id="18" name="TextBox 17">
             <a:extLst>
               <a:ext uri="{FF2B5EF4-FFF2-40B4-BE49-F238E27FC236}">
-                <a16:creationId xmlns:a16="http://schemas.microsoft.com/office/drawing/2014/main" id="{124B0B97-A8AD-7064-44CB-52A5614ED888}"/>
+                <a16:creationId xmlns:a16="http://schemas.microsoft.com/office/drawing/2014/main" id="{186798C3-1D04-3304-A1D6-DBC7945A87E9}"/>
               </a:ext>
             </a:extLst>
           </p:cNvPr>
@@ -7352,7 +7476,7 @@
           <p:cNvPr id="19" name="Straight Connector 18">
             <a:extLst>
               <a:ext uri="{FF2B5EF4-FFF2-40B4-BE49-F238E27FC236}">
-                <a16:creationId xmlns:a16="http://schemas.microsoft.com/office/drawing/2014/main" id="{83147C7A-DEBB-4E42-9F31-E4FB29E9F60F}"/>
+                <a16:creationId xmlns:a16="http://schemas.microsoft.com/office/drawing/2014/main" id="{42D34884-667A-4A32-3F8C-EA6D797143D1}"/>
               </a:ext>
             </a:extLst>
           </p:cNvPr>
@@ -7393,7 +7517,7 @@
           <p:cNvPr id="20" name="Straight Connector 19">
             <a:extLst>
               <a:ext uri="{FF2B5EF4-FFF2-40B4-BE49-F238E27FC236}">
-                <a16:creationId xmlns:a16="http://schemas.microsoft.com/office/drawing/2014/main" id="{8333B2E8-FBCC-7940-F1AB-76BC300BFEBB}"/>
+                <a16:creationId xmlns:a16="http://schemas.microsoft.com/office/drawing/2014/main" id="{E12C611F-5A7D-4288-9509-DA0AEB8B0617}"/>
               </a:ext>
             </a:extLst>
           </p:cNvPr>
@@ -7434,7 +7558,7 @@
           <p:cNvPr id="21" name="Straight Connector 20">
             <a:extLst>
               <a:ext uri="{FF2B5EF4-FFF2-40B4-BE49-F238E27FC236}">
-                <a16:creationId xmlns:a16="http://schemas.microsoft.com/office/drawing/2014/main" id="{0B0E2CEF-5E24-758A-5261-0C412BC89AD9}"/>
+                <a16:creationId xmlns:a16="http://schemas.microsoft.com/office/drawing/2014/main" id="{C5E9242E-C1DE-D37B-F8FF-4A2B31CA5E80}"/>
               </a:ext>
             </a:extLst>
           </p:cNvPr>
@@ -7475,7 +7599,7 @@
           <p:cNvPr id="22" name="Rectangle: Rounded Corners 21">
             <a:extLst>
               <a:ext uri="{FF2B5EF4-FFF2-40B4-BE49-F238E27FC236}">
-                <a16:creationId xmlns:a16="http://schemas.microsoft.com/office/drawing/2014/main" id="{91F06B55-6B4C-2A0C-85EA-E37CA35E5089}"/>
+                <a16:creationId xmlns:a16="http://schemas.microsoft.com/office/drawing/2014/main" id="{99C63943-A3B3-62CC-E763-93589018830D}"/>
               </a:ext>
             </a:extLst>
           </p:cNvPr>
@@ -7543,7 +7667,7 @@
           <p:cNvPr id="23" name="TextBox 22">
             <a:extLst>
               <a:ext uri="{FF2B5EF4-FFF2-40B4-BE49-F238E27FC236}">
-                <a16:creationId xmlns:a16="http://schemas.microsoft.com/office/drawing/2014/main" id="{C5F29286-28CF-9888-E38D-A30577D0BADF}"/>
+                <a16:creationId xmlns:a16="http://schemas.microsoft.com/office/drawing/2014/main" id="{E45990BD-3D2A-6C98-67BD-5EA820A01AB5}"/>
               </a:ext>
             </a:extLst>
           </p:cNvPr>
@@ -7579,10 +7703,57 @@
           </a:p>
         </p:txBody>
       </p:sp>
+      <p:sp>
+        <p:nvSpPr>
+          <p:cNvPr id="24" name="TextBox 23">
+            <a:extLst>
+              <a:ext uri="{FF2B5EF4-FFF2-40B4-BE49-F238E27FC236}">
+                <a16:creationId xmlns:a16="http://schemas.microsoft.com/office/drawing/2014/main" id="{9B91AFCF-5E93-B7D8-D29E-92D3DBF0A6E9}"/>
+              </a:ext>
+            </a:extLst>
+          </p:cNvPr>
+          <p:cNvSpPr txBox="1"/>
+          <p:nvPr/>
+        </p:nvSpPr>
+        <p:spPr>
+          <a:xfrm>
+            <a:off x="9281160" y="6510528"/>
+            <a:ext cx="2423160" cy="152349"/>
+          </a:xfrm>
+          <a:prstGeom prst="rect">
+            <a:avLst/>
+          </a:prstGeom>
+          <a:noFill/>
+        </p:spPr>
+        <p:txBody>
+          <a:bodyPr vert="horz" wrap="square" lIns="36576" tIns="18288" rIns="36576" bIns="18288" rtlCol="0">
+            <a:spAutoFit/>
+          </a:bodyPr>
+          <a:lstStyle/>
+          <a:p>
+            <a:pPr algn="r"/>
+            <a:r>
+              <a:rPr lang="it-IT" sz="750">
+                <a:solidFill>
+                  <a:srgbClr val="8A8886"/>
+                </a:solidFill>
+                <a:latin typeface="Segoe UI" panose="020B0502040204020203" pitchFamily="34" charset="0"/>
+              </a:rPr>
+              <a:t>Molina Healthcare EIM demo | 10</a:t>
+            </a:r>
+            <a:endParaRPr lang="en-US" sz="750">
+              <a:solidFill>
+                <a:srgbClr val="8A8886"/>
+              </a:solidFill>
+              <a:latin typeface="Segoe UI" panose="020B0502040204020203" pitchFamily="34" charset="0"/>
+            </a:endParaRPr>
+          </a:p>
+        </p:txBody>
+      </p:sp>
     </p:spTree>
     <p:extLst>
       <p:ext uri="{BB962C8B-B14F-4D97-AF65-F5344CB8AC3E}">
-        <p14:creationId xmlns:p14="http://schemas.microsoft.com/office/powerpoint/2010/main" val="2679890112"/>
+        <p14:creationId xmlns:p14="http://schemas.microsoft.com/office/powerpoint/2010/main" val="1260259465"/>
       </p:ext>
     </p:extLst>
   </p:cSld>
@@ -7614,7 +7785,7 @@
           <p:cNvPr id="2" name="Rectangle 1">
             <a:extLst>
               <a:ext uri="{FF2B5EF4-FFF2-40B4-BE49-F238E27FC236}">
-                <a16:creationId xmlns:a16="http://schemas.microsoft.com/office/drawing/2014/main" id="{2A1CB25D-B975-7EC5-C722-08EDE4B5C3FA}"/>
+                <a16:creationId xmlns:a16="http://schemas.microsoft.com/office/drawing/2014/main" id="{B9B5C24E-C29F-F179-961F-F994CF38C580}"/>
               </a:ext>
             </a:extLst>
           </p:cNvPr>
@@ -7682,7 +7853,7 @@
           <p:cNvPr id="3" name="TextBox 2">
             <a:extLst>
               <a:ext uri="{FF2B5EF4-FFF2-40B4-BE49-F238E27FC236}">
-                <a16:creationId xmlns:a16="http://schemas.microsoft.com/office/drawing/2014/main" id="{20ACFB86-AE5E-11D8-FAD3-6F39FE95C329}"/>
+                <a16:creationId xmlns:a16="http://schemas.microsoft.com/office/drawing/2014/main" id="{1615B841-87A6-2FB6-DFE2-E91C6B142D11}"/>
               </a:ext>
             </a:extLst>
           </p:cNvPr>
@@ -7722,7 +7893,7 @@
           <p:cNvPr id="4" name="TextBox 3">
             <a:extLst>
               <a:ext uri="{FF2B5EF4-FFF2-40B4-BE49-F238E27FC236}">
-                <a16:creationId xmlns:a16="http://schemas.microsoft.com/office/drawing/2014/main" id="{9800313A-9BB5-5422-A035-D6893C32EE05}"/>
+                <a16:creationId xmlns:a16="http://schemas.microsoft.com/office/drawing/2014/main" id="{40FCDEFA-2D57-456E-A2A2-90BA4660E263}"/>
               </a:ext>
             </a:extLst>
           </p:cNvPr>
@@ -7752,7 +7923,7 @@
                 </a:solidFill>
                 <a:latin typeface="Aptos Display" panose="020B0004020202020204" pitchFamily="34" charset="0"/>
               </a:rPr>
-              <a:t>Live serving: one endpoint, two behaviors</a:t>
+              <a:t>Fine-tuning in code: what actually changes</a:t>
             </a:r>
           </a:p>
         </p:txBody>
@@ -7762,7 +7933,7 @@
           <p:cNvPr id="5" name="TextBox 4">
             <a:extLst>
               <a:ext uri="{FF2B5EF4-FFF2-40B4-BE49-F238E27FC236}">
-                <a16:creationId xmlns:a16="http://schemas.microsoft.com/office/drawing/2014/main" id="{5F6B534F-8159-437F-AA30-B530B64EC908}"/>
+                <a16:creationId xmlns:a16="http://schemas.microsoft.com/office/drawing/2014/main" id="{BD70CE8E-5EE8-B5EC-CDCC-F7D9B0895CBE}"/>
               </a:ext>
             </a:extLst>
           </p:cNvPr>
@@ -7803,7 +7974,7 @@
           <p:cNvPr id="6" name="TextBox 5">
             <a:extLst>
               <a:ext uri="{FF2B5EF4-FFF2-40B4-BE49-F238E27FC236}">
-                <a16:creationId xmlns:a16="http://schemas.microsoft.com/office/drawing/2014/main" id="{8BAEA880-60F4-77FC-7498-7B73DF3C67AC}"/>
+                <a16:creationId xmlns:a16="http://schemas.microsoft.com/office/drawing/2014/main" id="{E3F27A2F-5838-6632-6156-06B4F40F1EF2}"/>
               </a:ext>
             </a:extLst>
           </p:cNvPr>
@@ -7812,8 +7983,8 @@
         </p:nvSpPr>
         <p:spPr>
           <a:xfrm>
-            <a:off x="594360" y="1143000"/>
-            <a:ext cx="8412480" cy="443198"/>
+            <a:off x="594360" y="1133856"/>
+            <a:ext cx="8778240" cy="443198"/>
           </a:xfrm>
           <a:prstGeom prst="rect">
             <a:avLst/>
@@ -7833,7 +8004,7 @@
                 </a:solidFill>
                 <a:latin typeface="Aptos" panose="020B0004020202020204" pitchFamily="34" charset="0"/>
               </a:rPr>
-              <a:t>The Streamlit demo calls the same AzureML endpoint twice: base behavior with the adapter disabled, and fine-tuned behavior with the adapter enabled.</a:t>
+              <a:t>The base Gemma weights stay mostly frozen. The training job learns a small LoRA adapter that changes how the model responds to this browser-action contract.</a:t>
             </a:r>
           </a:p>
         </p:txBody>
@@ -7843,7 +8014,7 @@
           <p:cNvPr id="7" name="Rectangle: Rounded Corners 6">
             <a:extLst>
               <a:ext uri="{FF2B5EF4-FFF2-40B4-BE49-F238E27FC236}">
-                <a16:creationId xmlns:a16="http://schemas.microsoft.com/office/drawing/2014/main" id="{6DE11E28-E5E1-8500-8435-4064A0DAD306}"/>
+                <a16:creationId xmlns:a16="http://schemas.microsoft.com/office/drawing/2014/main" id="{B46A8B1B-0EC3-724E-0544-4A256B6AC6EA}"/>
               </a:ext>
             </a:extLst>
           </p:cNvPr>
@@ -7852,8 +8023,8 @@
         </p:nvSpPr>
         <p:spPr>
           <a:xfrm>
-            <a:off x="749808" y="1874520"/>
-            <a:ext cx="3063240" cy="3520440"/>
+            <a:off x="713232" y="1874520"/>
+            <a:ext cx="2487168" cy="3566160"/>
           </a:xfrm>
           <a:prstGeom prst="roundRect">
             <a:avLst/>
@@ -7894,130 +8065,10 @@
       </p:sp>
       <p:sp>
         <p:nvSpPr>
-          <p:cNvPr id="8" name="TextBox 7">
-            <a:extLst>
-              <a:ext uri="{FF2B5EF4-FFF2-40B4-BE49-F238E27FC236}">
-                <a16:creationId xmlns:a16="http://schemas.microsoft.com/office/drawing/2014/main" id="{EFEB2255-708B-519E-8B48-2D6B6B107C5F}"/>
-              </a:ext>
-            </a:extLst>
-          </p:cNvPr>
-          <p:cNvSpPr txBox="1"/>
-          <p:nvPr/>
-        </p:nvSpPr>
-        <p:spPr>
-          <a:xfrm>
-            <a:off x="1042416" y="2167128"/>
-            <a:ext cx="1188720" cy="267766"/>
-          </a:xfrm>
-          <a:prstGeom prst="rect">
-            <a:avLst/>
-          </a:prstGeom>
-          <a:noFill/>
-        </p:spPr>
-        <p:txBody>
-          <a:bodyPr vert="horz" wrap="square" lIns="36576" tIns="18288" rIns="36576" bIns="18288" rtlCol="0">
-            <a:spAutoFit/>
-          </a:bodyPr>
-          <a:lstStyle/>
-          <a:p>
-            <a:r>
-              <a:rPr lang="en-US" sz="1500" b="1">
-                <a:solidFill>
-                  <a:srgbClr val="004578"/>
-                </a:solidFill>
-                <a:latin typeface="Segoe UI" panose="020B0502040204020203" pitchFamily="34" charset="0"/>
-              </a:rPr>
-              <a:t>Base call</a:t>
-            </a:r>
-          </a:p>
-        </p:txBody>
-      </p:sp>
-      <p:sp>
-        <p:nvSpPr>
-          <p:cNvPr id="9" name="TextBox 8">
-            <a:extLst>
-              <a:ext uri="{FF2B5EF4-FFF2-40B4-BE49-F238E27FC236}">
-                <a16:creationId xmlns:a16="http://schemas.microsoft.com/office/drawing/2014/main" id="{2B6AD7DC-45C6-CAC4-C79F-70614DE892E9}"/>
-              </a:ext>
-            </a:extLst>
-          </p:cNvPr>
-          <p:cNvSpPr txBox="1"/>
-          <p:nvPr/>
-        </p:nvSpPr>
-        <p:spPr>
-          <a:xfrm>
-            <a:off x="1042416" y="2615184"/>
-            <a:ext cx="1737360" cy="198516"/>
-          </a:xfrm>
-          <a:prstGeom prst="rect">
-            <a:avLst/>
-          </a:prstGeom>
-          <a:noFill/>
-        </p:spPr>
-        <p:txBody>
-          <a:bodyPr vert="horz" wrap="square" lIns="36576" tIns="18288" rIns="36576" bIns="18288" rtlCol="0">
-            <a:spAutoFit/>
-          </a:bodyPr>
-          <a:lstStyle/>
-          <a:p>
-            <a:r>
-              <a:rPr lang="en-US" sz="1050" b="1">
-                <a:solidFill>
-                  <a:srgbClr val="004578"/>
-                </a:solidFill>
-                <a:latin typeface="Consolas" panose="020B0609020204030204" pitchFamily="49" charset="0"/>
-              </a:rPr>
-              <a:t>use_adapter=false</a:t>
-            </a:r>
-          </a:p>
-        </p:txBody>
-      </p:sp>
-      <p:sp>
-        <p:nvSpPr>
-          <p:cNvPr id="10" name="TextBox 9">
-            <a:extLst>
-              <a:ext uri="{FF2B5EF4-FFF2-40B4-BE49-F238E27FC236}">
-                <a16:creationId xmlns:a16="http://schemas.microsoft.com/office/drawing/2014/main" id="{46B16CFE-1199-94FA-AF6F-4AA2BE465B67}"/>
-              </a:ext>
-            </a:extLst>
-          </p:cNvPr>
-          <p:cNvSpPr txBox="1"/>
-          <p:nvPr/>
-        </p:nvSpPr>
-        <p:spPr>
-          <a:xfrm>
-            <a:off x="1042416" y="3054096"/>
-            <a:ext cx="2240280" cy="614014"/>
-          </a:xfrm>
-          <a:prstGeom prst="rect">
-            <a:avLst/>
-          </a:prstGeom>
-          <a:noFill/>
-        </p:spPr>
-        <p:txBody>
-          <a:bodyPr vert="horz" wrap="square" lIns="36576" tIns="18288" rIns="36576" bIns="18288" rtlCol="0">
-            <a:spAutoFit/>
-          </a:bodyPr>
-          <a:lstStyle/>
-          <a:p>
-            <a:r>
-              <a:rPr lang="en-US" sz="1250">
-                <a:solidFill>
-                  <a:srgbClr val="605E5C"/>
-                </a:solidFill>
-                <a:latin typeface="Aptos" panose="020B0004020202020204" pitchFamily="34" charset="0"/>
-              </a:rPr>
-              <a:t>Good general reasoning, but often brittle selectors and incomplete workflow steps.</a:t>
-            </a:r>
-          </a:p>
-        </p:txBody>
-      </p:sp>
-      <p:sp>
-        <p:nvSpPr>
-          <p:cNvPr id="11" name="Rectangle: Rounded Corners 10">
-            <a:extLst>
-              <a:ext uri="{FF2B5EF4-FFF2-40B4-BE49-F238E27FC236}">
-                <a16:creationId xmlns:a16="http://schemas.microsoft.com/office/drawing/2014/main" id="{0B5D2931-26F1-CDED-9064-2E055B7FC25F}"/>
+          <p:cNvPr id="8" name="Oval 7">
+            <a:extLst>
+              <a:ext uri="{FF2B5EF4-FFF2-40B4-BE49-F238E27FC236}">
+                <a16:creationId xmlns:a16="http://schemas.microsoft.com/office/drawing/2014/main" id="{AE80E16C-1E59-9159-452D-AD2B80E17004}"/>
               </a:ext>
             </a:extLst>
           </p:cNvPr>
@@ -8026,117 +8077,8 @@
         </p:nvSpPr>
         <p:spPr>
           <a:xfrm>
-            <a:off x="4526280" y="1691640"/>
-            <a:ext cx="3063240" cy="3886200"/>
-          </a:xfrm>
-          <a:prstGeom prst="roundRect">
-            <a:avLst/>
-          </a:prstGeom>
-          <a:solidFill>
-            <a:srgbClr val="252423"/>
-          </a:solidFill>
-          <a:ln w="19050" cap="flat" cmpd="sng" algn="ctr">
-            <a:noFill/>
-            <a:prstDash val="solid"/>
-            <a:miter lim="800000"/>
-          </a:ln>
-          <a:effectLst/>
-          <a:extLst>
-            <a:ext uri="{91240B29-F687-4F45-9708-019B960494DF}">
-              <a14:hiddenLine xmlns:a14="http://schemas.microsoft.com/office/drawing/2010/main" w="19050" cap="flat" cmpd="sng" algn="ctr">
-                <a:solidFill>
-                  <a:schemeClr val="accent1">
-                    <a:shade val="15000"/>
-                  </a:schemeClr>
-                </a:solidFill>
-                <a:prstDash val="solid"/>
-                <a:miter lim="800000"/>
-              </a14:hiddenLine>
-            </a:ext>
-          </a:extLst>
-        </p:spPr>
-        <p:style>
-          <a:lnRef idx="2">
-            <a:schemeClr val="accent1">
-              <a:shade val="15000"/>
-            </a:schemeClr>
-          </a:lnRef>
-          <a:fillRef idx="1">
-            <a:schemeClr val="accent1"/>
-          </a:fillRef>
-          <a:effectRef idx="0">
-            <a:schemeClr val="accent1"/>
-          </a:effectRef>
-          <a:fontRef idx="minor">
-            <a:schemeClr val="lt1"/>
-          </a:fontRef>
-        </p:style>
-        <p:txBody>
-          <a:bodyPr rtlCol="0" anchor="ctr"/>
-          <a:lstStyle/>
-          <a:p>
-            <a:pPr algn="ctr"/>
-            <a:endParaRPr lang="en-US"/>
-          </a:p>
-        </p:txBody>
-      </p:sp>
-      <p:sp>
-        <p:nvSpPr>
-          <p:cNvPr id="12" name="TextBox 11">
-            <a:extLst>
-              <a:ext uri="{FF2B5EF4-FFF2-40B4-BE49-F238E27FC236}">
-                <a16:creationId xmlns:a16="http://schemas.microsoft.com/office/drawing/2014/main" id="{79507EFA-5257-EB6C-ACAA-30BB4A361E90}"/>
-              </a:ext>
-            </a:extLst>
-          </p:cNvPr>
-          <p:cNvSpPr txBox="1"/>
-          <p:nvPr/>
-        </p:nvSpPr>
-        <p:spPr>
-          <a:xfrm>
-            <a:off x="4892040" y="2029968"/>
-            <a:ext cx="2331720" cy="498598"/>
-          </a:xfrm>
-          <a:prstGeom prst="rect">
-            <a:avLst/>
-          </a:prstGeom>
-          <a:noFill/>
-        </p:spPr>
-        <p:txBody>
-          <a:bodyPr vert="horz" wrap="square" lIns="36576" tIns="18288" rIns="36576" bIns="18288" rtlCol="0">
-            <a:spAutoFit/>
-          </a:bodyPr>
-          <a:lstStyle/>
-          <a:p>
-            <a:pPr algn="ctr"/>
-            <a:r>
-              <a:rPr lang="en-US" sz="1500" b="1">
-                <a:solidFill>
-                  <a:srgbClr val="FFFFFF"/>
-                </a:solidFill>
-                <a:latin typeface="Aptos Display" panose="020B0004020202020204" pitchFamily="34" charset="0"/>
-              </a:rPr>
-              <a:t>AzureML managed online endpoint</a:t>
-            </a:r>
-          </a:p>
-        </p:txBody>
-      </p:sp>
-      <p:sp>
-        <p:nvSpPr>
-          <p:cNvPr id="13" name="Oval 12">
-            <a:extLst>
-              <a:ext uri="{FF2B5EF4-FFF2-40B4-BE49-F238E27FC236}">
-                <a16:creationId xmlns:a16="http://schemas.microsoft.com/office/drawing/2014/main" id="{29CC9A9F-FEFF-11C5-F31B-59BF4AB7499B}"/>
-              </a:ext>
-            </a:extLst>
-          </p:cNvPr>
-          <p:cNvSpPr/>
-          <p:nvPr/>
-        </p:nvSpPr>
-        <p:spPr>
-          <a:xfrm>
-            <a:off x="5257800" y="2788920"/>
-            <a:ext cx="713232" cy="713232"/>
+            <a:off x="877824" y="2084832"/>
+            <a:ext cx="438912" cy="438912"/>
           </a:xfrm>
           <a:prstGeom prst="ellipse">
             <a:avLst/>
@@ -8191,10 +8133,131 @@
       </p:sp>
       <p:sp>
         <p:nvSpPr>
-          <p:cNvPr id="14" name="Oval 13">
-            <a:extLst>
-              <a:ext uri="{FF2B5EF4-FFF2-40B4-BE49-F238E27FC236}">
-                <a16:creationId xmlns:a16="http://schemas.microsoft.com/office/drawing/2014/main" id="{67BE589E-3DD9-E21D-5388-348360200101}"/>
+          <p:cNvPr id="9" name="TextBox 8">
+            <a:extLst>
+              <a:ext uri="{FF2B5EF4-FFF2-40B4-BE49-F238E27FC236}">
+                <a16:creationId xmlns:a16="http://schemas.microsoft.com/office/drawing/2014/main" id="{B6C91497-72C3-DF3F-F452-54201876450B}"/>
+              </a:ext>
+            </a:extLst>
+          </p:cNvPr>
+          <p:cNvSpPr txBox="1"/>
+          <p:nvPr/>
+        </p:nvSpPr>
+        <p:spPr>
+          <a:xfrm>
+            <a:off x="891540" y="2157984"/>
+            <a:ext cx="411480" cy="190821"/>
+          </a:xfrm>
+          <a:prstGeom prst="rect">
+            <a:avLst/>
+          </a:prstGeom>
+          <a:noFill/>
+        </p:spPr>
+        <p:txBody>
+          <a:bodyPr vert="horz" wrap="square" lIns="36576" tIns="18288" rIns="36576" bIns="18288" rtlCol="0">
+            <a:spAutoFit/>
+          </a:bodyPr>
+          <a:lstStyle/>
+          <a:p>
+            <a:pPr algn="ctr"/>
+            <a:r>
+              <a:rPr lang="en-US" sz="1000" b="1">
+                <a:solidFill>
+                  <a:srgbClr val="FFFFFF"/>
+                </a:solidFill>
+                <a:latin typeface="Segoe UI" panose="020B0502040204020203" pitchFamily="34" charset="0"/>
+              </a:rPr>
+              <a:t>1</a:t>
+            </a:r>
+          </a:p>
+        </p:txBody>
+      </p:sp>
+      <p:sp>
+        <p:nvSpPr>
+          <p:cNvPr id="10" name="TextBox 9">
+            <a:extLst>
+              <a:ext uri="{FF2B5EF4-FFF2-40B4-BE49-F238E27FC236}">
+                <a16:creationId xmlns:a16="http://schemas.microsoft.com/office/drawing/2014/main" id="{7364F904-EEAE-9EFA-F8E0-9DD850B9901E}"/>
+              </a:ext>
+            </a:extLst>
+          </p:cNvPr>
+          <p:cNvSpPr txBox="1"/>
+          <p:nvPr/>
+        </p:nvSpPr>
+        <p:spPr>
+          <a:xfrm>
+            <a:off x="1426464" y="2084832"/>
+            <a:ext cx="1536192" cy="229294"/>
+          </a:xfrm>
+          <a:prstGeom prst="rect">
+            <a:avLst/>
+          </a:prstGeom>
+          <a:noFill/>
+        </p:spPr>
+        <p:txBody>
+          <a:bodyPr vert="horz" wrap="square" lIns="36576" tIns="18288" rIns="36576" bIns="18288" rtlCol="0">
+            <a:spAutoFit/>
+          </a:bodyPr>
+          <a:lstStyle/>
+          <a:p>
+            <a:r>
+              <a:rPr lang="en-US" sz="1250" b="1">
+                <a:solidFill>
+                  <a:srgbClr val="201F1E"/>
+                </a:solidFill>
+                <a:latin typeface="Segoe UI" panose="020B0502040204020203" pitchFamily="34" charset="0"/>
+              </a:rPr>
+              <a:t>Load base Gemma</a:t>
+            </a:r>
+          </a:p>
+        </p:txBody>
+      </p:sp>
+      <p:sp>
+        <p:nvSpPr>
+          <p:cNvPr id="11" name="TextBox 10">
+            <a:extLst>
+              <a:ext uri="{FF2B5EF4-FFF2-40B4-BE49-F238E27FC236}">
+                <a16:creationId xmlns:a16="http://schemas.microsoft.com/office/drawing/2014/main" id="{F527E280-444A-98AC-5DDD-BF9E3260FB9C}"/>
+              </a:ext>
+            </a:extLst>
+          </p:cNvPr>
+          <p:cNvSpPr txBox="1"/>
+          <p:nvPr/>
+        </p:nvSpPr>
+        <p:spPr>
+          <a:xfrm>
+            <a:off x="932688" y="2651760"/>
+            <a:ext cx="2011680" cy="350865"/>
+          </a:xfrm>
+          <a:prstGeom prst="rect">
+            <a:avLst/>
+          </a:prstGeom>
+          <a:noFill/>
+        </p:spPr>
+        <p:txBody>
+          <a:bodyPr vert="horz" wrap="square" lIns="36576" tIns="18288" rIns="36576" bIns="18288" rtlCol="0">
+            <a:spAutoFit/>
+          </a:bodyPr>
+          <a:lstStyle/>
+          <a:p>
+            <a:r>
+              <a:rPr lang="en-US" sz="1020">
+                <a:solidFill>
+                  <a:srgbClr val="605E5C"/>
+                </a:solidFill>
+                <a:latin typeface="Segoe UI" panose="020B0502040204020203" pitchFamily="34" charset="0"/>
+              </a:rPr>
+              <a:t>Transformers loads the catalog model in bf16 on the A100.</a:t>
+            </a:r>
+          </a:p>
+        </p:txBody>
+      </p:sp>
+      <p:sp>
+        <p:nvSpPr>
+          <p:cNvPr id="12" name="Rectangle: Rounded Corners 11">
+            <a:extLst>
+              <a:ext uri="{FF2B5EF4-FFF2-40B4-BE49-F238E27FC236}">
+                <a16:creationId xmlns:a16="http://schemas.microsoft.com/office/drawing/2014/main" id="{C4E27EC3-D4A4-8AA8-1B75-EF2E3158350D}"/>
               </a:ext>
             </a:extLst>
           </p:cNvPr>
@@ -8203,8 +8266,211 @@
         </p:nvSpPr>
         <p:spPr>
           <a:xfrm>
-            <a:off x="6144768" y="2788920"/>
-            <a:ext cx="713232" cy="713232"/>
+            <a:off x="932688" y="3703320"/>
+            <a:ext cx="1993392" cy="566928"/>
+          </a:xfrm>
+          <a:prstGeom prst="roundRect">
+            <a:avLst/>
+          </a:prstGeom>
+          <a:solidFill>
+            <a:srgbClr val="11100F"/>
+          </a:solidFill>
+          <a:ln w="19050" cap="flat" cmpd="sng" algn="ctr">
+            <a:noFill/>
+            <a:prstDash val="solid"/>
+            <a:miter lim="800000"/>
+          </a:ln>
+          <a:effectLst/>
+          <a:extLst>
+            <a:ext uri="{91240B29-F687-4F45-9708-019B960494DF}">
+              <a14:hiddenLine xmlns:a14="http://schemas.microsoft.com/office/drawing/2010/main" w="19050" cap="flat" cmpd="sng" algn="ctr">
+                <a:solidFill>
+                  <a:schemeClr val="accent1">
+                    <a:shade val="15000"/>
+                  </a:schemeClr>
+                </a:solidFill>
+                <a:prstDash val="solid"/>
+                <a:miter lim="800000"/>
+              </a14:hiddenLine>
+            </a:ext>
+          </a:extLst>
+        </p:spPr>
+        <p:style>
+          <a:lnRef idx="2">
+            <a:schemeClr val="accent1">
+              <a:shade val="15000"/>
+            </a:schemeClr>
+          </a:lnRef>
+          <a:fillRef idx="1">
+            <a:schemeClr val="accent1"/>
+          </a:fillRef>
+          <a:effectRef idx="0">
+            <a:schemeClr val="accent1"/>
+          </a:effectRef>
+          <a:fontRef idx="minor">
+            <a:schemeClr val="lt1"/>
+          </a:fontRef>
+        </p:style>
+        <p:txBody>
+          <a:bodyPr rtlCol="0" anchor="ctr"/>
+          <a:lstStyle/>
+          <a:p>
+            <a:pPr algn="ctr"/>
+            <a:endParaRPr lang="en-US"/>
+          </a:p>
+        </p:txBody>
+      </p:sp>
+      <p:sp>
+        <p:nvSpPr>
+          <p:cNvPr id="13" name="TextBox 12">
+            <a:extLst>
+              <a:ext uri="{FF2B5EF4-FFF2-40B4-BE49-F238E27FC236}">
+                <a16:creationId xmlns:a16="http://schemas.microsoft.com/office/drawing/2014/main" id="{2BADED24-4470-1989-35F4-C2AEC81C929A}"/>
+              </a:ext>
+            </a:extLst>
+          </p:cNvPr>
+          <p:cNvSpPr txBox="1"/>
+          <p:nvPr/>
+        </p:nvSpPr>
+        <p:spPr>
+          <a:xfrm>
+            <a:off x="1033272" y="3913632"/>
+            <a:ext cx="1810512" cy="155427"/>
+          </a:xfrm>
+          <a:prstGeom prst="rect">
+            <a:avLst/>
+          </a:prstGeom>
+          <a:noFill/>
+        </p:spPr>
+        <p:txBody>
+          <a:bodyPr vert="horz" wrap="square" lIns="36576" tIns="18288" rIns="36576" bIns="18288" rtlCol="0">
+            <a:spAutoFit/>
+          </a:bodyPr>
+          <a:lstStyle/>
+          <a:p>
+            <a:r>
+              <a:rPr lang="en-US" sz="770">
+                <a:solidFill>
+                  <a:srgbClr val="D7EBFF"/>
+                </a:solidFill>
+                <a:latin typeface="Consolas" panose="020B0609020204030204" pitchFamily="49" charset="0"/>
+              </a:rPr>
+              <a:t>from_pretrained(...)</a:t>
+            </a:r>
+          </a:p>
+        </p:txBody>
+      </p:sp>
+      <p:cxnSp>
+        <p:nvCxnSpPr>
+          <p:cNvPr id="14" name="Straight Connector 13">
+            <a:extLst>
+              <a:ext uri="{FF2B5EF4-FFF2-40B4-BE49-F238E27FC236}">
+                <a16:creationId xmlns:a16="http://schemas.microsoft.com/office/drawing/2014/main" id="{55A1EF84-EAA9-7B90-A19E-DC290FC857E9}"/>
+              </a:ext>
+            </a:extLst>
+          </p:cNvPr>
+          <p:cNvCxnSpPr/>
+          <p:nvPr/>
+        </p:nvCxnSpPr>
+        <p:spPr>
+          <a:xfrm>
+            <a:off x="3218688" y="3657600"/>
+            <a:ext cx="237744" cy="0"/>
+          </a:xfrm>
+          <a:prstGeom prst="line">
+            <a:avLst/>
+          </a:prstGeom>
+          <a:ln w="31750">
+            <a:solidFill>
+              <a:srgbClr val="0078D4"/>
+            </a:solidFill>
+          </a:ln>
+        </p:spPr>
+        <p:style>
+          <a:lnRef idx="2">
+            <a:schemeClr val="accent1"/>
+          </a:lnRef>
+          <a:fillRef idx="0">
+            <a:schemeClr val="accent1"/>
+          </a:fillRef>
+          <a:effectRef idx="1">
+            <a:schemeClr val="accent1"/>
+          </a:effectRef>
+          <a:fontRef idx="minor">
+            <a:schemeClr val="tx1"/>
+          </a:fontRef>
+        </p:style>
+      </p:cxnSp>
+      <p:sp>
+        <p:nvSpPr>
+          <p:cNvPr id="15" name="Rectangle: Rounded Corners 14">
+            <a:extLst>
+              <a:ext uri="{FF2B5EF4-FFF2-40B4-BE49-F238E27FC236}">
+                <a16:creationId xmlns:a16="http://schemas.microsoft.com/office/drawing/2014/main" id="{9B0C6CC0-CF7C-F5DC-9A11-84DCF2091F4C}"/>
+              </a:ext>
+            </a:extLst>
+          </p:cNvPr>
+          <p:cNvSpPr/>
+          <p:nvPr/>
+        </p:nvSpPr>
+        <p:spPr>
+          <a:xfrm>
+            <a:off x="3502152" y="1874520"/>
+            <a:ext cx="2487168" cy="3566160"/>
+          </a:xfrm>
+          <a:prstGeom prst="roundRect">
+            <a:avLst/>
+          </a:prstGeom>
+          <a:solidFill>
+            <a:srgbClr val="FFFFFF"/>
+          </a:solidFill>
+          <a:ln w="6350">
+            <a:solidFill>
+              <a:srgbClr val="D2D0CE"/>
+            </a:solidFill>
+          </a:ln>
+        </p:spPr>
+        <p:style>
+          <a:lnRef idx="2">
+            <a:schemeClr val="accent1">
+              <a:shade val="15000"/>
+            </a:schemeClr>
+          </a:lnRef>
+          <a:fillRef idx="1">
+            <a:schemeClr val="accent1"/>
+          </a:fillRef>
+          <a:effectRef idx="0">
+            <a:schemeClr val="accent1"/>
+          </a:effectRef>
+          <a:fontRef idx="minor">
+            <a:schemeClr val="lt1"/>
+          </a:fontRef>
+        </p:style>
+        <p:txBody>
+          <a:bodyPr rtlCol="0" anchor="ctr"/>
+          <a:lstStyle/>
+          <a:p>
+            <a:pPr algn="ctr"/>
+            <a:endParaRPr lang="en-US"/>
+          </a:p>
+        </p:txBody>
+      </p:sp>
+      <p:sp>
+        <p:nvSpPr>
+          <p:cNvPr id="16" name="Oval 15">
+            <a:extLst>
+              <a:ext uri="{FF2B5EF4-FFF2-40B4-BE49-F238E27FC236}">
+                <a16:creationId xmlns:a16="http://schemas.microsoft.com/office/drawing/2014/main" id="{84FE6B05-702C-5FBE-5EAA-60B095A6048B}"/>
+              </a:ext>
+            </a:extLst>
+          </p:cNvPr>
+          <p:cNvSpPr/>
+          <p:nvPr/>
+        </p:nvSpPr>
+        <p:spPr>
+          <a:xfrm>
+            <a:off x="3666744" y="2084832"/>
+            <a:ext cx="438912" cy="438912"/>
           </a:xfrm>
           <a:prstGeom prst="ellipse">
             <a:avLst/>
@@ -8259,10 +8525,131 @@
       </p:sp>
       <p:sp>
         <p:nvSpPr>
-          <p:cNvPr id="15" name="Oval 14">
-            <a:extLst>
-              <a:ext uri="{FF2B5EF4-FFF2-40B4-BE49-F238E27FC236}">
-                <a16:creationId xmlns:a16="http://schemas.microsoft.com/office/drawing/2014/main" id="{DAC96129-E6E8-05A8-6539-7A8ED94AD14D}"/>
+          <p:cNvPr id="17" name="TextBox 16">
+            <a:extLst>
+              <a:ext uri="{FF2B5EF4-FFF2-40B4-BE49-F238E27FC236}">
+                <a16:creationId xmlns:a16="http://schemas.microsoft.com/office/drawing/2014/main" id="{1522E15E-F344-599B-3307-9B2DD96A7F51}"/>
+              </a:ext>
+            </a:extLst>
+          </p:cNvPr>
+          <p:cNvSpPr txBox="1"/>
+          <p:nvPr/>
+        </p:nvSpPr>
+        <p:spPr>
+          <a:xfrm>
+            <a:off x="3680460" y="2157984"/>
+            <a:ext cx="411480" cy="190821"/>
+          </a:xfrm>
+          <a:prstGeom prst="rect">
+            <a:avLst/>
+          </a:prstGeom>
+          <a:noFill/>
+        </p:spPr>
+        <p:txBody>
+          <a:bodyPr vert="horz" wrap="square" lIns="36576" tIns="18288" rIns="36576" bIns="18288" rtlCol="0">
+            <a:spAutoFit/>
+          </a:bodyPr>
+          <a:lstStyle/>
+          <a:p>
+            <a:pPr algn="ctr"/>
+            <a:r>
+              <a:rPr lang="en-US" sz="1000" b="1">
+                <a:solidFill>
+                  <a:srgbClr val="FFFFFF"/>
+                </a:solidFill>
+                <a:latin typeface="Segoe UI" panose="020B0502040204020203" pitchFamily="34" charset="0"/>
+              </a:rPr>
+              <a:t>2</a:t>
+            </a:r>
+          </a:p>
+        </p:txBody>
+      </p:sp>
+      <p:sp>
+        <p:nvSpPr>
+          <p:cNvPr id="18" name="TextBox 17">
+            <a:extLst>
+              <a:ext uri="{FF2B5EF4-FFF2-40B4-BE49-F238E27FC236}">
+                <a16:creationId xmlns:a16="http://schemas.microsoft.com/office/drawing/2014/main" id="{CBEAA9FB-6A96-0445-0EDA-C9CB1373648C}"/>
+              </a:ext>
+            </a:extLst>
+          </p:cNvPr>
+          <p:cNvSpPr txBox="1"/>
+          <p:nvPr/>
+        </p:nvSpPr>
+        <p:spPr>
+          <a:xfrm>
+            <a:off x="4215384" y="2084832"/>
+            <a:ext cx="1536192" cy="229294"/>
+          </a:xfrm>
+          <a:prstGeom prst="rect">
+            <a:avLst/>
+          </a:prstGeom>
+          <a:noFill/>
+        </p:spPr>
+        <p:txBody>
+          <a:bodyPr vert="horz" wrap="square" lIns="36576" tIns="18288" rIns="36576" bIns="18288" rtlCol="0">
+            <a:spAutoFit/>
+          </a:bodyPr>
+          <a:lstStyle/>
+          <a:p>
+            <a:r>
+              <a:rPr lang="en-US" sz="1250" b="1">
+                <a:solidFill>
+                  <a:srgbClr val="201F1E"/>
+                </a:solidFill>
+                <a:latin typeface="Segoe UI" panose="020B0502040204020203" pitchFamily="34" charset="0"/>
+              </a:rPr>
+              <a:t>Inject LoRA</a:t>
+            </a:r>
+          </a:p>
+        </p:txBody>
+      </p:sp>
+      <p:sp>
+        <p:nvSpPr>
+          <p:cNvPr id="19" name="TextBox 18">
+            <a:extLst>
+              <a:ext uri="{FF2B5EF4-FFF2-40B4-BE49-F238E27FC236}">
+                <a16:creationId xmlns:a16="http://schemas.microsoft.com/office/drawing/2014/main" id="{2FB64EE8-4BA2-1244-56C7-9835050DF873}"/>
+              </a:ext>
+            </a:extLst>
+          </p:cNvPr>
+          <p:cNvSpPr txBox="1"/>
+          <p:nvPr/>
+        </p:nvSpPr>
+        <p:spPr>
+          <a:xfrm>
+            <a:off x="3721608" y="2651760"/>
+            <a:ext cx="2011680" cy="507831"/>
+          </a:xfrm>
+          <a:prstGeom prst="rect">
+            <a:avLst/>
+          </a:prstGeom>
+          <a:noFill/>
+        </p:spPr>
+        <p:txBody>
+          <a:bodyPr vert="horz" wrap="square" lIns="36576" tIns="18288" rIns="36576" bIns="18288" rtlCol="0">
+            <a:spAutoFit/>
+          </a:bodyPr>
+          <a:lstStyle/>
+          <a:p>
+            <a:r>
+              <a:rPr lang="en-US" sz="1020">
+                <a:solidFill>
+                  <a:srgbClr val="605E5C"/>
+                </a:solidFill>
+                <a:latin typeface="Segoe UI" panose="020B0502040204020203" pitchFamily="34" charset="0"/>
+              </a:rPr>
+              <a:t>PEFT adds trainable adapter matrices to attention and MLP projections.</a:t>
+            </a:r>
+          </a:p>
+        </p:txBody>
+      </p:sp>
+      <p:sp>
+        <p:nvSpPr>
+          <p:cNvPr id="20" name="Rectangle: Rounded Corners 19">
+            <a:extLst>
+              <a:ext uri="{FF2B5EF4-FFF2-40B4-BE49-F238E27FC236}">
+                <a16:creationId xmlns:a16="http://schemas.microsoft.com/office/drawing/2014/main" id="{FA3AB708-5A30-D9E0-A2FF-1EA1E3786E70}"/>
               </a:ext>
             </a:extLst>
           </p:cNvPr>
@@ -8271,8 +8658,217 @@
         </p:nvSpPr>
         <p:spPr>
           <a:xfrm>
-            <a:off x="6565392" y="3529584"/>
-            <a:ext cx="713232" cy="713232"/>
+            <a:off x="3721608" y="3703320"/>
+            <a:ext cx="1993392" cy="566928"/>
+          </a:xfrm>
+          <a:prstGeom prst="roundRect">
+            <a:avLst/>
+          </a:prstGeom>
+          <a:solidFill>
+            <a:srgbClr val="11100F"/>
+          </a:solidFill>
+          <a:ln w="19050" cap="flat" cmpd="sng" algn="ctr">
+            <a:noFill/>
+            <a:prstDash val="solid"/>
+            <a:miter lim="800000"/>
+          </a:ln>
+          <a:effectLst/>
+          <a:extLst>
+            <a:ext uri="{91240B29-F687-4F45-9708-019B960494DF}">
+              <a14:hiddenLine xmlns:a14="http://schemas.microsoft.com/office/drawing/2010/main" w="19050" cap="flat" cmpd="sng" algn="ctr">
+                <a:solidFill>
+                  <a:schemeClr val="accent1">
+                    <a:shade val="15000"/>
+                  </a:schemeClr>
+                </a:solidFill>
+                <a:prstDash val="solid"/>
+                <a:miter lim="800000"/>
+              </a14:hiddenLine>
+            </a:ext>
+          </a:extLst>
+        </p:spPr>
+        <p:style>
+          <a:lnRef idx="2">
+            <a:schemeClr val="accent1">
+              <a:shade val="15000"/>
+            </a:schemeClr>
+          </a:lnRef>
+          <a:fillRef idx="1">
+            <a:schemeClr val="accent1"/>
+          </a:fillRef>
+          <a:effectRef idx="0">
+            <a:schemeClr val="accent1"/>
+          </a:effectRef>
+          <a:fontRef idx="minor">
+            <a:schemeClr val="lt1"/>
+          </a:fontRef>
+        </p:style>
+        <p:txBody>
+          <a:bodyPr rtlCol="0" anchor="ctr"/>
+          <a:lstStyle/>
+          <a:p>
+            <a:pPr algn="ctr"/>
+            <a:endParaRPr lang="en-US"/>
+          </a:p>
+        </p:txBody>
+      </p:sp>
+      <p:sp>
+        <p:nvSpPr>
+          <p:cNvPr id="21" name="TextBox 20">
+            <a:extLst>
+              <a:ext uri="{FF2B5EF4-FFF2-40B4-BE49-F238E27FC236}">
+                <a16:creationId xmlns:a16="http://schemas.microsoft.com/office/drawing/2014/main" id="{6F5681D3-47DD-DF10-145C-DB5790A44477}"/>
+              </a:ext>
+            </a:extLst>
+          </p:cNvPr>
+          <p:cNvSpPr txBox="1"/>
+          <p:nvPr/>
+        </p:nvSpPr>
+        <p:spPr>
+          <a:xfrm>
+            <a:off x="3822192" y="3913632"/>
+            <a:ext cx="1810512" cy="155427"/>
+          </a:xfrm>
+          <a:prstGeom prst="rect">
+            <a:avLst/>
+          </a:prstGeom>
+          <a:noFill/>
+        </p:spPr>
+        <p:txBody>
+          <a:bodyPr vert="horz" wrap="square" lIns="36576" tIns="18288" rIns="36576" bIns="18288" rtlCol="0">
+            <a:spAutoFit/>
+          </a:bodyPr>
+          <a:lstStyle/>
+          <a:p>
+            <a:r>
+              <a:rPr lang="pt-BR" sz="770">
+                <a:solidFill>
+                  <a:srgbClr val="D7EBFF"/>
+                </a:solidFill>
+                <a:latin typeface="Consolas" panose="020B0609020204030204" pitchFamily="49" charset="0"/>
+              </a:rPr>
+              <a:t>LoraConfig(r=32, alpha=64)</a:t>
+            </a:r>
+            <a:endParaRPr lang="en-US" sz="770">
+              <a:solidFill>
+                <a:srgbClr val="D7EBFF"/>
+              </a:solidFill>
+              <a:latin typeface="Consolas" panose="020B0609020204030204" pitchFamily="49" charset="0"/>
+            </a:endParaRPr>
+          </a:p>
+        </p:txBody>
+      </p:sp>
+      <p:cxnSp>
+        <p:nvCxnSpPr>
+          <p:cNvPr id="22" name="Straight Connector 21">
+            <a:extLst>
+              <a:ext uri="{FF2B5EF4-FFF2-40B4-BE49-F238E27FC236}">
+                <a16:creationId xmlns:a16="http://schemas.microsoft.com/office/drawing/2014/main" id="{EDCEBE23-6C88-2D87-7B4F-19ACD5B1AF13}"/>
+              </a:ext>
+            </a:extLst>
+          </p:cNvPr>
+          <p:cNvCxnSpPr/>
+          <p:nvPr/>
+        </p:nvCxnSpPr>
+        <p:spPr>
+          <a:xfrm>
+            <a:off x="6007608" y="3657600"/>
+            <a:ext cx="237744" cy="0"/>
+          </a:xfrm>
+          <a:prstGeom prst="line">
+            <a:avLst/>
+          </a:prstGeom>
+          <a:ln w="31750">
+            <a:solidFill>
+              <a:srgbClr val="5C2D91"/>
+            </a:solidFill>
+          </a:ln>
+        </p:spPr>
+        <p:style>
+          <a:lnRef idx="2">
+            <a:schemeClr val="accent1"/>
+          </a:lnRef>
+          <a:fillRef idx="0">
+            <a:schemeClr val="accent1"/>
+          </a:fillRef>
+          <a:effectRef idx="1">
+            <a:schemeClr val="accent1"/>
+          </a:effectRef>
+          <a:fontRef idx="minor">
+            <a:schemeClr val="tx1"/>
+          </a:fontRef>
+        </p:style>
+      </p:cxnSp>
+      <p:sp>
+        <p:nvSpPr>
+          <p:cNvPr id="23" name="Rectangle: Rounded Corners 22">
+            <a:extLst>
+              <a:ext uri="{FF2B5EF4-FFF2-40B4-BE49-F238E27FC236}">
+                <a16:creationId xmlns:a16="http://schemas.microsoft.com/office/drawing/2014/main" id="{5A282FB8-A77D-AC6C-7CB6-070865A9CEFA}"/>
+              </a:ext>
+            </a:extLst>
+          </p:cNvPr>
+          <p:cNvSpPr/>
+          <p:nvPr/>
+        </p:nvSpPr>
+        <p:spPr>
+          <a:xfrm>
+            <a:off x="6291072" y="1874520"/>
+            <a:ext cx="2487167" cy="3566160"/>
+          </a:xfrm>
+          <a:prstGeom prst="roundRect">
+            <a:avLst/>
+          </a:prstGeom>
+          <a:solidFill>
+            <a:srgbClr val="FFFFFF"/>
+          </a:solidFill>
+          <a:ln w="6350">
+            <a:solidFill>
+              <a:srgbClr val="D2D0CE"/>
+            </a:solidFill>
+          </a:ln>
+        </p:spPr>
+        <p:style>
+          <a:lnRef idx="2">
+            <a:schemeClr val="accent1">
+              <a:shade val="15000"/>
+            </a:schemeClr>
+          </a:lnRef>
+          <a:fillRef idx="1">
+            <a:schemeClr val="accent1"/>
+          </a:fillRef>
+          <a:effectRef idx="0">
+            <a:schemeClr val="accent1"/>
+          </a:effectRef>
+          <a:fontRef idx="minor">
+            <a:schemeClr val="lt1"/>
+          </a:fontRef>
+        </p:style>
+        <p:txBody>
+          <a:bodyPr rtlCol="0" anchor="ctr"/>
+          <a:lstStyle/>
+          <a:p>
+            <a:pPr algn="ctr"/>
+            <a:endParaRPr lang="en-US"/>
+          </a:p>
+        </p:txBody>
+      </p:sp>
+      <p:sp>
+        <p:nvSpPr>
+          <p:cNvPr id="24" name="Oval 23">
+            <a:extLst>
+              <a:ext uri="{FF2B5EF4-FFF2-40B4-BE49-F238E27FC236}">
+                <a16:creationId xmlns:a16="http://schemas.microsoft.com/office/drawing/2014/main" id="{A20F9F01-D2B5-3BBE-323E-BADF879D886E}"/>
+              </a:ext>
+            </a:extLst>
+          </p:cNvPr>
+          <p:cNvSpPr/>
+          <p:nvPr/>
+        </p:nvSpPr>
+        <p:spPr>
+          <a:xfrm>
+            <a:off x="6455664" y="2084832"/>
+            <a:ext cx="438912" cy="438912"/>
           </a:xfrm>
           <a:prstGeom prst="ellipse">
             <a:avLst/>
@@ -8327,10 +8923,131 @@
       </p:sp>
       <p:sp>
         <p:nvSpPr>
-          <p:cNvPr id="16" name="Oval 15">
-            <a:extLst>
-              <a:ext uri="{FF2B5EF4-FFF2-40B4-BE49-F238E27FC236}">
-                <a16:creationId xmlns:a16="http://schemas.microsoft.com/office/drawing/2014/main" id="{0780BE5F-C0D2-F777-7FBF-732DC8D0E3C8}"/>
+          <p:cNvPr id="25" name="TextBox 24">
+            <a:extLst>
+              <a:ext uri="{FF2B5EF4-FFF2-40B4-BE49-F238E27FC236}">
+                <a16:creationId xmlns:a16="http://schemas.microsoft.com/office/drawing/2014/main" id="{42B7CEF8-2F2F-E53D-D427-07B10A882A3A}"/>
+              </a:ext>
+            </a:extLst>
+          </p:cNvPr>
+          <p:cNvSpPr txBox="1"/>
+          <p:nvPr/>
+        </p:nvSpPr>
+        <p:spPr>
+          <a:xfrm>
+            <a:off x="6469380" y="2157984"/>
+            <a:ext cx="411480" cy="190821"/>
+          </a:xfrm>
+          <a:prstGeom prst="rect">
+            <a:avLst/>
+          </a:prstGeom>
+          <a:noFill/>
+        </p:spPr>
+        <p:txBody>
+          <a:bodyPr vert="horz" wrap="square" lIns="36576" tIns="18288" rIns="36576" bIns="18288" rtlCol="0">
+            <a:spAutoFit/>
+          </a:bodyPr>
+          <a:lstStyle/>
+          <a:p>
+            <a:pPr algn="ctr"/>
+            <a:r>
+              <a:rPr lang="en-US" sz="1000" b="1">
+                <a:solidFill>
+                  <a:srgbClr val="FFFFFF"/>
+                </a:solidFill>
+                <a:latin typeface="Segoe UI" panose="020B0502040204020203" pitchFamily="34" charset="0"/>
+              </a:rPr>
+              <a:t>3</a:t>
+            </a:r>
+          </a:p>
+        </p:txBody>
+      </p:sp>
+      <p:sp>
+        <p:nvSpPr>
+          <p:cNvPr id="26" name="TextBox 25">
+            <a:extLst>
+              <a:ext uri="{FF2B5EF4-FFF2-40B4-BE49-F238E27FC236}">
+                <a16:creationId xmlns:a16="http://schemas.microsoft.com/office/drawing/2014/main" id="{10D46360-BB87-DD72-7BC6-A3013CE60CB2}"/>
+              </a:ext>
+            </a:extLst>
+          </p:cNvPr>
+          <p:cNvSpPr txBox="1"/>
+          <p:nvPr/>
+        </p:nvSpPr>
+        <p:spPr>
+          <a:xfrm>
+            <a:off x="7004304" y="2084832"/>
+            <a:ext cx="1536192" cy="229294"/>
+          </a:xfrm>
+          <a:prstGeom prst="rect">
+            <a:avLst/>
+          </a:prstGeom>
+          <a:noFill/>
+        </p:spPr>
+        <p:txBody>
+          <a:bodyPr vert="horz" wrap="square" lIns="36576" tIns="18288" rIns="36576" bIns="18288" rtlCol="0">
+            <a:spAutoFit/>
+          </a:bodyPr>
+          <a:lstStyle/>
+          <a:p>
+            <a:r>
+              <a:rPr lang="en-US" sz="1250" b="1">
+                <a:solidFill>
+                  <a:srgbClr val="201F1E"/>
+                </a:solidFill>
+                <a:latin typeface="Segoe UI" panose="020B0502040204020203" pitchFamily="34" charset="0"/>
+              </a:rPr>
+              <a:t>Run SFT</a:t>
+            </a:r>
+          </a:p>
+        </p:txBody>
+      </p:sp>
+      <p:sp>
+        <p:nvSpPr>
+          <p:cNvPr id="27" name="TextBox 26">
+            <a:extLst>
+              <a:ext uri="{FF2B5EF4-FFF2-40B4-BE49-F238E27FC236}">
+                <a16:creationId xmlns:a16="http://schemas.microsoft.com/office/drawing/2014/main" id="{E3CDC0F1-A2E0-3D40-D55F-9C5C6B1B4F7D}"/>
+              </a:ext>
+            </a:extLst>
+          </p:cNvPr>
+          <p:cNvSpPr txBox="1"/>
+          <p:nvPr/>
+        </p:nvSpPr>
+        <p:spPr>
+          <a:xfrm>
+            <a:off x="6510528" y="2651760"/>
+            <a:ext cx="2011680" cy="507831"/>
+          </a:xfrm>
+          <a:prstGeom prst="rect">
+            <a:avLst/>
+          </a:prstGeom>
+          <a:noFill/>
+        </p:spPr>
+        <p:txBody>
+          <a:bodyPr vert="horz" wrap="square" lIns="36576" tIns="18288" rIns="36576" bIns="18288" rtlCol="0">
+            <a:spAutoFit/>
+          </a:bodyPr>
+          <a:lstStyle/>
+          <a:p>
+            <a:r>
+              <a:rPr lang="en-US" sz="1020">
+                <a:solidFill>
+                  <a:srgbClr val="605E5C"/>
+                </a:solidFill>
+                <a:latin typeface="Segoe UI" panose="020B0502040204020203" pitchFamily="34" charset="0"/>
+              </a:rPr>
+              <a:t>TRL SFTTrainer learns from messages: system, user DOM, assistant JSON.</a:t>
+            </a:r>
+          </a:p>
+        </p:txBody>
+      </p:sp>
+      <p:sp>
+        <p:nvSpPr>
+          <p:cNvPr id="28" name="Rectangle: Rounded Corners 27">
+            <a:extLst>
+              <a:ext uri="{FF2B5EF4-FFF2-40B4-BE49-F238E27FC236}">
+                <a16:creationId xmlns:a16="http://schemas.microsoft.com/office/drawing/2014/main" id="{3CD84674-E448-DF9A-05C7-3A07DE2EFBCB}"/>
               </a:ext>
             </a:extLst>
           </p:cNvPr>
@@ -8339,14 +9056,14 @@
         </p:nvSpPr>
         <p:spPr>
           <a:xfrm>
-            <a:off x="5669280" y="3529584"/>
-            <a:ext cx="713232" cy="713232"/>
-          </a:xfrm>
-          <a:prstGeom prst="ellipse">
+            <a:off x="6510528" y="3703320"/>
+            <a:ext cx="1993392" cy="566928"/>
+          </a:xfrm>
+          <a:prstGeom prst="roundRect">
             <a:avLst/>
           </a:prstGeom>
           <a:solidFill>
-            <a:srgbClr val="038387"/>
+            <a:srgbClr val="11100F"/>
           </a:solidFill>
           <a:ln w="19050" cap="flat" cmpd="sng" algn="ctr">
             <a:noFill/>
@@ -8395,10 +9112,10 @@
       </p:sp>
       <p:sp>
         <p:nvSpPr>
-          <p:cNvPr id="17" name="TextBox 16">
-            <a:extLst>
-              <a:ext uri="{FF2B5EF4-FFF2-40B4-BE49-F238E27FC236}">
-                <a16:creationId xmlns:a16="http://schemas.microsoft.com/office/drawing/2014/main" id="{C30A038F-EC9D-99F8-396E-01F16461EF29}"/>
+          <p:cNvPr id="29" name="TextBox 28">
+            <a:extLst>
+              <a:ext uri="{FF2B5EF4-FFF2-40B4-BE49-F238E27FC236}">
+                <a16:creationId xmlns:a16="http://schemas.microsoft.com/office/drawing/2014/main" id="{398F2643-85BD-979C-C860-64A9D7867FAB}"/>
               </a:ext>
             </a:extLst>
           </p:cNvPr>
@@ -8407,8 +9124,8 @@
         </p:nvSpPr>
         <p:spPr>
           <a:xfrm>
-            <a:off x="5641848" y="3182112"/>
-            <a:ext cx="1051560" cy="498598"/>
+            <a:off x="6611112" y="3913632"/>
+            <a:ext cx="1810512" cy="155427"/>
           </a:xfrm>
           <a:prstGeom prst="rect">
             <a:avLst/>
@@ -8421,102 +9138,65 @@
           </a:bodyPr>
           <a:lstStyle/>
           <a:p>
-            <a:pPr algn="ctr"/>
-            <a:r>
-              <a:rPr lang="en-US" sz="1500" b="1">
-                <a:solidFill>
-                  <a:srgbClr val="FFFFFF"/>
-                </a:solidFill>
-                <a:latin typeface="Aptos Display" panose="020B0004020202020204" pitchFamily="34" charset="0"/>
-              </a:rPr>
-              <a:t>base +</a:t>
-            </a:r>
-          </a:p>
-          <a:p>
-            <a:pPr algn="ctr"/>
-            <a:r>
-              <a:rPr lang="en-US" sz="1500" b="1">
-                <a:solidFill>
-                  <a:srgbClr val="FFFFFF"/>
-                </a:solidFill>
-                <a:latin typeface="Aptos Display" panose="020B0004020202020204" pitchFamily="34" charset="0"/>
-              </a:rPr>
-              <a:t>LoRA</a:t>
-            </a:r>
-          </a:p>
-        </p:txBody>
-      </p:sp>
-      <p:sp>
-        <p:nvSpPr>
-          <p:cNvPr id="18" name="TextBox 17">
-            <a:extLst>
-              <a:ext uri="{FF2B5EF4-FFF2-40B4-BE49-F238E27FC236}">
-                <a16:creationId xmlns:a16="http://schemas.microsoft.com/office/drawing/2014/main" id="{D4263B94-129A-9393-1D1B-D398E2C63E3B}"/>
-              </a:ext>
-            </a:extLst>
-          </p:cNvPr>
-          <p:cNvSpPr txBox="1"/>
-          <p:nvPr/>
-        </p:nvSpPr>
-        <p:spPr>
-          <a:xfrm>
-            <a:off x="4983480" y="4498848"/>
-            <a:ext cx="2240280" cy="461665"/>
-          </a:xfrm>
-          <a:prstGeom prst="rect">
-            <a:avLst/>
-          </a:prstGeom>
-          <a:noFill/>
-        </p:spPr>
-        <p:txBody>
-          <a:bodyPr vert="horz" wrap="square" lIns="36576" tIns="18288" rIns="36576" bIns="18288" rtlCol="0">
-            <a:spAutoFit/>
-          </a:bodyPr>
-          <a:lstStyle/>
-          <a:p>
-            <a:pPr algn="ctr"/>
-            <a:r>
-              <a:rPr lang="en-US" sz="920">
+            <a:r>
+              <a:rPr lang="en-US" sz="770">
                 <a:solidFill>
                   <a:srgbClr val="D7EBFF"/>
                 </a:solidFill>
-                <a:latin typeface="Segoe UI" panose="020B0502040204020203" pitchFamily="34" charset="0"/>
-              </a:rPr>
-              <a:t>Deployment: ftadapter</a:t>
-            </a:r>
-          </a:p>
-          <a:p>
-            <a:pPr algn="ctr"/>
-            <a:r>
-              <a:rPr lang="en-US" sz="920">
-                <a:solidFill>
-                  <a:srgbClr val="D7EBFF"/>
-                </a:solidFill>
-                <a:latin typeface="Segoe UI" panose="020B0502040204020203" pitchFamily="34" charset="0"/>
-              </a:rPr>
-              <a:t>SKU: Standard_NC24ads_A100_v4</a:t>
-            </a:r>
-          </a:p>
-          <a:p>
-            <a:pPr algn="ctr"/>
-            <a:r>
-              <a:rPr lang="en-US" sz="920">
-                <a:solidFill>
-                  <a:srgbClr val="D7EBFF"/>
-                </a:solidFill>
-                <a:latin typeface="Segoe UI" panose="020B0502040204020203" pitchFamily="34" charset="0"/>
-              </a:rPr>
-              <a:t>Mode: catalog base + LoRA adapter</a:t>
-            </a:r>
-          </a:p>
-        </p:txBody>
-      </p:sp>
-      <p:sp>
-        <p:nvSpPr>
-          <p:cNvPr id="19" name="Rectangle: Rounded Corners 18">
-            <a:extLst>
-              <a:ext uri="{FF2B5EF4-FFF2-40B4-BE49-F238E27FC236}">
-                <a16:creationId xmlns:a16="http://schemas.microsoft.com/office/drawing/2014/main" id="{3DEEED32-9938-4B93-AE0E-9DFF740CBB0E}"/>
+                <a:latin typeface="Consolas" panose="020B0609020204030204" pitchFamily="49" charset="0"/>
+              </a:rPr>
+              <a:t>trainer = SFTTrainer(...)</a:t>
+            </a:r>
+          </a:p>
+        </p:txBody>
+      </p:sp>
+      <p:cxnSp>
+        <p:nvCxnSpPr>
+          <p:cNvPr id="30" name="Straight Connector 29">
+            <a:extLst>
+              <a:ext uri="{FF2B5EF4-FFF2-40B4-BE49-F238E27FC236}">
+                <a16:creationId xmlns:a16="http://schemas.microsoft.com/office/drawing/2014/main" id="{796F3F75-D0AE-AF3D-77AF-C612BD61E452}"/>
+              </a:ext>
+            </a:extLst>
+          </p:cNvPr>
+          <p:cNvCxnSpPr/>
+          <p:nvPr/>
+        </p:nvCxnSpPr>
+        <p:spPr>
+          <a:xfrm>
+            <a:off x="8796528" y="3657600"/>
+            <a:ext cx="237744" cy="0"/>
+          </a:xfrm>
+          <a:prstGeom prst="line">
+            <a:avLst/>
+          </a:prstGeom>
+          <a:ln w="31750">
+            <a:solidFill>
+              <a:srgbClr val="107C10"/>
+            </a:solidFill>
+          </a:ln>
+        </p:spPr>
+        <p:style>
+          <a:lnRef idx="2">
+            <a:schemeClr val="accent1"/>
+          </a:lnRef>
+          <a:fillRef idx="0">
+            <a:schemeClr val="accent1"/>
+          </a:fillRef>
+          <a:effectRef idx="1">
+            <a:schemeClr val="accent1"/>
+          </a:effectRef>
+          <a:fontRef idx="minor">
+            <a:schemeClr val="tx1"/>
+          </a:fontRef>
+        </p:style>
+      </p:cxnSp>
+      <p:sp>
+        <p:nvSpPr>
+          <p:cNvPr id="31" name="Rectangle: Rounded Corners 30">
+            <a:extLst>
+              <a:ext uri="{FF2B5EF4-FFF2-40B4-BE49-F238E27FC236}">
+                <a16:creationId xmlns:a16="http://schemas.microsoft.com/office/drawing/2014/main" id="{24296737-9D03-FAEA-DA5F-26ED578DA45F}"/>
               </a:ext>
             </a:extLst>
           </p:cNvPr>
@@ -8525,8 +9205,8 @@
         </p:nvSpPr>
         <p:spPr>
           <a:xfrm>
-            <a:off x="8321040" y="1874520"/>
-            <a:ext cx="3063240" cy="3520440"/>
+            <a:off x="9079992" y="1874520"/>
+            <a:ext cx="2487169" cy="3566160"/>
           </a:xfrm>
           <a:prstGeom prst="roundRect">
             <a:avLst/>
@@ -8567,212 +9247,10 @@
       </p:sp>
       <p:sp>
         <p:nvSpPr>
-          <p:cNvPr id="20" name="TextBox 19">
-            <a:extLst>
-              <a:ext uri="{FF2B5EF4-FFF2-40B4-BE49-F238E27FC236}">
-                <a16:creationId xmlns:a16="http://schemas.microsoft.com/office/drawing/2014/main" id="{A459C56B-BDC5-08BE-D362-210081B61A55}"/>
-              </a:ext>
-            </a:extLst>
-          </p:cNvPr>
-          <p:cNvSpPr txBox="1"/>
-          <p:nvPr/>
-        </p:nvSpPr>
-        <p:spPr>
-          <a:xfrm>
-            <a:off x="8613648" y="2167128"/>
-            <a:ext cx="1600200" cy="267766"/>
-          </a:xfrm>
-          <a:prstGeom prst="rect">
-            <a:avLst/>
-          </a:prstGeom>
-          <a:noFill/>
-        </p:spPr>
-        <p:txBody>
-          <a:bodyPr vert="horz" wrap="square" lIns="36576" tIns="18288" rIns="36576" bIns="18288" rtlCol="0">
-            <a:spAutoFit/>
-          </a:bodyPr>
-          <a:lstStyle/>
-          <a:p>
-            <a:r>
-              <a:rPr lang="en-US" sz="1500" b="1">
-                <a:solidFill>
-                  <a:srgbClr val="107C10"/>
-                </a:solidFill>
-                <a:latin typeface="Segoe UI" panose="020B0502040204020203" pitchFamily="34" charset="0"/>
-              </a:rPr>
-              <a:t>Fine-tuned call</a:t>
-            </a:r>
-          </a:p>
-        </p:txBody>
-      </p:sp>
-      <p:sp>
-        <p:nvSpPr>
-          <p:cNvPr id="21" name="TextBox 20">
-            <a:extLst>
-              <a:ext uri="{FF2B5EF4-FFF2-40B4-BE49-F238E27FC236}">
-                <a16:creationId xmlns:a16="http://schemas.microsoft.com/office/drawing/2014/main" id="{10585C69-6240-A364-368B-5F56C3C3E485}"/>
-              </a:ext>
-            </a:extLst>
-          </p:cNvPr>
-          <p:cNvSpPr txBox="1"/>
-          <p:nvPr/>
-        </p:nvSpPr>
-        <p:spPr>
-          <a:xfrm>
-            <a:off x="8613648" y="2615184"/>
-            <a:ext cx="1737360" cy="198516"/>
-          </a:xfrm>
-          <a:prstGeom prst="rect">
-            <a:avLst/>
-          </a:prstGeom>
-          <a:noFill/>
-        </p:spPr>
-        <p:txBody>
-          <a:bodyPr vert="horz" wrap="square" lIns="36576" tIns="18288" rIns="36576" bIns="18288" rtlCol="0">
-            <a:spAutoFit/>
-          </a:bodyPr>
-          <a:lstStyle/>
-          <a:p>
-            <a:r>
-              <a:rPr lang="en-US" sz="1050" b="1">
-                <a:solidFill>
-                  <a:srgbClr val="107C10"/>
-                </a:solidFill>
-                <a:latin typeface="Consolas" panose="020B0609020204030204" pitchFamily="49" charset="0"/>
-              </a:rPr>
-              <a:t>use_adapter=true</a:t>
-            </a:r>
-          </a:p>
-        </p:txBody>
-      </p:sp>
-      <p:sp>
-        <p:nvSpPr>
-          <p:cNvPr id="22" name="TextBox 21">
-            <a:extLst>
-              <a:ext uri="{FF2B5EF4-FFF2-40B4-BE49-F238E27FC236}">
-                <a16:creationId xmlns:a16="http://schemas.microsoft.com/office/drawing/2014/main" id="{E24A5933-5E63-D86E-8618-A0989DD8BD14}"/>
-              </a:ext>
-            </a:extLst>
-          </p:cNvPr>
-          <p:cNvSpPr txBox="1"/>
-          <p:nvPr/>
-        </p:nvSpPr>
-        <p:spPr>
-          <a:xfrm>
-            <a:off x="8613648" y="3054096"/>
-            <a:ext cx="2240280" cy="614014"/>
-          </a:xfrm>
-          <a:prstGeom prst="rect">
-            <a:avLst/>
-          </a:prstGeom>
-          <a:noFill/>
-        </p:spPr>
-        <p:txBody>
-          <a:bodyPr vert="horz" wrap="square" lIns="36576" tIns="18288" rIns="36576" bIns="18288" rtlCol="0">
-            <a:spAutoFit/>
-          </a:bodyPr>
-          <a:lstStyle/>
-          <a:p>
-            <a:r>
-              <a:rPr lang="en-US" sz="1250">
-                <a:solidFill>
-                  <a:srgbClr val="605E5C"/>
-                </a:solidFill>
-                <a:latin typeface="Aptos" panose="020B0004020202020204" pitchFamily="34" charset="0"/>
-              </a:rPr>
-              <a:t>Learns the EIM contract: stable data-eim selectors, action order, and no prose.</a:t>
-            </a:r>
-          </a:p>
-        </p:txBody>
-      </p:sp>
-      <p:cxnSp>
-        <p:nvCxnSpPr>
-          <p:cNvPr id="23" name="Straight Connector 22">
-            <a:extLst>
-              <a:ext uri="{FF2B5EF4-FFF2-40B4-BE49-F238E27FC236}">
-                <a16:creationId xmlns:a16="http://schemas.microsoft.com/office/drawing/2014/main" id="{C86E6A0D-7D5D-6CA9-6BD2-64ABE546B60D}"/>
-              </a:ext>
-            </a:extLst>
-          </p:cNvPr>
-          <p:cNvCxnSpPr/>
-          <p:nvPr/>
-        </p:nvCxnSpPr>
-        <p:spPr>
-          <a:xfrm>
-            <a:off x="3822192" y="3529584"/>
-            <a:ext cx="658368" cy="0"/>
-          </a:xfrm>
-          <a:prstGeom prst="line">
-            <a:avLst/>
-          </a:prstGeom>
-          <a:ln w="38100">
-            <a:solidFill>
-              <a:srgbClr val="0078D4"/>
-            </a:solidFill>
-          </a:ln>
-        </p:spPr>
-        <p:style>
-          <a:lnRef idx="2">
-            <a:schemeClr val="accent1"/>
-          </a:lnRef>
-          <a:fillRef idx="0">
-            <a:schemeClr val="accent1"/>
-          </a:fillRef>
-          <a:effectRef idx="1">
-            <a:schemeClr val="accent1"/>
-          </a:effectRef>
-          <a:fontRef idx="minor">
-            <a:schemeClr val="tx1"/>
-          </a:fontRef>
-        </p:style>
-      </p:cxnSp>
-      <p:cxnSp>
-        <p:nvCxnSpPr>
-          <p:cNvPr id="24" name="Straight Connector 23">
-            <a:extLst>
-              <a:ext uri="{FF2B5EF4-FFF2-40B4-BE49-F238E27FC236}">
-                <a16:creationId xmlns:a16="http://schemas.microsoft.com/office/drawing/2014/main" id="{AA624DCF-5404-9FC2-374E-4543BD1FC751}"/>
-              </a:ext>
-            </a:extLst>
-          </p:cNvPr>
-          <p:cNvCxnSpPr/>
-          <p:nvPr/>
-        </p:nvCxnSpPr>
-        <p:spPr>
-          <a:xfrm>
-            <a:off x="7607808" y="3529584"/>
-            <a:ext cx="667512" cy="0"/>
-          </a:xfrm>
-          <a:prstGeom prst="line">
-            <a:avLst/>
-          </a:prstGeom>
-          <a:ln w="38100">
-            <a:solidFill>
-              <a:srgbClr val="107C10"/>
-            </a:solidFill>
-          </a:ln>
-        </p:spPr>
-        <p:style>
-          <a:lnRef idx="2">
-            <a:schemeClr val="accent1"/>
-          </a:lnRef>
-          <a:fillRef idx="0">
-            <a:schemeClr val="accent1"/>
-          </a:fillRef>
-          <a:effectRef idx="1">
-            <a:schemeClr val="accent1"/>
-          </a:effectRef>
-          <a:fontRef idx="minor">
-            <a:schemeClr val="tx1"/>
-          </a:fontRef>
-        </p:style>
-      </p:cxnSp>
-      <p:sp>
-        <p:nvSpPr>
-          <p:cNvPr id="25" name="Rectangle: Rounded Corners 24">
-            <a:extLst>
-              <a:ext uri="{FF2B5EF4-FFF2-40B4-BE49-F238E27FC236}">
-                <a16:creationId xmlns:a16="http://schemas.microsoft.com/office/drawing/2014/main" id="{7BFAB17E-964F-B2DF-D777-383945946A52}"/>
+          <p:cNvPr id="32" name="Oval 31">
+            <a:extLst>
+              <a:ext uri="{FF2B5EF4-FFF2-40B4-BE49-F238E27FC236}">
+                <a16:creationId xmlns:a16="http://schemas.microsoft.com/office/drawing/2014/main" id="{9C39E235-1A79-53D9-7C90-BE001F2DFFAF}"/>
               </a:ext>
             </a:extLst>
           </p:cNvPr>
@@ -8781,14 +9259,14 @@
         </p:nvSpPr>
         <p:spPr>
           <a:xfrm>
-            <a:off x="1993392" y="5998464"/>
-            <a:ext cx="8211312" cy="402336"/>
-          </a:xfrm>
-          <a:prstGeom prst="roundRect">
+            <a:off x="9244584" y="2084832"/>
+            <a:ext cx="438912" cy="438912"/>
+          </a:xfrm>
+          <a:prstGeom prst="ellipse">
             <a:avLst/>
           </a:prstGeom>
           <a:solidFill>
-            <a:srgbClr val="DFF6DD"/>
+            <a:srgbClr val="FF8C00"/>
           </a:solidFill>
           <a:ln w="19050" cap="flat" cmpd="sng" algn="ctr">
             <a:noFill/>
@@ -8837,10 +9315,10 @@
       </p:sp>
       <p:sp>
         <p:nvSpPr>
-          <p:cNvPr id="26" name="TextBox 25">
-            <a:extLst>
-              <a:ext uri="{FF2B5EF4-FFF2-40B4-BE49-F238E27FC236}">
-                <a16:creationId xmlns:a16="http://schemas.microsoft.com/office/drawing/2014/main" id="{5CD11B8A-D5D5-0DD6-4DD5-62284C376588}"/>
+          <p:cNvPr id="33" name="TextBox 32">
+            <a:extLst>
+              <a:ext uri="{FF2B5EF4-FFF2-40B4-BE49-F238E27FC236}">
+                <a16:creationId xmlns:a16="http://schemas.microsoft.com/office/drawing/2014/main" id="{CBBCDD22-F24E-1BAB-D82D-9CFD72E3942F}"/>
               </a:ext>
             </a:extLst>
           </p:cNvPr>
@@ -8849,8 +9327,8 @@
         </p:nvSpPr>
         <p:spPr>
           <a:xfrm>
-            <a:off x="2176272" y="6126480"/>
-            <a:ext cx="7845552" cy="172355"/>
+            <a:off x="9258300" y="2157984"/>
+            <a:ext cx="411480" cy="190821"/>
           </a:xfrm>
           <a:prstGeom prst="rect">
             <a:avLst/>
@@ -8865,21 +9343,365 @@
           <a:p>
             <a:pPr algn="ctr"/>
             <a:r>
-              <a:rPr lang="en-US" sz="880" b="1">
-                <a:solidFill>
-                  <a:srgbClr val="107C10"/>
+              <a:rPr lang="en-US" sz="1000" b="1">
+                <a:solidFill>
+                  <a:srgbClr val="FFFFFF"/>
                 </a:solidFill>
                 <a:latin typeface="Segoe UI" panose="020B0502040204020203" pitchFamily="34" charset="0"/>
               </a:rPr>
-              <a:t>Cost posture: one A100 endpoint for the demo, delete immediately afterward to stop hourly billing.</a:t>
-            </a:r>
+              <a:t>4</a:t>
+            </a:r>
+          </a:p>
+        </p:txBody>
+      </p:sp>
+      <p:sp>
+        <p:nvSpPr>
+          <p:cNvPr id="34" name="TextBox 33">
+            <a:extLst>
+              <a:ext uri="{FF2B5EF4-FFF2-40B4-BE49-F238E27FC236}">
+                <a16:creationId xmlns:a16="http://schemas.microsoft.com/office/drawing/2014/main" id="{EC042A72-3CC5-0FD4-54E6-EF0FB30FDEF5}"/>
+              </a:ext>
+            </a:extLst>
+          </p:cNvPr>
+          <p:cNvSpPr txBox="1"/>
+          <p:nvPr/>
+        </p:nvSpPr>
+        <p:spPr>
+          <a:xfrm>
+            <a:off x="9793224" y="2084832"/>
+            <a:ext cx="1536192" cy="229294"/>
+          </a:xfrm>
+          <a:prstGeom prst="rect">
+            <a:avLst/>
+          </a:prstGeom>
+          <a:noFill/>
+        </p:spPr>
+        <p:txBody>
+          <a:bodyPr vert="horz" wrap="square" lIns="36576" tIns="18288" rIns="36576" bIns="18288" rtlCol="0">
+            <a:spAutoFit/>
+          </a:bodyPr>
+          <a:lstStyle/>
+          <a:p>
+            <a:r>
+              <a:rPr lang="en-US" sz="1250" b="1">
+                <a:solidFill>
+                  <a:srgbClr val="201F1E"/>
+                </a:solidFill>
+                <a:latin typeface="Segoe UI" panose="020B0502040204020203" pitchFamily="34" charset="0"/>
+              </a:rPr>
+              <a:t>Save adapter</a:t>
+            </a:r>
+          </a:p>
+        </p:txBody>
+      </p:sp>
+      <p:sp>
+        <p:nvSpPr>
+          <p:cNvPr id="35" name="TextBox 34">
+            <a:extLst>
+              <a:ext uri="{FF2B5EF4-FFF2-40B4-BE49-F238E27FC236}">
+                <a16:creationId xmlns:a16="http://schemas.microsoft.com/office/drawing/2014/main" id="{7ACE7129-C57C-8651-52ED-6F8594AE59AB}"/>
+              </a:ext>
+            </a:extLst>
+          </p:cNvPr>
+          <p:cNvSpPr txBox="1"/>
+          <p:nvPr/>
+        </p:nvSpPr>
+        <p:spPr>
+          <a:xfrm>
+            <a:off x="9299448" y="2651760"/>
+            <a:ext cx="2011680" cy="507831"/>
+          </a:xfrm>
+          <a:prstGeom prst="rect">
+            <a:avLst/>
+          </a:prstGeom>
+          <a:noFill/>
+        </p:spPr>
+        <p:txBody>
+          <a:bodyPr vert="horz" wrap="square" lIns="36576" tIns="18288" rIns="36576" bIns="18288" rtlCol="0">
+            <a:spAutoFit/>
+          </a:bodyPr>
+          <a:lstStyle/>
+          <a:p>
+            <a:r>
+              <a:rPr lang="en-US" sz="1020">
+                <a:solidFill>
+                  <a:srgbClr val="605E5C"/>
+                </a:solidFill>
+                <a:latin typeface="Segoe UI" panose="020B0502040204020203" pitchFamily="34" charset="0"/>
+              </a:rPr>
+              <a:t>Only the adapter and metadata are saved, then registered and deployed.</a:t>
+            </a:r>
+          </a:p>
+        </p:txBody>
+      </p:sp>
+      <p:sp>
+        <p:nvSpPr>
+          <p:cNvPr id="36" name="Rectangle: Rounded Corners 35">
+            <a:extLst>
+              <a:ext uri="{FF2B5EF4-FFF2-40B4-BE49-F238E27FC236}">
+                <a16:creationId xmlns:a16="http://schemas.microsoft.com/office/drawing/2014/main" id="{CBEC898D-FB1D-AC1E-4501-056D722EBD62}"/>
+              </a:ext>
+            </a:extLst>
+          </p:cNvPr>
+          <p:cNvSpPr/>
+          <p:nvPr/>
+        </p:nvSpPr>
+        <p:spPr>
+          <a:xfrm>
+            <a:off x="9299448" y="3703320"/>
+            <a:ext cx="1993392" cy="566928"/>
+          </a:xfrm>
+          <a:prstGeom prst="roundRect">
+            <a:avLst/>
+          </a:prstGeom>
+          <a:solidFill>
+            <a:srgbClr val="11100F"/>
+          </a:solidFill>
+          <a:ln w="19050" cap="flat" cmpd="sng" algn="ctr">
+            <a:noFill/>
+            <a:prstDash val="solid"/>
+            <a:miter lim="800000"/>
+          </a:ln>
+          <a:effectLst/>
+          <a:extLst>
+            <a:ext uri="{91240B29-F687-4F45-9708-019B960494DF}">
+              <a14:hiddenLine xmlns:a14="http://schemas.microsoft.com/office/drawing/2010/main" w="19050" cap="flat" cmpd="sng" algn="ctr">
+                <a:solidFill>
+                  <a:schemeClr val="accent1">
+                    <a:shade val="15000"/>
+                  </a:schemeClr>
+                </a:solidFill>
+                <a:prstDash val="solid"/>
+                <a:miter lim="800000"/>
+              </a14:hiddenLine>
+            </a:ext>
+          </a:extLst>
+        </p:spPr>
+        <p:style>
+          <a:lnRef idx="2">
+            <a:schemeClr val="accent1">
+              <a:shade val="15000"/>
+            </a:schemeClr>
+          </a:lnRef>
+          <a:fillRef idx="1">
+            <a:schemeClr val="accent1"/>
+          </a:fillRef>
+          <a:effectRef idx="0">
+            <a:schemeClr val="accent1"/>
+          </a:effectRef>
+          <a:fontRef idx="minor">
+            <a:schemeClr val="lt1"/>
+          </a:fontRef>
+        </p:style>
+        <p:txBody>
+          <a:bodyPr rtlCol="0" anchor="ctr"/>
+          <a:lstStyle/>
+          <a:p>
+            <a:pPr algn="ctr"/>
+            <a:endParaRPr lang="en-US"/>
+          </a:p>
+        </p:txBody>
+      </p:sp>
+      <p:sp>
+        <p:nvSpPr>
+          <p:cNvPr id="37" name="TextBox 36">
+            <a:extLst>
+              <a:ext uri="{FF2B5EF4-FFF2-40B4-BE49-F238E27FC236}">
+                <a16:creationId xmlns:a16="http://schemas.microsoft.com/office/drawing/2014/main" id="{06DF9103-FFEC-40AA-2915-D08809A767F7}"/>
+              </a:ext>
+            </a:extLst>
+          </p:cNvPr>
+          <p:cNvSpPr txBox="1"/>
+          <p:nvPr/>
+        </p:nvSpPr>
+        <p:spPr>
+          <a:xfrm>
+            <a:off x="9400032" y="3913632"/>
+            <a:ext cx="1810512" cy="155427"/>
+          </a:xfrm>
+          <a:prstGeom prst="rect">
+            <a:avLst/>
+          </a:prstGeom>
+          <a:noFill/>
+        </p:spPr>
+        <p:txBody>
+          <a:bodyPr vert="horz" wrap="square" lIns="36576" tIns="18288" rIns="36576" bIns="18288" rtlCol="0">
+            <a:spAutoFit/>
+          </a:bodyPr>
+          <a:lstStyle/>
+          <a:p>
+            <a:r>
+              <a:rPr lang="en-US" sz="770">
+                <a:solidFill>
+                  <a:srgbClr val="D7EBFF"/>
+                </a:solidFill>
+                <a:latin typeface="Consolas" panose="020B0609020204030204" pitchFamily="49" charset="0"/>
+              </a:rPr>
+              <a:t>save_pretrained(adapter)</a:t>
+            </a:r>
+          </a:p>
+        </p:txBody>
+      </p:sp>
+      <p:sp>
+        <p:nvSpPr>
+          <p:cNvPr id="38" name="Rectangle: Rounded Corners 37">
+            <a:extLst>
+              <a:ext uri="{FF2B5EF4-FFF2-40B4-BE49-F238E27FC236}">
+                <a16:creationId xmlns:a16="http://schemas.microsoft.com/office/drawing/2014/main" id="{E87468A0-2D7C-EC31-2A09-8D30EA29A389}"/>
+              </a:ext>
+            </a:extLst>
+          </p:cNvPr>
+          <p:cNvSpPr/>
+          <p:nvPr/>
+        </p:nvSpPr>
+        <p:spPr>
+          <a:xfrm>
+            <a:off x="960120" y="5806440"/>
+            <a:ext cx="10195560" cy="438912"/>
+          </a:xfrm>
+          <a:prstGeom prst="roundRect">
+            <a:avLst/>
+          </a:prstGeom>
+          <a:solidFill>
+            <a:srgbClr val="D7EBFF"/>
+          </a:solidFill>
+          <a:ln w="19050" cap="flat" cmpd="sng" algn="ctr">
+            <a:noFill/>
+            <a:prstDash val="solid"/>
+            <a:miter lim="800000"/>
+          </a:ln>
+          <a:effectLst/>
+          <a:extLst>
+            <a:ext uri="{91240B29-F687-4F45-9708-019B960494DF}">
+              <a14:hiddenLine xmlns:a14="http://schemas.microsoft.com/office/drawing/2010/main" w="19050" cap="flat" cmpd="sng" algn="ctr">
+                <a:solidFill>
+                  <a:schemeClr val="accent1">
+                    <a:shade val="15000"/>
+                  </a:schemeClr>
+                </a:solidFill>
+                <a:prstDash val="solid"/>
+                <a:miter lim="800000"/>
+              </a14:hiddenLine>
+            </a:ext>
+          </a:extLst>
+        </p:spPr>
+        <p:style>
+          <a:lnRef idx="2">
+            <a:schemeClr val="accent1">
+              <a:shade val="15000"/>
+            </a:schemeClr>
+          </a:lnRef>
+          <a:fillRef idx="1">
+            <a:schemeClr val="accent1"/>
+          </a:fillRef>
+          <a:effectRef idx="0">
+            <a:schemeClr val="accent1"/>
+          </a:effectRef>
+          <a:fontRef idx="minor">
+            <a:schemeClr val="lt1"/>
+          </a:fontRef>
+        </p:style>
+        <p:txBody>
+          <a:bodyPr rtlCol="0" anchor="ctr"/>
+          <a:lstStyle/>
+          <a:p>
+            <a:pPr algn="ctr"/>
+            <a:endParaRPr lang="en-US"/>
+          </a:p>
+        </p:txBody>
+      </p:sp>
+      <p:sp>
+        <p:nvSpPr>
+          <p:cNvPr id="39" name="TextBox 38">
+            <a:extLst>
+              <a:ext uri="{FF2B5EF4-FFF2-40B4-BE49-F238E27FC236}">
+                <a16:creationId xmlns:a16="http://schemas.microsoft.com/office/drawing/2014/main" id="{C9BEABC5-6934-F52E-ADC8-ECC73338EFBD}"/>
+              </a:ext>
+            </a:extLst>
+          </p:cNvPr>
+          <p:cNvSpPr txBox="1"/>
+          <p:nvPr/>
+        </p:nvSpPr>
+        <p:spPr>
+          <a:xfrm>
+            <a:off x="1170432" y="5943600"/>
+            <a:ext cx="9784080" cy="178510"/>
+          </a:xfrm>
+          <a:prstGeom prst="rect">
+            <a:avLst/>
+          </a:prstGeom>
+          <a:noFill/>
+        </p:spPr>
+        <p:txBody>
+          <a:bodyPr vert="horz" wrap="square" lIns="36576" tIns="18288" rIns="36576" bIns="18288" rtlCol="0">
+            <a:spAutoFit/>
+          </a:bodyPr>
+          <a:lstStyle/>
+          <a:p>
+            <a:pPr algn="ctr"/>
+            <a:r>
+              <a:rPr lang="en-US" sz="920" b="1">
+                <a:solidFill>
+                  <a:srgbClr val="004578"/>
+                </a:solidFill>
+                <a:latin typeface="Segoe UI" panose="020B0502040204020203" pitchFamily="34" charset="0"/>
+              </a:rPr>
+              <a:t>Plain English: we do not overwrite Gemma. We attach a small learned adapter that nudges it toward stable selectors, strict JSON, and correct workflow order.</a:t>
+            </a:r>
+          </a:p>
+        </p:txBody>
+      </p:sp>
+      <p:sp>
+        <p:nvSpPr>
+          <p:cNvPr id="40" name="TextBox 39">
+            <a:extLst>
+              <a:ext uri="{FF2B5EF4-FFF2-40B4-BE49-F238E27FC236}">
+                <a16:creationId xmlns:a16="http://schemas.microsoft.com/office/drawing/2014/main" id="{D8570057-5DF9-CC33-254D-8B2AF17D7995}"/>
+              </a:ext>
+            </a:extLst>
+          </p:cNvPr>
+          <p:cNvSpPr txBox="1"/>
+          <p:nvPr/>
+        </p:nvSpPr>
+        <p:spPr>
+          <a:xfrm>
+            <a:off x="9281160" y="6510528"/>
+            <a:ext cx="2423160" cy="152349"/>
+          </a:xfrm>
+          <a:prstGeom prst="rect">
+            <a:avLst/>
+          </a:prstGeom>
+          <a:noFill/>
+        </p:spPr>
+        <p:txBody>
+          <a:bodyPr vert="horz" wrap="square" lIns="36576" tIns="18288" rIns="36576" bIns="18288" rtlCol="0">
+            <a:spAutoFit/>
+          </a:bodyPr>
+          <a:lstStyle/>
+          <a:p>
+            <a:pPr algn="r"/>
+            <a:r>
+              <a:rPr lang="it-IT" sz="750">
+                <a:solidFill>
+                  <a:srgbClr val="8A8886"/>
+                </a:solidFill>
+                <a:latin typeface="Segoe UI" panose="020B0502040204020203" pitchFamily="34" charset="0"/>
+              </a:rPr>
+              <a:t>Molina Healthcare EIM demo | 11</a:t>
+            </a:r>
+            <a:endParaRPr lang="en-US" sz="750">
+              <a:solidFill>
+                <a:srgbClr val="8A8886"/>
+              </a:solidFill>
+              <a:latin typeface="Segoe UI" panose="020B0502040204020203" pitchFamily="34" charset="0"/>
+            </a:endParaRPr>
           </a:p>
         </p:txBody>
       </p:sp>
     </p:spTree>
     <p:extLst>
       <p:ext uri="{BB962C8B-B14F-4D97-AF65-F5344CB8AC3E}">
-        <p14:creationId xmlns:p14="http://schemas.microsoft.com/office/powerpoint/2010/main" val="1001487370"/>
+        <p14:creationId xmlns:p14="http://schemas.microsoft.com/office/powerpoint/2010/main" val="3418643584"/>
       </p:ext>
     </p:extLst>
   </p:cSld>
@@ -8911,7 +9733,7 @@
           <p:cNvPr id="2" name="Rectangle 1">
             <a:extLst>
               <a:ext uri="{FF2B5EF4-FFF2-40B4-BE49-F238E27FC236}">
-                <a16:creationId xmlns:a16="http://schemas.microsoft.com/office/drawing/2014/main" id="{42D6A5BD-6843-5135-50A9-FFEF9B2338EF}"/>
+                <a16:creationId xmlns:a16="http://schemas.microsoft.com/office/drawing/2014/main" id="{EE0A1614-5D0F-F3E0-8811-A824A7813D32}"/>
               </a:ext>
             </a:extLst>
           </p:cNvPr>
@@ -8924,6 +9746,409 @@
             <a:ext cx="12191695" cy="6858000"/>
           </a:xfrm>
           <a:prstGeom prst="rect">
+            <a:avLst/>
+          </a:prstGeom>
+          <a:solidFill>
+            <a:srgbClr val="F7F9FC"/>
+          </a:solidFill>
+          <a:ln w="19050" cap="flat" cmpd="sng" algn="ctr">
+            <a:noFill/>
+            <a:prstDash val="solid"/>
+            <a:miter lim="800000"/>
+          </a:ln>
+          <a:effectLst/>
+          <a:extLst>
+            <a:ext uri="{91240B29-F687-4F45-9708-019B960494DF}">
+              <a14:hiddenLine xmlns:a14="http://schemas.microsoft.com/office/drawing/2010/main" w="19050" cap="flat" cmpd="sng" algn="ctr">
+                <a:solidFill>
+                  <a:schemeClr val="accent1">
+                    <a:shade val="15000"/>
+                  </a:schemeClr>
+                </a:solidFill>
+                <a:prstDash val="solid"/>
+                <a:miter lim="800000"/>
+              </a14:hiddenLine>
+            </a:ext>
+          </a:extLst>
+        </p:spPr>
+        <p:style>
+          <a:lnRef idx="2">
+            <a:schemeClr val="accent1">
+              <a:shade val="15000"/>
+            </a:schemeClr>
+          </a:lnRef>
+          <a:fillRef idx="1">
+            <a:schemeClr val="accent1"/>
+          </a:fillRef>
+          <a:effectRef idx="0">
+            <a:schemeClr val="accent1"/>
+          </a:effectRef>
+          <a:fontRef idx="minor">
+            <a:schemeClr val="lt1"/>
+          </a:fontRef>
+        </p:style>
+        <p:txBody>
+          <a:bodyPr rtlCol="0" anchor="ctr"/>
+          <a:lstStyle/>
+          <a:p>
+            <a:pPr algn="ctr"/>
+            <a:endParaRPr lang="en-US"/>
+          </a:p>
+        </p:txBody>
+      </p:sp>
+      <p:sp>
+        <p:nvSpPr>
+          <p:cNvPr id="3" name="TextBox 2">
+            <a:extLst>
+              <a:ext uri="{FF2B5EF4-FFF2-40B4-BE49-F238E27FC236}">
+                <a16:creationId xmlns:a16="http://schemas.microsoft.com/office/drawing/2014/main" id="{C7AEF14A-7EDD-B93E-221F-40C4C280EDF0}"/>
+              </a:ext>
+            </a:extLst>
+          </p:cNvPr>
+          <p:cNvSpPr txBox="1"/>
+          <p:nvPr/>
+        </p:nvSpPr>
+        <p:spPr>
+          <a:xfrm>
+            <a:off x="502920" y="228600"/>
+            <a:ext cx="6400800" cy="183127"/>
+          </a:xfrm>
+          <a:prstGeom prst="rect">
+            <a:avLst/>
+          </a:prstGeom>
+          <a:noFill/>
+        </p:spPr>
+        <p:txBody>
+          <a:bodyPr vert="horz" wrap="square" lIns="36576" tIns="18288" rIns="36576" bIns="18288" rtlCol="0">
+            <a:spAutoFit/>
+          </a:bodyPr>
+          <a:lstStyle/>
+          <a:p>
+            <a:r>
+              <a:rPr lang="en-US" sz="950" b="1">
+                <a:solidFill>
+                  <a:srgbClr val="0078D4"/>
+                </a:solidFill>
+                <a:latin typeface="Segoe UI" panose="020B0502040204020203" pitchFamily="34" charset="0"/>
+              </a:rPr>
+              <a:t>Molina EIM | Gemma 4B-class SLM fine-tuning demo</a:t>
+            </a:r>
+          </a:p>
+        </p:txBody>
+      </p:sp>
+      <p:sp>
+        <p:nvSpPr>
+          <p:cNvPr id="4" name="TextBox 3">
+            <a:extLst>
+              <a:ext uri="{FF2B5EF4-FFF2-40B4-BE49-F238E27FC236}">
+                <a16:creationId xmlns:a16="http://schemas.microsoft.com/office/drawing/2014/main" id="{9671C3A7-D3D6-22E3-6CCA-DBCD66343546}"/>
+              </a:ext>
+            </a:extLst>
+          </p:cNvPr>
+          <p:cNvSpPr txBox="1"/>
+          <p:nvPr/>
+        </p:nvSpPr>
+        <p:spPr>
+          <a:xfrm>
+            <a:off x="502920" y="502920"/>
+            <a:ext cx="8046720" cy="483209"/>
+          </a:xfrm>
+          <a:prstGeom prst="rect">
+            <a:avLst/>
+          </a:prstGeom>
+          <a:noFill/>
+        </p:spPr>
+        <p:txBody>
+          <a:bodyPr vert="horz" wrap="square" lIns="36576" tIns="18288" rIns="36576" bIns="18288" rtlCol="0">
+            <a:spAutoFit/>
+          </a:bodyPr>
+          <a:lstStyle/>
+          <a:p>
+            <a:r>
+              <a:rPr lang="en-US" sz="2900" b="1">
+                <a:solidFill>
+                  <a:srgbClr val="201F1E"/>
+                </a:solidFill>
+                <a:latin typeface="Aptos Display" panose="020B0004020202020204" pitchFamily="34" charset="0"/>
+              </a:rPr>
+              <a:t>Live serving: one endpoint, two behaviors</a:t>
+            </a:r>
+          </a:p>
+        </p:txBody>
+      </p:sp>
+      <p:sp>
+        <p:nvSpPr>
+          <p:cNvPr id="5" name="TextBox 4">
+            <a:extLst>
+              <a:ext uri="{FF2B5EF4-FFF2-40B4-BE49-F238E27FC236}">
+                <a16:creationId xmlns:a16="http://schemas.microsoft.com/office/drawing/2014/main" id="{79398702-1078-3954-63CD-9BA7E41A4740}"/>
+              </a:ext>
+            </a:extLst>
+          </p:cNvPr>
+          <p:cNvSpPr txBox="1"/>
+          <p:nvPr/>
+        </p:nvSpPr>
+        <p:spPr>
+          <a:xfrm>
+            <a:off x="9646920" y="256032"/>
+            <a:ext cx="2057400" cy="167738"/>
+          </a:xfrm>
+          <a:prstGeom prst="rect">
+            <a:avLst/>
+          </a:prstGeom>
+          <a:noFill/>
+        </p:spPr>
+        <p:txBody>
+          <a:bodyPr vert="horz" wrap="square" lIns="36576" tIns="18288" rIns="36576" bIns="18288" rtlCol="0">
+            <a:spAutoFit/>
+          </a:bodyPr>
+          <a:lstStyle/>
+          <a:p>
+            <a:pPr algn="r"/>
+            <a:r>
+              <a:rPr lang="en-US" sz="850">
+                <a:solidFill>
+                  <a:srgbClr val="605E5C"/>
+                </a:solidFill>
+                <a:latin typeface="Segoe UI" panose="020B0502040204020203" pitchFamily="34" charset="0"/>
+              </a:rPr>
+              <a:t>Microsoft AI + AzureML</a:t>
+            </a:r>
+          </a:p>
+        </p:txBody>
+      </p:sp>
+      <p:sp>
+        <p:nvSpPr>
+          <p:cNvPr id="6" name="TextBox 5">
+            <a:extLst>
+              <a:ext uri="{FF2B5EF4-FFF2-40B4-BE49-F238E27FC236}">
+                <a16:creationId xmlns:a16="http://schemas.microsoft.com/office/drawing/2014/main" id="{C3DE7671-98D8-F361-91C4-E428CA010572}"/>
+              </a:ext>
+            </a:extLst>
+          </p:cNvPr>
+          <p:cNvSpPr txBox="1"/>
+          <p:nvPr/>
+        </p:nvSpPr>
+        <p:spPr>
+          <a:xfrm>
+            <a:off x="594360" y="1143000"/>
+            <a:ext cx="8412480" cy="443198"/>
+          </a:xfrm>
+          <a:prstGeom prst="rect">
+            <a:avLst/>
+          </a:prstGeom>
+          <a:noFill/>
+        </p:spPr>
+        <p:txBody>
+          <a:bodyPr vert="horz" wrap="square" lIns="36576" tIns="18288" rIns="36576" bIns="18288" rtlCol="0">
+            <a:spAutoFit/>
+          </a:bodyPr>
+          <a:lstStyle/>
+          <a:p>
+            <a:r>
+              <a:rPr lang="en-US" sz="1320">
+                <a:solidFill>
+                  <a:srgbClr val="605E5C"/>
+                </a:solidFill>
+                <a:latin typeface="Aptos" panose="020B0004020202020204" pitchFamily="34" charset="0"/>
+              </a:rPr>
+              <a:t>The Streamlit demo calls the same AzureML endpoint twice: base behavior with the adapter disabled, and fine-tuned behavior with the adapter enabled.</a:t>
+            </a:r>
+          </a:p>
+        </p:txBody>
+      </p:sp>
+      <p:sp>
+        <p:nvSpPr>
+          <p:cNvPr id="7" name="Rectangle: Rounded Corners 6">
+            <a:extLst>
+              <a:ext uri="{FF2B5EF4-FFF2-40B4-BE49-F238E27FC236}">
+                <a16:creationId xmlns:a16="http://schemas.microsoft.com/office/drawing/2014/main" id="{5B15281A-DF58-433F-23C3-FB1509C22A16}"/>
+              </a:ext>
+            </a:extLst>
+          </p:cNvPr>
+          <p:cNvSpPr/>
+          <p:nvPr/>
+        </p:nvSpPr>
+        <p:spPr>
+          <a:xfrm>
+            <a:off x="749808" y="1874520"/>
+            <a:ext cx="3063240" cy="3520440"/>
+          </a:xfrm>
+          <a:prstGeom prst="roundRect">
+            <a:avLst/>
+          </a:prstGeom>
+          <a:solidFill>
+            <a:srgbClr val="FFFFFF"/>
+          </a:solidFill>
+          <a:ln w="6350">
+            <a:solidFill>
+              <a:srgbClr val="D2D0CE"/>
+            </a:solidFill>
+          </a:ln>
+        </p:spPr>
+        <p:style>
+          <a:lnRef idx="2">
+            <a:schemeClr val="accent1">
+              <a:shade val="15000"/>
+            </a:schemeClr>
+          </a:lnRef>
+          <a:fillRef idx="1">
+            <a:schemeClr val="accent1"/>
+          </a:fillRef>
+          <a:effectRef idx="0">
+            <a:schemeClr val="accent1"/>
+          </a:effectRef>
+          <a:fontRef idx="minor">
+            <a:schemeClr val="lt1"/>
+          </a:fontRef>
+        </p:style>
+        <p:txBody>
+          <a:bodyPr rtlCol="0" anchor="ctr"/>
+          <a:lstStyle/>
+          <a:p>
+            <a:pPr algn="ctr"/>
+            <a:endParaRPr lang="en-US"/>
+          </a:p>
+        </p:txBody>
+      </p:sp>
+      <p:sp>
+        <p:nvSpPr>
+          <p:cNvPr id="8" name="TextBox 7">
+            <a:extLst>
+              <a:ext uri="{FF2B5EF4-FFF2-40B4-BE49-F238E27FC236}">
+                <a16:creationId xmlns:a16="http://schemas.microsoft.com/office/drawing/2014/main" id="{EA737EC1-14D8-EAC5-F051-8FA73492DD57}"/>
+              </a:ext>
+            </a:extLst>
+          </p:cNvPr>
+          <p:cNvSpPr txBox="1"/>
+          <p:nvPr/>
+        </p:nvSpPr>
+        <p:spPr>
+          <a:xfrm>
+            <a:off x="1042416" y="2167128"/>
+            <a:ext cx="1188720" cy="267766"/>
+          </a:xfrm>
+          <a:prstGeom prst="rect">
+            <a:avLst/>
+          </a:prstGeom>
+          <a:noFill/>
+        </p:spPr>
+        <p:txBody>
+          <a:bodyPr vert="horz" wrap="square" lIns="36576" tIns="18288" rIns="36576" bIns="18288" rtlCol="0">
+            <a:spAutoFit/>
+          </a:bodyPr>
+          <a:lstStyle/>
+          <a:p>
+            <a:r>
+              <a:rPr lang="en-US" sz="1500" b="1">
+                <a:solidFill>
+                  <a:srgbClr val="004578"/>
+                </a:solidFill>
+                <a:latin typeface="Segoe UI" panose="020B0502040204020203" pitchFamily="34" charset="0"/>
+              </a:rPr>
+              <a:t>Base call</a:t>
+            </a:r>
+          </a:p>
+        </p:txBody>
+      </p:sp>
+      <p:sp>
+        <p:nvSpPr>
+          <p:cNvPr id="9" name="TextBox 8">
+            <a:extLst>
+              <a:ext uri="{FF2B5EF4-FFF2-40B4-BE49-F238E27FC236}">
+                <a16:creationId xmlns:a16="http://schemas.microsoft.com/office/drawing/2014/main" id="{3FA2C673-1055-CAFC-6805-1428727BE6B6}"/>
+              </a:ext>
+            </a:extLst>
+          </p:cNvPr>
+          <p:cNvSpPr txBox="1"/>
+          <p:nvPr/>
+        </p:nvSpPr>
+        <p:spPr>
+          <a:xfrm>
+            <a:off x="1042416" y="2615184"/>
+            <a:ext cx="1737360" cy="198516"/>
+          </a:xfrm>
+          <a:prstGeom prst="rect">
+            <a:avLst/>
+          </a:prstGeom>
+          <a:noFill/>
+        </p:spPr>
+        <p:txBody>
+          <a:bodyPr vert="horz" wrap="square" lIns="36576" tIns="18288" rIns="36576" bIns="18288" rtlCol="0">
+            <a:spAutoFit/>
+          </a:bodyPr>
+          <a:lstStyle/>
+          <a:p>
+            <a:r>
+              <a:rPr lang="en-US" sz="1050" b="1">
+                <a:solidFill>
+                  <a:srgbClr val="004578"/>
+                </a:solidFill>
+                <a:latin typeface="Consolas" panose="020B0609020204030204" pitchFamily="49" charset="0"/>
+              </a:rPr>
+              <a:t>use_adapter=false</a:t>
+            </a:r>
+          </a:p>
+        </p:txBody>
+      </p:sp>
+      <p:sp>
+        <p:nvSpPr>
+          <p:cNvPr id="10" name="TextBox 9">
+            <a:extLst>
+              <a:ext uri="{FF2B5EF4-FFF2-40B4-BE49-F238E27FC236}">
+                <a16:creationId xmlns:a16="http://schemas.microsoft.com/office/drawing/2014/main" id="{759DA9BD-F0EF-C908-20EE-8BB7E128E6D4}"/>
+              </a:ext>
+            </a:extLst>
+          </p:cNvPr>
+          <p:cNvSpPr txBox="1"/>
+          <p:nvPr/>
+        </p:nvSpPr>
+        <p:spPr>
+          <a:xfrm>
+            <a:off x="1042416" y="3054096"/>
+            <a:ext cx="2240280" cy="614014"/>
+          </a:xfrm>
+          <a:prstGeom prst="rect">
+            <a:avLst/>
+          </a:prstGeom>
+          <a:noFill/>
+        </p:spPr>
+        <p:txBody>
+          <a:bodyPr vert="horz" wrap="square" lIns="36576" tIns="18288" rIns="36576" bIns="18288" rtlCol="0">
+            <a:spAutoFit/>
+          </a:bodyPr>
+          <a:lstStyle/>
+          <a:p>
+            <a:r>
+              <a:rPr lang="en-US" sz="1250">
+                <a:solidFill>
+                  <a:srgbClr val="605E5C"/>
+                </a:solidFill>
+                <a:latin typeface="Aptos" panose="020B0004020202020204" pitchFamily="34" charset="0"/>
+              </a:rPr>
+              <a:t>Good general reasoning, but often brittle selectors and incomplete workflow steps.</a:t>
+            </a:r>
+          </a:p>
+        </p:txBody>
+      </p:sp>
+      <p:sp>
+        <p:nvSpPr>
+          <p:cNvPr id="11" name="Rectangle: Rounded Corners 10">
+            <a:extLst>
+              <a:ext uri="{FF2B5EF4-FFF2-40B4-BE49-F238E27FC236}">
+                <a16:creationId xmlns:a16="http://schemas.microsoft.com/office/drawing/2014/main" id="{127F1B16-C758-3F66-988A-21DBF26A1C6C}"/>
+              </a:ext>
+            </a:extLst>
+          </p:cNvPr>
+          <p:cNvSpPr/>
+          <p:nvPr/>
+        </p:nvSpPr>
+        <p:spPr>
+          <a:xfrm>
+            <a:off x="4526280" y="1691640"/>
+            <a:ext cx="3063240" cy="3886200"/>
+          </a:xfrm>
+          <a:prstGeom prst="roundRect">
             <a:avLst/>
           </a:prstGeom>
           <a:solidFill>
@@ -8976,10 +10201,1021 @@
       </p:sp>
       <p:sp>
         <p:nvSpPr>
+          <p:cNvPr id="12" name="TextBox 11">
+            <a:extLst>
+              <a:ext uri="{FF2B5EF4-FFF2-40B4-BE49-F238E27FC236}">
+                <a16:creationId xmlns:a16="http://schemas.microsoft.com/office/drawing/2014/main" id="{0D2CC3D5-6124-F59F-9B88-7FDFF669EF70}"/>
+              </a:ext>
+            </a:extLst>
+          </p:cNvPr>
+          <p:cNvSpPr txBox="1"/>
+          <p:nvPr/>
+        </p:nvSpPr>
+        <p:spPr>
+          <a:xfrm>
+            <a:off x="4892040" y="2029968"/>
+            <a:ext cx="2331720" cy="498598"/>
+          </a:xfrm>
+          <a:prstGeom prst="rect">
+            <a:avLst/>
+          </a:prstGeom>
+          <a:noFill/>
+        </p:spPr>
+        <p:txBody>
+          <a:bodyPr vert="horz" wrap="square" lIns="36576" tIns="18288" rIns="36576" bIns="18288" rtlCol="0">
+            <a:spAutoFit/>
+          </a:bodyPr>
+          <a:lstStyle/>
+          <a:p>
+            <a:pPr algn="ctr"/>
+            <a:r>
+              <a:rPr lang="en-US" sz="1500" b="1">
+                <a:solidFill>
+                  <a:srgbClr val="FFFFFF"/>
+                </a:solidFill>
+                <a:latin typeface="Aptos Display" panose="020B0004020202020204" pitchFamily="34" charset="0"/>
+              </a:rPr>
+              <a:t>AzureML managed online endpoint</a:t>
+            </a:r>
+          </a:p>
+        </p:txBody>
+      </p:sp>
+      <p:sp>
+        <p:nvSpPr>
+          <p:cNvPr id="13" name="Oval 12">
+            <a:extLst>
+              <a:ext uri="{FF2B5EF4-FFF2-40B4-BE49-F238E27FC236}">
+                <a16:creationId xmlns:a16="http://schemas.microsoft.com/office/drawing/2014/main" id="{A5E90B0F-5F90-FFAF-F8EC-1DAB8E44EBF7}"/>
+              </a:ext>
+            </a:extLst>
+          </p:cNvPr>
+          <p:cNvSpPr/>
+          <p:nvPr/>
+        </p:nvSpPr>
+        <p:spPr>
+          <a:xfrm>
+            <a:off x="5257800" y="2788920"/>
+            <a:ext cx="713232" cy="713232"/>
+          </a:xfrm>
+          <a:prstGeom prst="ellipse">
+            <a:avLst/>
+          </a:prstGeom>
+          <a:solidFill>
+            <a:srgbClr val="0078D4"/>
+          </a:solidFill>
+          <a:ln w="19050" cap="flat" cmpd="sng" algn="ctr">
+            <a:noFill/>
+            <a:prstDash val="solid"/>
+            <a:miter lim="800000"/>
+          </a:ln>
+          <a:effectLst/>
+          <a:extLst>
+            <a:ext uri="{91240B29-F687-4F45-9708-019B960494DF}">
+              <a14:hiddenLine xmlns:a14="http://schemas.microsoft.com/office/drawing/2010/main" w="19050" cap="flat" cmpd="sng" algn="ctr">
+                <a:solidFill>
+                  <a:schemeClr val="accent1">
+                    <a:shade val="15000"/>
+                  </a:schemeClr>
+                </a:solidFill>
+                <a:prstDash val="solid"/>
+                <a:miter lim="800000"/>
+              </a14:hiddenLine>
+            </a:ext>
+          </a:extLst>
+        </p:spPr>
+        <p:style>
+          <a:lnRef idx="2">
+            <a:schemeClr val="accent1">
+              <a:shade val="15000"/>
+            </a:schemeClr>
+          </a:lnRef>
+          <a:fillRef idx="1">
+            <a:schemeClr val="accent1"/>
+          </a:fillRef>
+          <a:effectRef idx="0">
+            <a:schemeClr val="accent1"/>
+          </a:effectRef>
+          <a:fontRef idx="minor">
+            <a:schemeClr val="lt1"/>
+          </a:fontRef>
+        </p:style>
+        <p:txBody>
+          <a:bodyPr rtlCol="0" anchor="ctr"/>
+          <a:lstStyle/>
+          <a:p>
+            <a:pPr algn="ctr"/>
+            <a:endParaRPr lang="en-US"/>
+          </a:p>
+        </p:txBody>
+      </p:sp>
+      <p:sp>
+        <p:nvSpPr>
+          <p:cNvPr id="14" name="Oval 13">
+            <a:extLst>
+              <a:ext uri="{FF2B5EF4-FFF2-40B4-BE49-F238E27FC236}">
+                <a16:creationId xmlns:a16="http://schemas.microsoft.com/office/drawing/2014/main" id="{751541E2-4429-63FE-A507-021A1BE18D78}"/>
+              </a:ext>
+            </a:extLst>
+          </p:cNvPr>
+          <p:cNvSpPr/>
+          <p:nvPr/>
+        </p:nvSpPr>
+        <p:spPr>
+          <a:xfrm>
+            <a:off x="6144768" y="2788920"/>
+            <a:ext cx="713232" cy="713232"/>
+          </a:xfrm>
+          <a:prstGeom prst="ellipse">
+            <a:avLst/>
+          </a:prstGeom>
+          <a:solidFill>
+            <a:srgbClr val="5C2D91"/>
+          </a:solidFill>
+          <a:ln w="19050" cap="flat" cmpd="sng" algn="ctr">
+            <a:noFill/>
+            <a:prstDash val="solid"/>
+            <a:miter lim="800000"/>
+          </a:ln>
+          <a:effectLst/>
+          <a:extLst>
+            <a:ext uri="{91240B29-F687-4F45-9708-019B960494DF}">
+              <a14:hiddenLine xmlns:a14="http://schemas.microsoft.com/office/drawing/2010/main" w="19050" cap="flat" cmpd="sng" algn="ctr">
+                <a:solidFill>
+                  <a:schemeClr val="accent1">
+                    <a:shade val="15000"/>
+                  </a:schemeClr>
+                </a:solidFill>
+                <a:prstDash val="solid"/>
+                <a:miter lim="800000"/>
+              </a14:hiddenLine>
+            </a:ext>
+          </a:extLst>
+        </p:spPr>
+        <p:style>
+          <a:lnRef idx="2">
+            <a:schemeClr val="accent1">
+              <a:shade val="15000"/>
+            </a:schemeClr>
+          </a:lnRef>
+          <a:fillRef idx="1">
+            <a:schemeClr val="accent1"/>
+          </a:fillRef>
+          <a:effectRef idx="0">
+            <a:schemeClr val="accent1"/>
+          </a:effectRef>
+          <a:fontRef idx="minor">
+            <a:schemeClr val="lt1"/>
+          </a:fontRef>
+        </p:style>
+        <p:txBody>
+          <a:bodyPr rtlCol="0" anchor="ctr"/>
+          <a:lstStyle/>
+          <a:p>
+            <a:pPr algn="ctr"/>
+            <a:endParaRPr lang="en-US"/>
+          </a:p>
+        </p:txBody>
+      </p:sp>
+      <p:sp>
+        <p:nvSpPr>
+          <p:cNvPr id="15" name="Oval 14">
+            <a:extLst>
+              <a:ext uri="{FF2B5EF4-FFF2-40B4-BE49-F238E27FC236}">
+                <a16:creationId xmlns:a16="http://schemas.microsoft.com/office/drawing/2014/main" id="{B3F6DB00-624B-068F-74FD-52E94B2194E7}"/>
+              </a:ext>
+            </a:extLst>
+          </p:cNvPr>
+          <p:cNvSpPr/>
+          <p:nvPr/>
+        </p:nvSpPr>
+        <p:spPr>
+          <a:xfrm>
+            <a:off x="6565392" y="3529584"/>
+            <a:ext cx="713232" cy="713232"/>
+          </a:xfrm>
+          <a:prstGeom prst="ellipse">
+            <a:avLst/>
+          </a:prstGeom>
+          <a:solidFill>
+            <a:srgbClr val="107C10"/>
+          </a:solidFill>
+          <a:ln w="19050" cap="flat" cmpd="sng" algn="ctr">
+            <a:noFill/>
+            <a:prstDash val="solid"/>
+            <a:miter lim="800000"/>
+          </a:ln>
+          <a:effectLst/>
+          <a:extLst>
+            <a:ext uri="{91240B29-F687-4F45-9708-019B960494DF}">
+              <a14:hiddenLine xmlns:a14="http://schemas.microsoft.com/office/drawing/2010/main" w="19050" cap="flat" cmpd="sng" algn="ctr">
+                <a:solidFill>
+                  <a:schemeClr val="accent1">
+                    <a:shade val="15000"/>
+                  </a:schemeClr>
+                </a:solidFill>
+                <a:prstDash val="solid"/>
+                <a:miter lim="800000"/>
+              </a14:hiddenLine>
+            </a:ext>
+          </a:extLst>
+        </p:spPr>
+        <p:style>
+          <a:lnRef idx="2">
+            <a:schemeClr val="accent1">
+              <a:shade val="15000"/>
+            </a:schemeClr>
+          </a:lnRef>
+          <a:fillRef idx="1">
+            <a:schemeClr val="accent1"/>
+          </a:fillRef>
+          <a:effectRef idx="0">
+            <a:schemeClr val="accent1"/>
+          </a:effectRef>
+          <a:fontRef idx="minor">
+            <a:schemeClr val="lt1"/>
+          </a:fontRef>
+        </p:style>
+        <p:txBody>
+          <a:bodyPr rtlCol="0" anchor="ctr"/>
+          <a:lstStyle/>
+          <a:p>
+            <a:pPr algn="ctr"/>
+            <a:endParaRPr lang="en-US"/>
+          </a:p>
+        </p:txBody>
+      </p:sp>
+      <p:sp>
+        <p:nvSpPr>
+          <p:cNvPr id="16" name="Oval 15">
+            <a:extLst>
+              <a:ext uri="{FF2B5EF4-FFF2-40B4-BE49-F238E27FC236}">
+                <a16:creationId xmlns:a16="http://schemas.microsoft.com/office/drawing/2014/main" id="{77B5003D-8F62-7AA0-2717-88F0356DC504}"/>
+              </a:ext>
+            </a:extLst>
+          </p:cNvPr>
+          <p:cNvSpPr/>
+          <p:nvPr/>
+        </p:nvSpPr>
+        <p:spPr>
+          <a:xfrm>
+            <a:off x="5669280" y="3529584"/>
+            <a:ext cx="713232" cy="713232"/>
+          </a:xfrm>
+          <a:prstGeom prst="ellipse">
+            <a:avLst/>
+          </a:prstGeom>
+          <a:solidFill>
+            <a:srgbClr val="038387"/>
+          </a:solidFill>
+          <a:ln w="19050" cap="flat" cmpd="sng" algn="ctr">
+            <a:noFill/>
+            <a:prstDash val="solid"/>
+            <a:miter lim="800000"/>
+          </a:ln>
+          <a:effectLst/>
+          <a:extLst>
+            <a:ext uri="{91240B29-F687-4F45-9708-019B960494DF}">
+              <a14:hiddenLine xmlns:a14="http://schemas.microsoft.com/office/drawing/2010/main" w="19050" cap="flat" cmpd="sng" algn="ctr">
+                <a:solidFill>
+                  <a:schemeClr val="accent1">
+                    <a:shade val="15000"/>
+                  </a:schemeClr>
+                </a:solidFill>
+                <a:prstDash val="solid"/>
+                <a:miter lim="800000"/>
+              </a14:hiddenLine>
+            </a:ext>
+          </a:extLst>
+        </p:spPr>
+        <p:style>
+          <a:lnRef idx="2">
+            <a:schemeClr val="accent1">
+              <a:shade val="15000"/>
+            </a:schemeClr>
+          </a:lnRef>
+          <a:fillRef idx="1">
+            <a:schemeClr val="accent1"/>
+          </a:fillRef>
+          <a:effectRef idx="0">
+            <a:schemeClr val="accent1"/>
+          </a:effectRef>
+          <a:fontRef idx="minor">
+            <a:schemeClr val="lt1"/>
+          </a:fontRef>
+        </p:style>
+        <p:txBody>
+          <a:bodyPr rtlCol="0" anchor="ctr"/>
+          <a:lstStyle/>
+          <a:p>
+            <a:pPr algn="ctr"/>
+            <a:endParaRPr lang="en-US"/>
+          </a:p>
+        </p:txBody>
+      </p:sp>
+      <p:sp>
+        <p:nvSpPr>
+          <p:cNvPr id="17" name="TextBox 16">
+            <a:extLst>
+              <a:ext uri="{FF2B5EF4-FFF2-40B4-BE49-F238E27FC236}">
+                <a16:creationId xmlns:a16="http://schemas.microsoft.com/office/drawing/2014/main" id="{DB6CF9AC-AC65-30C3-DA10-0E50095621EB}"/>
+              </a:ext>
+            </a:extLst>
+          </p:cNvPr>
+          <p:cNvSpPr txBox="1"/>
+          <p:nvPr/>
+        </p:nvSpPr>
+        <p:spPr>
+          <a:xfrm>
+            <a:off x="5641848" y="3182112"/>
+            <a:ext cx="1051560" cy="498598"/>
+          </a:xfrm>
+          <a:prstGeom prst="rect">
+            <a:avLst/>
+          </a:prstGeom>
+          <a:noFill/>
+        </p:spPr>
+        <p:txBody>
+          <a:bodyPr vert="horz" wrap="square" lIns="36576" tIns="18288" rIns="36576" bIns="18288" rtlCol="0">
+            <a:spAutoFit/>
+          </a:bodyPr>
+          <a:lstStyle/>
+          <a:p>
+            <a:pPr algn="ctr"/>
+            <a:r>
+              <a:rPr lang="en-US" sz="1500" b="1">
+                <a:solidFill>
+                  <a:srgbClr val="FFFFFF"/>
+                </a:solidFill>
+                <a:latin typeface="Aptos Display" panose="020B0004020202020204" pitchFamily="34" charset="0"/>
+              </a:rPr>
+              <a:t>base +</a:t>
+            </a:r>
+          </a:p>
+          <a:p>
+            <a:pPr algn="ctr"/>
+            <a:r>
+              <a:rPr lang="en-US" sz="1500" b="1">
+                <a:solidFill>
+                  <a:srgbClr val="FFFFFF"/>
+                </a:solidFill>
+                <a:latin typeface="Aptos Display" panose="020B0004020202020204" pitchFamily="34" charset="0"/>
+              </a:rPr>
+              <a:t>LoRA</a:t>
+            </a:r>
+          </a:p>
+        </p:txBody>
+      </p:sp>
+      <p:sp>
+        <p:nvSpPr>
+          <p:cNvPr id="18" name="TextBox 17">
+            <a:extLst>
+              <a:ext uri="{FF2B5EF4-FFF2-40B4-BE49-F238E27FC236}">
+                <a16:creationId xmlns:a16="http://schemas.microsoft.com/office/drawing/2014/main" id="{1EE0A08A-8A2C-74BC-379A-3D58CA5D1168}"/>
+              </a:ext>
+            </a:extLst>
+          </p:cNvPr>
+          <p:cNvSpPr txBox="1"/>
+          <p:nvPr/>
+        </p:nvSpPr>
+        <p:spPr>
+          <a:xfrm>
+            <a:off x="4983480" y="4498848"/>
+            <a:ext cx="2240280" cy="461665"/>
+          </a:xfrm>
+          <a:prstGeom prst="rect">
+            <a:avLst/>
+          </a:prstGeom>
+          <a:noFill/>
+        </p:spPr>
+        <p:txBody>
+          <a:bodyPr vert="horz" wrap="square" lIns="36576" tIns="18288" rIns="36576" bIns="18288" rtlCol="0">
+            <a:spAutoFit/>
+          </a:bodyPr>
+          <a:lstStyle/>
+          <a:p>
+            <a:pPr algn="ctr"/>
+            <a:r>
+              <a:rPr lang="en-US" sz="920">
+                <a:solidFill>
+                  <a:srgbClr val="D7EBFF"/>
+                </a:solidFill>
+                <a:latin typeface="Segoe UI" panose="020B0502040204020203" pitchFamily="34" charset="0"/>
+              </a:rPr>
+              <a:t>Deployment: ftadapter</a:t>
+            </a:r>
+          </a:p>
+          <a:p>
+            <a:pPr algn="ctr"/>
+            <a:r>
+              <a:rPr lang="en-US" sz="920">
+                <a:solidFill>
+                  <a:srgbClr val="D7EBFF"/>
+                </a:solidFill>
+                <a:latin typeface="Segoe UI" panose="020B0502040204020203" pitchFamily="34" charset="0"/>
+              </a:rPr>
+              <a:t>SKU: Standard_NC24ads_A100_v4</a:t>
+            </a:r>
+          </a:p>
+          <a:p>
+            <a:pPr algn="ctr"/>
+            <a:r>
+              <a:rPr lang="en-US" sz="920">
+                <a:solidFill>
+                  <a:srgbClr val="D7EBFF"/>
+                </a:solidFill>
+                <a:latin typeface="Segoe UI" panose="020B0502040204020203" pitchFamily="34" charset="0"/>
+              </a:rPr>
+              <a:t>Mode: catalog base + LoRA adapter</a:t>
+            </a:r>
+          </a:p>
+        </p:txBody>
+      </p:sp>
+      <p:sp>
+        <p:nvSpPr>
+          <p:cNvPr id="19" name="Rectangle: Rounded Corners 18">
+            <a:extLst>
+              <a:ext uri="{FF2B5EF4-FFF2-40B4-BE49-F238E27FC236}">
+                <a16:creationId xmlns:a16="http://schemas.microsoft.com/office/drawing/2014/main" id="{56462240-1BF4-59DD-6510-0B1175A76EA7}"/>
+              </a:ext>
+            </a:extLst>
+          </p:cNvPr>
+          <p:cNvSpPr/>
+          <p:nvPr/>
+        </p:nvSpPr>
+        <p:spPr>
+          <a:xfrm>
+            <a:off x="8321040" y="1874520"/>
+            <a:ext cx="3063240" cy="3520440"/>
+          </a:xfrm>
+          <a:prstGeom prst="roundRect">
+            <a:avLst/>
+          </a:prstGeom>
+          <a:solidFill>
+            <a:srgbClr val="FFFFFF"/>
+          </a:solidFill>
+          <a:ln w="6350">
+            <a:solidFill>
+              <a:srgbClr val="D2D0CE"/>
+            </a:solidFill>
+          </a:ln>
+        </p:spPr>
+        <p:style>
+          <a:lnRef idx="2">
+            <a:schemeClr val="accent1">
+              <a:shade val="15000"/>
+            </a:schemeClr>
+          </a:lnRef>
+          <a:fillRef idx="1">
+            <a:schemeClr val="accent1"/>
+          </a:fillRef>
+          <a:effectRef idx="0">
+            <a:schemeClr val="accent1"/>
+          </a:effectRef>
+          <a:fontRef idx="minor">
+            <a:schemeClr val="lt1"/>
+          </a:fontRef>
+        </p:style>
+        <p:txBody>
+          <a:bodyPr rtlCol="0" anchor="ctr"/>
+          <a:lstStyle/>
+          <a:p>
+            <a:pPr algn="ctr"/>
+            <a:endParaRPr lang="en-US"/>
+          </a:p>
+        </p:txBody>
+      </p:sp>
+      <p:sp>
+        <p:nvSpPr>
+          <p:cNvPr id="20" name="TextBox 19">
+            <a:extLst>
+              <a:ext uri="{FF2B5EF4-FFF2-40B4-BE49-F238E27FC236}">
+                <a16:creationId xmlns:a16="http://schemas.microsoft.com/office/drawing/2014/main" id="{20A433C8-C87F-8F4B-75F5-079ABE009B05}"/>
+              </a:ext>
+            </a:extLst>
+          </p:cNvPr>
+          <p:cNvSpPr txBox="1"/>
+          <p:nvPr/>
+        </p:nvSpPr>
+        <p:spPr>
+          <a:xfrm>
+            <a:off x="8613648" y="2167128"/>
+            <a:ext cx="1600200" cy="267766"/>
+          </a:xfrm>
+          <a:prstGeom prst="rect">
+            <a:avLst/>
+          </a:prstGeom>
+          <a:noFill/>
+        </p:spPr>
+        <p:txBody>
+          <a:bodyPr vert="horz" wrap="square" lIns="36576" tIns="18288" rIns="36576" bIns="18288" rtlCol="0">
+            <a:spAutoFit/>
+          </a:bodyPr>
+          <a:lstStyle/>
+          <a:p>
+            <a:r>
+              <a:rPr lang="en-US" sz="1500" b="1">
+                <a:solidFill>
+                  <a:srgbClr val="107C10"/>
+                </a:solidFill>
+                <a:latin typeface="Segoe UI" panose="020B0502040204020203" pitchFamily="34" charset="0"/>
+              </a:rPr>
+              <a:t>Fine-tuned call</a:t>
+            </a:r>
+          </a:p>
+        </p:txBody>
+      </p:sp>
+      <p:sp>
+        <p:nvSpPr>
+          <p:cNvPr id="21" name="TextBox 20">
+            <a:extLst>
+              <a:ext uri="{FF2B5EF4-FFF2-40B4-BE49-F238E27FC236}">
+                <a16:creationId xmlns:a16="http://schemas.microsoft.com/office/drawing/2014/main" id="{64EF1964-BAA0-C322-A28B-4CA3B6A816EB}"/>
+              </a:ext>
+            </a:extLst>
+          </p:cNvPr>
+          <p:cNvSpPr txBox="1"/>
+          <p:nvPr/>
+        </p:nvSpPr>
+        <p:spPr>
+          <a:xfrm>
+            <a:off x="8613648" y="2615184"/>
+            <a:ext cx="1737360" cy="198516"/>
+          </a:xfrm>
+          <a:prstGeom prst="rect">
+            <a:avLst/>
+          </a:prstGeom>
+          <a:noFill/>
+        </p:spPr>
+        <p:txBody>
+          <a:bodyPr vert="horz" wrap="square" lIns="36576" tIns="18288" rIns="36576" bIns="18288" rtlCol="0">
+            <a:spAutoFit/>
+          </a:bodyPr>
+          <a:lstStyle/>
+          <a:p>
+            <a:r>
+              <a:rPr lang="en-US" sz="1050" b="1">
+                <a:solidFill>
+                  <a:srgbClr val="107C10"/>
+                </a:solidFill>
+                <a:latin typeface="Consolas" panose="020B0609020204030204" pitchFamily="49" charset="0"/>
+              </a:rPr>
+              <a:t>use_adapter=true</a:t>
+            </a:r>
+          </a:p>
+        </p:txBody>
+      </p:sp>
+      <p:sp>
+        <p:nvSpPr>
+          <p:cNvPr id="22" name="TextBox 21">
+            <a:extLst>
+              <a:ext uri="{FF2B5EF4-FFF2-40B4-BE49-F238E27FC236}">
+                <a16:creationId xmlns:a16="http://schemas.microsoft.com/office/drawing/2014/main" id="{025506D8-40DF-79E9-8569-245E1AF91025}"/>
+              </a:ext>
+            </a:extLst>
+          </p:cNvPr>
+          <p:cNvSpPr txBox="1"/>
+          <p:nvPr/>
+        </p:nvSpPr>
+        <p:spPr>
+          <a:xfrm>
+            <a:off x="8613648" y="3054096"/>
+            <a:ext cx="2240280" cy="614014"/>
+          </a:xfrm>
+          <a:prstGeom prst="rect">
+            <a:avLst/>
+          </a:prstGeom>
+          <a:noFill/>
+        </p:spPr>
+        <p:txBody>
+          <a:bodyPr vert="horz" wrap="square" lIns="36576" tIns="18288" rIns="36576" bIns="18288" rtlCol="0">
+            <a:spAutoFit/>
+          </a:bodyPr>
+          <a:lstStyle/>
+          <a:p>
+            <a:r>
+              <a:rPr lang="en-US" sz="1250">
+                <a:solidFill>
+                  <a:srgbClr val="605E5C"/>
+                </a:solidFill>
+                <a:latin typeface="Aptos" panose="020B0004020202020204" pitchFamily="34" charset="0"/>
+              </a:rPr>
+              <a:t>Learns the EIM contract: stable data-eim selectors, action order, and no prose.</a:t>
+            </a:r>
+          </a:p>
+        </p:txBody>
+      </p:sp>
+      <p:cxnSp>
+        <p:nvCxnSpPr>
+          <p:cNvPr id="23" name="Straight Connector 22">
+            <a:extLst>
+              <a:ext uri="{FF2B5EF4-FFF2-40B4-BE49-F238E27FC236}">
+                <a16:creationId xmlns:a16="http://schemas.microsoft.com/office/drawing/2014/main" id="{1F499578-DB2C-076C-3B82-39A182B0B11E}"/>
+              </a:ext>
+            </a:extLst>
+          </p:cNvPr>
+          <p:cNvCxnSpPr/>
+          <p:nvPr/>
+        </p:nvCxnSpPr>
+        <p:spPr>
+          <a:xfrm>
+            <a:off x="3822192" y="3529584"/>
+            <a:ext cx="658368" cy="0"/>
+          </a:xfrm>
+          <a:prstGeom prst="line">
+            <a:avLst/>
+          </a:prstGeom>
+          <a:ln w="38100">
+            <a:solidFill>
+              <a:srgbClr val="0078D4"/>
+            </a:solidFill>
+          </a:ln>
+        </p:spPr>
+        <p:style>
+          <a:lnRef idx="2">
+            <a:schemeClr val="accent1"/>
+          </a:lnRef>
+          <a:fillRef idx="0">
+            <a:schemeClr val="accent1"/>
+          </a:fillRef>
+          <a:effectRef idx="1">
+            <a:schemeClr val="accent1"/>
+          </a:effectRef>
+          <a:fontRef idx="minor">
+            <a:schemeClr val="tx1"/>
+          </a:fontRef>
+        </p:style>
+      </p:cxnSp>
+      <p:cxnSp>
+        <p:nvCxnSpPr>
+          <p:cNvPr id="24" name="Straight Connector 23">
+            <a:extLst>
+              <a:ext uri="{FF2B5EF4-FFF2-40B4-BE49-F238E27FC236}">
+                <a16:creationId xmlns:a16="http://schemas.microsoft.com/office/drawing/2014/main" id="{17B93264-ECF8-85CF-6578-B5C73CEF970F}"/>
+              </a:ext>
+            </a:extLst>
+          </p:cNvPr>
+          <p:cNvCxnSpPr/>
+          <p:nvPr/>
+        </p:nvCxnSpPr>
+        <p:spPr>
+          <a:xfrm>
+            <a:off x="7607808" y="3529584"/>
+            <a:ext cx="667512" cy="0"/>
+          </a:xfrm>
+          <a:prstGeom prst="line">
+            <a:avLst/>
+          </a:prstGeom>
+          <a:ln w="38100">
+            <a:solidFill>
+              <a:srgbClr val="107C10"/>
+            </a:solidFill>
+          </a:ln>
+        </p:spPr>
+        <p:style>
+          <a:lnRef idx="2">
+            <a:schemeClr val="accent1"/>
+          </a:lnRef>
+          <a:fillRef idx="0">
+            <a:schemeClr val="accent1"/>
+          </a:fillRef>
+          <a:effectRef idx="1">
+            <a:schemeClr val="accent1"/>
+          </a:effectRef>
+          <a:fontRef idx="minor">
+            <a:schemeClr val="tx1"/>
+          </a:fontRef>
+        </p:style>
+      </p:cxnSp>
+      <p:sp>
+        <p:nvSpPr>
+          <p:cNvPr id="25" name="Rectangle: Rounded Corners 24">
+            <a:extLst>
+              <a:ext uri="{FF2B5EF4-FFF2-40B4-BE49-F238E27FC236}">
+                <a16:creationId xmlns:a16="http://schemas.microsoft.com/office/drawing/2014/main" id="{7E41E0D6-BA90-EBAF-9D0E-C9950BC7B924}"/>
+              </a:ext>
+            </a:extLst>
+          </p:cNvPr>
+          <p:cNvSpPr/>
+          <p:nvPr/>
+        </p:nvSpPr>
+        <p:spPr>
+          <a:xfrm>
+            <a:off x="1993392" y="5998464"/>
+            <a:ext cx="8211312" cy="402336"/>
+          </a:xfrm>
+          <a:prstGeom prst="roundRect">
+            <a:avLst/>
+          </a:prstGeom>
+          <a:solidFill>
+            <a:srgbClr val="DFF6DD"/>
+          </a:solidFill>
+          <a:ln w="19050" cap="flat" cmpd="sng" algn="ctr">
+            <a:noFill/>
+            <a:prstDash val="solid"/>
+            <a:miter lim="800000"/>
+          </a:ln>
+          <a:effectLst/>
+          <a:extLst>
+            <a:ext uri="{91240B29-F687-4F45-9708-019B960494DF}">
+              <a14:hiddenLine xmlns:a14="http://schemas.microsoft.com/office/drawing/2010/main" w="19050" cap="flat" cmpd="sng" algn="ctr">
+                <a:solidFill>
+                  <a:schemeClr val="accent1">
+                    <a:shade val="15000"/>
+                  </a:schemeClr>
+                </a:solidFill>
+                <a:prstDash val="solid"/>
+                <a:miter lim="800000"/>
+              </a14:hiddenLine>
+            </a:ext>
+          </a:extLst>
+        </p:spPr>
+        <p:style>
+          <a:lnRef idx="2">
+            <a:schemeClr val="accent1">
+              <a:shade val="15000"/>
+            </a:schemeClr>
+          </a:lnRef>
+          <a:fillRef idx="1">
+            <a:schemeClr val="accent1"/>
+          </a:fillRef>
+          <a:effectRef idx="0">
+            <a:schemeClr val="accent1"/>
+          </a:effectRef>
+          <a:fontRef idx="minor">
+            <a:schemeClr val="lt1"/>
+          </a:fontRef>
+        </p:style>
+        <p:txBody>
+          <a:bodyPr rtlCol="0" anchor="ctr"/>
+          <a:lstStyle/>
+          <a:p>
+            <a:pPr algn="ctr"/>
+            <a:endParaRPr lang="en-US"/>
+          </a:p>
+        </p:txBody>
+      </p:sp>
+      <p:sp>
+        <p:nvSpPr>
+          <p:cNvPr id="26" name="TextBox 25">
+            <a:extLst>
+              <a:ext uri="{FF2B5EF4-FFF2-40B4-BE49-F238E27FC236}">
+                <a16:creationId xmlns:a16="http://schemas.microsoft.com/office/drawing/2014/main" id="{36CB488D-6E33-D70A-AA81-64C6DB9E838F}"/>
+              </a:ext>
+            </a:extLst>
+          </p:cNvPr>
+          <p:cNvSpPr txBox="1"/>
+          <p:nvPr/>
+        </p:nvSpPr>
+        <p:spPr>
+          <a:xfrm>
+            <a:off x="2176272" y="6126480"/>
+            <a:ext cx="7845552" cy="172355"/>
+          </a:xfrm>
+          <a:prstGeom prst="rect">
+            <a:avLst/>
+          </a:prstGeom>
+          <a:noFill/>
+        </p:spPr>
+        <p:txBody>
+          <a:bodyPr vert="horz" wrap="square" lIns="36576" tIns="18288" rIns="36576" bIns="18288" rtlCol="0">
+            <a:spAutoFit/>
+          </a:bodyPr>
+          <a:lstStyle/>
+          <a:p>
+            <a:pPr algn="ctr"/>
+            <a:r>
+              <a:rPr lang="en-US" sz="880" b="1">
+                <a:solidFill>
+                  <a:srgbClr val="107C10"/>
+                </a:solidFill>
+                <a:latin typeface="Segoe UI" panose="020B0502040204020203" pitchFamily="34" charset="0"/>
+              </a:rPr>
+              <a:t>Cost posture: one A100 endpoint for the demo, delete immediately afterward to stop hourly billing.</a:t>
+            </a:r>
+          </a:p>
+        </p:txBody>
+      </p:sp>
+      <p:sp>
+        <p:nvSpPr>
+          <p:cNvPr id="27" name="TextBox 26">
+            <a:extLst>
+              <a:ext uri="{FF2B5EF4-FFF2-40B4-BE49-F238E27FC236}">
+                <a16:creationId xmlns:a16="http://schemas.microsoft.com/office/drawing/2014/main" id="{EB7491DB-68AC-6D37-248A-FB05F18FD78C}"/>
+              </a:ext>
+            </a:extLst>
+          </p:cNvPr>
+          <p:cNvSpPr txBox="1"/>
+          <p:nvPr/>
+        </p:nvSpPr>
+        <p:spPr>
+          <a:xfrm>
+            <a:off x="9281160" y="6510528"/>
+            <a:ext cx="2423160" cy="152349"/>
+          </a:xfrm>
+          <a:prstGeom prst="rect">
+            <a:avLst/>
+          </a:prstGeom>
+          <a:noFill/>
+        </p:spPr>
+        <p:txBody>
+          <a:bodyPr vert="horz" wrap="square" lIns="36576" tIns="18288" rIns="36576" bIns="18288" rtlCol="0">
+            <a:spAutoFit/>
+          </a:bodyPr>
+          <a:lstStyle/>
+          <a:p>
+            <a:pPr algn="r"/>
+            <a:r>
+              <a:rPr lang="it-IT" sz="750">
+                <a:solidFill>
+                  <a:srgbClr val="8A8886"/>
+                </a:solidFill>
+                <a:latin typeface="Segoe UI" panose="020B0502040204020203" pitchFamily="34" charset="0"/>
+              </a:rPr>
+              <a:t>Molina Healthcare EIM demo | 12</a:t>
+            </a:r>
+            <a:endParaRPr lang="en-US" sz="750">
+              <a:solidFill>
+                <a:srgbClr val="8A8886"/>
+              </a:solidFill>
+              <a:latin typeface="Segoe UI" panose="020B0502040204020203" pitchFamily="34" charset="0"/>
+            </a:endParaRPr>
+          </a:p>
+        </p:txBody>
+      </p:sp>
+    </p:spTree>
+    <p:extLst>
+      <p:ext uri="{BB962C8B-B14F-4D97-AF65-F5344CB8AC3E}">
+        <p14:creationId xmlns:p14="http://schemas.microsoft.com/office/powerpoint/2010/main" val="749712283"/>
+      </p:ext>
+    </p:extLst>
+  </p:cSld>
+  <p:clrMapOvr>
+    <a:masterClrMapping/>
+  </p:clrMapOvr>
+</p:sld>
+</file>
+
+<file path=ppt/slides/slide13.xml><?xml version="1.0" encoding="utf-8"?>
+<p:sld xmlns:a="http://schemas.openxmlformats.org/drawingml/2006/main" xmlns:r="http://schemas.openxmlformats.org/officeDocument/2006/relationships" xmlns:p="http://schemas.openxmlformats.org/presentationml/2006/main">
+  <p:cSld>
+    <p:spTree>
+      <p:nvGrpSpPr>
+        <p:cNvPr id="1" name=""/>
+        <p:cNvGrpSpPr/>
+        <p:nvPr/>
+      </p:nvGrpSpPr>
+      <p:grpSpPr>
+        <a:xfrm>
+          <a:off x="0" y="0"/>
+          <a:ext cx="0" cy="0"/>
+          <a:chOff x="0" y="0"/>
+          <a:chExt cx="0" cy="0"/>
+        </a:xfrm>
+      </p:grpSpPr>
+      <p:sp>
+        <p:nvSpPr>
+          <p:cNvPr id="2" name="Rectangle 1">
+            <a:extLst>
+              <a:ext uri="{FF2B5EF4-FFF2-40B4-BE49-F238E27FC236}">
+                <a16:creationId xmlns:a16="http://schemas.microsoft.com/office/drawing/2014/main" id="{97542E58-9714-8D88-1292-40D6EF1039F0}"/>
+              </a:ext>
+            </a:extLst>
+          </p:cNvPr>
+          <p:cNvSpPr/>
+          <p:nvPr/>
+        </p:nvSpPr>
+        <p:spPr>
+          <a:xfrm>
+            <a:off x="0" y="0"/>
+            <a:ext cx="12191695" cy="6858000"/>
+          </a:xfrm>
+          <a:prstGeom prst="rect">
+            <a:avLst/>
+          </a:prstGeom>
+          <a:solidFill>
+            <a:srgbClr val="252423"/>
+          </a:solidFill>
+          <a:ln w="19050" cap="flat" cmpd="sng" algn="ctr">
+            <a:noFill/>
+            <a:prstDash val="solid"/>
+            <a:miter lim="800000"/>
+          </a:ln>
+          <a:effectLst/>
+          <a:extLst>
+            <a:ext uri="{91240B29-F687-4F45-9708-019B960494DF}">
+              <a14:hiddenLine xmlns:a14="http://schemas.microsoft.com/office/drawing/2010/main" w="19050" cap="flat" cmpd="sng" algn="ctr">
+                <a:solidFill>
+                  <a:schemeClr val="accent1">
+                    <a:shade val="15000"/>
+                  </a:schemeClr>
+                </a:solidFill>
+                <a:prstDash val="solid"/>
+                <a:miter lim="800000"/>
+              </a14:hiddenLine>
+            </a:ext>
+          </a:extLst>
+        </p:spPr>
+        <p:style>
+          <a:lnRef idx="2">
+            <a:schemeClr val="accent1">
+              <a:shade val="15000"/>
+            </a:schemeClr>
+          </a:lnRef>
+          <a:fillRef idx="1">
+            <a:schemeClr val="accent1"/>
+          </a:fillRef>
+          <a:effectRef idx="0">
+            <a:schemeClr val="accent1"/>
+          </a:effectRef>
+          <a:fontRef idx="minor">
+            <a:schemeClr val="lt1"/>
+          </a:fontRef>
+        </p:style>
+        <p:txBody>
+          <a:bodyPr rtlCol="0" anchor="ctr"/>
+          <a:lstStyle/>
+          <a:p>
+            <a:pPr algn="ctr"/>
+            <a:endParaRPr lang="en-US"/>
+          </a:p>
+        </p:txBody>
+      </p:sp>
+      <p:sp>
+        <p:nvSpPr>
+          <p:cNvPr id="3" name="Oval 2">
+            <a:extLst>
+              <a:ext uri="{FF2B5EF4-FFF2-40B4-BE49-F238E27FC236}">
+                <a16:creationId xmlns:a16="http://schemas.microsoft.com/office/drawing/2014/main" id="{20D244DD-05F2-B2D6-F0F7-496B3C643510}"/>
+              </a:ext>
+            </a:extLst>
+          </p:cNvPr>
+          <p:cNvSpPr/>
+          <p:nvPr/>
+        </p:nvSpPr>
+        <p:spPr>
+          <a:xfrm>
+            <a:off x="-640080" y="4297680"/>
+            <a:ext cx="2926080" cy="2926080"/>
+          </a:xfrm>
+          <a:prstGeom prst="ellipse">
+            <a:avLst/>
+          </a:prstGeom>
+          <a:solidFill>
+            <a:srgbClr val="0078D4">
+              <a:alpha val="80000"/>
+            </a:srgbClr>
+          </a:solidFill>
+          <a:ln w="19050" cap="flat" cmpd="sng" algn="ctr">
+            <a:noFill/>
+            <a:prstDash val="solid"/>
+            <a:miter lim="800000"/>
+          </a:ln>
+          <a:effectLst/>
+          <a:extLst>
+            <a:ext uri="{91240B29-F687-4F45-9708-019B960494DF}">
+              <a14:hiddenLine xmlns:a14="http://schemas.microsoft.com/office/drawing/2010/main" w="19050" cap="flat" cmpd="sng" algn="ctr">
+                <a:solidFill>
+                  <a:schemeClr val="accent1">
+                    <a:shade val="15000"/>
+                  </a:schemeClr>
+                </a:solidFill>
+                <a:prstDash val="solid"/>
+                <a:miter lim="800000"/>
+              </a14:hiddenLine>
+            </a:ext>
+          </a:extLst>
+        </p:spPr>
+        <p:style>
+          <a:lnRef idx="2">
+            <a:schemeClr val="accent1">
+              <a:shade val="15000"/>
+            </a:schemeClr>
+          </a:lnRef>
+          <a:fillRef idx="1">
+            <a:schemeClr val="accent1"/>
+          </a:fillRef>
+          <a:effectRef idx="0">
+            <a:schemeClr val="accent1"/>
+          </a:effectRef>
+          <a:fontRef idx="minor">
+            <a:schemeClr val="lt1"/>
+          </a:fontRef>
+        </p:style>
+        <p:txBody>
+          <a:bodyPr rtlCol="0" anchor="ctr"/>
+          <a:lstStyle/>
+          <a:p>
+            <a:pPr algn="ctr"/>
+            <a:endParaRPr lang="en-US"/>
+          </a:p>
+        </p:txBody>
+      </p:sp>
+      <p:sp>
+        <p:nvSpPr>
           <p:cNvPr id="4" name="Oval 3">
             <a:extLst>
               <a:ext uri="{FF2B5EF4-FFF2-40B4-BE49-F238E27FC236}">
-                <a16:creationId xmlns:a16="http://schemas.microsoft.com/office/drawing/2014/main" id="{E49724F9-FF7D-A7D7-E910-4E58FA05EDDB}"/>
+                <a16:creationId xmlns:a16="http://schemas.microsoft.com/office/drawing/2014/main" id="{9D31F0C0-E431-178D-2FC1-8950D6B8D5DA}"/>
               </a:ext>
             </a:extLst>
           </p:cNvPr>
@@ -9049,7 +11285,7 @@
           <p:cNvPr id="5" name="TextBox 4">
             <a:extLst>
               <a:ext uri="{FF2B5EF4-FFF2-40B4-BE49-F238E27FC236}">
-                <a16:creationId xmlns:a16="http://schemas.microsoft.com/office/drawing/2014/main" id="{1BA3E3AA-679B-1C38-E7D3-CA60023A3D87}"/>
+                <a16:creationId xmlns:a16="http://schemas.microsoft.com/office/drawing/2014/main" id="{50BDE8DC-4E35-0296-EF3C-26C18A4CCA90}"/>
               </a:ext>
             </a:extLst>
           </p:cNvPr>
@@ -9058,8 +11294,8 @@
         </p:nvSpPr>
         <p:spPr>
           <a:xfrm>
-            <a:off x="658367" y="658368"/>
-            <a:ext cx="8043373" cy="513987"/>
+            <a:off x="658368" y="658368"/>
+            <a:ext cx="6766560" cy="991041"/>
           </a:xfrm>
           <a:prstGeom prst="rect">
             <a:avLst/>
@@ -9089,7 +11325,7 @@
           <p:cNvPr id="6" name="TextBox 5">
             <a:extLst>
               <a:ext uri="{FF2B5EF4-FFF2-40B4-BE49-F238E27FC236}">
-                <a16:creationId xmlns:a16="http://schemas.microsoft.com/office/drawing/2014/main" id="{0B4636E1-D974-114B-910A-178F8E28C8AC}"/>
+                <a16:creationId xmlns:a16="http://schemas.microsoft.com/office/drawing/2014/main" id="{53CB3D66-EC94-C43A-C8B4-0BE2EA26061C}"/>
               </a:ext>
             </a:extLst>
           </p:cNvPr>
@@ -9098,8 +11334,8 @@
         </p:nvSpPr>
         <p:spPr>
           <a:xfrm>
-            <a:off x="658367" y="1512415"/>
-            <a:ext cx="7566989" cy="252377"/>
+            <a:off x="685800" y="1444752"/>
+            <a:ext cx="5852160" cy="467820"/>
           </a:xfrm>
           <a:prstGeom prst="rect">
             <a:avLst/>
@@ -9129,7 +11365,7 @@
           <p:cNvPr id="7" name="Rectangle: Rounded Corners 6">
             <a:extLst>
               <a:ext uri="{FF2B5EF4-FFF2-40B4-BE49-F238E27FC236}">
-                <a16:creationId xmlns:a16="http://schemas.microsoft.com/office/drawing/2014/main" id="{04014688-FA16-4D62-0B5E-B21FBFF9AC32}"/>
+                <a16:creationId xmlns:a16="http://schemas.microsoft.com/office/drawing/2014/main" id="{0F877420-23CB-42BA-B16A-70ACEE582A62}"/>
               </a:ext>
             </a:extLst>
           </p:cNvPr>
@@ -9199,7 +11435,7 @@
           <p:cNvPr id="8" name="Oval 7">
             <a:extLst>
               <a:ext uri="{FF2B5EF4-FFF2-40B4-BE49-F238E27FC236}">
-                <a16:creationId xmlns:a16="http://schemas.microsoft.com/office/drawing/2014/main" id="{E0E2C1D1-A843-1221-7AE9-CFF8D9D675A3}"/>
+                <a16:creationId xmlns:a16="http://schemas.microsoft.com/office/drawing/2014/main" id="{23C97BEB-54F7-1868-FB74-31CB59CBB20E}"/>
               </a:ext>
             </a:extLst>
           </p:cNvPr>
@@ -9267,7 +11503,7 @@
           <p:cNvPr id="9" name="TextBox 8">
             <a:extLst>
               <a:ext uri="{FF2B5EF4-FFF2-40B4-BE49-F238E27FC236}">
-                <a16:creationId xmlns:a16="http://schemas.microsoft.com/office/drawing/2014/main" id="{0C601DC4-FC90-421F-B916-817E52C540AF}"/>
+                <a16:creationId xmlns:a16="http://schemas.microsoft.com/office/drawing/2014/main" id="{AEA720BE-81E8-8366-C3F4-25E9EF397D8F}"/>
               </a:ext>
             </a:extLst>
           </p:cNvPr>
@@ -9308,7 +11544,7 @@
           <p:cNvPr id="10" name="TextBox 9">
             <a:extLst>
               <a:ext uri="{FF2B5EF4-FFF2-40B4-BE49-F238E27FC236}">
-                <a16:creationId xmlns:a16="http://schemas.microsoft.com/office/drawing/2014/main" id="{90A96813-ACB0-FDEF-DC98-501B56C7B0B9}"/>
+                <a16:creationId xmlns:a16="http://schemas.microsoft.com/office/drawing/2014/main" id="{262905DC-AC3C-173B-29C8-AAEF1B4562F8}"/>
               </a:ext>
             </a:extLst>
           </p:cNvPr>
@@ -9348,7 +11584,7 @@
           <p:cNvPr id="11" name="TextBox 10">
             <a:extLst>
               <a:ext uri="{FF2B5EF4-FFF2-40B4-BE49-F238E27FC236}">
-                <a16:creationId xmlns:a16="http://schemas.microsoft.com/office/drawing/2014/main" id="{84806425-4045-0D98-F262-94D15F745CC4}"/>
+                <a16:creationId xmlns:a16="http://schemas.microsoft.com/office/drawing/2014/main" id="{793C8ECE-3A3A-A214-61A0-1FFCB63B0FE1}"/>
               </a:ext>
             </a:extLst>
           </p:cNvPr>
@@ -9388,7 +11624,7 @@
           <p:cNvPr id="12" name="Rectangle: Rounded Corners 11">
             <a:extLst>
               <a:ext uri="{FF2B5EF4-FFF2-40B4-BE49-F238E27FC236}">
-                <a16:creationId xmlns:a16="http://schemas.microsoft.com/office/drawing/2014/main" id="{50241D87-61EF-9DDE-192B-A610F466E659}"/>
+                <a16:creationId xmlns:a16="http://schemas.microsoft.com/office/drawing/2014/main" id="{64999CFD-8774-0C16-FA36-3B46C1B2DCA5}"/>
               </a:ext>
             </a:extLst>
           </p:cNvPr>
@@ -9458,7 +11694,7 @@
           <p:cNvPr id="13" name="Oval 12">
             <a:extLst>
               <a:ext uri="{FF2B5EF4-FFF2-40B4-BE49-F238E27FC236}">
-                <a16:creationId xmlns:a16="http://schemas.microsoft.com/office/drawing/2014/main" id="{8311B486-D50A-C757-2217-F6396C4A9142}"/>
+                <a16:creationId xmlns:a16="http://schemas.microsoft.com/office/drawing/2014/main" id="{FEC3F6E4-AA23-0A76-CA8C-E632076BA046}"/>
               </a:ext>
             </a:extLst>
           </p:cNvPr>
@@ -9526,7 +11762,7 @@
           <p:cNvPr id="14" name="TextBox 13">
             <a:extLst>
               <a:ext uri="{FF2B5EF4-FFF2-40B4-BE49-F238E27FC236}">
-                <a16:creationId xmlns:a16="http://schemas.microsoft.com/office/drawing/2014/main" id="{42721FCF-DF1A-06B0-DA6A-45B7B50880AE}"/>
+                <a16:creationId xmlns:a16="http://schemas.microsoft.com/office/drawing/2014/main" id="{A27F8416-AA3F-6865-32E6-4E56905C83B4}"/>
               </a:ext>
             </a:extLst>
           </p:cNvPr>
@@ -9567,7 +11803,7 @@
           <p:cNvPr id="15" name="TextBox 14">
             <a:extLst>
               <a:ext uri="{FF2B5EF4-FFF2-40B4-BE49-F238E27FC236}">
-                <a16:creationId xmlns:a16="http://schemas.microsoft.com/office/drawing/2014/main" id="{63C38DDF-0434-8C97-BBE0-8C8247823BFB}"/>
+                <a16:creationId xmlns:a16="http://schemas.microsoft.com/office/drawing/2014/main" id="{076C6059-052E-7202-0A23-DA4F2B0F381B}"/>
               </a:ext>
             </a:extLst>
           </p:cNvPr>
@@ -9607,7 +11843,7 @@
           <p:cNvPr id="16" name="TextBox 15">
             <a:extLst>
               <a:ext uri="{FF2B5EF4-FFF2-40B4-BE49-F238E27FC236}">
-                <a16:creationId xmlns:a16="http://schemas.microsoft.com/office/drawing/2014/main" id="{AE9D496A-9124-B8C8-35C7-95FD6031085B}"/>
+                <a16:creationId xmlns:a16="http://schemas.microsoft.com/office/drawing/2014/main" id="{80E1AEAE-59DD-F817-B692-3D19B667490D}"/>
               </a:ext>
             </a:extLst>
           </p:cNvPr>
@@ -9647,7 +11883,7 @@
           <p:cNvPr id="17" name="Rectangle: Rounded Corners 16">
             <a:extLst>
               <a:ext uri="{FF2B5EF4-FFF2-40B4-BE49-F238E27FC236}">
-                <a16:creationId xmlns:a16="http://schemas.microsoft.com/office/drawing/2014/main" id="{639E6B27-BCAC-F99C-59FC-D981691A6590}"/>
+                <a16:creationId xmlns:a16="http://schemas.microsoft.com/office/drawing/2014/main" id="{B38AD529-8953-B2FB-9D9B-07FF5CEA5E93}"/>
               </a:ext>
             </a:extLst>
           </p:cNvPr>
@@ -9717,7 +11953,7 @@
           <p:cNvPr id="18" name="Oval 17">
             <a:extLst>
               <a:ext uri="{FF2B5EF4-FFF2-40B4-BE49-F238E27FC236}">
-                <a16:creationId xmlns:a16="http://schemas.microsoft.com/office/drawing/2014/main" id="{A47928C1-C7E2-6146-7416-CB2A948B22C7}"/>
+                <a16:creationId xmlns:a16="http://schemas.microsoft.com/office/drawing/2014/main" id="{65E57CB7-DA16-2D2C-6CBA-4AADB9976139}"/>
               </a:ext>
             </a:extLst>
           </p:cNvPr>
@@ -9785,7 +12021,7 @@
           <p:cNvPr id="19" name="TextBox 18">
             <a:extLst>
               <a:ext uri="{FF2B5EF4-FFF2-40B4-BE49-F238E27FC236}">
-                <a16:creationId xmlns:a16="http://schemas.microsoft.com/office/drawing/2014/main" id="{35C63D0C-317F-43A8-6F87-137C76F81746}"/>
+                <a16:creationId xmlns:a16="http://schemas.microsoft.com/office/drawing/2014/main" id="{CCB65849-65D2-6FFF-2967-482C64166EB5}"/>
               </a:ext>
             </a:extLst>
           </p:cNvPr>
@@ -9826,7 +12062,7 @@
           <p:cNvPr id="20" name="TextBox 19">
             <a:extLst>
               <a:ext uri="{FF2B5EF4-FFF2-40B4-BE49-F238E27FC236}">
-                <a16:creationId xmlns:a16="http://schemas.microsoft.com/office/drawing/2014/main" id="{5B95E2D8-19DF-D00F-3C62-050138175B1E}"/>
+                <a16:creationId xmlns:a16="http://schemas.microsoft.com/office/drawing/2014/main" id="{5F32DBD9-F20A-D0DB-76EC-B412FB22C6A3}"/>
               </a:ext>
             </a:extLst>
           </p:cNvPr>
@@ -9866,7 +12102,7 @@
           <p:cNvPr id="21" name="TextBox 20">
             <a:extLst>
               <a:ext uri="{FF2B5EF4-FFF2-40B4-BE49-F238E27FC236}">
-                <a16:creationId xmlns:a16="http://schemas.microsoft.com/office/drawing/2014/main" id="{F886CC88-9BFE-C826-40CB-979748EABAB0}"/>
+                <a16:creationId xmlns:a16="http://schemas.microsoft.com/office/drawing/2014/main" id="{F8DFC526-4CB6-C454-32AC-4BFC2FBCA5E2}"/>
               </a:ext>
             </a:extLst>
           </p:cNvPr>
@@ -9906,7 +12142,7 @@
           <p:cNvPr id="22" name="Rectangle: Rounded Corners 21">
             <a:extLst>
               <a:ext uri="{FF2B5EF4-FFF2-40B4-BE49-F238E27FC236}">
-                <a16:creationId xmlns:a16="http://schemas.microsoft.com/office/drawing/2014/main" id="{783355BE-79EE-5102-0988-AF370A4EF91D}"/>
+                <a16:creationId xmlns:a16="http://schemas.microsoft.com/office/drawing/2014/main" id="{21EF04FA-3A6F-B5AF-D21D-5C2944040DBA}"/>
               </a:ext>
             </a:extLst>
           </p:cNvPr>
@@ -9976,7 +12212,7 @@
           <p:cNvPr id="23" name="Oval 22">
             <a:extLst>
               <a:ext uri="{FF2B5EF4-FFF2-40B4-BE49-F238E27FC236}">
-                <a16:creationId xmlns:a16="http://schemas.microsoft.com/office/drawing/2014/main" id="{9B3DE963-8BF9-4CE7-F52B-C2207D7D3C2B}"/>
+                <a16:creationId xmlns:a16="http://schemas.microsoft.com/office/drawing/2014/main" id="{211BBEDA-9A4F-70B0-7283-56F0638AA585}"/>
               </a:ext>
             </a:extLst>
           </p:cNvPr>
@@ -10044,7 +12280,7 @@
           <p:cNvPr id="24" name="TextBox 23">
             <a:extLst>
               <a:ext uri="{FF2B5EF4-FFF2-40B4-BE49-F238E27FC236}">
-                <a16:creationId xmlns:a16="http://schemas.microsoft.com/office/drawing/2014/main" id="{6C9A5C2D-7F66-BE58-DD4C-15AC5FC6FFA7}"/>
+                <a16:creationId xmlns:a16="http://schemas.microsoft.com/office/drawing/2014/main" id="{76398394-0110-287C-1E10-C00714A1CCFD}"/>
               </a:ext>
             </a:extLst>
           </p:cNvPr>
@@ -10085,7 +12321,7 @@
           <p:cNvPr id="25" name="TextBox 24">
             <a:extLst>
               <a:ext uri="{FF2B5EF4-FFF2-40B4-BE49-F238E27FC236}">
-                <a16:creationId xmlns:a16="http://schemas.microsoft.com/office/drawing/2014/main" id="{71CA7505-0D2F-D02E-D28D-F7CB004F5187}"/>
+                <a16:creationId xmlns:a16="http://schemas.microsoft.com/office/drawing/2014/main" id="{95E550B4-FD3E-B0F3-1C8D-C2E9F48A33A1}"/>
               </a:ext>
             </a:extLst>
           </p:cNvPr>
@@ -10125,7 +12361,7 @@
           <p:cNvPr id="26" name="TextBox 25">
             <a:extLst>
               <a:ext uri="{FF2B5EF4-FFF2-40B4-BE49-F238E27FC236}">
-                <a16:creationId xmlns:a16="http://schemas.microsoft.com/office/drawing/2014/main" id="{799E6379-9581-00A6-464C-AEC3924AA138}"/>
+                <a16:creationId xmlns:a16="http://schemas.microsoft.com/office/drawing/2014/main" id="{AC7CF46F-4961-97D1-3F5C-A3FC8D0A2762}"/>
               </a:ext>
             </a:extLst>
           </p:cNvPr>
@@ -10165,7 +12401,7 @@
           <p:cNvPr id="27" name="Rectangle: Rounded Corners 26">
             <a:extLst>
               <a:ext uri="{FF2B5EF4-FFF2-40B4-BE49-F238E27FC236}">
-                <a16:creationId xmlns:a16="http://schemas.microsoft.com/office/drawing/2014/main" id="{35D81C2D-51F4-8E7B-F385-214E3A7FEEC2}"/>
+                <a16:creationId xmlns:a16="http://schemas.microsoft.com/office/drawing/2014/main" id="{9CB070B4-D3F9-F4EA-E4C9-864ACAE91B13}"/>
               </a:ext>
             </a:extLst>
           </p:cNvPr>
@@ -10233,7 +12469,7 @@
           <p:cNvPr id="28" name="TextBox 27">
             <a:extLst>
               <a:ext uri="{FF2B5EF4-FFF2-40B4-BE49-F238E27FC236}">
-                <a16:creationId xmlns:a16="http://schemas.microsoft.com/office/drawing/2014/main" id="{8BDBE892-330E-FBAE-D4DA-0C4286565B7B}"/>
+                <a16:creationId xmlns:a16="http://schemas.microsoft.com/office/drawing/2014/main" id="{2DB2EF36-CF57-7F3F-CA73-4F0CB2FC9639}"/>
               </a:ext>
             </a:extLst>
           </p:cNvPr>
@@ -10269,10 +12505,56 @@
           </a:p>
         </p:txBody>
       </p:sp>
+      <p:sp>
+        <p:nvSpPr>
+          <p:cNvPr id="29" name="TextBox 28">
+            <a:extLst>
+              <a:ext uri="{FF2B5EF4-FFF2-40B4-BE49-F238E27FC236}">
+                <a16:creationId xmlns:a16="http://schemas.microsoft.com/office/drawing/2014/main" id="{AFFDACD1-B77E-C56F-AA9C-686E02D306A9}"/>
+              </a:ext>
+            </a:extLst>
+          </p:cNvPr>
+          <p:cNvSpPr txBox="1"/>
+          <p:nvPr/>
+        </p:nvSpPr>
+        <p:spPr>
+          <a:xfrm>
+            <a:off x="713232" y="6473952"/>
+            <a:ext cx="2926080" cy="167738"/>
+          </a:xfrm>
+          <a:prstGeom prst="rect">
+            <a:avLst/>
+          </a:prstGeom>
+          <a:noFill/>
+        </p:spPr>
+        <p:txBody>
+          <a:bodyPr vert="horz" wrap="square" lIns="36576" tIns="18288" rIns="36576" bIns="18288" rtlCol="0">
+            <a:spAutoFit/>
+          </a:bodyPr>
+          <a:lstStyle/>
+          <a:p>
+            <a:r>
+              <a:rPr lang="it-IT" sz="850">
+                <a:solidFill>
+                  <a:srgbClr val="C8C6C4"/>
+                </a:solidFill>
+                <a:latin typeface="Segoe UI" panose="020B0502040204020203" pitchFamily="34" charset="0"/>
+              </a:rPr>
+              <a:t>Microsoft AI + AzureML | June 2026</a:t>
+            </a:r>
+            <a:endParaRPr lang="en-US" sz="850">
+              <a:solidFill>
+                <a:srgbClr val="C8C6C4"/>
+              </a:solidFill>
+              <a:latin typeface="Segoe UI" panose="020B0502040204020203" pitchFamily="34" charset="0"/>
+            </a:endParaRPr>
+          </a:p>
+        </p:txBody>
+      </p:sp>
     </p:spTree>
     <p:extLst>
       <p:ext uri="{BB962C8B-B14F-4D97-AF65-F5344CB8AC3E}">
-        <p14:creationId xmlns:p14="http://schemas.microsoft.com/office/powerpoint/2010/main" val="1024807437"/>
+        <p14:creationId xmlns:p14="http://schemas.microsoft.com/office/powerpoint/2010/main" val="3819502513"/>
       </p:ext>
     </p:extLst>
   </p:cSld>
@@ -10304,7 +12586,7 @@
           <p:cNvPr id="2" name="Rectangle 1">
             <a:extLst>
               <a:ext uri="{FF2B5EF4-FFF2-40B4-BE49-F238E27FC236}">
-                <a16:creationId xmlns:a16="http://schemas.microsoft.com/office/drawing/2014/main" id="{99C02493-4CB4-C81E-CF8B-CEC655BC928B}"/>
+                <a16:creationId xmlns:a16="http://schemas.microsoft.com/office/drawing/2014/main" id="{2D48D567-4C48-2532-A6E0-BCC214FB1487}"/>
               </a:ext>
             </a:extLst>
           </p:cNvPr>
@@ -10372,7 +12654,7 @@
           <p:cNvPr id="3" name="TextBox 2">
             <a:extLst>
               <a:ext uri="{FF2B5EF4-FFF2-40B4-BE49-F238E27FC236}">
-                <a16:creationId xmlns:a16="http://schemas.microsoft.com/office/drawing/2014/main" id="{BAAD64EB-B641-95FF-5570-BE1C51F71C68}"/>
+                <a16:creationId xmlns:a16="http://schemas.microsoft.com/office/drawing/2014/main" id="{61EB9319-7903-DED0-A583-EC2B8B476DE5}"/>
               </a:ext>
             </a:extLst>
           </p:cNvPr>
@@ -10412,7 +12694,7 @@
           <p:cNvPr id="4" name="TextBox 3">
             <a:extLst>
               <a:ext uri="{FF2B5EF4-FFF2-40B4-BE49-F238E27FC236}">
-                <a16:creationId xmlns:a16="http://schemas.microsoft.com/office/drawing/2014/main" id="{00EC5D6A-BD5B-7A00-251E-69C8475037EC}"/>
+                <a16:creationId xmlns:a16="http://schemas.microsoft.com/office/drawing/2014/main" id="{857136FC-CC25-4209-BA5E-479C3F09A3D0}"/>
               </a:ext>
             </a:extLst>
           </p:cNvPr>
@@ -10421,8 +12703,8 @@
         </p:nvSpPr>
         <p:spPr>
           <a:xfrm>
-            <a:off x="502919" y="502920"/>
-            <a:ext cx="9513645" cy="483209"/>
+            <a:off x="502920" y="502920"/>
+            <a:ext cx="8046720" cy="929485"/>
           </a:xfrm>
           <a:prstGeom prst="rect">
             <a:avLst/>
@@ -10449,10 +12731,10 @@
       </p:sp>
       <p:sp>
         <p:nvSpPr>
-          <p:cNvPr id="6" name="TextBox 5">
-            <a:extLst>
-              <a:ext uri="{FF2B5EF4-FFF2-40B4-BE49-F238E27FC236}">
-                <a16:creationId xmlns:a16="http://schemas.microsoft.com/office/drawing/2014/main" id="{65B5639F-85AC-CE3F-EFB5-1C8ADAFD2CDC}"/>
+          <p:cNvPr id="5" name="TextBox 4">
+            <a:extLst>
+              <a:ext uri="{FF2B5EF4-FFF2-40B4-BE49-F238E27FC236}">
+                <a16:creationId xmlns:a16="http://schemas.microsoft.com/office/drawing/2014/main" id="{0A6671A9-7BFC-6A7A-17F0-BFB3C6A0E2C0}"/>
               </a:ext>
             </a:extLst>
           </p:cNvPr>
@@ -10461,8 +12743,8 @@
         </p:nvSpPr>
         <p:spPr>
           <a:xfrm>
-            <a:off x="569229" y="1362860"/>
-            <a:ext cx="10474422" cy="252377"/>
+            <a:off x="9646920" y="256032"/>
+            <a:ext cx="2057400" cy="167738"/>
           </a:xfrm>
           <a:prstGeom prst="rect">
             <a:avLst/>
@@ -10475,6 +12757,47 @@
           </a:bodyPr>
           <a:lstStyle/>
           <a:p>
+            <a:pPr algn="r"/>
+            <a:r>
+              <a:rPr lang="en-US" sz="850">
+                <a:solidFill>
+                  <a:srgbClr val="605E5C"/>
+                </a:solidFill>
+                <a:latin typeface="Segoe UI" panose="020B0502040204020203" pitchFamily="34" charset="0"/>
+              </a:rPr>
+              <a:t>Microsoft AI + AzureML</a:t>
+            </a:r>
+          </a:p>
+        </p:txBody>
+      </p:sp>
+      <p:sp>
+        <p:nvSpPr>
+          <p:cNvPr id="6" name="TextBox 5">
+            <a:extLst>
+              <a:ext uri="{FF2B5EF4-FFF2-40B4-BE49-F238E27FC236}">
+                <a16:creationId xmlns:a16="http://schemas.microsoft.com/office/drawing/2014/main" id="{2B785C66-2FD5-9B25-5FE1-63484D341BD9}"/>
+              </a:ext>
+            </a:extLst>
+          </p:cNvPr>
+          <p:cNvSpPr txBox="1"/>
+          <p:nvPr/>
+        </p:nvSpPr>
+        <p:spPr>
+          <a:xfrm>
+            <a:off x="594360" y="1234440"/>
+            <a:ext cx="5669280" cy="683264"/>
+          </a:xfrm>
+          <a:prstGeom prst="rect">
+            <a:avLst/>
+          </a:prstGeom>
+          <a:noFill/>
+        </p:spPr>
+        <p:txBody>
+          <a:bodyPr vert="horz" wrap="square" lIns="36576" tIns="18288" rIns="36576" bIns="18288" rtlCol="0">
+            <a:spAutoFit/>
+          </a:bodyPr>
+          <a:lstStyle/>
+          <a:p>
             <a:r>
               <a:rPr lang="en-US" sz="1400">
                 <a:solidFill>
@@ -10482,7 +12805,7 @@
                 </a:solidFill>
                 <a:latin typeface="Aptos" panose="020B0004020202020204" pitchFamily="34" charset="0"/>
               </a:rPr>
-              <a:t>Map to a browser-control agent: read a page state, understand the user's intent, and return a precise machine-executable action plan.</a:t>
+              <a:t>Chirag's ask maps to a browser-control agent: read a page state, understand the user's intent, and return a precise machine-executable action plan.</a:t>
             </a:r>
           </a:p>
         </p:txBody>
@@ -10492,7 +12815,7 @@
           <p:cNvPr id="7" name="Rectangle: Rounded Corners 6">
             <a:extLst>
               <a:ext uri="{FF2B5EF4-FFF2-40B4-BE49-F238E27FC236}">
-                <a16:creationId xmlns:a16="http://schemas.microsoft.com/office/drawing/2014/main" id="{5D3A78D2-41E5-3E79-594F-0EB61743F179}"/>
+                <a16:creationId xmlns:a16="http://schemas.microsoft.com/office/drawing/2014/main" id="{38BD4F24-6B99-AE58-DDAF-737C78F495C8}"/>
               </a:ext>
             </a:extLst>
           </p:cNvPr>
@@ -10546,7 +12869,7 @@
           <p:cNvPr id="8" name="TextBox 7">
             <a:extLst>
               <a:ext uri="{FF2B5EF4-FFF2-40B4-BE49-F238E27FC236}">
-                <a16:creationId xmlns:a16="http://schemas.microsoft.com/office/drawing/2014/main" id="{6ACCABDC-0340-FF75-7350-6B749AAFA782}"/>
+                <a16:creationId xmlns:a16="http://schemas.microsoft.com/office/drawing/2014/main" id="{CE49EEDD-213B-3C62-644A-FBD7CA023A25}"/>
               </a:ext>
             </a:extLst>
           </p:cNvPr>
@@ -10586,7 +12909,7 @@
           <p:cNvPr id="9" name="TextBox 8">
             <a:extLst>
               <a:ext uri="{FF2B5EF4-FFF2-40B4-BE49-F238E27FC236}">
-                <a16:creationId xmlns:a16="http://schemas.microsoft.com/office/drawing/2014/main" id="{F7350C07-2714-9560-4224-E9CF4A029AB4}"/>
+                <a16:creationId xmlns:a16="http://schemas.microsoft.com/office/drawing/2014/main" id="{5DF4D252-C763-FC13-C25D-7B0D3C2D17AC}"/>
               </a:ext>
             </a:extLst>
           </p:cNvPr>
@@ -10626,7 +12949,7 @@
           <p:cNvPr id="10" name="TextBox 9">
             <a:extLst>
               <a:ext uri="{FF2B5EF4-FFF2-40B4-BE49-F238E27FC236}">
-                <a16:creationId xmlns:a16="http://schemas.microsoft.com/office/drawing/2014/main" id="{9DF8AC4A-E5D1-20E1-A655-E25594EE7EC2}"/>
+                <a16:creationId xmlns:a16="http://schemas.microsoft.com/office/drawing/2014/main" id="{FEAD7530-1AF5-5D89-072F-951852389BF9}"/>
               </a:ext>
             </a:extLst>
           </p:cNvPr>
@@ -10666,7 +12989,7 @@
           <p:cNvPr id="11" name="Rectangle: Rounded Corners 10">
             <a:extLst>
               <a:ext uri="{FF2B5EF4-FFF2-40B4-BE49-F238E27FC236}">
-                <a16:creationId xmlns:a16="http://schemas.microsoft.com/office/drawing/2014/main" id="{901650EC-0296-053C-738B-CEC34BFF61E7}"/>
+                <a16:creationId xmlns:a16="http://schemas.microsoft.com/office/drawing/2014/main" id="{1AA7C220-E5E7-5C20-9E33-F39408EAA862}"/>
               </a:ext>
             </a:extLst>
           </p:cNvPr>
@@ -10720,7 +13043,7 @@
           <p:cNvPr id="12" name="TextBox 11">
             <a:extLst>
               <a:ext uri="{FF2B5EF4-FFF2-40B4-BE49-F238E27FC236}">
-                <a16:creationId xmlns:a16="http://schemas.microsoft.com/office/drawing/2014/main" id="{F7FB08A2-2292-5194-3CD0-05D409CEB74A}"/>
+                <a16:creationId xmlns:a16="http://schemas.microsoft.com/office/drawing/2014/main" id="{D5D054AB-6CE4-5011-4682-C43CB4845DB9}"/>
               </a:ext>
             </a:extLst>
           </p:cNvPr>
@@ -10760,7 +13083,7 @@
           <p:cNvPr id="13" name="TextBox 12">
             <a:extLst>
               <a:ext uri="{FF2B5EF4-FFF2-40B4-BE49-F238E27FC236}">
-                <a16:creationId xmlns:a16="http://schemas.microsoft.com/office/drawing/2014/main" id="{1B3416CB-834E-5A7C-489A-E2C8BFC9A6F7}"/>
+                <a16:creationId xmlns:a16="http://schemas.microsoft.com/office/drawing/2014/main" id="{CEE2B1AF-D056-17FD-12D9-FD3B30B06AD5}"/>
               </a:ext>
             </a:extLst>
           </p:cNvPr>
@@ -10800,7 +13123,7 @@
           <p:cNvPr id="14" name="TextBox 13">
             <a:extLst>
               <a:ext uri="{FF2B5EF4-FFF2-40B4-BE49-F238E27FC236}">
-                <a16:creationId xmlns:a16="http://schemas.microsoft.com/office/drawing/2014/main" id="{5014366F-CE89-3CCC-FB9C-AD0640A0721A}"/>
+                <a16:creationId xmlns:a16="http://schemas.microsoft.com/office/drawing/2014/main" id="{740A90C0-DAB2-3208-6AC7-34F8C3447D2F}"/>
               </a:ext>
             </a:extLst>
           </p:cNvPr>
@@ -10840,7 +13163,7 @@
           <p:cNvPr id="15" name="Rectangle: Rounded Corners 14">
             <a:extLst>
               <a:ext uri="{FF2B5EF4-FFF2-40B4-BE49-F238E27FC236}">
-                <a16:creationId xmlns:a16="http://schemas.microsoft.com/office/drawing/2014/main" id="{8380C86F-DEA8-6CFD-F831-F048984129BA}"/>
+                <a16:creationId xmlns:a16="http://schemas.microsoft.com/office/drawing/2014/main" id="{C1C16875-E878-B86C-666C-A63761CE7452}"/>
               </a:ext>
             </a:extLst>
           </p:cNvPr>
@@ -10894,7 +13217,7 @@
           <p:cNvPr id="16" name="TextBox 15">
             <a:extLst>
               <a:ext uri="{FF2B5EF4-FFF2-40B4-BE49-F238E27FC236}">
-                <a16:creationId xmlns:a16="http://schemas.microsoft.com/office/drawing/2014/main" id="{98E2B5BE-CCE1-395D-AC50-8148DD923D14}"/>
+                <a16:creationId xmlns:a16="http://schemas.microsoft.com/office/drawing/2014/main" id="{1EE88E05-1E39-AA93-DCE3-DE81C3233DAC}"/>
               </a:ext>
             </a:extLst>
           </p:cNvPr>
@@ -10934,7 +13257,7 @@
           <p:cNvPr id="17" name="TextBox 16">
             <a:extLst>
               <a:ext uri="{FF2B5EF4-FFF2-40B4-BE49-F238E27FC236}">
-                <a16:creationId xmlns:a16="http://schemas.microsoft.com/office/drawing/2014/main" id="{A6759B29-6D70-A21F-37E8-A1FA06F6CC0A}"/>
+                <a16:creationId xmlns:a16="http://schemas.microsoft.com/office/drawing/2014/main" id="{19F77908-5CAF-023E-4C69-CAEABB32DB4E}"/>
               </a:ext>
             </a:extLst>
           </p:cNvPr>
@@ -10974,7 +13297,7 @@
           <p:cNvPr id="18" name="TextBox 17">
             <a:extLst>
               <a:ext uri="{FF2B5EF4-FFF2-40B4-BE49-F238E27FC236}">
-                <a16:creationId xmlns:a16="http://schemas.microsoft.com/office/drawing/2014/main" id="{9470E34A-00F6-BF6B-A598-13B1B319CA57}"/>
+                <a16:creationId xmlns:a16="http://schemas.microsoft.com/office/drawing/2014/main" id="{F140F76C-7F43-6FB5-D6CA-3D9FDF4CFC5D}"/>
               </a:ext>
             </a:extLst>
           </p:cNvPr>
@@ -11014,7 +13337,7 @@
           <p:cNvPr id="19" name="Rectangle: Rounded Corners 18">
             <a:extLst>
               <a:ext uri="{FF2B5EF4-FFF2-40B4-BE49-F238E27FC236}">
-                <a16:creationId xmlns:a16="http://schemas.microsoft.com/office/drawing/2014/main" id="{A2D04F47-C023-6735-6575-5D108AA5FF04}"/>
+                <a16:creationId xmlns:a16="http://schemas.microsoft.com/office/drawing/2014/main" id="{48865C73-8C1D-F869-9DD3-BC4519E6BB63}"/>
               </a:ext>
             </a:extLst>
           </p:cNvPr>
@@ -11082,7 +13405,7 @@
           <p:cNvPr id="20" name="TextBox 19">
             <a:extLst>
               <a:ext uri="{FF2B5EF4-FFF2-40B4-BE49-F238E27FC236}">
-                <a16:creationId xmlns:a16="http://schemas.microsoft.com/office/drawing/2014/main" id="{572CB94C-D075-FFD8-C020-E2424CB5F1BE}"/>
+                <a16:creationId xmlns:a16="http://schemas.microsoft.com/office/drawing/2014/main" id="{6B5446CB-C814-0BD3-994C-D3B4D35E0F0F}"/>
               </a:ext>
             </a:extLst>
           </p:cNvPr>
@@ -11122,7 +13445,7 @@
           <p:cNvPr id="21" name="TextBox 20">
             <a:extLst>
               <a:ext uri="{FF2B5EF4-FFF2-40B4-BE49-F238E27FC236}">
-                <a16:creationId xmlns:a16="http://schemas.microsoft.com/office/drawing/2014/main" id="{25AFB3D1-C609-77B6-9CD9-25F54288240C}"/>
+                <a16:creationId xmlns:a16="http://schemas.microsoft.com/office/drawing/2014/main" id="{0AAF99B4-9A78-4F06-AD58-6E35A82B2D60}"/>
               </a:ext>
             </a:extLst>
           </p:cNvPr>
@@ -11199,7 +13522,7 @@
           <p:cNvPr id="22" name="Straight Connector 21">
             <a:extLst>
               <a:ext uri="{FF2B5EF4-FFF2-40B4-BE49-F238E27FC236}">
-                <a16:creationId xmlns:a16="http://schemas.microsoft.com/office/drawing/2014/main" id="{6CDB7ABB-7752-49DC-123E-1890CB560B74}"/>
+                <a16:creationId xmlns:a16="http://schemas.microsoft.com/office/drawing/2014/main" id="{F48BAA3C-00DC-3B3D-F550-CEB5D67B2977}"/>
               </a:ext>
             </a:extLst>
           </p:cNvPr>
@@ -11240,7 +13563,7 @@
           <p:cNvPr id="23" name="Straight Connector 22">
             <a:extLst>
               <a:ext uri="{FF2B5EF4-FFF2-40B4-BE49-F238E27FC236}">
-                <a16:creationId xmlns:a16="http://schemas.microsoft.com/office/drawing/2014/main" id="{9E250C42-8E13-8068-A871-B67D72E166BE}"/>
+                <a16:creationId xmlns:a16="http://schemas.microsoft.com/office/drawing/2014/main" id="{FB7CB14E-1AC6-834A-043F-AACB1FCF4CEB}"/>
               </a:ext>
             </a:extLst>
           </p:cNvPr>
@@ -11281,7 +13604,7 @@
           <p:cNvPr id="24" name="Straight Connector 23">
             <a:extLst>
               <a:ext uri="{FF2B5EF4-FFF2-40B4-BE49-F238E27FC236}">
-                <a16:creationId xmlns:a16="http://schemas.microsoft.com/office/drawing/2014/main" id="{6902D23E-22DB-6D80-77FD-9CE53B3CA309}"/>
+                <a16:creationId xmlns:a16="http://schemas.microsoft.com/office/drawing/2014/main" id="{FE8894EB-C213-509B-B64D-AC80C883D82D}"/>
               </a:ext>
             </a:extLst>
           </p:cNvPr>
@@ -11322,7 +13645,7 @@
           <p:cNvPr id="25" name="Rectangle: Rounded Corners 24">
             <a:extLst>
               <a:ext uri="{FF2B5EF4-FFF2-40B4-BE49-F238E27FC236}">
-                <a16:creationId xmlns:a16="http://schemas.microsoft.com/office/drawing/2014/main" id="{23847C76-A790-3A4F-9141-CF42C3466FDE}"/>
+                <a16:creationId xmlns:a16="http://schemas.microsoft.com/office/drawing/2014/main" id="{7AB70CCE-14FE-6C8C-2D8C-026891994F60}"/>
               </a:ext>
             </a:extLst>
           </p:cNvPr>
@@ -11376,7 +13699,7 @@
           <p:cNvPr id="26" name="TextBox 25">
             <a:extLst>
               <a:ext uri="{FF2B5EF4-FFF2-40B4-BE49-F238E27FC236}">
-                <a16:creationId xmlns:a16="http://schemas.microsoft.com/office/drawing/2014/main" id="{6CE90C15-98E0-4018-9932-5BBF6DC3690C}"/>
+                <a16:creationId xmlns:a16="http://schemas.microsoft.com/office/drawing/2014/main" id="{2D70F88B-BD0D-965B-6FBD-A16082DEF387}"/>
               </a:ext>
             </a:extLst>
           </p:cNvPr>
@@ -11416,7 +13739,7 @@
           <p:cNvPr id="27" name="TextBox 26">
             <a:extLst>
               <a:ext uri="{FF2B5EF4-FFF2-40B4-BE49-F238E27FC236}">
-                <a16:creationId xmlns:a16="http://schemas.microsoft.com/office/drawing/2014/main" id="{E4B5E624-3B65-870E-49D0-E2237546CB88}"/>
+                <a16:creationId xmlns:a16="http://schemas.microsoft.com/office/drawing/2014/main" id="{FABF79C6-4CB1-7297-35AA-B1F164C1E97D}"/>
               </a:ext>
             </a:extLst>
           </p:cNvPr>
@@ -11456,7 +13779,7 @@
           <p:cNvPr id="28" name="Rectangle: Rounded Corners 27">
             <a:extLst>
               <a:ext uri="{FF2B5EF4-FFF2-40B4-BE49-F238E27FC236}">
-                <a16:creationId xmlns:a16="http://schemas.microsoft.com/office/drawing/2014/main" id="{74CF35AC-EC80-8BBE-77DF-FBDD516200AC}"/>
+                <a16:creationId xmlns:a16="http://schemas.microsoft.com/office/drawing/2014/main" id="{C7DFE734-1135-10B2-F2A9-A9BFE36661B8}"/>
               </a:ext>
             </a:extLst>
           </p:cNvPr>
@@ -11510,7 +13833,7 @@
           <p:cNvPr id="29" name="TextBox 28">
             <a:extLst>
               <a:ext uri="{FF2B5EF4-FFF2-40B4-BE49-F238E27FC236}">
-                <a16:creationId xmlns:a16="http://schemas.microsoft.com/office/drawing/2014/main" id="{06C6ACD6-6A47-F515-C988-5378551B03FB}"/>
+                <a16:creationId xmlns:a16="http://schemas.microsoft.com/office/drawing/2014/main" id="{CA5F9D5B-1D46-E321-4765-884FC739A5A9}"/>
               </a:ext>
             </a:extLst>
           </p:cNvPr>
@@ -11550,7 +13873,7 @@
           <p:cNvPr id="30" name="TextBox 29">
             <a:extLst>
               <a:ext uri="{FF2B5EF4-FFF2-40B4-BE49-F238E27FC236}">
-                <a16:creationId xmlns:a16="http://schemas.microsoft.com/office/drawing/2014/main" id="{6C7E403F-F8FF-E357-7764-6957CFB1F608}"/>
+                <a16:creationId xmlns:a16="http://schemas.microsoft.com/office/drawing/2014/main" id="{D25419A3-D872-B742-E279-0F63122AC7A9}"/>
               </a:ext>
             </a:extLst>
           </p:cNvPr>
@@ -11590,7 +13913,7 @@
           <p:cNvPr id="31" name="Rectangle: Rounded Corners 30">
             <a:extLst>
               <a:ext uri="{FF2B5EF4-FFF2-40B4-BE49-F238E27FC236}">
-                <a16:creationId xmlns:a16="http://schemas.microsoft.com/office/drawing/2014/main" id="{27454508-2AF5-E566-DA8D-ED7ABFDEF9D0}"/>
+                <a16:creationId xmlns:a16="http://schemas.microsoft.com/office/drawing/2014/main" id="{5D0B4990-B108-B7F6-6AFF-C7F4B346A762}"/>
               </a:ext>
             </a:extLst>
           </p:cNvPr>
@@ -11644,7 +13967,7 @@
           <p:cNvPr id="32" name="TextBox 31">
             <a:extLst>
               <a:ext uri="{FF2B5EF4-FFF2-40B4-BE49-F238E27FC236}">
-                <a16:creationId xmlns:a16="http://schemas.microsoft.com/office/drawing/2014/main" id="{D8AFDFDA-AA1F-0E52-3D28-1C3C60633A18}"/>
+                <a16:creationId xmlns:a16="http://schemas.microsoft.com/office/drawing/2014/main" id="{49D1C13C-1B31-CD16-6AD9-2B3B9F1B7B35}"/>
               </a:ext>
             </a:extLst>
           </p:cNvPr>
@@ -11684,7 +14007,7 @@
           <p:cNvPr id="33" name="TextBox 32">
             <a:extLst>
               <a:ext uri="{FF2B5EF4-FFF2-40B4-BE49-F238E27FC236}">
-                <a16:creationId xmlns:a16="http://schemas.microsoft.com/office/drawing/2014/main" id="{50E2CCFF-030B-04CF-49CC-4CCD6FAD787C}"/>
+                <a16:creationId xmlns:a16="http://schemas.microsoft.com/office/drawing/2014/main" id="{5C7089D6-A7D3-569C-94DC-EBC133A767E3}"/>
               </a:ext>
             </a:extLst>
           </p:cNvPr>
@@ -11724,7 +14047,7 @@
           <p:cNvPr id="34" name="Rectangle: Rounded Corners 33">
             <a:extLst>
               <a:ext uri="{FF2B5EF4-FFF2-40B4-BE49-F238E27FC236}">
-                <a16:creationId xmlns:a16="http://schemas.microsoft.com/office/drawing/2014/main" id="{B426E457-6B61-B5DB-6B27-1C157D994CD6}"/>
+                <a16:creationId xmlns:a16="http://schemas.microsoft.com/office/drawing/2014/main" id="{27ADAF62-2B53-D974-70C8-EF14FABB34D3}"/>
               </a:ext>
             </a:extLst>
           </p:cNvPr>
@@ -11778,7 +14101,7 @@
           <p:cNvPr id="35" name="TextBox 34">
             <a:extLst>
               <a:ext uri="{FF2B5EF4-FFF2-40B4-BE49-F238E27FC236}">
-                <a16:creationId xmlns:a16="http://schemas.microsoft.com/office/drawing/2014/main" id="{3B9D12F3-45D1-611B-5A00-3BD383CBB37D}"/>
+                <a16:creationId xmlns:a16="http://schemas.microsoft.com/office/drawing/2014/main" id="{6147CD8B-317B-6431-D1B7-02BA89D2CA2A}"/>
               </a:ext>
             </a:extLst>
           </p:cNvPr>
@@ -11818,7 +14141,7 @@
           <p:cNvPr id="36" name="TextBox 35">
             <a:extLst>
               <a:ext uri="{FF2B5EF4-FFF2-40B4-BE49-F238E27FC236}">
-                <a16:creationId xmlns:a16="http://schemas.microsoft.com/office/drawing/2014/main" id="{7680410A-7CD3-E7F1-AA11-79CE7DB5A050}"/>
+                <a16:creationId xmlns:a16="http://schemas.microsoft.com/office/drawing/2014/main" id="{8689DC31-1A97-A01C-9FA3-A3BFD867DE09}"/>
               </a:ext>
             </a:extLst>
           </p:cNvPr>
@@ -11853,10 +14176,57 @@
           </a:p>
         </p:txBody>
       </p:sp>
+      <p:sp>
+        <p:nvSpPr>
+          <p:cNvPr id="37" name="TextBox 36">
+            <a:extLst>
+              <a:ext uri="{FF2B5EF4-FFF2-40B4-BE49-F238E27FC236}">
+                <a16:creationId xmlns:a16="http://schemas.microsoft.com/office/drawing/2014/main" id="{CDDF89EC-356B-1066-EEC8-9C77CD1AB1DE}"/>
+              </a:ext>
+            </a:extLst>
+          </p:cNvPr>
+          <p:cNvSpPr txBox="1"/>
+          <p:nvPr/>
+        </p:nvSpPr>
+        <p:spPr>
+          <a:xfrm>
+            <a:off x="9281160" y="6510528"/>
+            <a:ext cx="2423160" cy="152349"/>
+          </a:xfrm>
+          <a:prstGeom prst="rect">
+            <a:avLst/>
+          </a:prstGeom>
+          <a:noFill/>
+        </p:spPr>
+        <p:txBody>
+          <a:bodyPr vert="horz" wrap="square" lIns="36576" tIns="18288" rIns="36576" bIns="18288" rtlCol="0">
+            <a:spAutoFit/>
+          </a:bodyPr>
+          <a:lstStyle/>
+          <a:p>
+            <a:pPr algn="r"/>
+            <a:r>
+              <a:rPr lang="it-IT" sz="750">
+                <a:solidFill>
+                  <a:srgbClr val="8A8886"/>
+                </a:solidFill>
+                <a:latin typeface="Segoe UI" panose="020B0502040204020203" pitchFamily="34" charset="0"/>
+              </a:rPr>
+              <a:t>Molina Healthcare EIM demo | 02</a:t>
+            </a:r>
+            <a:endParaRPr lang="en-US" sz="750">
+              <a:solidFill>
+                <a:srgbClr val="8A8886"/>
+              </a:solidFill>
+              <a:latin typeface="Segoe UI" panose="020B0502040204020203" pitchFamily="34" charset="0"/>
+            </a:endParaRPr>
+          </a:p>
+        </p:txBody>
+      </p:sp>
     </p:spTree>
     <p:extLst>
       <p:ext uri="{BB962C8B-B14F-4D97-AF65-F5344CB8AC3E}">
-        <p14:creationId xmlns:p14="http://schemas.microsoft.com/office/powerpoint/2010/main" val="4191963947"/>
+        <p14:creationId xmlns:p14="http://schemas.microsoft.com/office/powerpoint/2010/main" val="2602866994"/>
       </p:ext>
     </p:extLst>
   </p:cSld>
@@ -11888,7 +14258,7 @@
           <p:cNvPr id="2" name="Rectangle 1">
             <a:extLst>
               <a:ext uri="{FF2B5EF4-FFF2-40B4-BE49-F238E27FC236}">
-                <a16:creationId xmlns:a16="http://schemas.microsoft.com/office/drawing/2014/main" id="{2B2102C4-14BC-7A0E-B1BF-40D42A5FFBEC}"/>
+                <a16:creationId xmlns:a16="http://schemas.microsoft.com/office/drawing/2014/main" id="{17705012-E6AE-8810-D871-EE21C7BB0B9C}"/>
               </a:ext>
             </a:extLst>
           </p:cNvPr>
@@ -11956,7 +14326,7 @@
           <p:cNvPr id="3" name="TextBox 2">
             <a:extLst>
               <a:ext uri="{FF2B5EF4-FFF2-40B4-BE49-F238E27FC236}">
-                <a16:creationId xmlns:a16="http://schemas.microsoft.com/office/drawing/2014/main" id="{AC61D226-4EE3-597F-833A-CAD1D3E26A43}"/>
+                <a16:creationId xmlns:a16="http://schemas.microsoft.com/office/drawing/2014/main" id="{7674BAD7-1055-AD51-9F03-0A3E4101FA0B}"/>
               </a:ext>
             </a:extLst>
           </p:cNvPr>
@@ -11996,7 +14366,7 @@
           <p:cNvPr id="4" name="TextBox 3">
             <a:extLst>
               <a:ext uri="{FF2B5EF4-FFF2-40B4-BE49-F238E27FC236}">
-                <a16:creationId xmlns:a16="http://schemas.microsoft.com/office/drawing/2014/main" id="{B47AD166-FA0F-1328-881D-A26FE7315752}"/>
+                <a16:creationId xmlns:a16="http://schemas.microsoft.com/office/drawing/2014/main" id="{3325EBE5-CA51-2E06-FAE1-B302CA9DDB51}"/>
               </a:ext>
             </a:extLst>
           </p:cNvPr>
@@ -12036,7 +14406,7 @@
           <p:cNvPr id="5" name="TextBox 4">
             <a:extLst>
               <a:ext uri="{FF2B5EF4-FFF2-40B4-BE49-F238E27FC236}">
-                <a16:creationId xmlns:a16="http://schemas.microsoft.com/office/drawing/2014/main" id="{E5FDB6EE-D568-4C88-CF30-371D6CF220B3}"/>
+                <a16:creationId xmlns:a16="http://schemas.microsoft.com/office/drawing/2014/main" id="{4D2100AA-BCE2-4342-66DD-BD64493E27ED}"/>
               </a:ext>
             </a:extLst>
           </p:cNvPr>
@@ -12077,7 +14447,7 @@
           <p:cNvPr id="6" name="TextBox 5">
             <a:extLst>
               <a:ext uri="{FF2B5EF4-FFF2-40B4-BE49-F238E27FC236}">
-                <a16:creationId xmlns:a16="http://schemas.microsoft.com/office/drawing/2014/main" id="{FE9CA260-10CD-BE86-4162-578205F6B84C}"/>
+                <a16:creationId xmlns:a16="http://schemas.microsoft.com/office/drawing/2014/main" id="{52FEF3F6-E36B-E40C-84AC-1DE1472452E4}"/>
               </a:ext>
             </a:extLst>
           </p:cNvPr>
@@ -12117,7 +14487,7 @@
           <p:cNvPr id="7" name="Rectangle: Rounded Corners 6">
             <a:extLst>
               <a:ext uri="{FF2B5EF4-FFF2-40B4-BE49-F238E27FC236}">
-                <a16:creationId xmlns:a16="http://schemas.microsoft.com/office/drawing/2014/main" id="{A4945818-DDC6-E163-EB3A-74D9B36395B6}"/>
+                <a16:creationId xmlns:a16="http://schemas.microsoft.com/office/drawing/2014/main" id="{6AE1D0DF-33D5-4DA8-7FC9-773362D8C761}"/>
               </a:ext>
             </a:extLst>
           </p:cNvPr>
@@ -12171,7 +14541,7 @@
           <p:cNvPr id="8" name="Oval 7">
             <a:extLst>
               <a:ext uri="{FF2B5EF4-FFF2-40B4-BE49-F238E27FC236}">
-                <a16:creationId xmlns:a16="http://schemas.microsoft.com/office/drawing/2014/main" id="{C32232D1-BFA6-6979-B1D0-9321A6A39F4C}"/>
+                <a16:creationId xmlns:a16="http://schemas.microsoft.com/office/drawing/2014/main" id="{178A6C72-4491-4A99-92E3-8771AADBC9EB}"/>
               </a:ext>
             </a:extLst>
           </p:cNvPr>
@@ -12239,7 +14609,7 @@
           <p:cNvPr id="9" name="TextBox 8">
             <a:extLst>
               <a:ext uri="{FF2B5EF4-FFF2-40B4-BE49-F238E27FC236}">
-                <a16:creationId xmlns:a16="http://schemas.microsoft.com/office/drawing/2014/main" id="{2F761F9A-D61E-D0B4-F8E4-711560923C11}"/>
+                <a16:creationId xmlns:a16="http://schemas.microsoft.com/office/drawing/2014/main" id="{7C1A3552-9D5D-2830-E6EA-2E6FEE5091AD}"/>
               </a:ext>
             </a:extLst>
           </p:cNvPr>
@@ -12280,7 +14650,7 @@
           <p:cNvPr id="10" name="TextBox 9">
             <a:extLst>
               <a:ext uri="{FF2B5EF4-FFF2-40B4-BE49-F238E27FC236}">
-                <a16:creationId xmlns:a16="http://schemas.microsoft.com/office/drawing/2014/main" id="{CAF8703A-3E60-479A-CA58-8563BDBFE987}"/>
+                <a16:creationId xmlns:a16="http://schemas.microsoft.com/office/drawing/2014/main" id="{E43AB21B-5706-A4B5-1AF8-4D2213BED032}"/>
               </a:ext>
             </a:extLst>
           </p:cNvPr>
@@ -12320,7 +14690,7 @@
           <p:cNvPr id="11" name="TextBox 10">
             <a:extLst>
               <a:ext uri="{FF2B5EF4-FFF2-40B4-BE49-F238E27FC236}">
-                <a16:creationId xmlns:a16="http://schemas.microsoft.com/office/drawing/2014/main" id="{B1DB45C5-5F02-9ED9-9DAB-88C6B9A51DFD}"/>
+                <a16:creationId xmlns:a16="http://schemas.microsoft.com/office/drawing/2014/main" id="{23DA7877-37F2-B75A-6ADD-C2448ECE9820}"/>
               </a:ext>
             </a:extLst>
           </p:cNvPr>
@@ -12360,7 +14730,7 @@
           <p:cNvPr id="12" name="Rectangle: Rounded Corners 11">
             <a:extLst>
               <a:ext uri="{FF2B5EF4-FFF2-40B4-BE49-F238E27FC236}">
-                <a16:creationId xmlns:a16="http://schemas.microsoft.com/office/drawing/2014/main" id="{1C4522FB-A539-51B2-66D2-18AFA720B5D3}"/>
+                <a16:creationId xmlns:a16="http://schemas.microsoft.com/office/drawing/2014/main" id="{E5551763-0ACC-F4DF-2B5E-42380BA7D7D7}"/>
               </a:ext>
             </a:extLst>
           </p:cNvPr>
@@ -12414,7 +14784,7 @@
           <p:cNvPr id="13" name="Oval 12">
             <a:extLst>
               <a:ext uri="{FF2B5EF4-FFF2-40B4-BE49-F238E27FC236}">
-                <a16:creationId xmlns:a16="http://schemas.microsoft.com/office/drawing/2014/main" id="{E3AECA88-5C15-14BD-C9E1-1C34C806BF50}"/>
+                <a16:creationId xmlns:a16="http://schemas.microsoft.com/office/drawing/2014/main" id="{8FEEC267-2051-9EB5-4AD8-B22F1C38038D}"/>
               </a:ext>
             </a:extLst>
           </p:cNvPr>
@@ -12482,7 +14852,7 @@
           <p:cNvPr id="14" name="TextBox 13">
             <a:extLst>
               <a:ext uri="{FF2B5EF4-FFF2-40B4-BE49-F238E27FC236}">
-                <a16:creationId xmlns:a16="http://schemas.microsoft.com/office/drawing/2014/main" id="{C097D071-74C8-A6F7-05AC-D464D0CD78B6}"/>
+                <a16:creationId xmlns:a16="http://schemas.microsoft.com/office/drawing/2014/main" id="{D6CA496E-B645-BA0F-0438-0059940AA754}"/>
               </a:ext>
             </a:extLst>
           </p:cNvPr>
@@ -12523,7 +14893,7 @@
           <p:cNvPr id="15" name="TextBox 14">
             <a:extLst>
               <a:ext uri="{FF2B5EF4-FFF2-40B4-BE49-F238E27FC236}">
-                <a16:creationId xmlns:a16="http://schemas.microsoft.com/office/drawing/2014/main" id="{52EF56E8-BAEB-CA5A-C7ED-77A00B27726C}"/>
+                <a16:creationId xmlns:a16="http://schemas.microsoft.com/office/drawing/2014/main" id="{B3258AD1-629E-1125-52AC-A0ED2BB37FAB}"/>
               </a:ext>
             </a:extLst>
           </p:cNvPr>
@@ -12563,7 +14933,7 @@
           <p:cNvPr id="16" name="TextBox 15">
             <a:extLst>
               <a:ext uri="{FF2B5EF4-FFF2-40B4-BE49-F238E27FC236}">
-                <a16:creationId xmlns:a16="http://schemas.microsoft.com/office/drawing/2014/main" id="{FE24538E-5D50-2D1A-2B04-2E9EB840C3E0}"/>
+                <a16:creationId xmlns:a16="http://schemas.microsoft.com/office/drawing/2014/main" id="{A06AA808-B79A-D3E0-A44E-275A9AAAC31A}"/>
               </a:ext>
             </a:extLst>
           </p:cNvPr>
@@ -12603,7 +14973,7 @@
           <p:cNvPr id="17" name="Rectangle: Rounded Corners 16">
             <a:extLst>
               <a:ext uri="{FF2B5EF4-FFF2-40B4-BE49-F238E27FC236}">
-                <a16:creationId xmlns:a16="http://schemas.microsoft.com/office/drawing/2014/main" id="{CDAE71EE-AF73-E5EC-369D-529EBB1FA511}"/>
+                <a16:creationId xmlns:a16="http://schemas.microsoft.com/office/drawing/2014/main" id="{AD5ADE33-D38D-D71E-6C23-84BC8A74D6F0}"/>
               </a:ext>
             </a:extLst>
           </p:cNvPr>
@@ -12657,7 +15027,7 @@
           <p:cNvPr id="18" name="Oval 17">
             <a:extLst>
               <a:ext uri="{FF2B5EF4-FFF2-40B4-BE49-F238E27FC236}">
-                <a16:creationId xmlns:a16="http://schemas.microsoft.com/office/drawing/2014/main" id="{B1A0E798-67C1-00E4-F150-62446E770771}"/>
+                <a16:creationId xmlns:a16="http://schemas.microsoft.com/office/drawing/2014/main" id="{9552E0EC-1277-F83D-1D02-6814B97275BC}"/>
               </a:ext>
             </a:extLst>
           </p:cNvPr>
@@ -12725,7 +15095,7 @@
           <p:cNvPr id="19" name="TextBox 18">
             <a:extLst>
               <a:ext uri="{FF2B5EF4-FFF2-40B4-BE49-F238E27FC236}">
-                <a16:creationId xmlns:a16="http://schemas.microsoft.com/office/drawing/2014/main" id="{B399F7B2-79DF-87C4-FB54-114D6B41F6D9}"/>
+                <a16:creationId xmlns:a16="http://schemas.microsoft.com/office/drawing/2014/main" id="{81AB7768-E4CA-FA52-FB44-699F011EEB88}"/>
               </a:ext>
             </a:extLst>
           </p:cNvPr>
@@ -12766,7 +15136,7 @@
           <p:cNvPr id="20" name="TextBox 19">
             <a:extLst>
               <a:ext uri="{FF2B5EF4-FFF2-40B4-BE49-F238E27FC236}">
-                <a16:creationId xmlns:a16="http://schemas.microsoft.com/office/drawing/2014/main" id="{C7A05C42-C1CE-E085-44A8-4F3B50B4B17E}"/>
+                <a16:creationId xmlns:a16="http://schemas.microsoft.com/office/drawing/2014/main" id="{C1DD530A-5EAE-D912-810E-FA2D732811FB}"/>
               </a:ext>
             </a:extLst>
           </p:cNvPr>
@@ -12806,7 +15176,7 @@
           <p:cNvPr id="21" name="TextBox 20">
             <a:extLst>
               <a:ext uri="{FF2B5EF4-FFF2-40B4-BE49-F238E27FC236}">
-                <a16:creationId xmlns:a16="http://schemas.microsoft.com/office/drawing/2014/main" id="{53A67DE7-00D0-5400-C1A7-DD221E8580E2}"/>
+                <a16:creationId xmlns:a16="http://schemas.microsoft.com/office/drawing/2014/main" id="{B52338D7-B86A-4AAA-D5C3-90A92F41671E}"/>
               </a:ext>
             </a:extLst>
           </p:cNvPr>
@@ -12846,7 +15216,7 @@
           <p:cNvPr id="22" name="Rectangle: Rounded Corners 21">
             <a:extLst>
               <a:ext uri="{FF2B5EF4-FFF2-40B4-BE49-F238E27FC236}">
-                <a16:creationId xmlns:a16="http://schemas.microsoft.com/office/drawing/2014/main" id="{A9EB9090-773A-F329-E1BB-3070E3126889}"/>
+                <a16:creationId xmlns:a16="http://schemas.microsoft.com/office/drawing/2014/main" id="{6DCFE204-FCCF-A424-AD9F-79B10FC7B7B7}"/>
               </a:ext>
             </a:extLst>
           </p:cNvPr>
@@ -12900,7 +15270,7 @@
           <p:cNvPr id="23" name="Oval 22">
             <a:extLst>
               <a:ext uri="{FF2B5EF4-FFF2-40B4-BE49-F238E27FC236}">
-                <a16:creationId xmlns:a16="http://schemas.microsoft.com/office/drawing/2014/main" id="{CB7AF00B-3C2E-92B0-0777-D87A44202BB8}"/>
+                <a16:creationId xmlns:a16="http://schemas.microsoft.com/office/drawing/2014/main" id="{C8861689-0107-AFBB-D630-31B77260AFD6}"/>
               </a:ext>
             </a:extLst>
           </p:cNvPr>
@@ -12968,7 +15338,7 @@
           <p:cNvPr id="24" name="TextBox 23">
             <a:extLst>
               <a:ext uri="{FF2B5EF4-FFF2-40B4-BE49-F238E27FC236}">
-                <a16:creationId xmlns:a16="http://schemas.microsoft.com/office/drawing/2014/main" id="{DE4D4B88-C5E8-4976-3F12-15A22B4DE74B}"/>
+                <a16:creationId xmlns:a16="http://schemas.microsoft.com/office/drawing/2014/main" id="{F73BD434-BDA6-4709-491E-4A58C9F1A1A2}"/>
               </a:ext>
             </a:extLst>
           </p:cNvPr>
@@ -13009,7 +15379,7 @@
           <p:cNvPr id="25" name="TextBox 24">
             <a:extLst>
               <a:ext uri="{FF2B5EF4-FFF2-40B4-BE49-F238E27FC236}">
-                <a16:creationId xmlns:a16="http://schemas.microsoft.com/office/drawing/2014/main" id="{ECA9CDD1-9F9C-7BBF-622B-4688FB23C352}"/>
+                <a16:creationId xmlns:a16="http://schemas.microsoft.com/office/drawing/2014/main" id="{6627C52E-FD25-68F0-6322-96B6B8F2580A}"/>
               </a:ext>
             </a:extLst>
           </p:cNvPr>
@@ -13049,7 +15419,7 @@
           <p:cNvPr id="26" name="TextBox 25">
             <a:extLst>
               <a:ext uri="{FF2B5EF4-FFF2-40B4-BE49-F238E27FC236}">
-                <a16:creationId xmlns:a16="http://schemas.microsoft.com/office/drawing/2014/main" id="{D639ED4C-492F-EAAA-7836-36A9D44B159A}"/>
+                <a16:creationId xmlns:a16="http://schemas.microsoft.com/office/drawing/2014/main" id="{9DEE331C-E97E-AF44-7A8C-4242BF0EDF98}"/>
               </a:ext>
             </a:extLst>
           </p:cNvPr>
@@ -13089,7 +15459,7 @@
           <p:cNvPr id="27" name="Rectangle: Rounded Corners 26">
             <a:extLst>
               <a:ext uri="{FF2B5EF4-FFF2-40B4-BE49-F238E27FC236}">
-                <a16:creationId xmlns:a16="http://schemas.microsoft.com/office/drawing/2014/main" id="{F25E79B4-3062-2294-E74B-85F05EA9AB70}"/>
+                <a16:creationId xmlns:a16="http://schemas.microsoft.com/office/drawing/2014/main" id="{0E1A764C-0BFC-4800-BE59-6460150A7E48}"/>
               </a:ext>
             </a:extLst>
           </p:cNvPr>
@@ -13143,7 +15513,7 @@
           <p:cNvPr id="28" name="Oval 27">
             <a:extLst>
               <a:ext uri="{FF2B5EF4-FFF2-40B4-BE49-F238E27FC236}">
-                <a16:creationId xmlns:a16="http://schemas.microsoft.com/office/drawing/2014/main" id="{141D89D9-45D2-4BBF-1973-08C961F94DB0}"/>
+                <a16:creationId xmlns:a16="http://schemas.microsoft.com/office/drawing/2014/main" id="{C051C8B1-C15F-2C58-3F2F-1E73398C76FC}"/>
               </a:ext>
             </a:extLst>
           </p:cNvPr>
@@ -13211,7 +15581,7 @@
           <p:cNvPr id="29" name="TextBox 28">
             <a:extLst>
               <a:ext uri="{FF2B5EF4-FFF2-40B4-BE49-F238E27FC236}">
-                <a16:creationId xmlns:a16="http://schemas.microsoft.com/office/drawing/2014/main" id="{035F1C10-A531-0BE9-2D62-BDA9F3A58186}"/>
+                <a16:creationId xmlns:a16="http://schemas.microsoft.com/office/drawing/2014/main" id="{689073CB-44A7-5265-B36F-8BEF5E2E5D70}"/>
               </a:ext>
             </a:extLst>
           </p:cNvPr>
@@ -13252,7 +15622,7 @@
           <p:cNvPr id="30" name="TextBox 29">
             <a:extLst>
               <a:ext uri="{FF2B5EF4-FFF2-40B4-BE49-F238E27FC236}">
-                <a16:creationId xmlns:a16="http://schemas.microsoft.com/office/drawing/2014/main" id="{A109BB3C-C3DF-6B90-E64B-1A72A8A6172A}"/>
+                <a16:creationId xmlns:a16="http://schemas.microsoft.com/office/drawing/2014/main" id="{9C7C4F89-BBA8-89A7-E7CF-5FF298230BAE}"/>
               </a:ext>
             </a:extLst>
           </p:cNvPr>
@@ -13292,7 +15662,7 @@
           <p:cNvPr id="31" name="TextBox 30">
             <a:extLst>
               <a:ext uri="{FF2B5EF4-FFF2-40B4-BE49-F238E27FC236}">
-                <a16:creationId xmlns:a16="http://schemas.microsoft.com/office/drawing/2014/main" id="{AD8FCF9F-5CA7-5C97-6324-94992F719F52}"/>
+                <a16:creationId xmlns:a16="http://schemas.microsoft.com/office/drawing/2014/main" id="{D1E8A098-D6D0-C26B-B977-29A4269ABE84}"/>
               </a:ext>
             </a:extLst>
           </p:cNvPr>
@@ -13332,7 +15702,7 @@
           <p:cNvPr id="32" name="Rectangle: Rounded Corners 31">
             <a:extLst>
               <a:ext uri="{FF2B5EF4-FFF2-40B4-BE49-F238E27FC236}">
-                <a16:creationId xmlns:a16="http://schemas.microsoft.com/office/drawing/2014/main" id="{1B1BF879-FE50-F14F-20AC-2C272FE4A514}"/>
+                <a16:creationId xmlns:a16="http://schemas.microsoft.com/office/drawing/2014/main" id="{5DC1DD26-E6DB-390F-BB75-8B1CFD19B30B}"/>
               </a:ext>
             </a:extLst>
           </p:cNvPr>
@@ -13386,7 +15756,7 @@
           <p:cNvPr id="33" name="Oval 32">
             <a:extLst>
               <a:ext uri="{FF2B5EF4-FFF2-40B4-BE49-F238E27FC236}">
-                <a16:creationId xmlns:a16="http://schemas.microsoft.com/office/drawing/2014/main" id="{8FB4FB32-8851-F9CA-9217-EFBF39369ED8}"/>
+                <a16:creationId xmlns:a16="http://schemas.microsoft.com/office/drawing/2014/main" id="{B1B880A3-7CA3-88A3-54D6-F70D55E66E1D}"/>
               </a:ext>
             </a:extLst>
           </p:cNvPr>
@@ -13454,7 +15824,7 @@
           <p:cNvPr id="34" name="TextBox 33">
             <a:extLst>
               <a:ext uri="{FF2B5EF4-FFF2-40B4-BE49-F238E27FC236}">
-                <a16:creationId xmlns:a16="http://schemas.microsoft.com/office/drawing/2014/main" id="{A1C3950C-1E3E-8984-93A1-374626486CE3}"/>
+                <a16:creationId xmlns:a16="http://schemas.microsoft.com/office/drawing/2014/main" id="{2F3F17AC-BED0-8D87-A877-1C66E4DE0099}"/>
               </a:ext>
             </a:extLst>
           </p:cNvPr>
@@ -13495,7 +15865,7 @@
           <p:cNvPr id="35" name="TextBox 34">
             <a:extLst>
               <a:ext uri="{FF2B5EF4-FFF2-40B4-BE49-F238E27FC236}">
-                <a16:creationId xmlns:a16="http://schemas.microsoft.com/office/drawing/2014/main" id="{743CCDA0-E6BB-8FB0-D2D9-D29C8176D8BF}"/>
+                <a16:creationId xmlns:a16="http://schemas.microsoft.com/office/drawing/2014/main" id="{9682D461-F34D-0CFF-2A6C-189E8E32DD51}"/>
               </a:ext>
             </a:extLst>
           </p:cNvPr>
@@ -13535,7 +15905,7 @@
           <p:cNvPr id="36" name="TextBox 35">
             <a:extLst>
               <a:ext uri="{FF2B5EF4-FFF2-40B4-BE49-F238E27FC236}">
-                <a16:creationId xmlns:a16="http://schemas.microsoft.com/office/drawing/2014/main" id="{E5291B2D-0A85-476F-E982-2752E30EEACB}"/>
+                <a16:creationId xmlns:a16="http://schemas.microsoft.com/office/drawing/2014/main" id="{C8C92E68-6720-BB62-5938-1B59A8CBCE06}"/>
               </a:ext>
             </a:extLst>
           </p:cNvPr>
@@ -13570,10 +15940,57 @@
           </a:p>
         </p:txBody>
       </p:sp>
+      <p:sp>
+        <p:nvSpPr>
+          <p:cNvPr id="37" name="TextBox 36">
+            <a:extLst>
+              <a:ext uri="{FF2B5EF4-FFF2-40B4-BE49-F238E27FC236}">
+                <a16:creationId xmlns:a16="http://schemas.microsoft.com/office/drawing/2014/main" id="{B111890A-EB2F-9BA3-172E-365EDEF71571}"/>
+              </a:ext>
+            </a:extLst>
+          </p:cNvPr>
+          <p:cNvSpPr txBox="1"/>
+          <p:nvPr/>
+        </p:nvSpPr>
+        <p:spPr>
+          <a:xfrm>
+            <a:off x="9281160" y="6510528"/>
+            <a:ext cx="2423160" cy="152349"/>
+          </a:xfrm>
+          <a:prstGeom prst="rect">
+            <a:avLst/>
+          </a:prstGeom>
+          <a:noFill/>
+        </p:spPr>
+        <p:txBody>
+          <a:bodyPr vert="horz" wrap="square" lIns="36576" tIns="18288" rIns="36576" bIns="18288" rtlCol="0">
+            <a:spAutoFit/>
+          </a:bodyPr>
+          <a:lstStyle/>
+          <a:p>
+            <a:pPr algn="r"/>
+            <a:r>
+              <a:rPr lang="it-IT" sz="750">
+                <a:solidFill>
+                  <a:srgbClr val="8A8886"/>
+                </a:solidFill>
+                <a:latin typeface="Segoe UI" panose="020B0502040204020203" pitchFamily="34" charset="0"/>
+              </a:rPr>
+              <a:t>Molina Healthcare EIM demo | 03</a:t>
+            </a:r>
+            <a:endParaRPr lang="en-US" sz="750">
+              <a:solidFill>
+                <a:srgbClr val="8A8886"/>
+              </a:solidFill>
+              <a:latin typeface="Segoe UI" panose="020B0502040204020203" pitchFamily="34" charset="0"/>
+            </a:endParaRPr>
+          </a:p>
+        </p:txBody>
+      </p:sp>
     </p:spTree>
     <p:extLst>
       <p:ext uri="{BB962C8B-B14F-4D97-AF65-F5344CB8AC3E}">
-        <p14:creationId xmlns:p14="http://schemas.microsoft.com/office/powerpoint/2010/main" val="2980989318"/>
+        <p14:creationId xmlns:p14="http://schemas.microsoft.com/office/powerpoint/2010/main" val="4252568303"/>
       </p:ext>
     </p:extLst>
   </p:cSld>
@@ -13605,7 +16022,7 @@
           <p:cNvPr id="2" name="Rectangle 1">
             <a:extLst>
               <a:ext uri="{FF2B5EF4-FFF2-40B4-BE49-F238E27FC236}">
-                <a16:creationId xmlns:a16="http://schemas.microsoft.com/office/drawing/2014/main" id="{E1B683AC-157E-9FB3-D9C3-6932B137B727}"/>
+                <a16:creationId xmlns:a16="http://schemas.microsoft.com/office/drawing/2014/main" id="{2435F46F-5E20-F6F7-6F86-B83A78FB1F06}"/>
               </a:ext>
             </a:extLst>
           </p:cNvPr>
@@ -13673,7 +16090,7 @@
           <p:cNvPr id="3" name="TextBox 2">
             <a:extLst>
               <a:ext uri="{FF2B5EF4-FFF2-40B4-BE49-F238E27FC236}">
-                <a16:creationId xmlns:a16="http://schemas.microsoft.com/office/drawing/2014/main" id="{EA9B575B-7F33-09D9-B46E-D325BCA39505}"/>
+                <a16:creationId xmlns:a16="http://schemas.microsoft.com/office/drawing/2014/main" id="{4E74D878-63A0-735C-775B-C1956F3FD91B}"/>
               </a:ext>
             </a:extLst>
           </p:cNvPr>
@@ -13713,7 +16130,7 @@
           <p:cNvPr id="4" name="TextBox 3">
             <a:extLst>
               <a:ext uri="{FF2B5EF4-FFF2-40B4-BE49-F238E27FC236}">
-                <a16:creationId xmlns:a16="http://schemas.microsoft.com/office/drawing/2014/main" id="{EEFD338B-21F1-FB4B-16A5-81E41B1BC5B2}"/>
+                <a16:creationId xmlns:a16="http://schemas.microsoft.com/office/drawing/2014/main" id="{7ED15C6D-F201-E0FE-1452-A9DAAD1F02F4}"/>
               </a:ext>
             </a:extLst>
           </p:cNvPr>
@@ -13753,7 +16170,7 @@
           <p:cNvPr id="5" name="TextBox 4">
             <a:extLst>
               <a:ext uri="{FF2B5EF4-FFF2-40B4-BE49-F238E27FC236}">
-                <a16:creationId xmlns:a16="http://schemas.microsoft.com/office/drawing/2014/main" id="{11ED1850-57BE-13C0-7C93-37922914CA6F}"/>
+                <a16:creationId xmlns:a16="http://schemas.microsoft.com/office/drawing/2014/main" id="{DBD6DDED-FF58-0697-7472-F0EC7422BF12}"/>
               </a:ext>
             </a:extLst>
           </p:cNvPr>
@@ -13794,7 +16211,7 @@
           <p:cNvPr id="6" name="TextBox 5">
             <a:extLst>
               <a:ext uri="{FF2B5EF4-FFF2-40B4-BE49-F238E27FC236}">
-                <a16:creationId xmlns:a16="http://schemas.microsoft.com/office/drawing/2014/main" id="{45EBE288-D07B-E819-BD35-956CBDA026BC}"/>
+                <a16:creationId xmlns:a16="http://schemas.microsoft.com/office/drawing/2014/main" id="{9DB574AB-5861-4668-13E2-28B41B402C58}"/>
               </a:ext>
             </a:extLst>
           </p:cNvPr>
@@ -13804,7 +16221,7 @@
         <p:spPr>
           <a:xfrm>
             <a:off x="594360" y="1188720"/>
-            <a:ext cx="9230958" cy="244682"/>
+            <a:ext cx="6400800" cy="452432"/>
           </a:xfrm>
           <a:prstGeom prst="rect">
             <a:avLst/>
@@ -13824,7 +16241,7 @@
                 </a:solidFill>
                 <a:latin typeface="Aptos" panose="020B0004020202020204" pitchFamily="34" charset="0"/>
               </a:rPr>
-              <a:t>In the live demo, the base model often gets surface structure right but misses the stable EIM automation contract.</a:t>
+              <a:t>In the live demo, the base model often gets surface structure right, but misses the stable EIM automation contract.</a:t>
             </a:r>
           </a:p>
         </p:txBody>
@@ -13834,7 +16251,7 @@
           <p:cNvPr id="7" name="Rectangle: Rounded Corners 6">
             <a:extLst>
               <a:ext uri="{FF2B5EF4-FFF2-40B4-BE49-F238E27FC236}">
-                <a16:creationId xmlns:a16="http://schemas.microsoft.com/office/drawing/2014/main" id="{00CABF67-5AA6-0F76-D3B4-5F16172A3065}"/>
+                <a16:creationId xmlns:a16="http://schemas.microsoft.com/office/drawing/2014/main" id="{4768D5A4-80E9-4B29-CE25-0BF304B2E7C4}"/>
               </a:ext>
             </a:extLst>
           </p:cNvPr>
@@ -13888,7 +16305,7 @@
           <p:cNvPr id="8" name="TextBox 7">
             <a:extLst>
               <a:ext uri="{FF2B5EF4-FFF2-40B4-BE49-F238E27FC236}">
-                <a16:creationId xmlns:a16="http://schemas.microsoft.com/office/drawing/2014/main" id="{4F61536B-E784-F202-A2C0-3C192EB5434D}"/>
+                <a16:creationId xmlns:a16="http://schemas.microsoft.com/office/drawing/2014/main" id="{6679F5B1-3811-A8A5-3C8D-87C9A13AA968}"/>
               </a:ext>
             </a:extLst>
           </p:cNvPr>
@@ -13928,7 +16345,7 @@
           <p:cNvPr id="9" name="TextBox 8">
             <a:extLst>
               <a:ext uri="{FF2B5EF4-FFF2-40B4-BE49-F238E27FC236}">
-                <a16:creationId xmlns:a16="http://schemas.microsoft.com/office/drawing/2014/main" id="{7164000B-6B94-444D-31DE-07BDD27CE9BA}"/>
+                <a16:creationId xmlns:a16="http://schemas.microsoft.com/office/drawing/2014/main" id="{DA33DA25-401C-5863-A624-8A55161534D3}"/>
               </a:ext>
             </a:extLst>
           </p:cNvPr>
@@ -13968,7 +16385,7 @@
           <p:cNvPr id="10" name="TextBox 9">
             <a:extLst>
               <a:ext uri="{FF2B5EF4-FFF2-40B4-BE49-F238E27FC236}">
-                <a16:creationId xmlns:a16="http://schemas.microsoft.com/office/drawing/2014/main" id="{D5A4DD4E-7DD6-456F-372B-B15DCDB0A4DE}"/>
+                <a16:creationId xmlns:a16="http://schemas.microsoft.com/office/drawing/2014/main" id="{178C29D7-D8AC-F9C6-F723-1645729F71D7}"/>
               </a:ext>
             </a:extLst>
           </p:cNvPr>
@@ -14030,7 +16447,7 @@
           <p:cNvPr id="11" name="TextBox 10">
             <a:extLst>
               <a:ext uri="{FF2B5EF4-FFF2-40B4-BE49-F238E27FC236}">
-                <a16:creationId xmlns:a16="http://schemas.microsoft.com/office/drawing/2014/main" id="{D6DFDA47-6F29-FE88-AC4C-266DC8382034}"/>
+                <a16:creationId xmlns:a16="http://schemas.microsoft.com/office/drawing/2014/main" id="{B69345E9-0354-5409-016C-7F374A4FBAA5}"/>
               </a:ext>
             </a:extLst>
           </p:cNvPr>
@@ -14060,7 +16477,7 @@
                 </a:solidFill>
                 <a:latin typeface="Segoe UI" panose="020B0502040204020203" pitchFamily="34" charset="0"/>
               </a:rPr>
-              <a:t>Misses' workflow checks</a:t>
+              <a:t>Misses workflow checks</a:t>
             </a:r>
           </a:p>
         </p:txBody>
@@ -14070,7 +16487,7 @@
           <p:cNvPr id="12" name="TextBox 11">
             <a:extLst>
               <a:ext uri="{FF2B5EF4-FFF2-40B4-BE49-F238E27FC236}">
-                <a16:creationId xmlns:a16="http://schemas.microsoft.com/office/drawing/2014/main" id="{AFF4173E-8144-BDD6-F9B2-1A23448A2B02}"/>
+                <a16:creationId xmlns:a16="http://schemas.microsoft.com/office/drawing/2014/main" id="{7E58802C-5B82-5209-F4AF-989A9ECF1F14}"/>
               </a:ext>
             </a:extLst>
           </p:cNvPr>
@@ -14154,7 +16571,7 @@
           <p:cNvPr id="13" name="Rectangle: Rounded Corners 12">
             <a:extLst>
               <a:ext uri="{FF2B5EF4-FFF2-40B4-BE49-F238E27FC236}">
-                <a16:creationId xmlns:a16="http://schemas.microsoft.com/office/drawing/2014/main" id="{0D4C3794-6832-7051-5529-E06F39B40A42}"/>
+                <a16:creationId xmlns:a16="http://schemas.microsoft.com/office/drawing/2014/main" id="{05E7FF8A-D016-D541-C7E4-8FAAF7BB2F5E}"/>
               </a:ext>
             </a:extLst>
           </p:cNvPr>
@@ -14222,7 +16639,7 @@
           <p:cNvPr id="14" name="TextBox 13">
             <a:extLst>
               <a:ext uri="{FF2B5EF4-FFF2-40B4-BE49-F238E27FC236}">
-                <a16:creationId xmlns:a16="http://schemas.microsoft.com/office/drawing/2014/main" id="{F4AC6BC2-043C-5636-BB4C-8E98CA02C046}"/>
+                <a16:creationId xmlns:a16="http://schemas.microsoft.com/office/drawing/2014/main" id="{2F738BCC-9492-70C6-1C0E-47D22803CE77}"/>
               </a:ext>
             </a:extLst>
           </p:cNvPr>
@@ -14262,7 +16679,7 @@
           <p:cNvPr id="15" name="TextBox 14">
             <a:extLst>
               <a:ext uri="{FF2B5EF4-FFF2-40B4-BE49-F238E27FC236}">
-                <a16:creationId xmlns:a16="http://schemas.microsoft.com/office/drawing/2014/main" id="{3E52681F-6B27-A635-55C9-569E10C4E84D}"/>
+                <a16:creationId xmlns:a16="http://schemas.microsoft.com/office/drawing/2014/main" id="{3339767D-7BFD-DB9F-8AF1-0B8803E1A62C}"/>
               </a:ext>
             </a:extLst>
           </p:cNvPr>
@@ -14302,7 +16719,7 @@
           <p:cNvPr id="16" name="Rectangle: Rounded Corners 15">
             <a:extLst>
               <a:ext uri="{FF2B5EF4-FFF2-40B4-BE49-F238E27FC236}">
-                <a16:creationId xmlns:a16="http://schemas.microsoft.com/office/drawing/2014/main" id="{AFC6A3F2-2469-045F-7070-DA0599A13678}"/>
+                <a16:creationId xmlns:a16="http://schemas.microsoft.com/office/drawing/2014/main" id="{63E36F80-D832-E91B-A68C-5C854FC9207E}"/>
               </a:ext>
             </a:extLst>
           </p:cNvPr>
@@ -14356,7 +16773,7 @@
           <p:cNvPr id="17" name="TextBox 16">
             <a:extLst>
               <a:ext uri="{FF2B5EF4-FFF2-40B4-BE49-F238E27FC236}">
-                <a16:creationId xmlns:a16="http://schemas.microsoft.com/office/drawing/2014/main" id="{BBB6862E-219B-9D30-A238-9055E5FA9C49}"/>
+                <a16:creationId xmlns:a16="http://schemas.microsoft.com/office/drawing/2014/main" id="{D2DD0ADF-067A-0FCC-95C2-08E431332DA6}"/>
               </a:ext>
             </a:extLst>
           </p:cNvPr>
@@ -14396,7 +16813,7 @@
           <p:cNvPr id="18" name="TextBox 17">
             <a:extLst>
               <a:ext uri="{FF2B5EF4-FFF2-40B4-BE49-F238E27FC236}">
-                <a16:creationId xmlns:a16="http://schemas.microsoft.com/office/drawing/2014/main" id="{74E01327-EE57-3B4B-D056-3B52B7E7F32A}"/>
+                <a16:creationId xmlns:a16="http://schemas.microsoft.com/office/drawing/2014/main" id="{A3A3F955-4307-8E10-75D8-B7C36D9C02B1}"/>
               </a:ext>
             </a:extLst>
           </p:cNvPr>
@@ -14436,7 +16853,7 @@
           <p:cNvPr id="19" name="TextBox 18">
             <a:extLst>
               <a:ext uri="{FF2B5EF4-FFF2-40B4-BE49-F238E27FC236}">
-                <a16:creationId xmlns:a16="http://schemas.microsoft.com/office/drawing/2014/main" id="{E9DC7236-26EA-6924-3CA5-C832EA5B5A38}"/>
+                <a16:creationId xmlns:a16="http://schemas.microsoft.com/office/drawing/2014/main" id="{C8E598C2-57F9-758E-277F-E94FEA2F1A42}"/>
               </a:ext>
             </a:extLst>
           </p:cNvPr>
@@ -14477,7 +16894,7 @@
           <p:cNvPr id="20" name="TextBox 19">
             <a:extLst>
               <a:ext uri="{FF2B5EF4-FFF2-40B4-BE49-F238E27FC236}">
-                <a16:creationId xmlns:a16="http://schemas.microsoft.com/office/drawing/2014/main" id="{71FBE3A5-4D6A-113C-EC7F-62C5AE383D32}"/>
+                <a16:creationId xmlns:a16="http://schemas.microsoft.com/office/drawing/2014/main" id="{C41818B3-6CED-6D47-A83F-460F7EBE4CBA}"/>
               </a:ext>
             </a:extLst>
           </p:cNvPr>
@@ -14518,7 +16935,7 @@
           <p:cNvPr id="21" name="TextBox 20">
             <a:extLst>
               <a:ext uri="{FF2B5EF4-FFF2-40B4-BE49-F238E27FC236}">
-                <a16:creationId xmlns:a16="http://schemas.microsoft.com/office/drawing/2014/main" id="{12EF0D4F-66AA-7009-09D6-11416DC4C3F7}"/>
+                <a16:creationId xmlns:a16="http://schemas.microsoft.com/office/drawing/2014/main" id="{48CD73F6-8895-B126-81CE-46617E04E250}"/>
               </a:ext>
             </a:extLst>
           </p:cNvPr>
@@ -14558,7 +16975,7 @@
           <p:cNvPr id="22" name="Rectangle: Rounded Corners 21">
             <a:extLst>
               <a:ext uri="{FF2B5EF4-FFF2-40B4-BE49-F238E27FC236}">
-                <a16:creationId xmlns:a16="http://schemas.microsoft.com/office/drawing/2014/main" id="{8A6AADAA-FB05-6C78-5D43-CE9BEBA7ABC1}"/>
+                <a16:creationId xmlns:a16="http://schemas.microsoft.com/office/drawing/2014/main" id="{B1A8B150-B682-A09D-0DA6-F5DE031E6649}"/>
               </a:ext>
             </a:extLst>
           </p:cNvPr>
@@ -14626,7 +17043,7 @@
           <p:cNvPr id="23" name="TextBox 22">
             <a:extLst>
               <a:ext uri="{FF2B5EF4-FFF2-40B4-BE49-F238E27FC236}">
-                <a16:creationId xmlns:a16="http://schemas.microsoft.com/office/drawing/2014/main" id="{723251B7-8D98-CCC8-204C-7BBF48378A43}"/>
+                <a16:creationId xmlns:a16="http://schemas.microsoft.com/office/drawing/2014/main" id="{FCBDD2A5-704C-2867-630D-9625A5ACF479}"/>
               </a:ext>
             </a:extLst>
           </p:cNvPr>
@@ -14667,7 +17084,7 @@
           <p:cNvPr id="24" name="Rectangle: Rounded Corners 23">
             <a:extLst>
               <a:ext uri="{FF2B5EF4-FFF2-40B4-BE49-F238E27FC236}">
-                <a16:creationId xmlns:a16="http://schemas.microsoft.com/office/drawing/2014/main" id="{9688AB23-0909-2144-19F9-D4F332518FF0}"/>
+                <a16:creationId xmlns:a16="http://schemas.microsoft.com/office/drawing/2014/main" id="{291CED91-A5B5-A40C-AE1E-5CD5C14819ED}"/>
               </a:ext>
             </a:extLst>
           </p:cNvPr>
@@ -14735,7 +17152,7 @@
           <p:cNvPr id="25" name="TextBox 24">
             <a:extLst>
               <a:ext uri="{FF2B5EF4-FFF2-40B4-BE49-F238E27FC236}">
-                <a16:creationId xmlns:a16="http://schemas.microsoft.com/office/drawing/2014/main" id="{750700F2-AD2D-92BC-87C7-6E9AFEF6D2AD}"/>
+                <a16:creationId xmlns:a16="http://schemas.microsoft.com/office/drawing/2014/main" id="{B1F34005-F38A-C108-F1EA-DDEB4051E37E}"/>
               </a:ext>
             </a:extLst>
           </p:cNvPr>
@@ -14776,7 +17193,7 @@
           <p:cNvPr id="26" name="TextBox 25">
             <a:extLst>
               <a:ext uri="{FF2B5EF4-FFF2-40B4-BE49-F238E27FC236}">
-                <a16:creationId xmlns:a16="http://schemas.microsoft.com/office/drawing/2014/main" id="{E838C0EA-F247-D9B8-632E-B36566598D68}"/>
+                <a16:creationId xmlns:a16="http://schemas.microsoft.com/office/drawing/2014/main" id="{3BA3ACEF-736D-261D-5671-9130198078FE}"/>
               </a:ext>
             </a:extLst>
           </p:cNvPr>
@@ -14816,7 +17233,7 @@
           <p:cNvPr id="27" name="Rectangle: Rounded Corners 26">
             <a:extLst>
               <a:ext uri="{FF2B5EF4-FFF2-40B4-BE49-F238E27FC236}">
-                <a16:creationId xmlns:a16="http://schemas.microsoft.com/office/drawing/2014/main" id="{281D72E6-26A8-A048-3DBA-C95BBE388C6D}"/>
+                <a16:creationId xmlns:a16="http://schemas.microsoft.com/office/drawing/2014/main" id="{DA7DD594-CB53-C17E-1851-A54C48B44705}"/>
               </a:ext>
             </a:extLst>
           </p:cNvPr>
@@ -14884,7 +17301,7 @@
           <p:cNvPr id="28" name="TextBox 27">
             <a:extLst>
               <a:ext uri="{FF2B5EF4-FFF2-40B4-BE49-F238E27FC236}">
-                <a16:creationId xmlns:a16="http://schemas.microsoft.com/office/drawing/2014/main" id="{39755FCB-CEC0-4D06-CAB1-6EC61F050986}"/>
+                <a16:creationId xmlns:a16="http://schemas.microsoft.com/office/drawing/2014/main" id="{260E223B-0260-F095-D1EE-B308DD505BE0}"/>
               </a:ext>
             </a:extLst>
           </p:cNvPr>
@@ -14925,7 +17342,7 @@
           <p:cNvPr id="29" name="Rectangle: Rounded Corners 28">
             <a:extLst>
               <a:ext uri="{FF2B5EF4-FFF2-40B4-BE49-F238E27FC236}">
-                <a16:creationId xmlns:a16="http://schemas.microsoft.com/office/drawing/2014/main" id="{C7234791-00C4-26C9-C4F3-A0C615DB8A07}"/>
+                <a16:creationId xmlns:a16="http://schemas.microsoft.com/office/drawing/2014/main" id="{3F004A13-F3C1-EB87-1771-C369733FDE28}"/>
               </a:ext>
             </a:extLst>
           </p:cNvPr>
@@ -14993,7 +17410,7 @@
           <p:cNvPr id="30" name="TextBox 29">
             <a:extLst>
               <a:ext uri="{FF2B5EF4-FFF2-40B4-BE49-F238E27FC236}">
-                <a16:creationId xmlns:a16="http://schemas.microsoft.com/office/drawing/2014/main" id="{9B3C58E5-81D8-6971-726C-626F5990C785}"/>
+                <a16:creationId xmlns:a16="http://schemas.microsoft.com/office/drawing/2014/main" id="{58A7D3F0-D8E4-D716-721A-C0A9B4BA155A}"/>
               </a:ext>
             </a:extLst>
           </p:cNvPr>
@@ -15034,7 +17451,7 @@
           <p:cNvPr id="31" name="TextBox 30">
             <a:extLst>
               <a:ext uri="{FF2B5EF4-FFF2-40B4-BE49-F238E27FC236}">
-                <a16:creationId xmlns:a16="http://schemas.microsoft.com/office/drawing/2014/main" id="{C18926DB-EBB4-9722-ED23-DCB58DEC7E6F}"/>
+                <a16:creationId xmlns:a16="http://schemas.microsoft.com/office/drawing/2014/main" id="{9B184995-C6DE-2B2F-483E-8E1C64BD655A}"/>
               </a:ext>
             </a:extLst>
           </p:cNvPr>
@@ -15074,7 +17491,7 @@
           <p:cNvPr id="32" name="Rectangle: Rounded Corners 31">
             <a:extLst>
               <a:ext uri="{FF2B5EF4-FFF2-40B4-BE49-F238E27FC236}">
-                <a16:creationId xmlns:a16="http://schemas.microsoft.com/office/drawing/2014/main" id="{E7696382-5320-31A6-2EB8-36FA4EFC0D6B}"/>
+                <a16:creationId xmlns:a16="http://schemas.microsoft.com/office/drawing/2014/main" id="{89CF2FC2-4431-DC2B-95E7-020F4F392F31}"/>
               </a:ext>
             </a:extLst>
           </p:cNvPr>
@@ -15142,7 +17559,7 @@
           <p:cNvPr id="33" name="TextBox 32">
             <a:extLst>
               <a:ext uri="{FF2B5EF4-FFF2-40B4-BE49-F238E27FC236}">
-                <a16:creationId xmlns:a16="http://schemas.microsoft.com/office/drawing/2014/main" id="{3B7E5579-FC9A-A8DF-F067-CFBD18F50BEA}"/>
+                <a16:creationId xmlns:a16="http://schemas.microsoft.com/office/drawing/2014/main" id="{6F6F2060-79C5-19ED-DEB5-A09F5DFC342B}"/>
               </a:ext>
             </a:extLst>
           </p:cNvPr>
@@ -15183,7 +17600,7 @@
           <p:cNvPr id="34" name="Rectangle: Rounded Corners 33">
             <a:extLst>
               <a:ext uri="{FF2B5EF4-FFF2-40B4-BE49-F238E27FC236}">
-                <a16:creationId xmlns:a16="http://schemas.microsoft.com/office/drawing/2014/main" id="{6ADAC11D-6344-F57F-B650-BFFE09F226AB}"/>
+                <a16:creationId xmlns:a16="http://schemas.microsoft.com/office/drawing/2014/main" id="{F401D943-C884-0BFF-7C6D-78C03B44C27E}"/>
               </a:ext>
             </a:extLst>
           </p:cNvPr>
@@ -15251,7 +17668,7 @@
           <p:cNvPr id="35" name="TextBox 34">
             <a:extLst>
               <a:ext uri="{FF2B5EF4-FFF2-40B4-BE49-F238E27FC236}">
-                <a16:creationId xmlns:a16="http://schemas.microsoft.com/office/drawing/2014/main" id="{9F4F59EA-4347-F866-90FD-A33F31BD557E}"/>
+                <a16:creationId xmlns:a16="http://schemas.microsoft.com/office/drawing/2014/main" id="{99F47870-F051-9305-6A6B-1AE89AB873D7}"/>
               </a:ext>
             </a:extLst>
           </p:cNvPr>
@@ -15292,7 +17709,7 @@
           <p:cNvPr id="36" name="TextBox 35">
             <a:extLst>
               <a:ext uri="{FF2B5EF4-FFF2-40B4-BE49-F238E27FC236}">
-                <a16:creationId xmlns:a16="http://schemas.microsoft.com/office/drawing/2014/main" id="{62562D42-8228-D434-2B4C-AF52B21ABDC9}"/>
+                <a16:creationId xmlns:a16="http://schemas.microsoft.com/office/drawing/2014/main" id="{2E915D97-B1EA-7DB6-A74E-9691C5F7C041}"/>
               </a:ext>
             </a:extLst>
           </p:cNvPr>
@@ -15332,7 +17749,7 @@
           <p:cNvPr id="37" name="Rectangle: Rounded Corners 36">
             <a:extLst>
               <a:ext uri="{FF2B5EF4-FFF2-40B4-BE49-F238E27FC236}">
-                <a16:creationId xmlns:a16="http://schemas.microsoft.com/office/drawing/2014/main" id="{AA42D2FA-28BA-7BD6-ED6C-A5017B06B2FC}"/>
+                <a16:creationId xmlns:a16="http://schemas.microsoft.com/office/drawing/2014/main" id="{2B523953-4772-70FB-DF8F-CD6696182C20}"/>
               </a:ext>
             </a:extLst>
           </p:cNvPr>
@@ -15400,7 +17817,7 @@
           <p:cNvPr id="38" name="TextBox 37">
             <a:extLst>
               <a:ext uri="{FF2B5EF4-FFF2-40B4-BE49-F238E27FC236}">
-                <a16:creationId xmlns:a16="http://schemas.microsoft.com/office/drawing/2014/main" id="{6D78F615-A6F4-AC29-248F-8B1E30975856}"/>
+                <a16:creationId xmlns:a16="http://schemas.microsoft.com/office/drawing/2014/main" id="{F309AC00-1A53-3BC8-85AB-43EB3484CF6C}"/>
               </a:ext>
             </a:extLst>
           </p:cNvPr>
@@ -15441,7 +17858,7 @@
           <p:cNvPr id="39" name="Rectangle: Rounded Corners 38">
             <a:extLst>
               <a:ext uri="{FF2B5EF4-FFF2-40B4-BE49-F238E27FC236}">
-                <a16:creationId xmlns:a16="http://schemas.microsoft.com/office/drawing/2014/main" id="{45960638-495A-CF44-55FA-2FBDF5C1C6A9}"/>
+                <a16:creationId xmlns:a16="http://schemas.microsoft.com/office/drawing/2014/main" id="{621521E2-0354-2806-C8A6-5E9D2D67EDD8}"/>
               </a:ext>
             </a:extLst>
           </p:cNvPr>
@@ -15509,7 +17926,7 @@
           <p:cNvPr id="40" name="TextBox 39">
             <a:extLst>
               <a:ext uri="{FF2B5EF4-FFF2-40B4-BE49-F238E27FC236}">
-                <a16:creationId xmlns:a16="http://schemas.microsoft.com/office/drawing/2014/main" id="{43272D40-E9B0-99CA-D7F7-0E146D625F60}"/>
+                <a16:creationId xmlns:a16="http://schemas.microsoft.com/office/drawing/2014/main" id="{7E80DD9F-9F2B-2879-1F11-A21BC9ACE97D}"/>
               </a:ext>
             </a:extLst>
           </p:cNvPr>
@@ -15550,7 +17967,7 @@
           <p:cNvPr id="41" name="TextBox 40">
             <a:extLst>
               <a:ext uri="{FF2B5EF4-FFF2-40B4-BE49-F238E27FC236}">
-                <a16:creationId xmlns:a16="http://schemas.microsoft.com/office/drawing/2014/main" id="{CAC46C84-AFFF-8E7A-CF78-3D9623E3683A}"/>
+                <a16:creationId xmlns:a16="http://schemas.microsoft.com/office/drawing/2014/main" id="{33056491-9918-1BAA-EA2A-B0AA7D7B544F}"/>
               </a:ext>
             </a:extLst>
           </p:cNvPr>
@@ -15590,7 +18007,7 @@
           <p:cNvPr id="42" name="Rectangle: Rounded Corners 41">
             <a:extLst>
               <a:ext uri="{FF2B5EF4-FFF2-40B4-BE49-F238E27FC236}">
-                <a16:creationId xmlns:a16="http://schemas.microsoft.com/office/drawing/2014/main" id="{C102824A-E241-45FE-B525-9E9E05872261}"/>
+                <a16:creationId xmlns:a16="http://schemas.microsoft.com/office/drawing/2014/main" id="{E3716D8F-17EB-0D0F-90E9-B4AC0D677B85}"/>
               </a:ext>
             </a:extLst>
           </p:cNvPr>
@@ -15658,7 +18075,7 @@
           <p:cNvPr id="43" name="TextBox 42">
             <a:extLst>
               <a:ext uri="{FF2B5EF4-FFF2-40B4-BE49-F238E27FC236}">
-                <a16:creationId xmlns:a16="http://schemas.microsoft.com/office/drawing/2014/main" id="{3D83F2E3-F4B6-C08E-2A1A-1B044248FE40}"/>
+                <a16:creationId xmlns:a16="http://schemas.microsoft.com/office/drawing/2014/main" id="{EAE5DDB0-16DE-F199-82B0-E5118A54FE50}"/>
               </a:ext>
             </a:extLst>
           </p:cNvPr>
@@ -15699,7 +18116,7 @@
           <p:cNvPr id="44" name="Rectangle: Rounded Corners 43">
             <a:extLst>
               <a:ext uri="{FF2B5EF4-FFF2-40B4-BE49-F238E27FC236}">
-                <a16:creationId xmlns:a16="http://schemas.microsoft.com/office/drawing/2014/main" id="{76EC4CE0-C5CD-05F3-69C7-73C332A4E6B3}"/>
+                <a16:creationId xmlns:a16="http://schemas.microsoft.com/office/drawing/2014/main" id="{9E6D2075-425A-798E-D9DA-E45B3CAA5B7F}"/>
               </a:ext>
             </a:extLst>
           </p:cNvPr>
@@ -15767,7 +18184,7 @@
           <p:cNvPr id="45" name="TextBox 44">
             <a:extLst>
               <a:ext uri="{FF2B5EF4-FFF2-40B4-BE49-F238E27FC236}">
-                <a16:creationId xmlns:a16="http://schemas.microsoft.com/office/drawing/2014/main" id="{BF7B15DE-B8F5-272F-6241-76FA8BE45199}"/>
+                <a16:creationId xmlns:a16="http://schemas.microsoft.com/office/drawing/2014/main" id="{2D63E9A5-98DF-E697-E998-3F042C3007E7}"/>
               </a:ext>
             </a:extLst>
           </p:cNvPr>
@@ -15808,7 +18225,7 @@
           <p:cNvPr id="46" name="TextBox 45">
             <a:extLst>
               <a:ext uri="{FF2B5EF4-FFF2-40B4-BE49-F238E27FC236}">
-                <a16:creationId xmlns:a16="http://schemas.microsoft.com/office/drawing/2014/main" id="{E558D037-7784-86EB-D430-5312491C2376}"/>
+                <a16:creationId xmlns:a16="http://schemas.microsoft.com/office/drawing/2014/main" id="{571F9841-9005-9EB6-3543-210728D0C397}"/>
               </a:ext>
             </a:extLst>
           </p:cNvPr>
@@ -15848,7 +18265,7 @@
           <p:cNvPr id="47" name="Rectangle: Rounded Corners 46">
             <a:extLst>
               <a:ext uri="{FF2B5EF4-FFF2-40B4-BE49-F238E27FC236}">
-                <a16:creationId xmlns:a16="http://schemas.microsoft.com/office/drawing/2014/main" id="{FC461FE4-19B9-46FE-3EE6-18C69130E70F}"/>
+                <a16:creationId xmlns:a16="http://schemas.microsoft.com/office/drawing/2014/main" id="{C12A17C5-43EF-B163-95BD-C30660C92600}"/>
               </a:ext>
             </a:extLst>
           </p:cNvPr>
@@ -15916,7 +18333,7 @@
           <p:cNvPr id="48" name="TextBox 47">
             <a:extLst>
               <a:ext uri="{FF2B5EF4-FFF2-40B4-BE49-F238E27FC236}">
-                <a16:creationId xmlns:a16="http://schemas.microsoft.com/office/drawing/2014/main" id="{7BFA0EC7-E0A4-1959-F5F4-94559AEEFAE5}"/>
+                <a16:creationId xmlns:a16="http://schemas.microsoft.com/office/drawing/2014/main" id="{191D33BB-3B88-0B60-A1A2-D75FDE4E8EF1}"/>
               </a:ext>
             </a:extLst>
           </p:cNvPr>
@@ -15957,7 +18374,7 @@
           <p:cNvPr id="49" name="Rectangle: Rounded Corners 48">
             <a:extLst>
               <a:ext uri="{FF2B5EF4-FFF2-40B4-BE49-F238E27FC236}">
-                <a16:creationId xmlns:a16="http://schemas.microsoft.com/office/drawing/2014/main" id="{7FB8A735-7293-C407-8E45-F279550C9E2F}"/>
+                <a16:creationId xmlns:a16="http://schemas.microsoft.com/office/drawing/2014/main" id="{463F51F7-7EC8-3F3E-120D-A12045FE8E8A}"/>
               </a:ext>
             </a:extLst>
           </p:cNvPr>
@@ -16025,7 +18442,7 @@
           <p:cNvPr id="50" name="TextBox 49">
             <a:extLst>
               <a:ext uri="{FF2B5EF4-FFF2-40B4-BE49-F238E27FC236}">
-                <a16:creationId xmlns:a16="http://schemas.microsoft.com/office/drawing/2014/main" id="{8361899D-7F1F-F2B9-38A4-009AD6E7DCF8}"/>
+                <a16:creationId xmlns:a16="http://schemas.microsoft.com/office/drawing/2014/main" id="{E87D63A9-43C9-F33B-751D-17A5985C4C67}"/>
               </a:ext>
             </a:extLst>
           </p:cNvPr>
@@ -16066,7 +18483,7 @@
           <p:cNvPr id="51" name="TextBox 50">
             <a:extLst>
               <a:ext uri="{FF2B5EF4-FFF2-40B4-BE49-F238E27FC236}">
-                <a16:creationId xmlns:a16="http://schemas.microsoft.com/office/drawing/2014/main" id="{FB1E4453-2B69-3774-3941-5361EA868049}"/>
+                <a16:creationId xmlns:a16="http://schemas.microsoft.com/office/drawing/2014/main" id="{2BD92B16-615C-7282-EC64-024FBF18165B}"/>
               </a:ext>
             </a:extLst>
           </p:cNvPr>
@@ -16106,7 +18523,7 @@
           <p:cNvPr id="52" name="Rectangle: Rounded Corners 51">
             <a:extLst>
               <a:ext uri="{FF2B5EF4-FFF2-40B4-BE49-F238E27FC236}">
-                <a16:creationId xmlns:a16="http://schemas.microsoft.com/office/drawing/2014/main" id="{8C0007DD-B24C-A28A-371A-8214B11FBDFA}"/>
+                <a16:creationId xmlns:a16="http://schemas.microsoft.com/office/drawing/2014/main" id="{AF8CE039-D6C6-E78C-E0B1-FEB736C15D82}"/>
               </a:ext>
             </a:extLst>
           </p:cNvPr>
@@ -16174,7 +18591,7 @@
           <p:cNvPr id="53" name="TextBox 52">
             <a:extLst>
               <a:ext uri="{FF2B5EF4-FFF2-40B4-BE49-F238E27FC236}">
-                <a16:creationId xmlns:a16="http://schemas.microsoft.com/office/drawing/2014/main" id="{42B9A20F-E0EE-6ADD-C6B4-5B310707546A}"/>
+                <a16:creationId xmlns:a16="http://schemas.microsoft.com/office/drawing/2014/main" id="{7B3B09AB-71EF-9DBE-10F5-7207F7C839E0}"/>
               </a:ext>
             </a:extLst>
           </p:cNvPr>
@@ -16215,7 +18632,7 @@
           <p:cNvPr id="54" name="Rectangle: Rounded Corners 53">
             <a:extLst>
               <a:ext uri="{FF2B5EF4-FFF2-40B4-BE49-F238E27FC236}">
-                <a16:creationId xmlns:a16="http://schemas.microsoft.com/office/drawing/2014/main" id="{0C99D395-FE4E-85CF-A6AE-E8FFC5FB14B5}"/>
+                <a16:creationId xmlns:a16="http://schemas.microsoft.com/office/drawing/2014/main" id="{B517677E-CDAE-BBAF-9217-218BBD291F72}"/>
               </a:ext>
             </a:extLst>
           </p:cNvPr>
@@ -16283,7 +18700,7 @@
           <p:cNvPr id="55" name="TextBox 54">
             <a:extLst>
               <a:ext uri="{FF2B5EF4-FFF2-40B4-BE49-F238E27FC236}">
-                <a16:creationId xmlns:a16="http://schemas.microsoft.com/office/drawing/2014/main" id="{BE9FB549-A7E3-3C86-A422-4F0D3A6D2AD3}"/>
+                <a16:creationId xmlns:a16="http://schemas.microsoft.com/office/drawing/2014/main" id="{E41FA21B-AC35-F488-06EC-9B63028E36A9}"/>
               </a:ext>
             </a:extLst>
           </p:cNvPr>
@@ -16324,7 +18741,7 @@
           <p:cNvPr id="56" name="TextBox 55">
             <a:extLst>
               <a:ext uri="{FF2B5EF4-FFF2-40B4-BE49-F238E27FC236}">
-                <a16:creationId xmlns:a16="http://schemas.microsoft.com/office/drawing/2014/main" id="{5098C1B9-9D96-CAC6-D98E-0E927AFF367B}"/>
+                <a16:creationId xmlns:a16="http://schemas.microsoft.com/office/drawing/2014/main" id="{57347B9C-F798-2B40-DD4A-B8FE6E9D9F2E}"/>
               </a:ext>
             </a:extLst>
           </p:cNvPr>
@@ -16364,7 +18781,7 @@
           <p:cNvPr id="57" name="Rectangle: Rounded Corners 56">
             <a:extLst>
               <a:ext uri="{FF2B5EF4-FFF2-40B4-BE49-F238E27FC236}">
-                <a16:creationId xmlns:a16="http://schemas.microsoft.com/office/drawing/2014/main" id="{74D50A60-12F5-161B-D2D2-9B2DA34475A5}"/>
+                <a16:creationId xmlns:a16="http://schemas.microsoft.com/office/drawing/2014/main" id="{5CB23DEF-2C50-11E7-58A5-6BEDB4ABECB2}"/>
               </a:ext>
             </a:extLst>
           </p:cNvPr>
@@ -16432,7 +18849,7 @@
           <p:cNvPr id="58" name="TextBox 57">
             <a:extLst>
               <a:ext uri="{FF2B5EF4-FFF2-40B4-BE49-F238E27FC236}">
-                <a16:creationId xmlns:a16="http://schemas.microsoft.com/office/drawing/2014/main" id="{86B323DA-E426-829F-2B76-186BAF39A94A}"/>
+                <a16:creationId xmlns:a16="http://schemas.microsoft.com/office/drawing/2014/main" id="{10F700B1-A702-3082-0752-DDED041DBD27}"/>
               </a:ext>
             </a:extLst>
           </p:cNvPr>
@@ -16473,7 +18890,7 @@
           <p:cNvPr id="59" name="Rectangle: Rounded Corners 58">
             <a:extLst>
               <a:ext uri="{FF2B5EF4-FFF2-40B4-BE49-F238E27FC236}">
-                <a16:creationId xmlns:a16="http://schemas.microsoft.com/office/drawing/2014/main" id="{6F553679-6F0E-FE78-0550-0A7AA7B671F5}"/>
+                <a16:creationId xmlns:a16="http://schemas.microsoft.com/office/drawing/2014/main" id="{4B5BA48D-EF8B-7E93-5486-8A635F2FD593}"/>
               </a:ext>
             </a:extLst>
           </p:cNvPr>
@@ -16541,7 +18958,7 @@
           <p:cNvPr id="60" name="TextBox 59">
             <a:extLst>
               <a:ext uri="{FF2B5EF4-FFF2-40B4-BE49-F238E27FC236}">
-                <a16:creationId xmlns:a16="http://schemas.microsoft.com/office/drawing/2014/main" id="{44D98742-C55D-88E3-23B8-3F7B13939DCA}"/>
+                <a16:creationId xmlns:a16="http://schemas.microsoft.com/office/drawing/2014/main" id="{E6683F4E-56E1-519C-3A15-73B4CDFB5361}"/>
               </a:ext>
             </a:extLst>
           </p:cNvPr>
@@ -16577,10 +18994,57 @@
           </a:p>
         </p:txBody>
       </p:sp>
+      <p:sp>
+        <p:nvSpPr>
+          <p:cNvPr id="61" name="TextBox 60">
+            <a:extLst>
+              <a:ext uri="{FF2B5EF4-FFF2-40B4-BE49-F238E27FC236}">
+                <a16:creationId xmlns:a16="http://schemas.microsoft.com/office/drawing/2014/main" id="{6034C565-6D78-A12A-01C9-8E1C0ABCC167}"/>
+              </a:ext>
+            </a:extLst>
+          </p:cNvPr>
+          <p:cNvSpPr txBox="1"/>
+          <p:nvPr/>
+        </p:nvSpPr>
+        <p:spPr>
+          <a:xfrm>
+            <a:off x="9281160" y="6510528"/>
+            <a:ext cx="2423160" cy="152349"/>
+          </a:xfrm>
+          <a:prstGeom prst="rect">
+            <a:avLst/>
+          </a:prstGeom>
+          <a:noFill/>
+        </p:spPr>
+        <p:txBody>
+          <a:bodyPr vert="horz" wrap="square" lIns="36576" tIns="18288" rIns="36576" bIns="18288" rtlCol="0">
+            <a:spAutoFit/>
+          </a:bodyPr>
+          <a:lstStyle/>
+          <a:p>
+            <a:pPr algn="r"/>
+            <a:r>
+              <a:rPr lang="it-IT" sz="750">
+                <a:solidFill>
+                  <a:srgbClr val="8A8886"/>
+                </a:solidFill>
+                <a:latin typeface="Segoe UI" panose="020B0502040204020203" pitchFamily="34" charset="0"/>
+              </a:rPr>
+              <a:t>Molina Healthcare EIM demo | 04</a:t>
+            </a:r>
+            <a:endParaRPr lang="en-US" sz="750">
+              <a:solidFill>
+                <a:srgbClr val="8A8886"/>
+              </a:solidFill>
+              <a:latin typeface="Segoe UI" panose="020B0502040204020203" pitchFamily="34" charset="0"/>
+            </a:endParaRPr>
+          </a:p>
+        </p:txBody>
+      </p:sp>
     </p:spTree>
     <p:extLst>
       <p:ext uri="{BB962C8B-B14F-4D97-AF65-F5344CB8AC3E}">
-        <p14:creationId xmlns:p14="http://schemas.microsoft.com/office/powerpoint/2010/main" val="1478307375"/>
+        <p14:creationId xmlns:p14="http://schemas.microsoft.com/office/powerpoint/2010/main" val="1096125497"/>
       </p:ext>
     </p:extLst>
   </p:cSld>
@@ -16612,7 +19076,7 @@
           <p:cNvPr id="2" name="Rectangle 1">
             <a:extLst>
               <a:ext uri="{FF2B5EF4-FFF2-40B4-BE49-F238E27FC236}">
-                <a16:creationId xmlns:a16="http://schemas.microsoft.com/office/drawing/2014/main" id="{3DB18545-8814-6C68-5E3A-64B502ED9073}"/>
+                <a16:creationId xmlns:a16="http://schemas.microsoft.com/office/drawing/2014/main" id="{B61FB0FC-E2AA-5830-19A0-EFD7B3683F05}"/>
               </a:ext>
             </a:extLst>
           </p:cNvPr>
@@ -16680,7 +19144,7 @@
           <p:cNvPr id="3" name="TextBox 2">
             <a:extLst>
               <a:ext uri="{FF2B5EF4-FFF2-40B4-BE49-F238E27FC236}">
-                <a16:creationId xmlns:a16="http://schemas.microsoft.com/office/drawing/2014/main" id="{0FD5B8F7-6123-498F-5A45-A886DAE7E7A8}"/>
+                <a16:creationId xmlns:a16="http://schemas.microsoft.com/office/drawing/2014/main" id="{2F1F855C-5D0D-C983-BA23-398A1AC891DD}"/>
               </a:ext>
             </a:extLst>
           </p:cNvPr>
@@ -16720,7 +19184,7 @@
           <p:cNvPr id="4" name="TextBox 3">
             <a:extLst>
               <a:ext uri="{FF2B5EF4-FFF2-40B4-BE49-F238E27FC236}">
-                <a16:creationId xmlns:a16="http://schemas.microsoft.com/office/drawing/2014/main" id="{9728937E-FDA9-6E6A-5A4E-A70DD538DFB6}"/>
+                <a16:creationId xmlns:a16="http://schemas.microsoft.com/office/drawing/2014/main" id="{78EF2489-4CB8-E708-85E1-EC6B9C8D0DFC}"/>
               </a:ext>
             </a:extLst>
           </p:cNvPr>
@@ -16760,7 +19224,7 @@
           <p:cNvPr id="5" name="TextBox 4">
             <a:extLst>
               <a:ext uri="{FF2B5EF4-FFF2-40B4-BE49-F238E27FC236}">
-                <a16:creationId xmlns:a16="http://schemas.microsoft.com/office/drawing/2014/main" id="{00A78336-C871-D0CB-283E-7F106BA006E6}"/>
+                <a16:creationId xmlns:a16="http://schemas.microsoft.com/office/drawing/2014/main" id="{F37363B4-A751-5617-9A3A-DEF766B90104}"/>
               </a:ext>
             </a:extLst>
           </p:cNvPr>
@@ -16801,7 +19265,7 @@
           <p:cNvPr id="6" name="Rectangle: Rounded Corners 5">
             <a:extLst>
               <a:ext uri="{FF2B5EF4-FFF2-40B4-BE49-F238E27FC236}">
-                <a16:creationId xmlns:a16="http://schemas.microsoft.com/office/drawing/2014/main" id="{438D6B1D-EA0A-948C-CCE5-6EEAFC4AAFA0}"/>
+                <a16:creationId xmlns:a16="http://schemas.microsoft.com/office/drawing/2014/main" id="{0F7EB95F-C9F1-9214-AB54-2A0FD02BD023}"/>
               </a:ext>
             </a:extLst>
           </p:cNvPr>
@@ -16869,7 +19333,7 @@
           <p:cNvPr id="7" name="TextBox 6">
             <a:extLst>
               <a:ext uri="{FF2B5EF4-FFF2-40B4-BE49-F238E27FC236}">
-                <a16:creationId xmlns:a16="http://schemas.microsoft.com/office/drawing/2014/main" id="{06DE90F3-DD2E-A7D8-9335-EE3BB9610CAC}"/>
+                <a16:creationId xmlns:a16="http://schemas.microsoft.com/office/drawing/2014/main" id="{B7CB92A7-3DDC-22DA-C685-8BB3DAE7A1A9}"/>
               </a:ext>
             </a:extLst>
           </p:cNvPr>
@@ -16909,7 +19373,7 @@
           <p:cNvPr id="8" name="Oval 7">
             <a:extLst>
               <a:ext uri="{FF2B5EF4-FFF2-40B4-BE49-F238E27FC236}">
-                <a16:creationId xmlns:a16="http://schemas.microsoft.com/office/drawing/2014/main" id="{0D3B95C7-C17C-4AAD-AB4B-6E2BABD89FA5}"/>
+                <a16:creationId xmlns:a16="http://schemas.microsoft.com/office/drawing/2014/main" id="{DD35CAE3-9898-7F05-B86E-0035FF9C7B6A}"/>
               </a:ext>
             </a:extLst>
           </p:cNvPr>
@@ -16977,7 +19441,7 @@
           <p:cNvPr id="9" name="TextBox 8">
             <a:extLst>
               <a:ext uri="{FF2B5EF4-FFF2-40B4-BE49-F238E27FC236}">
-                <a16:creationId xmlns:a16="http://schemas.microsoft.com/office/drawing/2014/main" id="{BFEEA5CB-98D4-7ED2-292C-4EDC659BF92E}"/>
+                <a16:creationId xmlns:a16="http://schemas.microsoft.com/office/drawing/2014/main" id="{AB6424C8-2385-087A-BD8F-86E6DEE36749}"/>
               </a:ext>
             </a:extLst>
           </p:cNvPr>
@@ -17018,7 +19482,7 @@
           <p:cNvPr id="10" name="TextBox 9">
             <a:extLst>
               <a:ext uri="{FF2B5EF4-FFF2-40B4-BE49-F238E27FC236}">
-                <a16:creationId xmlns:a16="http://schemas.microsoft.com/office/drawing/2014/main" id="{2E43B77C-8A0D-E327-0A26-D649E584A536}"/>
+                <a16:creationId xmlns:a16="http://schemas.microsoft.com/office/drawing/2014/main" id="{732D187A-C5E8-3B1D-BC70-2FA14A799674}"/>
               </a:ext>
             </a:extLst>
           </p:cNvPr>
@@ -17058,7 +19522,7 @@
           <p:cNvPr id="11" name="Oval 10">
             <a:extLst>
               <a:ext uri="{FF2B5EF4-FFF2-40B4-BE49-F238E27FC236}">
-                <a16:creationId xmlns:a16="http://schemas.microsoft.com/office/drawing/2014/main" id="{2EE757AD-22A6-45E3-D92A-18A48156C9E1}"/>
+                <a16:creationId xmlns:a16="http://schemas.microsoft.com/office/drawing/2014/main" id="{F8E1D0C4-03CD-F488-FE72-BC52F0386C5E}"/>
               </a:ext>
             </a:extLst>
           </p:cNvPr>
@@ -17126,7 +19590,7 @@
           <p:cNvPr id="12" name="TextBox 11">
             <a:extLst>
               <a:ext uri="{FF2B5EF4-FFF2-40B4-BE49-F238E27FC236}">
-                <a16:creationId xmlns:a16="http://schemas.microsoft.com/office/drawing/2014/main" id="{2F5CEB9A-A63E-F0B6-A41C-84C1ED7C894F}"/>
+                <a16:creationId xmlns:a16="http://schemas.microsoft.com/office/drawing/2014/main" id="{458E03B8-DDA9-B424-C460-887A4B033F8F}"/>
               </a:ext>
             </a:extLst>
           </p:cNvPr>
@@ -17167,7 +19631,7 @@
           <p:cNvPr id="13" name="TextBox 12">
             <a:extLst>
               <a:ext uri="{FF2B5EF4-FFF2-40B4-BE49-F238E27FC236}">
-                <a16:creationId xmlns:a16="http://schemas.microsoft.com/office/drawing/2014/main" id="{8A7BCE88-287C-3872-41FE-8F03C2514854}"/>
+                <a16:creationId xmlns:a16="http://schemas.microsoft.com/office/drawing/2014/main" id="{B8A97C80-AA82-104E-AD2F-3BDFFF25CA15}"/>
               </a:ext>
             </a:extLst>
           </p:cNvPr>
@@ -17207,7 +19671,7 @@
           <p:cNvPr id="14" name="Oval 13">
             <a:extLst>
               <a:ext uri="{FF2B5EF4-FFF2-40B4-BE49-F238E27FC236}">
-                <a16:creationId xmlns:a16="http://schemas.microsoft.com/office/drawing/2014/main" id="{3A377312-711C-C6CC-853B-2C190E4F68DB}"/>
+                <a16:creationId xmlns:a16="http://schemas.microsoft.com/office/drawing/2014/main" id="{FA2C5D24-F390-5A50-4647-D20BE281BCBF}"/>
               </a:ext>
             </a:extLst>
           </p:cNvPr>
@@ -17275,7 +19739,7 @@
           <p:cNvPr id="15" name="TextBox 14">
             <a:extLst>
               <a:ext uri="{FF2B5EF4-FFF2-40B4-BE49-F238E27FC236}">
-                <a16:creationId xmlns:a16="http://schemas.microsoft.com/office/drawing/2014/main" id="{7CBA3663-B6C6-14B2-C53D-54C7BA847446}"/>
+                <a16:creationId xmlns:a16="http://schemas.microsoft.com/office/drawing/2014/main" id="{DF27CD29-E232-D221-2B06-57D86E320748}"/>
               </a:ext>
             </a:extLst>
           </p:cNvPr>
@@ -17316,7 +19780,7 @@
           <p:cNvPr id="16" name="TextBox 15">
             <a:extLst>
               <a:ext uri="{FF2B5EF4-FFF2-40B4-BE49-F238E27FC236}">
-                <a16:creationId xmlns:a16="http://schemas.microsoft.com/office/drawing/2014/main" id="{F33F450F-9E4A-EF3E-5BF4-A467C502F031}"/>
+                <a16:creationId xmlns:a16="http://schemas.microsoft.com/office/drawing/2014/main" id="{596F9C4E-58A2-F5FD-FB1B-8A2933EC4986}"/>
               </a:ext>
             </a:extLst>
           </p:cNvPr>
@@ -17356,7 +19820,7 @@
           <p:cNvPr id="17" name="Oval 16">
             <a:extLst>
               <a:ext uri="{FF2B5EF4-FFF2-40B4-BE49-F238E27FC236}">
-                <a16:creationId xmlns:a16="http://schemas.microsoft.com/office/drawing/2014/main" id="{CF90AAAF-5BF4-21B8-D64C-12D58D652EE8}"/>
+                <a16:creationId xmlns:a16="http://schemas.microsoft.com/office/drawing/2014/main" id="{FCE0A6EA-DFDE-91FF-1C63-174AE7FBDDFA}"/>
               </a:ext>
             </a:extLst>
           </p:cNvPr>
@@ -17424,7 +19888,7 @@
           <p:cNvPr id="18" name="TextBox 17">
             <a:extLst>
               <a:ext uri="{FF2B5EF4-FFF2-40B4-BE49-F238E27FC236}">
-                <a16:creationId xmlns:a16="http://schemas.microsoft.com/office/drawing/2014/main" id="{66C761CC-A1DA-F177-B3F7-642D84E3EBC8}"/>
+                <a16:creationId xmlns:a16="http://schemas.microsoft.com/office/drawing/2014/main" id="{5149E90F-17C9-93E0-5EF3-3A61D0FADC8B}"/>
               </a:ext>
             </a:extLst>
           </p:cNvPr>
@@ -17465,7 +19929,7 @@
           <p:cNvPr id="19" name="TextBox 18">
             <a:extLst>
               <a:ext uri="{FF2B5EF4-FFF2-40B4-BE49-F238E27FC236}">
-                <a16:creationId xmlns:a16="http://schemas.microsoft.com/office/drawing/2014/main" id="{7AA8FE5A-31AE-A931-68C3-0F0AF196A093}"/>
+                <a16:creationId xmlns:a16="http://schemas.microsoft.com/office/drawing/2014/main" id="{2D977512-AB29-DC03-5121-A8589A0D3EB5}"/>
               </a:ext>
             </a:extLst>
           </p:cNvPr>
@@ -17505,7 +19969,7 @@
           <p:cNvPr id="20" name="Rectangle: Rounded Corners 19">
             <a:extLst>
               <a:ext uri="{FF2B5EF4-FFF2-40B4-BE49-F238E27FC236}">
-                <a16:creationId xmlns:a16="http://schemas.microsoft.com/office/drawing/2014/main" id="{4D75DA31-AF8A-F6A0-A7FD-EF1333B0493D}"/>
+                <a16:creationId xmlns:a16="http://schemas.microsoft.com/office/drawing/2014/main" id="{48B3B240-3B60-0423-4B83-168B04331479}"/>
               </a:ext>
             </a:extLst>
           </p:cNvPr>
@@ -17573,7 +20037,7 @@
           <p:cNvPr id="21" name="TextBox 20">
             <a:extLst>
               <a:ext uri="{FF2B5EF4-FFF2-40B4-BE49-F238E27FC236}">
-                <a16:creationId xmlns:a16="http://schemas.microsoft.com/office/drawing/2014/main" id="{A0141B46-41D1-98CD-689D-FB5DB7DEDC86}"/>
+                <a16:creationId xmlns:a16="http://schemas.microsoft.com/office/drawing/2014/main" id="{C1967711-10A5-6AD3-A110-640BDA0F65D0}"/>
               </a:ext>
             </a:extLst>
           </p:cNvPr>
@@ -17613,7 +20077,7 @@
           <p:cNvPr id="22" name="Oval 21">
             <a:extLst>
               <a:ext uri="{FF2B5EF4-FFF2-40B4-BE49-F238E27FC236}">
-                <a16:creationId xmlns:a16="http://schemas.microsoft.com/office/drawing/2014/main" id="{F6A1B7E0-BAC2-F621-2297-BEB4F556BB00}"/>
+                <a16:creationId xmlns:a16="http://schemas.microsoft.com/office/drawing/2014/main" id="{52B1B492-E31D-932C-367D-E1059D94D152}"/>
               </a:ext>
             </a:extLst>
           </p:cNvPr>
@@ -17681,7 +20145,7 @@
           <p:cNvPr id="23" name="TextBox 22">
             <a:extLst>
               <a:ext uri="{FF2B5EF4-FFF2-40B4-BE49-F238E27FC236}">
-                <a16:creationId xmlns:a16="http://schemas.microsoft.com/office/drawing/2014/main" id="{AF50AABA-0040-7B36-046B-9BA1AF863479}"/>
+                <a16:creationId xmlns:a16="http://schemas.microsoft.com/office/drawing/2014/main" id="{E2F0EEF9-9E7E-144B-E974-9A21147E6C0B}"/>
               </a:ext>
             </a:extLst>
           </p:cNvPr>
@@ -17722,7 +20186,7 @@
           <p:cNvPr id="24" name="TextBox 23">
             <a:extLst>
               <a:ext uri="{FF2B5EF4-FFF2-40B4-BE49-F238E27FC236}">
-                <a16:creationId xmlns:a16="http://schemas.microsoft.com/office/drawing/2014/main" id="{E4DE9A06-64E0-58F1-0215-49D859889A9C}"/>
+                <a16:creationId xmlns:a16="http://schemas.microsoft.com/office/drawing/2014/main" id="{77432E92-EAE1-56DB-4F81-75A27CDE12BE}"/>
               </a:ext>
             </a:extLst>
           </p:cNvPr>
@@ -17762,7 +20226,7 @@
           <p:cNvPr id="25" name="Oval 24">
             <a:extLst>
               <a:ext uri="{FF2B5EF4-FFF2-40B4-BE49-F238E27FC236}">
-                <a16:creationId xmlns:a16="http://schemas.microsoft.com/office/drawing/2014/main" id="{29CF48F9-2F5D-B2B0-8603-03020BF9CB7E}"/>
+                <a16:creationId xmlns:a16="http://schemas.microsoft.com/office/drawing/2014/main" id="{7BB7DEC8-B7A2-5704-C176-7FD92C005651}"/>
               </a:ext>
             </a:extLst>
           </p:cNvPr>
@@ -17830,7 +20294,7 @@
           <p:cNvPr id="26" name="TextBox 25">
             <a:extLst>
               <a:ext uri="{FF2B5EF4-FFF2-40B4-BE49-F238E27FC236}">
-                <a16:creationId xmlns:a16="http://schemas.microsoft.com/office/drawing/2014/main" id="{5DA41F14-079A-2281-A28C-32501E7B7246}"/>
+                <a16:creationId xmlns:a16="http://schemas.microsoft.com/office/drawing/2014/main" id="{7119F0C5-E607-5515-E0AF-AEC99A4C3B59}"/>
               </a:ext>
             </a:extLst>
           </p:cNvPr>
@@ -17871,7 +20335,7 @@
           <p:cNvPr id="27" name="TextBox 26">
             <a:extLst>
               <a:ext uri="{FF2B5EF4-FFF2-40B4-BE49-F238E27FC236}">
-                <a16:creationId xmlns:a16="http://schemas.microsoft.com/office/drawing/2014/main" id="{113C8DEC-CEFC-F7C4-699E-3514C1C70354}"/>
+                <a16:creationId xmlns:a16="http://schemas.microsoft.com/office/drawing/2014/main" id="{F9399E48-F857-787C-7BA2-DECA03B824E7}"/>
               </a:ext>
             </a:extLst>
           </p:cNvPr>
@@ -17911,7 +20375,7 @@
           <p:cNvPr id="28" name="Oval 27">
             <a:extLst>
               <a:ext uri="{FF2B5EF4-FFF2-40B4-BE49-F238E27FC236}">
-                <a16:creationId xmlns:a16="http://schemas.microsoft.com/office/drawing/2014/main" id="{E265498B-DCED-941F-872D-BB8A802D692B}"/>
+                <a16:creationId xmlns:a16="http://schemas.microsoft.com/office/drawing/2014/main" id="{1757B03E-5A6C-7689-4E93-C747801BDB8B}"/>
               </a:ext>
             </a:extLst>
           </p:cNvPr>
@@ -17979,7 +20443,7 @@
           <p:cNvPr id="29" name="TextBox 28">
             <a:extLst>
               <a:ext uri="{FF2B5EF4-FFF2-40B4-BE49-F238E27FC236}">
-                <a16:creationId xmlns:a16="http://schemas.microsoft.com/office/drawing/2014/main" id="{9BD6F029-7506-463D-503F-474313EA5924}"/>
+                <a16:creationId xmlns:a16="http://schemas.microsoft.com/office/drawing/2014/main" id="{8E0819D7-7849-01C0-432E-951C1A4DFE78}"/>
               </a:ext>
             </a:extLst>
           </p:cNvPr>
@@ -18020,7 +20484,7 @@
           <p:cNvPr id="30" name="TextBox 29">
             <a:extLst>
               <a:ext uri="{FF2B5EF4-FFF2-40B4-BE49-F238E27FC236}">
-                <a16:creationId xmlns:a16="http://schemas.microsoft.com/office/drawing/2014/main" id="{5BF9876E-B148-8D11-CEFF-7C1A7DB99A19}"/>
+                <a16:creationId xmlns:a16="http://schemas.microsoft.com/office/drawing/2014/main" id="{9961E6AE-43AD-BA3B-0B3A-1ECBDA8B9F6D}"/>
               </a:ext>
             </a:extLst>
           </p:cNvPr>
@@ -18060,7 +20524,7 @@
           <p:cNvPr id="31" name="Oval 30">
             <a:extLst>
               <a:ext uri="{FF2B5EF4-FFF2-40B4-BE49-F238E27FC236}">
-                <a16:creationId xmlns:a16="http://schemas.microsoft.com/office/drawing/2014/main" id="{B5872738-D543-1BEF-5648-2FBB7F5D9F51}"/>
+                <a16:creationId xmlns:a16="http://schemas.microsoft.com/office/drawing/2014/main" id="{416B7D71-6EEA-5850-F841-D988DB5985C4}"/>
               </a:ext>
             </a:extLst>
           </p:cNvPr>
@@ -18128,7 +20592,7 @@
           <p:cNvPr id="32" name="TextBox 31">
             <a:extLst>
               <a:ext uri="{FF2B5EF4-FFF2-40B4-BE49-F238E27FC236}">
-                <a16:creationId xmlns:a16="http://schemas.microsoft.com/office/drawing/2014/main" id="{F02F851E-8DF0-2B14-AE7F-8026CE1504B6}"/>
+                <a16:creationId xmlns:a16="http://schemas.microsoft.com/office/drawing/2014/main" id="{47F24D00-8EEE-4F29-3A66-0866ED2756AB}"/>
               </a:ext>
             </a:extLst>
           </p:cNvPr>
@@ -18169,7 +20633,7 @@
           <p:cNvPr id="33" name="TextBox 32">
             <a:extLst>
               <a:ext uri="{FF2B5EF4-FFF2-40B4-BE49-F238E27FC236}">
-                <a16:creationId xmlns:a16="http://schemas.microsoft.com/office/drawing/2014/main" id="{29099254-37A0-0DE2-DECC-B4F603EDDAB2}"/>
+                <a16:creationId xmlns:a16="http://schemas.microsoft.com/office/drawing/2014/main" id="{54A755E4-A92A-06B1-8DBE-3933817A4B13}"/>
               </a:ext>
             </a:extLst>
           </p:cNvPr>
@@ -18209,7 +20673,7 @@
           <p:cNvPr id="34" name="Rectangle: Rounded Corners 33">
             <a:extLst>
               <a:ext uri="{FF2B5EF4-FFF2-40B4-BE49-F238E27FC236}">
-                <a16:creationId xmlns:a16="http://schemas.microsoft.com/office/drawing/2014/main" id="{D2C6A5BE-85A1-C480-F26E-89012DBD1085}"/>
+                <a16:creationId xmlns:a16="http://schemas.microsoft.com/office/drawing/2014/main" id="{ECEFBD31-F7C0-1317-F5AB-20E5FE48F46B}"/>
               </a:ext>
             </a:extLst>
           </p:cNvPr>
@@ -18277,7 +20741,7 @@
           <p:cNvPr id="35" name="TextBox 34">
             <a:extLst>
               <a:ext uri="{FF2B5EF4-FFF2-40B4-BE49-F238E27FC236}">
-                <a16:creationId xmlns:a16="http://schemas.microsoft.com/office/drawing/2014/main" id="{00134BC3-701B-4D4D-DE9B-85B6D3ED58E2}"/>
+                <a16:creationId xmlns:a16="http://schemas.microsoft.com/office/drawing/2014/main" id="{A907C7F0-88AC-EA4B-2D30-905F688129EF}"/>
               </a:ext>
             </a:extLst>
           </p:cNvPr>
@@ -18286,7 +20750,7 @@
         </p:nvSpPr>
         <p:spPr>
           <a:xfrm>
-            <a:off x="4562856" y="5539085"/>
+            <a:off x="4617720" y="5650992"/>
             <a:ext cx="2926080" cy="381643"/>
           </a:xfrm>
           <a:prstGeom prst="rect">
@@ -18302,39 +20766,68 @@
           <a:p>
             <a:pPr algn="ctr"/>
             <a:r>
-              <a:rPr lang="en-US" sz="1120" b="1" dirty="0">
+              <a:rPr lang="en-US" sz="1120" b="1">
                 <a:solidFill>
                   <a:srgbClr val="FFFFFF"/>
                 </a:solidFill>
                 <a:latin typeface="Segoe UI" panose="020B0502040204020203" pitchFamily="34" charset="0"/>
               </a:rPr>
-              <a:t>Conclusion: </a:t>
-            </a:r>
-            <a:r>
-              <a:rPr lang="en-US" sz="1120" b="1" dirty="0" err="1">
-                <a:solidFill>
-                  <a:srgbClr val="FFFFFF"/>
+              <a:t>Conclusion: promptable, but not yet dependable</a:t>
+            </a:r>
+          </a:p>
+        </p:txBody>
+      </p:sp>
+      <p:sp>
+        <p:nvSpPr>
+          <p:cNvPr id="36" name="TextBox 35">
+            <a:extLst>
+              <a:ext uri="{FF2B5EF4-FFF2-40B4-BE49-F238E27FC236}">
+                <a16:creationId xmlns:a16="http://schemas.microsoft.com/office/drawing/2014/main" id="{8A6FE080-652A-49E2-4591-817F44F37AED}"/>
+              </a:ext>
+            </a:extLst>
+          </p:cNvPr>
+          <p:cNvSpPr txBox="1"/>
+          <p:nvPr/>
+        </p:nvSpPr>
+        <p:spPr>
+          <a:xfrm>
+            <a:off x="9281160" y="6510528"/>
+            <a:ext cx="2423160" cy="152349"/>
+          </a:xfrm>
+          <a:prstGeom prst="rect">
+            <a:avLst/>
+          </a:prstGeom>
+          <a:noFill/>
+        </p:spPr>
+        <p:txBody>
+          <a:bodyPr vert="horz" wrap="square" lIns="36576" tIns="18288" rIns="36576" bIns="18288" rtlCol="0">
+            <a:spAutoFit/>
+          </a:bodyPr>
+          <a:lstStyle/>
+          <a:p>
+            <a:pPr algn="r"/>
+            <a:r>
+              <a:rPr lang="it-IT" sz="750">
+                <a:solidFill>
+                  <a:srgbClr val="8A8886"/>
                 </a:solidFill>
                 <a:latin typeface="Segoe UI" panose="020B0502040204020203" pitchFamily="34" charset="0"/>
               </a:rPr>
-              <a:t>promptable</a:t>
-            </a:r>
-            <a:r>
-              <a:rPr lang="en-US" sz="1120" b="1" dirty="0">
-                <a:solidFill>
-                  <a:srgbClr val="FFFFFF"/>
-                </a:solidFill>
-                <a:latin typeface="Segoe UI" panose="020B0502040204020203" pitchFamily="34" charset="0"/>
-              </a:rPr>
-              <a:t>, but not yet dependable</a:t>
-            </a:r>
+              <a:t>Molina Healthcare EIM demo | 05</a:t>
+            </a:r>
+            <a:endParaRPr lang="en-US" sz="750">
+              <a:solidFill>
+                <a:srgbClr val="8A8886"/>
+              </a:solidFill>
+              <a:latin typeface="Segoe UI" panose="020B0502040204020203" pitchFamily="34" charset="0"/>
+            </a:endParaRPr>
           </a:p>
         </p:txBody>
       </p:sp>
     </p:spTree>
     <p:extLst>
       <p:ext uri="{BB962C8B-B14F-4D97-AF65-F5344CB8AC3E}">
-        <p14:creationId xmlns:p14="http://schemas.microsoft.com/office/powerpoint/2010/main" val="1105497129"/>
+        <p14:creationId xmlns:p14="http://schemas.microsoft.com/office/powerpoint/2010/main" val="2292220117"/>
       </p:ext>
     </p:extLst>
   </p:cSld>
@@ -18366,7 +20859,7 @@
           <p:cNvPr id="2" name="Rectangle 1">
             <a:extLst>
               <a:ext uri="{FF2B5EF4-FFF2-40B4-BE49-F238E27FC236}">
-                <a16:creationId xmlns:a16="http://schemas.microsoft.com/office/drawing/2014/main" id="{0EF7F2A6-9198-E394-442D-7D8C5E24CCCC}"/>
+                <a16:creationId xmlns:a16="http://schemas.microsoft.com/office/drawing/2014/main" id="{EECBE77F-7B63-2ACD-411C-17E82D9D45A7}"/>
               </a:ext>
             </a:extLst>
           </p:cNvPr>
@@ -18434,7 +20927,7 @@
           <p:cNvPr id="3" name="TextBox 2">
             <a:extLst>
               <a:ext uri="{FF2B5EF4-FFF2-40B4-BE49-F238E27FC236}">
-                <a16:creationId xmlns:a16="http://schemas.microsoft.com/office/drawing/2014/main" id="{7AF97820-F188-4031-4ACF-77C872AE91A2}"/>
+                <a16:creationId xmlns:a16="http://schemas.microsoft.com/office/drawing/2014/main" id="{6782C0EF-64C3-3454-C3EE-C9C3AD7A29C4}"/>
               </a:ext>
             </a:extLst>
           </p:cNvPr>
@@ -18474,7 +20967,7 @@
           <p:cNvPr id="4" name="TextBox 3">
             <a:extLst>
               <a:ext uri="{FF2B5EF4-FFF2-40B4-BE49-F238E27FC236}">
-                <a16:creationId xmlns:a16="http://schemas.microsoft.com/office/drawing/2014/main" id="{8C7A3BF2-1C13-1B7E-EB14-8BC84BB8EA0F}"/>
+                <a16:creationId xmlns:a16="http://schemas.microsoft.com/office/drawing/2014/main" id="{8E50BA90-9845-10DA-36FB-53DF416870AE}"/>
               </a:ext>
             </a:extLst>
           </p:cNvPr>
@@ -18511,10 +21004,10 @@
       </p:sp>
       <p:sp>
         <p:nvSpPr>
-          <p:cNvPr id="6" name="TextBox 5">
-            <a:extLst>
-              <a:ext uri="{FF2B5EF4-FFF2-40B4-BE49-F238E27FC236}">
-                <a16:creationId xmlns:a16="http://schemas.microsoft.com/office/drawing/2014/main" id="{D7E7196A-05EA-13DA-8B14-A160289E9A16}"/>
+          <p:cNvPr id="5" name="TextBox 4">
+            <a:extLst>
+              <a:ext uri="{FF2B5EF4-FFF2-40B4-BE49-F238E27FC236}">
+                <a16:creationId xmlns:a16="http://schemas.microsoft.com/office/drawing/2014/main" id="{B0A93A0B-D740-2248-9939-068DAC8BCA5D}"/>
               </a:ext>
             </a:extLst>
           </p:cNvPr>
@@ -18523,8 +21016,8 @@
         </p:nvSpPr>
         <p:spPr>
           <a:xfrm>
-            <a:off x="594360" y="1143000"/>
-            <a:ext cx="10250424" cy="244682"/>
+            <a:off x="9646920" y="256032"/>
+            <a:ext cx="2057400" cy="167738"/>
           </a:xfrm>
           <a:prstGeom prst="rect">
             <a:avLst/>
@@ -18537,6 +21030,47 @@
           </a:bodyPr>
           <a:lstStyle/>
           <a:p>
+            <a:pPr algn="r"/>
+            <a:r>
+              <a:rPr lang="en-US" sz="850">
+                <a:solidFill>
+                  <a:srgbClr val="605E5C"/>
+                </a:solidFill>
+                <a:latin typeface="Segoe UI" panose="020B0502040204020203" pitchFamily="34" charset="0"/>
+              </a:rPr>
+              <a:t>Microsoft AI + AzureML</a:t>
+            </a:r>
+          </a:p>
+        </p:txBody>
+      </p:sp>
+      <p:sp>
+        <p:nvSpPr>
+          <p:cNvPr id="6" name="TextBox 5">
+            <a:extLst>
+              <a:ext uri="{FF2B5EF4-FFF2-40B4-BE49-F238E27FC236}">
+                <a16:creationId xmlns:a16="http://schemas.microsoft.com/office/drawing/2014/main" id="{37A7849C-5B25-7690-077E-8D67C3A1A899}"/>
+              </a:ext>
+            </a:extLst>
+          </p:cNvPr>
+          <p:cNvSpPr txBox="1"/>
+          <p:nvPr/>
+        </p:nvSpPr>
+        <p:spPr>
+          <a:xfrm>
+            <a:off x="594360" y="1143000"/>
+            <a:ext cx="7315200" cy="452432"/>
+          </a:xfrm>
+          <a:prstGeom prst="rect">
+            <a:avLst/>
+          </a:prstGeom>
+          <a:noFill/>
+        </p:spPr>
+        <p:txBody>
+          <a:bodyPr vert="horz" wrap="square" lIns="36576" tIns="18288" rIns="36576" bIns="18288" rtlCol="0">
+            <a:spAutoFit/>
+          </a:bodyPr>
+          <a:lstStyle/>
+          <a:p>
             <a:r>
               <a:rPr lang="en-US" sz="1350">
                 <a:solidFill>
@@ -18554,7 +21088,7 @@
           <p:cNvPr id="7" name="Rectangle: Rounded Corners 6">
             <a:extLst>
               <a:ext uri="{FF2B5EF4-FFF2-40B4-BE49-F238E27FC236}">
-                <a16:creationId xmlns:a16="http://schemas.microsoft.com/office/drawing/2014/main" id="{59BD57EF-8304-8CD6-C19F-D27B123C85D1}"/>
+                <a16:creationId xmlns:a16="http://schemas.microsoft.com/office/drawing/2014/main" id="{5A993033-320A-03C2-9C53-7158651E02C5}"/>
               </a:ext>
             </a:extLst>
           </p:cNvPr>
@@ -18608,7 +21142,7 @@
           <p:cNvPr id="8" name="TextBox 7">
             <a:extLst>
               <a:ext uri="{FF2B5EF4-FFF2-40B4-BE49-F238E27FC236}">
-                <a16:creationId xmlns:a16="http://schemas.microsoft.com/office/drawing/2014/main" id="{8C87EBB2-B5A4-A2B6-142D-419134C182E7}"/>
+                <a16:creationId xmlns:a16="http://schemas.microsoft.com/office/drawing/2014/main" id="{FAC767AF-22D3-A879-2336-1921A89CEE34}"/>
               </a:ext>
             </a:extLst>
           </p:cNvPr>
@@ -18649,7 +21183,7 @@
           <p:cNvPr id="9" name="Oval 8">
             <a:extLst>
               <a:ext uri="{FF2B5EF4-FFF2-40B4-BE49-F238E27FC236}">
-                <a16:creationId xmlns:a16="http://schemas.microsoft.com/office/drawing/2014/main" id="{E330EF77-B6E9-CF74-141C-0BC86F83B7A8}"/>
+                <a16:creationId xmlns:a16="http://schemas.microsoft.com/office/drawing/2014/main" id="{EFC6E5BE-AC78-6EC9-952A-B2C7AA87F767}"/>
               </a:ext>
             </a:extLst>
           </p:cNvPr>
@@ -18703,7 +21237,7 @@
           <p:cNvPr id="10" name="TextBox 9">
             <a:extLst>
               <a:ext uri="{FF2B5EF4-FFF2-40B4-BE49-F238E27FC236}">
-                <a16:creationId xmlns:a16="http://schemas.microsoft.com/office/drawing/2014/main" id="{017BB6CA-4293-A235-5A86-1AF79DAD2C59}"/>
+                <a16:creationId xmlns:a16="http://schemas.microsoft.com/office/drawing/2014/main" id="{F0150563-6504-2E68-0191-BB1282CCC0CB}"/>
               </a:ext>
             </a:extLst>
           </p:cNvPr>
@@ -18713,7 +21247,7 @@
         <p:spPr>
           <a:xfrm>
             <a:off x="1746504" y="3154680"/>
-            <a:ext cx="832104" cy="283154"/>
+            <a:ext cx="749808" cy="529376"/>
           </a:xfrm>
           <a:prstGeom prst="rect">
             <a:avLst/>
@@ -18744,7 +21278,7 @@
           <p:cNvPr id="11" name="TextBox 10">
             <a:extLst>
               <a:ext uri="{FF2B5EF4-FFF2-40B4-BE49-F238E27FC236}">
-                <a16:creationId xmlns:a16="http://schemas.microsoft.com/office/drawing/2014/main" id="{8D50C5CD-DD6C-38AB-15B0-082B512DBD5B}"/>
+                <a16:creationId xmlns:a16="http://schemas.microsoft.com/office/drawing/2014/main" id="{D351277F-BF07-83EE-3262-C6D05633ADFB}"/>
               </a:ext>
             </a:extLst>
           </p:cNvPr>
@@ -18785,7 +21319,7 @@
           <p:cNvPr id="12" name="Rectangle: Rounded Corners 11">
             <a:extLst>
               <a:ext uri="{FF2B5EF4-FFF2-40B4-BE49-F238E27FC236}">
-                <a16:creationId xmlns:a16="http://schemas.microsoft.com/office/drawing/2014/main" id="{53055D67-2CAE-C074-156D-B479EEC84C41}"/>
+                <a16:creationId xmlns:a16="http://schemas.microsoft.com/office/drawing/2014/main" id="{FF6951F1-BF49-021B-6DC1-4E1E4A95823D}"/>
               </a:ext>
             </a:extLst>
           </p:cNvPr>
@@ -18853,7 +21387,7 @@
           <p:cNvPr id="13" name="TextBox 12">
             <a:extLst>
               <a:ext uri="{FF2B5EF4-FFF2-40B4-BE49-F238E27FC236}">
-                <a16:creationId xmlns:a16="http://schemas.microsoft.com/office/drawing/2014/main" id="{E8CB68AC-F868-D866-10A8-3091A652A1EC}"/>
+                <a16:creationId xmlns:a16="http://schemas.microsoft.com/office/drawing/2014/main" id="{FD689965-D97B-1E59-3BA0-300872522429}"/>
               </a:ext>
             </a:extLst>
           </p:cNvPr>
@@ -18894,7 +21428,7 @@
           <p:cNvPr id="14" name="Rectangle: Rounded Corners 13">
             <a:extLst>
               <a:ext uri="{FF2B5EF4-FFF2-40B4-BE49-F238E27FC236}">
-                <a16:creationId xmlns:a16="http://schemas.microsoft.com/office/drawing/2014/main" id="{A1BCB192-1DB4-3C94-8830-4B4A1947F369}"/>
+                <a16:creationId xmlns:a16="http://schemas.microsoft.com/office/drawing/2014/main" id="{240C48C9-B0DB-F128-24BC-B3409E600CA3}"/>
               </a:ext>
             </a:extLst>
           </p:cNvPr>
@@ -18962,7 +21496,7 @@
           <p:cNvPr id="15" name="TextBox 14">
             <a:extLst>
               <a:ext uri="{FF2B5EF4-FFF2-40B4-BE49-F238E27FC236}">
-                <a16:creationId xmlns:a16="http://schemas.microsoft.com/office/drawing/2014/main" id="{98221FC5-3D18-5D83-FA73-D24C3DDF9AEE}"/>
+                <a16:creationId xmlns:a16="http://schemas.microsoft.com/office/drawing/2014/main" id="{503D2D1D-7CA5-53B2-00D4-5F80C6745AF0}"/>
               </a:ext>
             </a:extLst>
           </p:cNvPr>
@@ -19015,7 +21549,7 @@
           <p:cNvPr id="16" name="TextBox 15">
             <a:extLst>
               <a:ext uri="{FF2B5EF4-FFF2-40B4-BE49-F238E27FC236}">
-                <a16:creationId xmlns:a16="http://schemas.microsoft.com/office/drawing/2014/main" id="{3A3928DB-CD29-C7A6-7357-FA38CA6E57B6}"/>
+                <a16:creationId xmlns:a16="http://schemas.microsoft.com/office/drawing/2014/main" id="{91D60268-F21D-B8AB-4CD0-D1CE0909AA66}"/>
               </a:ext>
             </a:extLst>
           </p:cNvPr>
@@ -19056,7 +21590,7 @@
           <p:cNvPr id="17" name="Rectangle: Rounded Corners 16">
             <a:extLst>
               <a:ext uri="{FF2B5EF4-FFF2-40B4-BE49-F238E27FC236}">
-                <a16:creationId xmlns:a16="http://schemas.microsoft.com/office/drawing/2014/main" id="{A4F94BFA-CACE-220B-CB0B-008CE1A9AEB9}"/>
+                <a16:creationId xmlns:a16="http://schemas.microsoft.com/office/drawing/2014/main" id="{E374E130-3EA6-5B96-AFEC-F3E6A9C83D67}"/>
               </a:ext>
             </a:extLst>
           </p:cNvPr>
@@ -19110,7 +21644,7 @@
           <p:cNvPr id="18" name="TextBox 17">
             <a:extLst>
               <a:ext uri="{FF2B5EF4-FFF2-40B4-BE49-F238E27FC236}">
-                <a16:creationId xmlns:a16="http://schemas.microsoft.com/office/drawing/2014/main" id="{C051E616-3E33-31C4-FD2A-DEAE26BD247E}"/>
+                <a16:creationId xmlns:a16="http://schemas.microsoft.com/office/drawing/2014/main" id="{AFDF1265-4047-586B-4895-5BEFA3ED4BED}"/>
               </a:ext>
             </a:extLst>
           </p:cNvPr>
@@ -19151,7 +21685,7 @@
           <p:cNvPr id="19" name="Rectangle: Rounded Corners 18">
             <a:extLst>
               <a:ext uri="{FF2B5EF4-FFF2-40B4-BE49-F238E27FC236}">
-                <a16:creationId xmlns:a16="http://schemas.microsoft.com/office/drawing/2014/main" id="{00C6E1F5-1ABA-9A11-FEB8-875F7673B4DB}"/>
+                <a16:creationId xmlns:a16="http://schemas.microsoft.com/office/drawing/2014/main" id="{0C7562E8-6E03-2609-044A-B6682A13AD35}"/>
               </a:ext>
             </a:extLst>
           </p:cNvPr>
@@ -19219,7 +21753,7 @@
           <p:cNvPr id="20" name="TextBox 19">
             <a:extLst>
               <a:ext uri="{FF2B5EF4-FFF2-40B4-BE49-F238E27FC236}">
-                <a16:creationId xmlns:a16="http://schemas.microsoft.com/office/drawing/2014/main" id="{F81F313F-930A-F0C9-E4B8-04C9F48EC02E}"/>
+                <a16:creationId xmlns:a16="http://schemas.microsoft.com/office/drawing/2014/main" id="{7F3783C3-B248-8C53-DB31-D15FE059896C}"/>
               </a:ext>
             </a:extLst>
           </p:cNvPr>
@@ -19260,7 +21794,7 @@
           <p:cNvPr id="21" name="Rectangle: Rounded Corners 20">
             <a:extLst>
               <a:ext uri="{FF2B5EF4-FFF2-40B4-BE49-F238E27FC236}">
-                <a16:creationId xmlns:a16="http://schemas.microsoft.com/office/drawing/2014/main" id="{162D5E58-1824-6C33-8F4A-25A7FAD39FCC}"/>
+                <a16:creationId xmlns:a16="http://schemas.microsoft.com/office/drawing/2014/main" id="{BEFE6F04-295C-61D9-1600-D809EF87097E}"/>
               </a:ext>
             </a:extLst>
           </p:cNvPr>
@@ -19328,7 +21862,7 @@
           <p:cNvPr id="22" name="TextBox 21">
             <a:extLst>
               <a:ext uri="{FF2B5EF4-FFF2-40B4-BE49-F238E27FC236}">
-                <a16:creationId xmlns:a16="http://schemas.microsoft.com/office/drawing/2014/main" id="{3EDCA815-9BBC-A507-132B-04723BE1BFB9}"/>
+                <a16:creationId xmlns:a16="http://schemas.microsoft.com/office/drawing/2014/main" id="{0A1EBEFC-2446-0132-EEFD-BB47CD7828AE}"/>
               </a:ext>
             </a:extLst>
           </p:cNvPr>
@@ -19369,7 +21903,7 @@
           <p:cNvPr id="23" name="Rectangle: Rounded Corners 22">
             <a:extLst>
               <a:ext uri="{FF2B5EF4-FFF2-40B4-BE49-F238E27FC236}">
-                <a16:creationId xmlns:a16="http://schemas.microsoft.com/office/drawing/2014/main" id="{0C16F5A0-D461-9EDC-A8E2-55AB1605EE75}"/>
+                <a16:creationId xmlns:a16="http://schemas.microsoft.com/office/drawing/2014/main" id="{608BD0CA-869D-0AD8-3A20-16A52E1437F5}"/>
               </a:ext>
             </a:extLst>
           </p:cNvPr>
@@ -19437,7 +21971,7 @@
           <p:cNvPr id="24" name="TextBox 23">
             <a:extLst>
               <a:ext uri="{FF2B5EF4-FFF2-40B4-BE49-F238E27FC236}">
-                <a16:creationId xmlns:a16="http://schemas.microsoft.com/office/drawing/2014/main" id="{563E97FE-DD24-4C60-0BB9-DD69916737FE}"/>
+                <a16:creationId xmlns:a16="http://schemas.microsoft.com/office/drawing/2014/main" id="{A47BB7B1-2C77-F0F2-98D4-BB30184A3DAC}"/>
               </a:ext>
             </a:extLst>
           </p:cNvPr>
@@ -19478,7 +22012,7 @@
           <p:cNvPr id="25" name="Straight Connector 24">
             <a:extLst>
               <a:ext uri="{FF2B5EF4-FFF2-40B4-BE49-F238E27FC236}">
-                <a16:creationId xmlns:a16="http://schemas.microsoft.com/office/drawing/2014/main" id="{A8C42114-E54E-94E5-9208-2BD076DCA1D0}"/>
+                <a16:creationId xmlns:a16="http://schemas.microsoft.com/office/drawing/2014/main" id="{70AEE10F-B8F7-0D12-9CCA-512CDFA37674}"/>
               </a:ext>
             </a:extLst>
           </p:cNvPr>
@@ -19519,7 +22053,7 @@
           <p:cNvPr id="26" name="Straight Connector 25">
             <a:extLst>
               <a:ext uri="{FF2B5EF4-FFF2-40B4-BE49-F238E27FC236}">
-                <a16:creationId xmlns:a16="http://schemas.microsoft.com/office/drawing/2014/main" id="{80285DAF-3500-238A-965C-7FB5A0A6BE92}"/>
+                <a16:creationId xmlns:a16="http://schemas.microsoft.com/office/drawing/2014/main" id="{89CBEC77-1436-02D2-3B92-DC5BA87C491F}"/>
               </a:ext>
             </a:extLst>
           </p:cNvPr>
@@ -19560,7 +22094,7 @@
           <p:cNvPr id="27" name="Rectangle: Rounded Corners 26">
             <a:extLst>
               <a:ext uri="{FF2B5EF4-FFF2-40B4-BE49-F238E27FC236}">
-                <a16:creationId xmlns:a16="http://schemas.microsoft.com/office/drawing/2014/main" id="{78941667-5CDA-598A-186A-B767C046BF7C}"/>
+                <a16:creationId xmlns:a16="http://schemas.microsoft.com/office/drawing/2014/main" id="{556B60CF-C010-9C86-84D2-CF90C6EADB5B}"/>
               </a:ext>
             </a:extLst>
           </p:cNvPr>
@@ -19614,7 +22148,7 @@
           <p:cNvPr id="28" name="TextBox 27">
             <a:extLst>
               <a:ext uri="{FF2B5EF4-FFF2-40B4-BE49-F238E27FC236}">
-                <a16:creationId xmlns:a16="http://schemas.microsoft.com/office/drawing/2014/main" id="{63D4BEF1-9F33-252E-7108-39A6451B2905}"/>
+                <a16:creationId xmlns:a16="http://schemas.microsoft.com/office/drawing/2014/main" id="{139CA6AE-3AAE-7BA2-14D6-EC8C697AA0A4}"/>
               </a:ext>
             </a:extLst>
           </p:cNvPr>
@@ -19654,7 +22188,7 @@
           <p:cNvPr id="29" name="TextBox 28">
             <a:extLst>
               <a:ext uri="{FF2B5EF4-FFF2-40B4-BE49-F238E27FC236}">
-                <a16:creationId xmlns:a16="http://schemas.microsoft.com/office/drawing/2014/main" id="{C8C2C968-62FD-7134-4B78-B4802FFF7C89}"/>
+                <a16:creationId xmlns:a16="http://schemas.microsoft.com/office/drawing/2014/main" id="{ECA6384B-D575-2AC1-B197-7FFE0FEF9FB5}"/>
               </a:ext>
             </a:extLst>
           </p:cNvPr>
@@ -19694,7 +22228,7 @@
           <p:cNvPr id="30" name="Rectangle: Rounded Corners 29">
             <a:extLst>
               <a:ext uri="{FF2B5EF4-FFF2-40B4-BE49-F238E27FC236}">
-                <a16:creationId xmlns:a16="http://schemas.microsoft.com/office/drawing/2014/main" id="{847A5BA9-E0F4-D7E7-C9E5-49AA70EBDBFA}"/>
+                <a16:creationId xmlns:a16="http://schemas.microsoft.com/office/drawing/2014/main" id="{EB4A26F2-DC19-CA11-30D6-7301A8CB79B7}"/>
               </a:ext>
             </a:extLst>
           </p:cNvPr>
@@ -19748,7 +22282,7 @@
           <p:cNvPr id="31" name="TextBox 30">
             <a:extLst>
               <a:ext uri="{FF2B5EF4-FFF2-40B4-BE49-F238E27FC236}">
-                <a16:creationId xmlns:a16="http://schemas.microsoft.com/office/drawing/2014/main" id="{83DC0F27-7C33-218C-16EF-005BC6685DFB}"/>
+                <a16:creationId xmlns:a16="http://schemas.microsoft.com/office/drawing/2014/main" id="{8561CE26-50D1-2542-234E-B39ABD8E31CE}"/>
               </a:ext>
             </a:extLst>
           </p:cNvPr>
@@ -19788,7 +22322,7 @@
           <p:cNvPr id="32" name="TextBox 31">
             <a:extLst>
               <a:ext uri="{FF2B5EF4-FFF2-40B4-BE49-F238E27FC236}">
-                <a16:creationId xmlns:a16="http://schemas.microsoft.com/office/drawing/2014/main" id="{0C978F77-F063-04FC-96D7-99317D502591}"/>
+                <a16:creationId xmlns:a16="http://schemas.microsoft.com/office/drawing/2014/main" id="{172C9D0E-A253-BC50-4081-32D62A6B047A}"/>
               </a:ext>
             </a:extLst>
           </p:cNvPr>
@@ -19828,7 +22362,7 @@
           <p:cNvPr id="33" name="Rectangle: Rounded Corners 32">
             <a:extLst>
               <a:ext uri="{FF2B5EF4-FFF2-40B4-BE49-F238E27FC236}">
-                <a16:creationId xmlns:a16="http://schemas.microsoft.com/office/drawing/2014/main" id="{2EB34E16-29B5-356D-7849-FAC46A7ADF74}"/>
+                <a16:creationId xmlns:a16="http://schemas.microsoft.com/office/drawing/2014/main" id="{DFE62956-7474-EC14-4681-575AAA46D9ED}"/>
               </a:ext>
             </a:extLst>
           </p:cNvPr>
@@ -19882,7 +22416,7 @@
           <p:cNvPr id="34" name="TextBox 33">
             <a:extLst>
               <a:ext uri="{FF2B5EF4-FFF2-40B4-BE49-F238E27FC236}">
-                <a16:creationId xmlns:a16="http://schemas.microsoft.com/office/drawing/2014/main" id="{CA6C086C-2C07-A5FA-A3BC-EA8ADEC50A42}"/>
+                <a16:creationId xmlns:a16="http://schemas.microsoft.com/office/drawing/2014/main" id="{91D7EF31-541C-B666-58E5-77503FC87D1D}"/>
               </a:ext>
             </a:extLst>
           </p:cNvPr>
@@ -19922,7 +22456,7 @@
           <p:cNvPr id="35" name="TextBox 34">
             <a:extLst>
               <a:ext uri="{FF2B5EF4-FFF2-40B4-BE49-F238E27FC236}">
-                <a16:creationId xmlns:a16="http://schemas.microsoft.com/office/drawing/2014/main" id="{CFC7A846-EAA1-7074-83DD-35FF6BB66CCE}"/>
+                <a16:creationId xmlns:a16="http://schemas.microsoft.com/office/drawing/2014/main" id="{BC7AD369-2102-E6BB-9177-9A6EF69D4D09}"/>
               </a:ext>
             </a:extLst>
           </p:cNvPr>
@@ -19962,7 +22496,7 @@
           <p:cNvPr id="36" name="Rectangle: Rounded Corners 35">
             <a:extLst>
               <a:ext uri="{FF2B5EF4-FFF2-40B4-BE49-F238E27FC236}">
-                <a16:creationId xmlns:a16="http://schemas.microsoft.com/office/drawing/2014/main" id="{FA8A55FD-0625-F134-10FE-C93F92CBF239}"/>
+                <a16:creationId xmlns:a16="http://schemas.microsoft.com/office/drawing/2014/main" id="{8E7B3EFE-7CBE-2CD8-512C-78CB2FB3CB10}"/>
               </a:ext>
             </a:extLst>
           </p:cNvPr>
@@ -20016,7 +22550,7 @@
           <p:cNvPr id="37" name="TextBox 36">
             <a:extLst>
               <a:ext uri="{FF2B5EF4-FFF2-40B4-BE49-F238E27FC236}">
-                <a16:creationId xmlns:a16="http://schemas.microsoft.com/office/drawing/2014/main" id="{BB6296F1-BAA0-3912-5239-0C81EE9269DE}"/>
+                <a16:creationId xmlns:a16="http://schemas.microsoft.com/office/drawing/2014/main" id="{33B69C42-9F96-CEAD-A80B-D007790CC142}"/>
               </a:ext>
             </a:extLst>
           </p:cNvPr>
@@ -20056,7 +22590,7 @@
           <p:cNvPr id="38" name="TextBox 37">
             <a:extLst>
               <a:ext uri="{FF2B5EF4-FFF2-40B4-BE49-F238E27FC236}">
-                <a16:creationId xmlns:a16="http://schemas.microsoft.com/office/drawing/2014/main" id="{9BC9178C-134A-5864-07A2-F82B9CF94000}"/>
+                <a16:creationId xmlns:a16="http://schemas.microsoft.com/office/drawing/2014/main" id="{66352904-2C9F-9122-DAE3-23EADB335C89}"/>
               </a:ext>
             </a:extLst>
           </p:cNvPr>
@@ -20091,10 +22625,57 @@
           </a:p>
         </p:txBody>
       </p:sp>
+      <p:sp>
+        <p:nvSpPr>
+          <p:cNvPr id="39" name="TextBox 38">
+            <a:extLst>
+              <a:ext uri="{FF2B5EF4-FFF2-40B4-BE49-F238E27FC236}">
+                <a16:creationId xmlns:a16="http://schemas.microsoft.com/office/drawing/2014/main" id="{2F57DF6E-8077-2080-1D31-5D84E7190881}"/>
+              </a:ext>
+            </a:extLst>
+          </p:cNvPr>
+          <p:cNvSpPr txBox="1"/>
+          <p:nvPr/>
+        </p:nvSpPr>
+        <p:spPr>
+          <a:xfrm>
+            <a:off x="9281160" y="6510528"/>
+            <a:ext cx="2423160" cy="152349"/>
+          </a:xfrm>
+          <a:prstGeom prst="rect">
+            <a:avLst/>
+          </a:prstGeom>
+          <a:noFill/>
+        </p:spPr>
+        <p:txBody>
+          <a:bodyPr vert="horz" wrap="square" lIns="36576" tIns="18288" rIns="36576" bIns="18288" rtlCol="0">
+            <a:spAutoFit/>
+          </a:bodyPr>
+          <a:lstStyle/>
+          <a:p>
+            <a:pPr algn="r"/>
+            <a:r>
+              <a:rPr lang="it-IT" sz="750">
+                <a:solidFill>
+                  <a:srgbClr val="8A8886"/>
+                </a:solidFill>
+                <a:latin typeface="Segoe UI" panose="020B0502040204020203" pitchFamily="34" charset="0"/>
+              </a:rPr>
+              <a:t>Molina Healthcare EIM demo | 06</a:t>
+            </a:r>
+            <a:endParaRPr lang="en-US" sz="750">
+              <a:solidFill>
+                <a:srgbClr val="8A8886"/>
+              </a:solidFill>
+              <a:latin typeface="Segoe UI" panose="020B0502040204020203" pitchFamily="34" charset="0"/>
+            </a:endParaRPr>
+          </a:p>
+        </p:txBody>
+      </p:sp>
     </p:spTree>
     <p:extLst>
       <p:ext uri="{BB962C8B-B14F-4D97-AF65-F5344CB8AC3E}">
-        <p14:creationId xmlns:p14="http://schemas.microsoft.com/office/powerpoint/2010/main" val="2712118673"/>
+        <p14:creationId xmlns:p14="http://schemas.microsoft.com/office/powerpoint/2010/main" val="3693080895"/>
       </p:ext>
     </p:extLst>
   </p:cSld>
@@ -20126,7 +22707,7 @@
           <p:cNvPr id="2" name="Rectangle 1">
             <a:extLst>
               <a:ext uri="{FF2B5EF4-FFF2-40B4-BE49-F238E27FC236}">
-                <a16:creationId xmlns:a16="http://schemas.microsoft.com/office/drawing/2014/main" id="{0E0E2B75-2DF3-C9AB-AC20-39E60E729A36}"/>
+                <a16:creationId xmlns:a16="http://schemas.microsoft.com/office/drawing/2014/main" id="{B3F8963D-7B84-29ED-E959-68B2DFC4E74E}"/>
               </a:ext>
             </a:extLst>
           </p:cNvPr>
@@ -20194,7 +22775,7 @@
           <p:cNvPr id="3" name="TextBox 2">
             <a:extLst>
               <a:ext uri="{FF2B5EF4-FFF2-40B4-BE49-F238E27FC236}">
-                <a16:creationId xmlns:a16="http://schemas.microsoft.com/office/drawing/2014/main" id="{2C42CD5F-7C87-0F5D-7860-CEF6A7DA92D6}"/>
+                <a16:creationId xmlns:a16="http://schemas.microsoft.com/office/drawing/2014/main" id="{C6177279-3069-4C66-75B9-93F2580612F2}"/>
               </a:ext>
             </a:extLst>
           </p:cNvPr>
@@ -20234,7 +22815,7 @@
           <p:cNvPr id="4" name="TextBox 3">
             <a:extLst>
               <a:ext uri="{FF2B5EF4-FFF2-40B4-BE49-F238E27FC236}">
-                <a16:creationId xmlns:a16="http://schemas.microsoft.com/office/drawing/2014/main" id="{AB20ED41-07B5-E78E-DAD3-1C2582CD2F44}"/>
+                <a16:creationId xmlns:a16="http://schemas.microsoft.com/office/drawing/2014/main" id="{0C9E2177-0C47-DA0A-3ED4-47E765BA1975}"/>
               </a:ext>
             </a:extLst>
           </p:cNvPr>
@@ -20274,7 +22855,7 @@
           <p:cNvPr id="5" name="TextBox 4">
             <a:extLst>
               <a:ext uri="{FF2B5EF4-FFF2-40B4-BE49-F238E27FC236}">
-                <a16:creationId xmlns:a16="http://schemas.microsoft.com/office/drawing/2014/main" id="{901EE05D-B658-6C9A-6B07-C5A5014E68C0}"/>
+                <a16:creationId xmlns:a16="http://schemas.microsoft.com/office/drawing/2014/main" id="{E06844D3-8F35-9140-7AE2-A06CA14484C6}"/>
               </a:ext>
             </a:extLst>
           </p:cNvPr>
@@ -20315,7 +22896,7 @@
           <p:cNvPr id="6" name="TextBox 5">
             <a:extLst>
               <a:ext uri="{FF2B5EF4-FFF2-40B4-BE49-F238E27FC236}">
-                <a16:creationId xmlns:a16="http://schemas.microsoft.com/office/drawing/2014/main" id="{E90EF3C6-D9ED-6C2E-A973-4C5A03535729}"/>
+                <a16:creationId xmlns:a16="http://schemas.microsoft.com/office/drawing/2014/main" id="{5CBB608E-518F-F6DC-5073-C8802010B09A}"/>
               </a:ext>
             </a:extLst>
           </p:cNvPr>
@@ -20355,7 +22936,7 @@
           <p:cNvPr id="7" name="Rectangle: Rounded Corners 6">
             <a:extLst>
               <a:ext uri="{FF2B5EF4-FFF2-40B4-BE49-F238E27FC236}">
-                <a16:creationId xmlns:a16="http://schemas.microsoft.com/office/drawing/2014/main" id="{52C79A35-CC4D-03F5-4C75-25A557F64EE1}"/>
+                <a16:creationId xmlns:a16="http://schemas.microsoft.com/office/drawing/2014/main" id="{4FB55AAC-AAE4-05DD-A22B-E11E9510E47E}"/>
               </a:ext>
             </a:extLst>
           </p:cNvPr>
@@ -20409,7 +22990,7 @@
           <p:cNvPr id="8" name="Oval 7">
             <a:extLst>
               <a:ext uri="{FF2B5EF4-FFF2-40B4-BE49-F238E27FC236}">
-                <a16:creationId xmlns:a16="http://schemas.microsoft.com/office/drawing/2014/main" id="{E4F9D962-3037-ECCC-D7E3-17911AEC8084}"/>
+                <a16:creationId xmlns:a16="http://schemas.microsoft.com/office/drawing/2014/main" id="{AAE016B7-76D4-B5C4-C1A1-5930420A812E}"/>
               </a:ext>
             </a:extLst>
           </p:cNvPr>
@@ -20477,7 +23058,7 @@
           <p:cNvPr id="9" name="TextBox 8">
             <a:extLst>
               <a:ext uri="{FF2B5EF4-FFF2-40B4-BE49-F238E27FC236}">
-                <a16:creationId xmlns:a16="http://schemas.microsoft.com/office/drawing/2014/main" id="{D3CB73EC-9A65-FD16-95A3-AB190E52BF84}"/>
+                <a16:creationId xmlns:a16="http://schemas.microsoft.com/office/drawing/2014/main" id="{DBA64FFC-7515-94DA-90F8-C9CFF9A3C452}"/>
               </a:ext>
             </a:extLst>
           </p:cNvPr>
@@ -20518,7 +23099,7 @@
           <p:cNvPr id="10" name="TextBox 9">
             <a:extLst>
               <a:ext uri="{FF2B5EF4-FFF2-40B4-BE49-F238E27FC236}">
-                <a16:creationId xmlns:a16="http://schemas.microsoft.com/office/drawing/2014/main" id="{BBF90B40-47A3-61D8-09AA-4357F500C267}"/>
+                <a16:creationId xmlns:a16="http://schemas.microsoft.com/office/drawing/2014/main" id="{516EBDC9-F632-53E9-7084-F74AF892ED00}"/>
               </a:ext>
             </a:extLst>
           </p:cNvPr>
@@ -20558,7 +23139,7 @@
           <p:cNvPr id="11" name="TextBox 10">
             <a:extLst>
               <a:ext uri="{FF2B5EF4-FFF2-40B4-BE49-F238E27FC236}">
-                <a16:creationId xmlns:a16="http://schemas.microsoft.com/office/drawing/2014/main" id="{EAAAF4D0-729A-27F7-00CE-7E851104A996}"/>
+                <a16:creationId xmlns:a16="http://schemas.microsoft.com/office/drawing/2014/main" id="{47D5F402-D315-8573-E001-4A211197FFB0}"/>
               </a:ext>
             </a:extLst>
           </p:cNvPr>
@@ -20598,7 +23179,7 @@
           <p:cNvPr id="12" name="Straight Connector 11">
             <a:extLst>
               <a:ext uri="{FF2B5EF4-FFF2-40B4-BE49-F238E27FC236}">
-                <a16:creationId xmlns:a16="http://schemas.microsoft.com/office/drawing/2014/main" id="{8561FAA2-8034-19D6-F92A-498B9D08F403}"/>
+                <a16:creationId xmlns:a16="http://schemas.microsoft.com/office/drawing/2014/main" id="{FF0A788B-C89A-CC55-EC0E-3BDB42D40FFA}"/>
               </a:ext>
             </a:extLst>
           </p:cNvPr>
@@ -20607,7 +23188,7 @@
         </p:nvCxnSpPr>
         <p:spPr>
           <a:xfrm>
-            <a:off x="3971963" y="2350008"/>
+            <a:off x="3840480" y="2350008"/>
             <a:ext cx="402336" cy="0"/>
           </a:xfrm>
           <a:prstGeom prst="line">
@@ -20639,7 +23220,7 @@
           <p:cNvPr id="13" name="Rectangle: Rounded Corners 12">
             <a:extLst>
               <a:ext uri="{FF2B5EF4-FFF2-40B4-BE49-F238E27FC236}">
-                <a16:creationId xmlns:a16="http://schemas.microsoft.com/office/drawing/2014/main" id="{831659BF-2DBD-00CC-6CFB-969EE7322CA9}"/>
+                <a16:creationId xmlns:a16="http://schemas.microsoft.com/office/drawing/2014/main" id="{2C7802BA-423D-4B0C-E3CD-66A2754F916C}"/>
               </a:ext>
             </a:extLst>
           </p:cNvPr>
@@ -20693,7 +23274,7 @@
           <p:cNvPr id="14" name="Oval 13">
             <a:extLst>
               <a:ext uri="{FF2B5EF4-FFF2-40B4-BE49-F238E27FC236}">
-                <a16:creationId xmlns:a16="http://schemas.microsoft.com/office/drawing/2014/main" id="{32CB48B6-2428-7553-2E48-03F3644477D2}"/>
+                <a16:creationId xmlns:a16="http://schemas.microsoft.com/office/drawing/2014/main" id="{C6B80484-F9F5-7492-8E4C-B4302DAA0AA6}"/>
               </a:ext>
             </a:extLst>
           </p:cNvPr>
@@ -20761,7 +23342,7 @@
           <p:cNvPr id="15" name="TextBox 14">
             <a:extLst>
               <a:ext uri="{FF2B5EF4-FFF2-40B4-BE49-F238E27FC236}">
-                <a16:creationId xmlns:a16="http://schemas.microsoft.com/office/drawing/2014/main" id="{C9F860E3-2CE1-657C-39A7-28A8E8D37434}"/>
+                <a16:creationId xmlns:a16="http://schemas.microsoft.com/office/drawing/2014/main" id="{F07871F7-1B64-7FD2-8FF0-D4005A96B5C9}"/>
               </a:ext>
             </a:extLst>
           </p:cNvPr>
@@ -20802,7 +23383,7 @@
           <p:cNvPr id="16" name="TextBox 15">
             <a:extLst>
               <a:ext uri="{FF2B5EF4-FFF2-40B4-BE49-F238E27FC236}">
-                <a16:creationId xmlns:a16="http://schemas.microsoft.com/office/drawing/2014/main" id="{9930A0AA-420C-027F-57D6-963589DE1846}"/>
+                <a16:creationId xmlns:a16="http://schemas.microsoft.com/office/drawing/2014/main" id="{6993A1B3-68D2-8D11-9B8F-1066915E48DC}"/>
               </a:ext>
             </a:extLst>
           </p:cNvPr>
@@ -20842,7 +23423,7 @@
           <p:cNvPr id="17" name="TextBox 16">
             <a:extLst>
               <a:ext uri="{FF2B5EF4-FFF2-40B4-BE49-F238E27FC236}">
-                <a16:creationId xmlns:a16="http://schemas.microsoft.com/office/drawing/2014/main" id="{7A57D670-8F18-22FD-968B-B7FF438B21C1}"/>
+                <a16:creationId xmlns:a16="http://schemas.microsoft.com/office/drawing/2014/main" id="{EA51FEA6-46DF-7D64-6090-70CB736283EE}"/>
               </a:ext>
             </a:extLst>
           </p:cNvPr>
@@ -20882,7 +23463,7 @@
           <p:cNvPr id="18" name="Straight Connector 17">
             <a:extLst>
               <a:ext uri="{FF2B5EF4-FFF2-40B4-BE49-F238E27FC236}">
-                <a16:creationId xmlns:a16="http://schemas.microsoft.com/office/drawing/2014/main" id="{D4E370B4-8FE7-FE2B-DA71-962CD3030A2D}"/>
+                <a16:creationId xmlns:a16="http://schemas.microsoft.com/office/drawing/2014/main" id="{081F7C6A-9E7D-E40D-CBF4-351F5B4A5783}"/>
               </a:ext>
             </a:extLst>
           </p:cNvPr>
@@ -20891,7 +23472,7 @@
         </p:nvCxnSpPr>
         <p:spPr>
           <a:xfrm>
-            <a:off x="7639423" y="2350008"/>
+            <a:off x="7543800" y="2350008"/>
             <a:ext cx="402336" cy="0"/>
           </a:xfrm>
           <a:prstGeom prst="line">
@@ -20923,7 +23504,7 @@
           <p:cNvPr id="19" name="Rectangle: Rounded Corners 18">
             <a:extLst>
               <a:ext uri="{FF2B5EF4-FFF2-40B4-BE49-F238E27FC236}">
-                <a16:creationId xmlns:a16="http://schemas.microsoft.com/office/drawing/2014/main" id="{632ACB82-C993-337E-5DC1-741883A85975}"/>
+                <a16:creationId xmlns:a16="http://schemas.microsoft.com/office/drawing/2014/main" id="{5432C1A9-DAA2-AF90-0F6B-664F2B3935D2}"/>
               </a:ext>
             </a:extLst>
           </p:cNvPr>
@@ -20977,7 +23558,7 @@
           <p:cNvPr id="20" name="Oval 19">
             <a:extLst>
               <a:ext uri="{FF2B5EF4-FFF2-40B4-BE49-F238E27FC236}">
-                <a16:creationId xmlns:a16="http://schemas.microsoft.com/office/drawing/2014/main" id="{2B922B5D-5D85-DCA8-E4CD-0C2D6321D98A}"/>
+                <a16:creationId xmlns:a16="http://schemas.microsoft.com/office/drawing/2014/main" id="{9DDD38AC-603C-B4BF-56BC-EA4868FFDB6F}"/>
               </a:ext>
             </a:extLst>
           </p:cNvPr>
@@ -21045,7 +23626,7 @@
           <p:cNvPr id="21" name="TextBox 20">
             <a:extLst>
               <a:ext uri="{FF2B5EF4-FFF2-40B4-BE49-F238E27FC236}">
-                <a16:creationId xmlns:a16="http://schemas.microsoft.com/office/drawing/2014/main" id="{E4EF50BC-542E-AD86-6CEB-572E81E0B8B3}"/>
+                <a16:creationId xmlns:a16="http://schemas.microsoft.com/office/drawing/2014/main" id="{EAFD28C3-2DEB-4B20-F356-99C0FF0E8A40}"/>
               </a:ext>
             </a:extLst>
           </p:cNvPr>
@@ -21086,7 +23667,7 @@
           <p:cNvPr id="22" name="TextBox 21">
             <a:extLst>
               <a:ext uri="{FF2B5EF4-FFF2-40B4-BE49-F238E27FC236}">
-                <a16:creationId xmlns:a16="http://schemas.microsoft.com/office/drawing/2014/main" id="{8DFE3E5E-E07D-E535-E33E-FA64271B0C4A}"/>
+                <a16:creationId xmlns:a16="http://schemas.microsoft.com/office/drawing/2014/main" id="{E6434572-CC32-8F56-2F17-DDBF4A63FC6C}"/>
               </a:ext>
             </a:extLst>
           </p:cNvPr>
@@ -21126,7 +23707,7 @@
           <p:cNvPr id="23" name="TextBox 22">
             <a:extLst>
               <a:ext uri="{FF2B5EF4-FFF2-40B4-BE49-F238E27FC236}">
-                <a16:creationId xmlns:a16="http://schemas.microsoft.com/office/drawing/2014/main" id="{7812B29F-1856-76E1-52E8-561BC510FB75}"/>
+                <a16:creationId xmlns:a16="http://schemas.microsoft.com/office/drawing/2014/main" id="{8B9B713A-AC0A-F169-2649-C83CDA733236}"/>
               </a:ext>
             </a:extLst>
           </p:cNvPr>
@@ -21166,7 +23747,7 @@
           <p:cNvPr id="24" name="Straight Connector 23">
             <a:extLst>
               <a:ext uri="{FF2B5EF4-FFF2-40B4-BE49-F238E27FC236}">
-                <a16:creationId xmlns:a16="http://schemas.microsoft.com/office/drawing/2014/main" id="{48E854BA-7C84-4D18-5DB1-50C559EC9627}"/>
+                <a16:creationId xmlns:a16="http://schemas.microsoft.com/office/drawing/2014/main" id="{C888DD6E-7DE9-F81E-078F-E1AF25A9F301}"/>
               </a:ext>
             </a:extLst>
           </p:cNvPr>
@@ -21175,7 +23756,7 @@
         </p:nvCxnSpPr>
         <p:spPr>
           <a:xfrm>
-            <a:off x="9663654" y="2987936"/>
+            <a:off x="9692640" y="2880360"/>
             <a:ext cx="0" cy="731520"/>
           </a:xfrm>
           <a:prstGeom prst="line">
@@ -21207,7 +23788,7 @@
           <p:cNvPr id="25" name="Rectangle: Rounded Corners 24">
             <a:extLst>
               <a:ext uri="{FF2B5EF4-FFF2-40B4-BE49-F238E27FC236}">
-                <a16:creationId xmlns:a16="http://schemas.microsoft.com/office/drawing/2014/main" id="{EA912D3A-131D-7F7E-2167-77AD74AFBE1D}"/>
+                <a16:creationId xmlns:a16="http://schemas.microsoft.com/office/drawing/2014/main" id="{AB2ACD6F-6FA3-A708-C9DD-1D173BFE27EF}"/>
               </a:ext>
             </a:extLst>
           </p:cNvPr>
@@ -21261,7 +23842,7 @@
           <p:cNvPr id="26" name="Oval 25">
             <a:extLst>
               <a:ext uri="{FF2B5EF4-FFF2-40B4-BE49-F238E27FC236}">
-                <a16:creationId xmlns:a16="http://schemas.microsoft.com/office/drawing/2014/main" id="{A2B37AA2-C793-58B4-5387-4200C3502055}"/>
+                <a16:creationId xmlns:a16="http://schemas.microsoft.com/office/drawing/2014/main" id="{CD8B9D4E-2701-700B-8742-CF75A0194CCE}"/>
               </a:ext>
             </a:extLst>
           </p:cNvPr>
@@ -21329,7 +23910,7 @@
           <p:cNvPr id="27" name="TextBox 26">
             <a:extLst>
               <a:ext uri="{FF2B5EF4-FFF2-40B4-BE49-F238E27FC236}">
-                <a16:creationId xmlns:a16="http://schemas.microsoft.com/office/drawing/2014/main" id="{0C2FE547-3621-3EFD-A519-7F4DD81AA281}"/>
+                <a16:creationId xmlns:a16="http://schemas.microsoft.com/office/drawing/2014/main" id="{92A96269-EEDB-FDB7-EC43-419DAE56CACA}"/>
               </a:ext>
             </a:extLst>
           </p:cNvPr>
@@ -21370,7 +23951,7 @@
           <p:cNvPr id="28" name="TextBox 27">
             <a:extLst>
               <a:ext uri="{FF2B5EF4-FFF2-40B4-BE49-F238E27FC236}">
-                <a16:creationId xmlns:a16="http://schemas.microsoft.com/office/drawing/2014/main" id="{A8BE57D5-511E-35A7-71EC-F60EB85AAFBE}"/>
+                <a16:creationId xmlns:a16="http://schemas.microsoft.com/office/drawing/2014/main" id="{4C8F7453-94C0-A3E2-A4C2-6CC8CFF5F78A}"/>
               </a:ext>
             </a:extLst>
           </p:cNvPr>
@@ -21410,7 +23991,7 @@
           <p:cNvPr id="29" name="TextBox 28">
             <a:extLst>
               <a:ext uri="{FF2B5EF4-FFF2-40B4-BE49-F238E27FC236}">
-                <a16:creationId xmlns:a16="http://schemas.microsoft.com/office/drawing/2014/main" id="{A65D58E9-4F18-FADF-663D-F1B1F8DBA5FC}"/>
+                <a16:creationId xmlns:a16="http://schemas.microsoft.com/office/drawing/2014/main" id="{C899E4F9-5B9A-6888-2560-FE9259676F1E}"/>
               </a:ext>
             </a:extLst>
           </p:cNvPr>
@@ -21450,7 +24031,7 @@
           <p:cNvPr id="30" name="Rectangle: Rounded Corners 29">
             <a:extLst>
               <a:ext uri="{FF2B5EF4-FFF2-40B4-BE49-F238E27FC236}">
-                <a16:creationId xmlns:a16="http://schemas.microsoft.com/office/drawing/2014/main" id="{43AB38B9-00FA-B34F-F374-8BE44228FD8C}"/>
+                <a16:creationId xmlns:a16="http://schemas.microsoft.com/office/drawing/2014/main" id="{1EC1AFCF-4281-9CC7-9535-A5EBE49B1A6A}"/>
               </a:ext>
             </a:extLst>
           </p:cNvPr>
@@ -21504,7 +24085,7 @@
           <p:cNvPr id="31" name="Oval 30">
             <a:extLst>
               <a:ext uri="{FF2B5EF4-FFF2-40B4-BE49-F238E27FC236}">
-                <a16:creationId xmlns:a16="http://schemas.microsoft.com/office/drawing/2014/main" id="{27A48DA0-90BA-0DCB-8006-DFB6695222D8}"/>
+                <a16:creationId xmlns:a16="http://schemas.microsoft.com/office/drawing/2014/main" id="{68D98B48-A417-FEE1-63E7-A2572A9B8792}"/>
               </a:ext>
             </a:extLst>
           </p:cNvPr>
@@ -21572,7 +24153,7 @@
           <p:cNvPr id="32" name="TextBox 31">
             <a:extLst>
               <a:ext uri="{FF2B5EF4-FFF2-40B4-BE49-F238E27FC236}">
-                <a16:creationId xmlns:a16="http://schemas.microsoft.com/office/drawing/2014/main" id="{CF3178D7-9171-97BF-F117-2DCA960BD38D}"/>
+                <a16:creationId xmlns:a16="http://schemas.microsoft.com/office/drawing/2014/main" id="{4C0AA412-E3E1-9F4F-FB47-9EB0968DEB18}"/>
               </a:ext>
             </a:extLst>
           </p:cNvPr>
@@ -21613,7 +24194,7 @@
           <p:cNvPr id="33" name="TextBox 32">
             <a:extLst>
               <a:ext uri="{FF2B5EF4-FFF2-40B4-BE49-F238E27FC236}">
-                <a16:creationId xmlns:a16="http://schemas.microsoft.com/office/drawing/2014/main" id="{045DB32D-9DEC-6A52-D0A3-D377AB613DC8}"/>
+                <a16:creationId xmlns:a16="http://schemas.microsoft.com/office/drawing/2014/main" id="{A41633B2-B2FF-AC92-AAD6-FA984DDF012A}"/>
               </a:ext>
             </a:extLst>
           </p:cNvPr>
@@ -21653,7 +24234,7 @@
           <p:cNvPr id="34" name="TextBox 33">
             <a:extLst>
               <a:ext uri="{FF2B5EF4-FFF2-40B4-BE49-F238E27FC236}">
-                <a16:creationId xmlns:a16="http://schemas.microsoft.com/office/drawing/2014/main" id="{EF6083AC-4FA1-9788-19B9-4DC20607DFE4}"/>
+                <a16:creationId xmlns:a16="http://schemas.microsoft.com/office/drawing/2014/main" id="{1F3CDC3D-F750-4252-7926-C72535A9151E}"/>
               </a:ext>
             </a:extLst>
           </p:cNvPr>
@@ -21693,7 +24274,7 @@
           <p:cNvPr id="35" name="Straight Connector 34">
             <a:extLst>
               <a:ext uri="{FF2B5EF4-FFF2-40B4-BE49-F238E27FC236}">
-                <a16:creationId xmlns:a16="http://schemas.microsoft.com/office/drawing/2014/main" id="{7DCC78E2-344B-E20F-6F92-4271BFB22033}"/>
+                <a16:creationId xmlns:a16="http://schemas.microsoft.com/office/drawing/2014/main" id="{8D245A82-ADA2-E301-60F6-D792D86DB448}"/>
               </a:ext>
             </a:extLst>
           </p:cNvPr>
@@ -21702,7 +24283,7 @@
         </p:nvCxnSpPr>
         <p:spPr>
           <a:xfrm>
-            <a:off x="7639423" y="4320809"/>
+            <a:off x="4050792" y="4361688"/>
             <a:ext cx="384048" cy="0"/>
           </a:xfrm>
           <a:prstGeom prst="line">
@@ -21734,7 +24315,7 @@
           <p:cNvPr id="36" name="Rectangle: Rounded Corners 35">
             <a:extLst>
               <a:ext uri="{FF2B5EF4-FFF2-40B4-BE49-F238E27FC236}">
-                <a16:creationId xmlns:a16="http://schemas.microsoft.com/office/drawing/2014/main" id="{FAF4CC64-6A18-8622-882E-839C8D75F924}"/>
+                <a16:creationId xmlns:a16="http://schemas.microsoft.com/office/drawing/2014/main" id="{968A4EFD-4BE5-C69B-03B4-D2784954BAA1}"/>
               </a:ext>
             </a:extLst>
           </p:cNvPr>
@@ -21788,7 +24369,7 @@
           <p:cNvPr id="37" name="Oval 36">
             <a:extLst>
               <a:ext uri="{FF2B5EF4-FFF2-40B4-BE49-F238E27FC236}">
-                <a16:creationId xmlns:a16="http://schemas.microsoft.com/office/drawing/2014/main" id="{2B4F0893-9110-07D1-36D7-FC1AB885EB0C}"/>
+                <a16:creationId xmlns:a16="http://schemas.microsoft.com/office/drawing/2014/main" id="{FAE2D665-65FC-6BE4-DB1E-789ECF1C6C39}"/>
               </a:ext>
             </a:extLst>
           </p:cNvPr>
@@ -21856,7 +24437,7 @@
           <p:cNvPr id="38" name="TextBox 37">
             <a:extLst>
               <a:ext uri="{FF2B5EF4-FFF2-40B4-BE49-F238E27FC236}">
-                <a16:creationId xmlns:a16="http://schemas.microsoft.com/office/drawing/2014/main" id="{CADD4BA0-5C8F-7238-9A0D-DFD5834A8E3C}"/>
+                <a16:creationId xmlns:a16="http://schemas.microsoft.com/office/drawing/2014/main" id="{16EFB707-6452-7459-D6DB-ABAFF637460A}"/>
               </a:ext>
             </a:extLst>
           </p:cNvPr>
@@ -21897,7 +24478,7 @@
           <p:cNvPr id="39" name="TextBox 38">
             <a:extLst>
               <a:ext uri="{FF2B5EF4-FFF2-40B4-BE49-F238E27FC236}">
-                <a16:creationId xmlns:a16="http://schemas.microsoft.com/office/drawing/2014/main" id="{8167C34F-EB8A-286B-6668-42A5C991FDBD}"/>
+                <a16:creationId xmlns:a16="http://schemas.microsoft.com/office/drawing/2014/main" id="{B1D8E085-69E1-434A-7A69-592DC7319881}"/>
               </a:ext>
             </a:extLst>
           </p:cNvPr>
@@ -21937,7 +24518,7 @@
           <p:cNvPr id="40" name="TextBox 39">
             <a:extLst>
               <a:ext uri="{FF2B5EF4-FFF2-40B4-BE49-F238E27FC236}">
-                <a16:creationId xmlns:a16="http://schemas.microsoft.com/office/drawing/2014/main" id="{9CD9D3E9-97D2-BF3B-4433-44B1E0111C00}"/>
+                <a16:creationId xmlns:a16="http://schemas.microsoft.com/office/drawing/2014/main" id="{77E2B42A-C6B4-D127-9ED3-224E1015B87F}"/>
               </a:ext>
             </a:extLst>
           </p:cNvPr>
@@ -21977,7 +24558,7 @@
           <p:cNvPr id="41" name="Straight Connector 40">
             <a:extLst>
               <a:ext uri="{FF2B5EF4-FFF2-40B4-BE49-F238E27FC236}">
-                <a16:creationId xmlns:a16="http://schemas.microsoft.com/office/drawing/2014/main" id="{63818CBC-CF3A-EC36-BB26-211D47C22B2E}"/>
+                <a16:creationId xmlns:a16="http://schemas.microsoft.com/office/drawing/2014/main" id="{5C88F108-2000-1FD5-C4E3-CE636B5AC06B}"/>
               </a:ext>
             </a:extLst>
           </p:cNvPr>
@@ -21986,7 +24567,7 @@
         </p:nvCxnSpPr>
         <p:spPr>
           <a:xfrm>
-            <a:off x="3971963" y="4332762"/>
+            <a:off x="347472" y="4361688"/>
             <a:ext cx="384048" cy="0"/>
           </a:xfrm>
           <a:prstGeom prst="line">
@@ -22018,7 +24599,7 @@
           <p:cNvPr id="42" name="Rectangle: Rounded Corners 41">
             <a:extLst>
               <a:ext uri="{FF2B5EF4-FFF2-40B4-BE49-F238E27FC236}">
-                <a16:creationId xmlns:a16="http://schemas.microsoft.com/office/drawing/2014/main" id="{188C8C71-DBDD-19E0-4908-10153CE8C1EF}"/>
+                <a16:creationId xmlns:a16="http://schemas.microsoft.com/office/drawing/2014/main" id="{92ABFF85-025A-A203-FA61-A0ACD3537EA0}"/>
               </a:ext>
             </a:extLst>
           </p:cNvPr>
@@ -22086,7 +24667,7 @@
           <p:cNvPr id="43" name="TextBox 42">
             <a:extLst>
               <a:ext uri="{FF2B5EF4-FFF2-40B4-BE49-F238E27FC236}">
-                <a16:creationId xmlns:a16="http://schemas.microsoft.com/office/drawing/2014/main" id="{890BA5DC-8B6F-9A80-2248-6D7000FC9FAB}"/>
+                <a16:creationId xmlns:a16="http://schemas.microsoft.com/office/drawing/2014/main" id="{9D3F1F48-A31B-8D0D-6867-83DCDBED74E7}"/>
               </a:ext>
             </a:extLst>
           </p:cNvPr>
@@ -22121,10 +24702,57 @@
           </a:p>
         </p:txBody>
       </p:sp>
+      <p:sp>
+        <p:nvSpPr>
+          <p:cNvPr id="44" name="TextBox 43">
+            <a:extLst>
+              <a:ext uri="{FF2B5EF4-FFF2-40B4-BE49-F238E27FC236}">
+                <a16:creationId xmlns:a16="http://schemas.microsoft.com/office/drawing/2014/main" id="{9F5079BD-3434-0F0F-2904-22D0CD7AE1F8}"/>
+              </a:ext>
+            </a:extLst>
+          </p:cNvPr>
+          <p:cNvSpPr txBox="1"/>
+          <p:nvPr/>
+        </p:nvSpPr>
+        <p:spPr>
+          <a:xfrm>
+            <a:off x="9281160" y="6510528"/>
+            <a:ext cx="2423160" cy="152349"/>
+          </a:xfrm>
+          <a:prstGeom prst="rect">
+            <a:avLst/>
+          </a:prstGeom>
+          <a:noFill/>
+        </p:spPr>
+        <p:txBody>
+          <a:bodyPr vert="horz" wrap="square" lIns="36576" tIns="18288" rIns="36576" bIns="18288" rtlCol="0">
+            <a:spAutoFit/>
+          </a:bodyPr>
+          <a:lstStyle/>
+          <a:p>
+            <a:pPr algn="r"/>
+            <a:r>
+              <a:rPr lang="it-IT" sz="750">
+                <a:solidFill>
+                  <a:srgbClr val="8A8886"/>
+                </a:solidFill>
+                <a:latin typeface="Segoe UI" panose="020B0502040204020203" pitchFamily="34" charset="0"/>
+              </a:rPr>
+              <a:t>Molina Healthcare EIM demo | 07</a:t>
+            </a:r>
+            <a:endParaRPr lang="en-US" sz="750">
+              <a:solidFill>
+                <a:srgbClr val="8A8886"/>
+              </a:solidFill>
+              <a:latin typeface="Segoe UI" panose="020B0502040204020203" pitchFamily="34" charset="0"/>
+            </a:endParaRPr>
+          </a:p>
+        </p:txBody>
+      </p:sp>
     </p:spTree>
     <p:extLst>
       <p:ext uri="{BB962C8B-B14F-4D97-AF65-F5344CB8AC3E}">
-        <p14:creationId xmlns:p14="http://schemas.microsoft.com/office/powerpoint/2010/main" val="2273145114"/>
+        <p14:creationId xmlns:p14="http://schemas.microsoft.com/office/powerpoint/2010/main" val="4157664255"/>
       </p:ext>
     </p:extLst>
   </p:cSld>
@@ -22156,7 +24784,7 @@
           <p:cNvPr id="2" name="Rectangle 1">
             <a:extLst>
               <a:ext uri="{FF2B5EF4-FFF2-40B4-BE49-F238E27FC236}">
-                <a16:creationId xmlns:a16="http://schemas.microsoft.com/office/drawing/2014/main" id="{D6A9596A-B4E8-EEAB-211D-D9EDD06F9652}"/>
+                <a16:creationId xmlns:a16="http://schemas.microsoft.com/office/drawing/2014/main" id="{46D0EBA4-A288-48B9-33CA-4682AFF206FC}"/>
               </a:ext>
             </a:extLst>
           </p:cNvPr>
@@ -22224,7 +24852,7 @@
           <p:cNvPr id="3" name="TextBox 2">
             <a:extLst>
               <a:ext uri="{FF2B5EF4-FFF2-40B4-BE49-F238E27FC236}">
-                <a16:creationId xmlns:a16="http://schemas.microsoft.com/office/drawing/2014/main" id="{A611D822-D59A-9678-9131-6BE202CFC75B}"/>
+                <a16:creationId xmlns:a16="http://schemas.microsoft.com/office/drawing/2014/main" id="{7877D87D-71E1-5755-5AEA-2572552E7355}"/>
               </a:ext>
             </a:extLst>
           </p:cNvPr>
@@ -22264,7 +24892,7 @@
           <p:cNvPr id="4" name="TextBox 3">
             <a:extLst>
               <a:ext uri="{FF2B5EF4-FFF2-40B4-BE49-F238E27FC236}">
-                <a16:creationId xmlns:a16="http://schemas.microsoft.com/office/drawing/2014/main" id="{1BD5679E-B7DE-1535-646C-449C16FF0DB9}"/>
+                <a16:creationId xmlns:a16="http://schemas.microsoft.com/office/drawing/2014/main" id="{90562C2D-7480-3D3C-4627-DC0786D0B45C}"/>
               </a:ext>
             </a:extLst>
           </p:cNvPr>
@@ -22304,7 +24932,7 @@
           <p:cNvPr id="5" name="TextBox 4">
             <a:extLst>
               <a:ext uri="{FF2B5EF4-FFF2-40B4-BE49-F238E27FC236}">
-                <a16:creationId xmlns:a16="http://schemas.microsoft.com/office/drawing/2014/main" id="{1D3473F2-A9F1-3E0B-FAD8-ACA1C1DA18F3}"/>
+                <a16:creationId xmlns:a16="http://schemas.microsoft.com/office/drawing/2014/main" id="{06077930-7EC1-1DA7-318C-C7C35FF50A95}"/>
               </a:ext>
             </a:extLst>
           </p:cNvPr>
@@ -22345,7 +24973,7 @@
           <p:cNvPr id="6" name="TextBox 5">
             <a:extLst>
               <a:ext uri="{FF2B5EF4-FFF2-40B4-BE49-F238E27FC236}">
-                <a16:creationId xmlns:a16="http://schemas.microsoft.com/office/drawing/2014/main" id="{99403D41-BB5C-5FBC-AE79-BB9054834C37}"/>
+                <a16:creationId xmlns:a16="http://schemas.microsoft.com/office/drawing/2014/main" id="{3C332891-B100-6F4F-61FB-5700D5EE8F0F}"/>
               </a:ext>
             </a:extLst>
           </p:cNvPr>
@@ -22385,7 +25013,7 @@
           <p:cNvPr id="7" name="Rectangle: Rounded Corners 6">
             <a:extLst>
               <a:ext uri="{FF2B5EF4-FFF2-40B4-BE49-F238E27FC236}">
-                <a16:creationId xmlns:a16="http://schemas.microsoft.com/office/drawing/2014/main" id="{7B04A5D6-5176-99C3-1D97-E5444D8DBD08}"/>
+                <a16:creationId xmlns:a16="http://schemas.microsoft.com/office/drawing/2014/main" id="{15DFA154-9EC6-3E4C-903E-51E39FD7524E}"/>
               </a:ext>
             </a:extLst>
           </p:cNvPr>
@@ -22439,7 +25067,7 @@
           <p:cNvPr id="8" name="TextBox 7">
             <a:extLst>
               <a:ext uri="{FF2B5EF4-FFF2-40B4-BE49-F238E27FC236}">
-                <a16:creationId xmlns:a16="http://schemas.microsoft.com/office/drawing/2014/main" id="{8801E3AE-2CCB-0B5E-C1CE-AFC3FC934D97}"/>
+                <a16:creationId xmlns:a16="http://schemas.microsoft.com/office/drawing/2014/main" id="{5622C70F-DF36-07B9-70D5-BBEB7043697E}"/>
               </a:ext>
             </a:extLst>
           </p:cNvPr>
@@ -22479,7 +25107,7 @@
           <p:cNvPr id="9" name="TextBox 8">
             <a:extLst>
               <a:ext uri="{FF2B5EF4-FFF2-40B4-BE49-F238E27FC236}">
-                <a16:creationId xmlns:a16="http://schemas.microsoft.com/office/drawing/2014/main" id="{81A5BA4B-11DF-6494-017B-63C28824629A}"/>
+                <a16:creationId xmlns:a16="http://schemas.microsoft.com/office/drawing/2014/main" id="{6383EE5C-150D-BF6E-209C-659BB5D5FAB4}"/>
               </a:ext>
             </a:extLst>
           </p:cNvPr>
@@ -22519,7 +25147,7 @@
           <p:cNvPr id="10" name="Rectangle: Rounded Corners 9">
             <a:extLst>
               <a:ext uri="{FF2B5EF4-FFF2-40B4-BE49-F238E27FC236}">
-                <a16:creationId xmlns:a16="http://schemas.microsoft.com/office/drawing/2014/main" id="{4485C4DB-CEA4-21ED-42A5-74B88BE4B203}"/>
+                <a16:creationId xmlns:a16="http://schemas.microsoft.com/office/drawing/2014/main" id="{B0C38E1A-619B-96DB-337F-2EC9211A5430}"/>
               </a:ext>
             </a:extLst>
           </p:cNvPr>
@@ -22573,7 +25201,7 @@
           <p:cNvPr id="11" name="TextBox 10">
             <a:extLst>
               <a:ext uri="{FF2B5EF4-FFF2-40B4-BE49-F238E27FC236}">
-                <a16:creationId xmlns:a16="http://schemas.microsoft.com/office/drawing/2014/main" id="{0E256D3F-444E-7FB0-5A2E-F0221537B552}"/>
+                <a16:creationId xmlns:a16="http://schemas.microsoft.com/office/drawing/2014/main" id="{B842475A-266E-0E6B-9E18-0B3944B2C1E2}"/>
               </a:ext>
             </a:extLst>
           </p:cNvPr>
@@ -22613,7 +25241,7 @@
           <p:cNvPr id="12" name="TextBox 11">
             <a:extLst>
               <a:ext uri="{FF2B5EF4-FFF2-40B4-BE49-F238E27FC236}">
-                <a16:creationId xmlns:a16="http://schemas.microsoft.com/office/drawing/2014/main" id="{05279DAA-8F70-01B9-05BF-339C8C13FDFE}"/>
+                <a16:creationId xmlns:a16="http://schemas.microsoft.com/office/drawing/2014/main" id="{30AF8727-1624-EAFE-3C8D-69F6540A8A45}"/>
               </a:ext>
             </a:extLst>
           </p:cNvPr>
@@ -22653,7 +25281,7 @@
           <p:cNvPr id="13" name="Rectangle: Rounded Corners 12">
             <a:extLst>
               <a:ext uri="{FF2B5EF4-FFF2-40B4-BE49-F238E27FC236}">
-                <a16:creationId xmlns:a16="http://schemas.microsoft.com/office/drawing/2014/main" id="{C77CEDF4-A02F-51F1-D761-02AC3C0469A5}"/>
+                <a16:creationId xmlns:a16="http://schemas.microsoft.com/office/drawing/2014/main" id="{5DAE0DCD-4153-CA5D-CE28-629269BD2B05}"/>
               </a:ext>
             </a:extLst>
           </p:cNvPr>
@@ -22707,7 +25335,7 @@
           <p:cNvPr id="14" name="TextBox 13">
             <a:extLst>
               <a:ext uri="{FF2B5EF4-FFF2-40B4-BE49-F238E27FC236}">
-                <a16:creationId xmlns:a16="http://schemas.microsoft.com/office/drawing/2014/main" id="{7DC94491-BCCE-5A67-A462-3984E078A5BC}"/>
+                <a16:creationId xmlns:a16="http://schemas.microsoft.com/office/drawing/2014/main" id="{A0B228EA-3CD3-F989-0216-1440A8912F0C}"/>
               </a:ext>
             </a:extLst>
           </p:cNvPr>
@@ -22747,7 +25375,7 @@
           <p:cNvPr id="15" name="TextBox 14">
             <a:extLst>
               <a:ext uri="{FF2B5EF4-FFF2-40B4-BE49-F238E27FC236}">
-                <a16:creationId xmlns:a16="http://schemas.microsoft.com/office/drawing/2014/main" id="{3C2D7256-7CB9-C846-BF74-DEE502429E48}"/>
+                <a16:creationId xmlns:a16="http://schemas.microsoft.com/office/drawing/2014/main" id="{88BCA9C2-4427-ADC6-4973-6E599636534F}"/>
               </a:ext>
             </a:extLst>
           </p:cNvPr>
@@ -22787,7 +25415,7 @@
           <p:cNvPr id="16" name="Rectangle: Rounded Corners 15">
             <a:extLst>
               <a:ext uri="{FF2B5EF4-FFF2-40B4-BE49-F238E27FC236}">
-                <a16:creationId xmlns:a16="http://schemas.microsoft.com/office/drawing/2014/main" id="{2479EBC7-751A-8C64-628B-B44AEA1906AA}"/>
+                <a16:creationId xmlns:a16="http://schemas.microsoft.com/office/drawing/2014/main" id="{14C08D74-EFBC-3DD2-F995-E51624F25D3F}"/>
               </a:ext>
             </a:extLst>
           </p:cNvPr>
@@ -22841,7 +25469,7 @@
           <p:cNvPr id="17" name="TextBox 16">
             <a:extLst>
               <a:ext uri="{FF2B5EF4-FFF2-40B4-BE49-F238E27FC236}">
-                <a16:creationId xmlns:a16="http://schemas.microsoft.com/office/drawing/2014/main" id="{E0007ADA-A7F2-A25E-4BA5-9CCEFB877CF2}"/>
+                <a16:creationId xmlns:a16="http://schemas.microsoft.com/office/drawing/2014/main" id="{5EB20486-3607-36AF-C3DD-C8C394FC6595}"/>
               </a:ext>
             </a:extLst>
           </p:cNvPr>
@@ -22881,7 +25509,7 @@
           <p:cNvPr id="18" name="TextBox 17">
             <a:extLst>
               <a:ext uri="{FF2B5EF4-FFF2-40B4-BE49-F238E27FC236}">
-                <a16:creationId xmlns:a16="http://schemas.microsoft.com/office/drawing/2014/main" id="{D97EC049-EF29-DDAF-7AC8-04D627D2A895}"/>
+                <a16:creationId xmlns:a16="http://schemas.microsoft.com/office/drawing/2014/main" id="{7BF207C0-B27F-C9E0-D949-DEB6A8004227}"/>
               </a:ext>
             </a:extLst>
           </p:cNvPr>
@@ -22921,7 +25549,7 @@
           <p:cNvPr id="19" name="Rectangle: Rounded Corners 18">
             <a:extLst>
               <a:ext uri="{FF2B5EF4-FFF2-40B4-BE49-F238E27FC236}">
-                <a16:creationId xmlns:a16="http://schemas.microsoft.com/office/drawing/2014/main" id="{721B773E-53D9-07D3-7FE5-9C2C5118C6F1}"/>
+                <a16:creationId xmlns:a16="http://schemas.microsoft.com/office/drawing/2014/main" id="{5578D13F-BBEB-2EE8-835E-AF723A7811E0}"/>
               </a:ext>
             </a:extLst>
           </p:cNvPr>
@@ -22975,7 +25603,7 @@
           <p:cNvPr id="20" name="TextBox 19">
             <a:extLst>
               <a:ext uri="{FF2B5EF4-FFF2-40B4-BE49-F238E27FC236}">
-                <a16:creationId xmlns:a16="http://schemas.microsoft.com/office/drawing/2014/main" id="{10B75258-5C75-895C-2A90-3BB71310E762}"/>
+                <a16:creationId xmlns:a16="http://schemas.microsoft.com/office/drawing/2014/main" id="{2A4367FC-C31F-F257-7CF5-D6CB6FFEF8A8}"/>
               </a:ext>
             </a:extLst>
           </p:cNvPr>
@@ -23015,7 +25643,7 @@
           <p:cNvPr id="21" name="TextBox 20">
             <a:extLst>
               <a:ext uri="{FF2B5EF4-FFF2-40B4-BE49-F238E27FC236}">
-                <a16:creationId xmlns:a16="http://schemas.microsoft.com/office/drawing/2014/main" id="{61A0AA49-5BBD-65DB-6881-4F1DA07841D4}"/>
+                <a16:creationId xmlns:a16="http://schemas.microsoft.com/office/drawing/2014/main" id="{E95B82DB-F2F2-064A-065B-C1A08700D069}"/>
               </a:ext>
             </a:extLst>
           </p:cNvPr>
@@ -23118,7 +25746,7 @@
           <p:cNvPr id="22" name="Rectangle: Rounded Corners 21">
             <a:extLst>
               <a:ext uri="{FF2B5EF4-FFF2-40B4-BE49-F238E27FC236}">
-                <a16:creationId xmlns:a16="http://schemas.microsoft.com/office/drawing/2014/main" id="{2DEF9462-43C4-7ABE-FF0A-4E52CC839C5E}"/>
+                <a16:creationId xmlns:a16="http://schemas.microsoft.com/office/drawing/2014/main" id="{EBDD8034-1020-0A06-71CF-C37A1BC5FC92}"/>
               </a:ext>
             </a:extLst>
           </p:cNvPr>
@@ -23172,7 +25800,7 @@
           <p:cNvPr id="23" name="TextBox 22">
             <a:extLst>
               <a:ext uri="{FF2B5EF4-FFF2-40B4-BE49-F238E27FC236}">
-                <a16:creationId xmlns:a16="http://schemas.microsoft.com/office/drawing/2014/main" id="{C02BC299-7BF2-F98F-732A-1A29754AA4CF}"/>
+                <a16:creationId xmlns:a16="http://schemas.microsoft.com/office/drawing/2014/main" id="{FF404935-A7E7-558B-D0D1-6E29CE17E640}"/>
               </a:ext>
             </a:extLst>
           </p:cNvPr>
@@ -23212,7 +25840,7 @@
           <p:cNvPr id="24" name="TextBox 23">
             <a:extLst>
               <a:ext uri="{FF2B5EF4-FFF2-40B4-BE49-F238E27FC236}">
-                <a16:creationId xmlns:a16="http://schemas.microsoft.com/office/drawing/2014/main" id="{576303F3-4948-D47A-0F89-392D67B292D4}"/>
+                <a16:creationId xmlns:a16="http://schemas.microsoft.com/office/drawing/2014/main" id="{4D7ABCDB-B1CF-7104-5845-EEF906A6DFEF}"/>
               </a:ext>
             </a:extLst>
           </p:cNvPr>
@@ -23318,7 +25946,7 @@
           <p:cNvPr id="25" name="Rectangle: Rounded Corners 24">
             <a:extLst>
               <a:ext uri="{FF2B5EF4-FFF2-40B4-BE49-F238E27FC236}">
-                <a16:creationId xmlns:a16="http://schemas.microsoft.com/office/drawing/2014/main" id="{DB3F5E51-B440-F8D5-794C-ABAC81BDA2BA}"/>
+                <a16:creationId xmlns:a16="http://schemas.microsoft.com/office/drawing/2014/main" id="{BB020116-EE27-3C33-C88E-1C92C35DB2DD}"/>
               </a:ext>
             </a:extLst>
           </p:cNvPr>
@@ -23386,7 +26014,7 @@
           <p:cNvPr id="26" name="TextBox 25">
             <a:extLst>
               <a:ext uri="{FF2B5EF4-FFF2-40B4-BE49-F238E27FC236}">
-                <a16:creationId xmlns:a16="http://schemas.microsoft.com/office/drawing/2014/main" id="{C4070C44-92F1-EDA0-9DCA-BD4654F57F6A}"/>
+                <a16:creationId xmlns:a16="http://schemas.microsoft.com/office/drawing/2014/main" id="{57396FBE-294A-D4A1-961A-6EB9EEC390F2}"/>
               </a:ext>
             </a:extLst>
           </p:cNvPr>
@@ -23422,10 +26050,57 @@
           </a:p>
         </p:txBody>
       </p:sp>
+      <p:sp>
+        <p:nvSpPr>
+          <p:cNvPr id="27" name="TextBox 26">
+            <a:extLst>
+              <a:ext uri="{FF2B5EF4-FFF2-40B4-BE49-F238E27FC236}">
+                <a16:creationId xmlns:a16="http://schemas.microsoft.com/office/drawing/2014/main" id="{2C0188B1-C358-99BE-8C9A-5C3098B66E67}"/>
+              </a:ext>
+            </a:extLst>
+          </p:cNvPr>
+          <p:cNvSpPr txBox="1"/>
+          <p:nvPr/>
+        </p:nvSpPr>
+        <p:spPr>
+          <a:xfrm>
+            <a:off x="9281160" y="6510528"/>
+            <a:ext cx="2423160" cy="152349"/>
+          </a:xfrm>
+          <a:prstGeom prst="rect">
+            <a:avLst/>
+          </a:prstGeom>
+          <a:noFill/>
+        </p:spPr>
+        <p:txBody>
+          <a:bodyPr vert="horz" wrap="square" lIns="36576" tIns="18288" rIns="36576" bIns="18288" rtlCol="0">
+            <a:spAutoFit/>
+          </a:bodyPr>
+          <a:lstStyle/>
+          <a:p>
+            <a:pPr algn="r"/>
+            <a:r>
+              <a:rPr lang="it-IT" sz="750">
+                <a:solidFill>
+                  <a:srgbClr val="8A8886"/>
+                </a:solidFill>
+                <a:latin typeface="Segoe UI" panose="020B0502040204020203" pitchFamily="34" charset="0"/>
+              </a:rPr>
+              <a:t>Molina Healthcare EIM demo | 08</a:t>
+            </a:r>
+            <a:endParaRPr lang="en-US" sz="750">
+              <a:solidFill>
+                <a:srgbClr val="8A8886"/>
+              </a:solidFill>
+              <a:latin typeface="Segoe UI" panose="020B0502040204020203" pitchFamily="34" charset="0"/>
+            </a:endParaRPr>
+          </a:p>
+        </p:txBody>
+      </p:sp>
     </p:spTree>
     <p:extLst>
       <p:ext uri="{BB962C8B-B14F-4D97-AF65-F5344CB8AC3E}">
-        <p14:creationId xmlns:p14="http://schemas.microsoft.com/office/powerpoint/2010/main" val="1588241042"/>
+        <p14:creationId xmlns:p14="http://schemas.microsoft.com/office/powerpoint/2010/main" val="3929924851"/>
       </p:ext>
     </p:extLst>
   </p:cSld>
@@ -23457,7 +26132,7 @@
           <p:cNvPr id="2" name="Rectangle 1">
             <a:extLst>
               <a:ext uri="{FF2B5EF4-FFF2-40B4-BE49-F238E27FC236}">
-                <a16:creationId xmlns:a16="http://schemas.microsoft.com/office/drawing/2014/main" id="{3ABAF651-2FF0-60E9-BE62-8EFDC50894E0}"/>
+                <a16:creationId xmlns:a16="http://schemas.microsoft.com/office/drawing/2014/main" id="{212D175E-CF38-378C-76E1-52D523A95687}"/>
               </a:ext>
             </a:extLst>
           </p:cNvPr>
@@ -23525,7 +26200,7 @@
           <p:cNvPr id="3" name="TextBox 2">
             <a:extLst>
               <a:ext uri="{FF2B5EF4-FFF2-40B4-BE49-F238E27FC236}">
-                <a16:creationId xmlns:a16="http://schemas.microsoft.com/office/drawing/2014/main" id="{B245E274-2AFB-C129-1F56-5752AD15F078}"/>
+                <a16:creationId xmlns:a16="http://schemas.microsoft.com/office/drawing/2014/main" id="{AC4055C7-D162-A249-7755-08EF05F11B43}"/>
               </a:ext>
             </a:extLst>
           </p:cNvPr>
@@ -23565,7 +26240,7 @@
           <p:cNvPr id="4" name="TextBox 3">
             <a:extLst>
               <a:ext uri="{FF2B5EF4-FFF2-40B4-BE49-F238E27FC236}">
-                <a16:creationId xmlns:a16="http://schemas.microsoft.com/office/drawing/2014/main" id="{8F8CAA01-F639-B4FF-CC87-BF457AD34829}"/>
+                <a16:creationId xmlns:a16="http://schemas.microsoft.com/office/drawing/2014/main" id="{AAA0CBF9-9324-0007-4A2B-0E872D3E7E34}"/>
               </a:ext>
             </a:extLst>
           </p:cNvPr>
@@ -23605,7 +26280,7 @@
           <p:cNvPr id="5" name="TextBox 4">
             <a:extLst>
               <a:ext uri="{FF2B5EF4-FFF2-40B4-BE49-F238E27FC236}">
-                <a16:creationId xmlns:a16="http://schemas.microsoft.com/office/drawing/2014/main" id="{EDDADB54-E9B8-687A-207B-1E3AC735F9D1}"/>
+                <a16:creationId xmlns:a16="http://schemas.microsoft.com/office/drawing/2014/main" id="{13CEE9E8-AF21-50EF-6FCA-8C97CAC7637D}"/>
               </a:ext>
             </a:extLst>
           </p:cNvPr>
@@ -23646,7 +26321,7 @@
           <p:cNvPr id="6" name="TextBox 5">
             <a:extLst>
               <a:ext uri="{FF2B5EF4-FFF2-40B4-BE49-F238E27FC236}">
-                <a16:creationId xmlns:a16="http://schemas.microsoft.com/office/drawing/2014/main" id="{E92ADFD3-1A87-3AEE-7E5F-8A25B9AD785F}"/>
+                <a16:creationId xmlns:a16="http://schemas.microsoft.com/office/drawing/2014/main" id="{DFA934FA-C479-0E45-3195-27305E98DF57}"/>
               </a:ext>
             </a:extLst>
           </p:cNvPr>
@@ -23686,7 +26361,7 @@
           <p:cNvPr id="7" name="Rectangle: Rounded Corners 6">
             <a:extLst>
               <a:ext uri="{FF2B5EF4-FFF2-40B4-BE49-F238E27FC236}">
-                <a16:creationId xmlns:a16="http://schemas.microsoft.com/office/drawing/2014/main" id="{719AA68B-830E-DAF7-0BC8-429F31D58BCD}"/>
+                <a16:creationId xmlns:a16="http://schemas.microsoft.com/office/drawing/2014/main" id="{2CAA8E2B-B7A5-C908-3853-ED8849380024}"/>
               </a:ext>
             </a:extLst>
           </p:cNvPr>
@@ -23754,7 +26429,7 @@
           <p:cNvPr id="8" name="TextBox 7">
             <a:extLst>
               <a:ext uri="{FF2B5EF4-FFF2-40B4-BE49-F238E27FC236}">
-                <a16:creationId xmlns:a16="http://schemas.microsoft.com/office/drawing/2014/main" id="{3851208D-ECD4-1668-C875-ADA3103272E0}"/>
+                <a16:creationId xmlns:a16="http://schemas.microsoft.com/office/drawing/2014/main" id="{1B6466FC-DC1C-427E-3960-E9CB61378252}"/>
               </a:ext>
             </a:extLst>
           </p:cNvPr>
@@ -23795,7 +26470,7 @@
           <p:cNvPr id="9" name="TextBox 8">
             <a:extLst>
               <a:ext uri="{FF2B5EF4-FFF2-40B4-BE49-F238E27FC236}">
-                <a16:creationId xmlns:a16="http://schemas.microsoft.com/office/drawing/2014/main" id="{B0D81154-EA11-3371-2147-01B1ED92F76F}"/>
+                <a16:creationId xmlns:a16="http://schemas.microsoft.com/office/drawing/2014/main" id="{1B79C6F5-18D2-EE77-A3AF-A5C742DE2EFA}"/>
               </a:ext>
             </a:extLst>
           </p:cNvPr>
@@ -23836,7 +26511,7 @@
           <p:cNvPr id="10" name="Rectangle: Rounded Corners 9">
             <a:extLst>
               <a:ext uri="{FF2B5EF4-FFF2-40B4-BE49-F238E27FC236}">
-                <a16:creationId xmlns:a16="http://schemas.microsoft.com/office/drawing/2014/main" id="{E6478E03-658F-8ED9-2EAD-5D4D170D3D8A}"/>
+                <a16:creationId xmlns:a16="http://schemas.microsoft.com/office/drawing/2014/main" id="{4229B731-A004-9E16-1929-17B6A09A0ED1}"/>
               </a:ext>
             </a:extLst>
           </p:cNvPr>
@@ -23904,7 +26579,7 @@
           <p:cNvPr id="11" name="TextBox 10">
             <a:extLst>
               <a:ext uri="{FF2B5EF4-FFF2-40B4-BE49-F238E27FC236}">
-                <a16:creationId xmlns:a16="http://schemas.microsoft.com/office/drawing/2014/main" id="{FC3814C3-81F7-E1C2-30AB-4B3696249042}"/>
+                <a16:creationId xmlns:a16="http://schemas.microsoft.com/office/drawing/2014/main" id="{BDF9E905-61AA-A9F9-21EA-FFD0C20A1312}"/>
               </a:ext>
             </a:extLst>
           </p:cNvPr>
@@ -23945,7 +26620,7 @@
           <p:cNvPr id="12" name="TextBox 11">
             <a:extLst>
               <a:ext uri="{FF2B5EF4-FFF2-40B4-BE49-F238E27FC236}">
-                <a16:creationId xmlns:a16="http://schemas.microsoft.com/office/drawing/2014/main" id="{55DF3FDA-A7B9-1B25-12D9-7D7E72BC7850}"/>
+                <a16:creationId xmlns:a16="http://schemas.microsoft.com/office/drawing/2014/main" id="{02AD0445-EC9D-E306-291D-F15C8DA28894}"/>
               </a:ext>
             </a:extLst>
           </p:cNvPr>
@@ -23986,7 +26661,7 @@
           <p:cNvPr id="13" name="Rectangle: Rounded Corners 12">
             <a:extLst>
               <a:ext uri="{FF2B5EF4-FFF2-40B4-BE49-F238E27FC236}">
-                <a16:creationId xmlns:a16="http://schemas.microsoft.com/office/drawing/2014/main" id="{B182E097-E012-9F9C-FAAE-E93081C062C7}"/>
+                <a16:creationId xmlns:a16="http://schemas.microsoft.com/office/drawing/2014/main" id="{ADCC58C9-FB3D-8102-E470-43253760B7D6}"/>
               </a:ext>
             </a:extLst>
           </p:cNvPr>
@@ -24054,7 +26729,7 @@
           <p:cNvPr id="14" name="TextBox 13">
             <a:extLst>
               <a:ext uri="{FF2B5EF4-FFF2-40B4-BE49-F238E27FC236}">
-                <a16:creationId xmlns:a16="http://schemas.microsoft.com/office/drawing/2014/main" id="{A79B200E-E55C-D445-8942-0CD210B4CD8C}"/>
+                <a16:creationId xmlns:a16="http://schemas.microsoft.com/office/drawing/2014/main" id="{BCFF1EB8-E4E7-D902-8644-85D328C803E3}"/>
               </a:ext>
             </a:extLst>
           </p:cNvPr>
@@ -24095,7 +26770,7 @@
           <p:cNvPr id="15" name="TextBox 14">
             <a:extLst>
               <a:ext uri="{FF2B5EF4-FFF2-40B4-BE49-F238E27FC236}">
-                <a16:creationId xmlns:a16="http://schemas.microsoft.com/office/drawing/2014/main" id="{C25DBC9F-D676-DA58-8204-E759E03AA73A}"/>
+                <a16:creationId xmlns:a16="http://schemas.microsoft.com/office/drawing/2014/main" id="{5D939F1A-53AE-6E9D-0F70-D9639DB1F9F5}"/>
               </a:ext>
             </a:extLst>
           </p:cNvPr>
@@ -24136,7 +26811,7 @@
           <p:cNvPr id="16" name="Rectangle: Rounded Corners 15">
             <a:extLst>
               <a:ext uri="{FF2B5EF4-FFF2-40B4-BE49-F238E27FC236}">
-                <a16:creationId xmlns:a16="http://schemas.microsoft.com/office/drawing/2014/main" id="{969E4829-F5EE-AD89-AEF3-3C934F3ADE05}"/>
+                <a16:creationId xmlns:a16="http://schemas.microsoft.com/office/drawing/2014/main" id="{A6789D16-D520-9680-7DE9-5F10CA7A911F}"/>
               </a:ext>
             </a:extLst>
           </p:cNvPr>
@@ -24204,7 +26879,7 @@
           <p:cNvPr id="17" name="TextBox 16">
             <a:extLst>
               <a:ext uri="{FF2B5EF4-FFF2-40B4-BE49-F238E27FC236}">
-                <a16:creationId xmlns:a16="http://schemas.microsoft.com/office/drawing/2014/main" id="{DE5F3EA6-BC82-E9FD-B544-F454AB9A5225}"/>
+                <a16:creationId xmlns:a16="http://schemas.microsoft.com/office/drawing/2014/main" id="{FBBDCC9D-AC7E-8422-6BB4-56C9C4B3FDBD}"/>
               </a:ext>
             </a:extLst>
           </p:cNvPr>
@@ -24245,7 +26920,7 @@
           <p:cNvPr id="18" name="TextBox 17">
             <a:extLst>
               <a:ext uri="{FF2B5EF4-FFF2-40B4-BE49-F238E27FC236}">
-                <a16:creationId xmlns:a16="http://schemas.microsoft.com/office/drawing/2014/main" id="{A0A4C977-9735-64EC-65E1-FC66B059E2F0}"/>
+                <a16:creationId xmlns:a16="http://schemas.microsoft.com/office/drawing/2014/main" id="{CBA78F57-85EF-0B70-AD76-BE5554599C8B}"/>
               </a:ext>
             </a:extLst>
           </p:cNvPr>
@@ -24286,7 +26961,7 @@
           <p:cNvPr id="19" name="Straight Connector 18">
             <a:extLst>
               <a:ext uri="{FF2B5EF4-FFF2-40B4-BE49-F238E27FC236}">
-                <a16:creationId xmlns:a16="http://schemas.microsoft.com/office/drawing/2014/main" id="{7EAF9D0F-FBF1-6F2C-1E67-A6DA8B320866}"/>
+                <a16:creationId xmlns:a16="http://schemas.microsoft.com/office/drawing/2014/main" id="{0DCDECFF-69BB-AA63-980F-257D5128783A}"/>
               </a:ext>
             </a:extLst>
           </p:cNvPr>
@@ -24327,7 +27002,7 @@
           <p:cNvPr id="20" name="Straight Connector 19">
             <a:extLst>
               <a:ext uri="{FF2B5EF4-FFF2-40B4-BE49-F238E27FC236}">
-                <a16:creationId xmlns:a16="http://schemas.microsoft.com/office/drawing/2014/main" id="{2C5EC327-1205-2D0E-03FC-EE0DDED2BD35}"/>
+                <a16:creationId xmlns:a16="http://schemas.microsoft.com/office/drawing/2014/main" id="{83A49E15-8FED-E7FB-2383-3BA6EF7E00EA}"/>
               </a:ext>
             </a:extLst>
           </p:cNvPr>
@@ -24368,7 +27043,7 @@
           <p:cNvPr id="21" name="Straight Connector 20">
             <a:extLst>
               <a:ext uri="{FF2B5EF4-FFF2-40B4-BE49-F238E27FC236}">
-                <a16:creationId xmlns:a16="http://schemas.microsoft.com/office/drawing/2014/main" id="{E7A8B7D4-91F0-340C-DE76-747700BFAF76}"/>
+                <a16:creationId xmlns:a16="http://schemas.microsoft.com/office/drawing/2014/main" id="{C026986E-9002-DA5E-3B27-E3B73A76DBA7}"/>
               </a:ext>
             </a:extLst>
           </p:cNvPr>
@@ -24409,7 +27084,7 @@
           <p:cNvPr id="22" name="Rectangle: Rounded Corners 21">
             <a:extLst>
               <a:ext uri="{FF2B5EF4-FFF2-40B4-BE49-F238E27FC236}">
-                <a16:creationId xmlns:a16="http://schemas.microsoft.com/office/drawing/2014/main" id="{4C41DBC3-9DA4-42BC-8447-57DD876FC8E7}"/>
+                <a16:creationId xmlns:a16="http://schemas.microsoft.com/office/drawing/2014/main" id="{2E6CF461-8793-8A48-566F-82E279404FA3}"/>
               </a:ext>
             </a:extLst>
           </p:cNvPr>
@@ -24463,7 +27138,7 @@
           <p:cNvPr id="23" name="TextBox 22">
             <a:extLst>
               <a:ext uri="{FF2B5EF4-FFF2-40B4-BE49-F238E27FC236}">
-                <a16:creationId xmlns:a16="http://schemas.microsoft.com/office/drawing/2014/main" id="{6B9284E3-A0DA-600F-9466-F14462D1AB20}"/>
+                <a16:creationId xmlns:a16="http://schemas.microsoft.com/office/drawing/2014/main" id="{DCE2201C-B938-8B12-5EAA-38AC345479B6}"/>
               </a:ext>
             </a:extLst>
           </p:cNvPr>
@@ -24503,7 +27178,7 @@
           <p:cNvPr id="24" name="TextBox 23">
             <a:extLst>
               <a:ext uri="{FF2B5EF4-FFF2-40B4-BE49-F238E27FC236}">
-                <a16:creationId xmlns:a16="http://schemas.microsoft.com/office/drawing/2014/main" id="{BCC25CFF-7C92-186E-B687-E1C71CE3C6BD}"/>
+                <a16:creationId xmlns:a16="http://schemas.microsoft.com/office/drawing/2014/main" id="{C80B51AD-72C1-C237-C9AB-945A75CE47D6}"/>
               </a:ext>
             </a:extLst>
           </p:cNvPr>
@@ -24549,7 +27224,7 @@
           <p:cNvPr id="25" name="TextBox 24">
             <a:extLst>
               <a:ext uri="{FF2B5EF4-FFF2-40B4-BE49-F238E27FC236}">
-                <a16:creationId xmlns:a16="http://schemas.microsoft.com/office/drawing/2014/main" id="{9ADFF34A-A8FC-CD2A-652A-2ADD2EC61525}"/>
+                <a16:creationId xmlns:a16="http://schemas.microsoft.com/office/drawing/2014/main" id="{C144B0FB-BB94-D32C-D8E0-B038BE35279D}"/>
               </a:ext>
             </a:extLst>
           </p:cNvPr>
@@ -24589,7 +27264,7 @@
           <p:cNvPr id="26" name="TextBox 25">
             <a:extLst>
               <a:ext uri="{FF2B5EF4-FFF2-40B4-BE49-F238E27FC236}">
-                <a16:creationId xmlns:a16="http://schemas.microsoft.com/office/drawing/2014/main" id="{BE70070A-7A49-2A00-09F6-4E67375CA1FE}"/>
+                <a16:creationId xmlns:a16="http://schemas.microsoft.com/office/drawing/2014/main" id="{9E89FE71-534E-958F-21ED-DC2850886C1D}"/>
               </a:ext>
             </a:extLst>
           </p:cNvPr>
@@ -24629,7 +27304,7 @@
           <p:cNvPr id="27" name="TextBox 26">
             <a:extLst>
               <a:ext uri="{FF2B5EF4-FFF2-40B4-BE49-F238E27FC236}">
-                <a16:creationId xmlns:a16="http://schemas.microsoft.com/office/drawing/2014/main" id="{4A7F6781-E4EB-00C1-1586-08A43AE3BF72}"/>
+                <a16:creationId xmlns:a16="http://schemas.microsoft.com/office/drawing/2014/main" id="{540D689C-8A5B-1C9D-7C67-78B2E0D737AE}"/>
               </a:ext>
             </a:extLst>
           </p:cNvPr>
@@ -24669,7 +27344,7 @@
           <p:cNvPr id="28" name="TextBox 27">
             <a:extLst>
               <a:ext uri="{FF2B5EF4-FFF2-40B4-BE49-F238E27FC236}">
-                <a16:creationId xmlns:a16="http://schemas.microsoft.com/office/drawing/2014/main" id="{41600E4B-BA1F-AF0B-459C-59E69FB823E3}"/>
+                <a16:creationId xmlns:a16="http://schemas.microsoft.com/office/drawing/2014/main" id="{086B98C0-450B-D5EB-5BD3-ECAE57D2F503}"/>
               </a:ext>
             </a:extLst>
           </p:cNvPr>
@@ -24709,7 +27384,7 @@
           <p:cNvPr id="29" name="TextBox 28">
             <a:extLst>
               <a:ext uri="{FF2B5EF4-FFF2-40B4-BE49-F238E27FC236}">
-                <a16:creationId xmlns:a16="http://schemas.microsoft.com/office/drawing/2014/main" id="{448F4FB3-0177-EB8A-0E90-7BDC654497B6}"/>
+                <a16:creationId xmlns:a16="http://schemas.microsoft.com/office/drawing/2014/main" id="{08C11CD0-7EBB-CBCD-14B7-53C5CA881F47}"/>
               </a:ext>
             </a:extLst>
           </p:cNvPr>
@@ -24744,10 +27419,57 @@
           </a:p>
         </p:txBody>
       </p:sp>
+      <p:sp>
+        <p:nvSpPr>
+          <p:cNvPr id="30" name="TextBox 29">
+            <a:extLst>
+              <a:ext uri="{FF2B5EF4-FFF2-40B4-BE49-F238E27FC236}">
+                <a16:creationId xmlns:a16="http://schemas.microsoft.com/office/drawing/2014/main" id="{A65E0514-E940-765E-978D-E79B8F36C22C}"/>
+              </a:ext>
+            </a:extLst>
+          </p:cNvPr>
+          <p:cNvSpPr txBox="1"/>
+          <p:nvPr/>
+        </p:nvSpPr>
+        <p:spPr>
+          <a:xfrm>
+            <a:off x="9281160" y="6510528"/>
+            <a:ext cx="2423160" cy="152349"/>
+          </a:xfrm>
+          <a:prstGeom prst="rect">
+            <a:avLst/>
+          </a:prstGeom>
+          <a:noFill/>
+        </p:spPr>
+        <p:txBody>
+          <a:bodyPr vert="horz" wrap="square" lIns="36576" tIns="18288" rIns="36576" bIns="18288" rtlCol="0">
+            <a:spAutoFit/>
+          </a:bodyPr>
+          <a:lstStyle/>
+          <a:p>
+            <a:pPr algn="r"/>
+            <a:r>
+              <a:rPr lang="it-IT" sz="750">
+                <a:solidFill>
+                  <a:srgbClr val="8A8886"/>
+                </a:solidFill>
+                <a:latin typeface="Segoe UI" panose="020B0502040204020203" pitchFamily="34" charset="0"/>
+              </a:rPr>
+              <a:t>Molina Healthcare EIM demo | 09</a:t>
+            </a:r>
+            <a:endParaRPr lang="en-US" sz="750">
+              <a:solidFill>
+                <a:srgbClr val="8A8886"/>
+              </a:solidFill>
+              <a:latin typeface="Segoe UI" panose="020B0502040204020203" pitchFamily="34" charset="0"/>
+            </a:endParaRPr>
+          </a:p>
+        </p:txBody>
+      </p:sp>
     </p:spTree>
     <p:extLst>
       <p:ext uri="{BB962C8B-B14F-4D97-AF65-F5344CB8AC3E}">
-        <p14:creationId xmlns:p14="http://schemas.microsoft.com/office/powerpoint/2010/main" val="4293682231"/>
+        <p14:creationId xmlns:p14="http://schemas.microsoft.com/office/powerpoint/2010/main" val="3126079346"/>
       </p:ext>
     </p:extLst>
   </p:cSld>
@@ -25389,6 +28111,6 @@
 
 <file path=docMetadata/LabelInfo.xml><?xml version="1.0" encoding="utf-8"?>
 <clbl:labelList xmlns:clbl="http://schemas.microsoft.com/office/2020/mipLabelMetadata">
-  <clbl:label id="{87ba5c36-b7cf-4793-bbc2-bd5b3a9f95ca}" enabled="1" method="Privileged" siteId="{72f988bf-86f1-41af-91ab-2d7cd011db47}" removed="0"/>
+  <clbl:label id="{f42aa342-8706-4288-bd11-ebb85995028c}" enabled="1" method="Standard" siteId="{72f988bf-86f1-41af-91ab-2d7cd011db47}" contentBits="0" removed="0"/>
 </clbl:labelList>
 </file>